--- a/docs/TuT_AI_Marketing_Pitch_Deck.pptx
+++ b/docs/TuT_AI_Marketing_Pitch_Deck.pptx
@@ -3264,7 +3264,7 @@
               </a:defRPr>
             </a:pPr>
             <a:r>
-              <a:t>Project Lead: Ahmed Gamal Sophi Arfa | Under the Supervision of MCIT Leadership</a:t>
+              <a:t>Principal Architect &amp; Project Lead: Ahmed Gamal Sophi Arfa | Under the Supervision of MCIT Leadership</a:t>
             </a:r>
           </a:p>
         </p:txBody>
@@ -4298,13 +4298,13 @@
               </a:spcAft>
               <a:defRPr sz="1000">
                 <a:solidFill>
-                  <a:srgbClr val="94A3B8"/>
-                </a:solidFill>
-                <a:latin typeface="Arial"/>
-              </a:defRPr>
-            </a:pPr>
-            <a:r>
-              <a:t>     Project Lead &amp; Core AI Architect (Lead)</a:t>
+                  <a:srgbClr val="F5D673"/>
+                </a:solidFill>
+                <a:latin typeface="Arial"/>
+              </a:defRPr>
+            </a:pPr>
+            <a:r>
+              <a:t>     Project Lead, Principal Architect &amp; Full-Stack Creator (End-to-End Platform)</a:t>
             </a:r>
           </a:p>
           <a:p>
@@ -4333,7 +4333,7 @@
               </a:defRPr>
             </a:pPr>
             <a:r>
-              <a:t>     Systems &amp; Fullstack Engineer</a:t>
+              <a:t>     RAG Specialist (Retrieval-Augmented Generation &amp; Vector Search)</a:t>
             </a:r>
           </a:p>
           <a:p>
@@ -4362,7 +4362,7 @@
               </a:defRPr>
             </a:pPr>
             <a:r>
-              <a:t>     Data Engineering &amp; Research Workflows</a:t>
+              <a:t>     Infographics Specialist (VectorCraft Studio &amp; Visual Storytelling)</a:t>
             </a:r>
           </a:p>
           <a:p>
@@ -4391,7 +4391,7 @@
               </a:defRPr>
             </a:pPr>
             <a:r>
-              <a:t>     Backend &amp; Integration Specialist</a:t>
+              <a:t>     Presentation Engine Specialist (DeckCraft &amp; Slide Generation)</a:t>
             </a:r>
           </a:p>
           <a:p>
@@ -4420,7 +4420,7 @@
               </a:defRPr>
             </a:pPr>
             <a:r>
-              <a:t>     UI/UX &amp; Frontend Platform Specialist</a:t>
+              <a:t>     Presentation Design Specialist (DeckCraft &amp; Slide Layouts)</a:t>
             </a:r>
           </a:p>
           <a:p>
@@ -4449,7 +4449,7 @@
               </a:defRPr>
             </a:pPr>
             <a:r>
-              <a:t>     DevOps &amp; Infrastructure Engineer</a:t>
+              <a:t>     RAG Pipeline Specialist (Knowledge Ingestion &amp; Chunking)</a:t>
             </a:r>
           </a:p>
         </p:txBody>

--- a/docs/TuT_AI_Marketing_Pitch_Deck.pptx
+++ b/docs/TuT_AI_Marketing_Pitch_Deck.pptx
@@ -4119,7 +4119,10 @@
           </a:p>
           <a:p>
             <a:pPr>
-              <a:defRPr sz="1400" b="1">
+              <a:spcAft>
+                <a:spcPts val="2000"/>
+              </a:spcAft>
+              <a:defRPr sz="1500" b="1">
                 <a:solidFill>
                   <a:srgbClr val="F5D673"/>
                 </a:solidFill>
@@ -4133,22 +4136,9 @@
           <a:p>
             <a:pPr>
               <a:spcAft>
-                <a:spcPts val="1000"/>
-              </a:spcAft>
-              <a:defRPr sz="1100">
-                <a:solidFill>
-                  <a:srgbClr val="94A3B8"/>
-                </a:solidFill>
-                <a:latin typeface="Arial"/>
-              </a:defRPr>
-            </a:pPr>
-            <a:r>
-              <a:t>     Ministry Leadership &amp; Project Sponsor</a:t>
-            </a:r>
-          </a:p>
-          <a:p>
-            <a:pPr>
-              <a:defRPr sz="1400" b="1">
+                <a:spcPts val="2000"/>
+              </a:spcAft>
+              <a:defRPr sz="1500" b="1">
                 <a:solidFill>
                   <a:srgbClr val="F5D673"/>
                 </a:solidFill>
@@ -4162,22 +4152,9 @@
           <a:p>
             <a:pPr>
               <a:spcAft>
-                <a:spcPts val="1000"/>
-              </a:spcAft>
-              <a:defRPr sz="1100">
-                <a:solidFill>
-                  <a:srgbClr val="94A3B8"/>
-                </a:solidFill>
-                <a:latin typeface="Arial"/>
-              </a:defRPr>
-            </a:pPr>
-            <a:r>
-              <a:t>     Technical Oversight &amp; Ministerial Direction</a:t>
-            </a:r>
-          </a:p>
-          <a:p>
-            <a:pPr>
-              <a:defRPr sz="1400" b="1">
+                <a:spcPts val="2000"/>
+              </a:spcAft>
+              <a:defRPr sz="1500" b="1">
                 <a:solidFill>
                   <a:srgbClr val="F5D673"/>
                 </a:solidFill>
@@ -4186,22 +4163,6 @@
             </a:pPr>
             <a:r>
               <a:t>🎖️  Eng. Mohamed Khalid Mohamed Roshdy</a:t>
-            </a:r>
-          </a:p>
-          <a:p>
-            <a:pPr>
-              <a:spcAft>
-                <a:spcPts val="1000"/>
-              </a:spcAft>
-              <a:defRPr sz="1100">
-                <a:solidFill>
-                  <a:srgbClr val="94A3B8"/>
-                </a:solidFill>
-                <a:latin typeface="Arial"/>
-              </a:defRPr>
-            </a:pPr>
-            <a:r>
-              <a:t>     Strategic Engineering &amp; Systems Supervision</a:t>
             </a:r>
           </a:p>
         </p:txBody>
@@ -4265,9 +4226,41 @@
           <a:p>
             <a:pPr>
               <a:spcAft>
+                <a:spcPts val="1600"/>
+              </a:spcAft>
+              <a:defRPr sz="1800" b="1">
+                <a:solidFill>
+                  <a:srgbClr val="F8FAFC"/>
+                </a:solidFill>
+                <a:latin typeface="Arial"/>
+              </a:defRPr>
+            </a:pPr>
+            <a:r>
+              <a:t>TuT AI Core Team</a:t>
+            </a:r>
+          </a:p>
+          <a:p>
+            <a:pPr>
+              <a:spcAft>
                 <a:spcPts val="1200"/>
               </a:spcAft>
-              <a:defRPr sz="1800" b="1">
+              <a:defRPr sz="1400" b="1">
+                <a:solidFill>
+                  <a:srgbClr val="D4AF37"/>
+                </a:solidFill>
+                <a:latin typeface="Arial"/>
+              </a:defRPr>
+            </a:pPr>
+            <a:r>
+              <a:t>⭐  Ahmed Gamal Sophi Arfa</a:t>
+            </a:r>
+          </a:p>
+          <a:p>
+            <a:pPr>
+              <a:spcAft>
+                <a:spcPts val="800"/>
+              </a:spcAft>
+              <a:defRPr sz="1300" b="1">
                 <a:solidFill>
                   <a:srgbClr val="F8FAFC"/>
                 </a:solidFill>
@@ -4275,41 +4268,15 @@
               </a:defRPr>
             </a:pPr>
             <a:r>
-              <a:t>TuT AI Core Contributors</a:t>
-            </a:r>
-          </a:p>
-          <a:p>
-            <a:pPr>
-              <a:defRPr sz="1200" b="1">
-                <a:solidFill>
-                  <a:srgbClr val="D4AF37"/>
-                </a:solidFill>
-                <a:latin typeface="Arial"/>
-              </a:defRPr>
-            </a:pPr>
-            <a:r>
-              <a:t>⭐  Ahmed Gamal Sophi Arfa</a:t>
-            </a:r>
-          </a:p>
-          <a:p>
-            <a:pPr>
-              <a:spcAft>
-                <a:spcPts val="400"/>
-              </a:spcAft>
-              <a:defRPr sz="1000">
-                <a:solidFill>
-                  <a:srgbClr val="F5D673"/>
-                </a:solidFill>
-                <a:latin typeface="Arial"/>
-              </a:defRPr>
-            </a:pPr>
-            <a:r>
-              <a:t>     Project Lead, Principal Architect &amp; Full-Stack Creator (End-to-End Platform)</a:t>
-            </a:r>
-          </a:p>
-          <a:p>
-            <a:pPr>
-              <a:defRPr sz="1200" b="1">
+              <a:t>•  Abdelrhman Mahmoud Fawzy</a:t>
+            </a:r>
+          </a:p>
+          <a:p>
+            <a:pPr>
+              <a:spcAft>
+                <a:spcPts val="800"/>
+              </a:spcAft>
+              <a:defRPr sz="1300" b="1">
                 <a:solidFill>
                   <a:srgbClr val="F8FAFC"/>
                 </a:solidFill>
@@ -4317,28 +4284,15 @@
               </a:defRPr>
             </a:pPr>
             <a:r>
-              <a:t>•  Abdelrhman Mahmoud Fawzy</a:t>
-            </a:r>
-          </a:p>
-          <a:p>
-            <a:pPr>
-              <a:spcAft>
-                <a:spcPts val="400"/>
-              </a:spcAft>
-              <a:defRPr sz="1000">
-                <a:solidFill>
-                  <a:srgbClr val="94A3B8"/>
-                </a:solidFill>
-                <a:latin typeface="Arial"/>
-              </a:defRPr>
-            </a:pPr>
-            <a:r>
-              <a:t>     RAG Specialist (Retrieval-Augmented Generation &amp; Vector Search)</a:t>
-            </a:r>
-          </a:p>
-          <a:p>
-            <a:pPr>
-              <a:defRPr sz="1200" b="1">
+              <a:t>•  Saja Raafat Gaber</a:t>
+            </a:r>
+          </a:p>
+          <a:p>
+            <a:pPr>
+              <a:spcAft>
+                <a:spcPts val="800"/>
+              </a:spcAft>
+              <a:defRPr sz="1300" b="1">
                 <a:solidFill>
                   <a:srgbClr val="F8FAFC"/>
                 </a:solidFill>
@@ -4346,28 +4300,15 @@
               </a:defRPr>
             </a:pPr>
             <a:r>
-              <a:t>•  Saja Raafat Gaber</a:t>
-            </a:r>
-          </a:p>
-          <a:p>
-            <a:pPr>
-              <a:spcAft>
-                <a:spcPts val="400"/>
-              </a:spcAft>
-              <a:defRPr sz="1000">
-                <a:solidFill>
-                  <a:srgbClr val="94A3B8"/>
-                </a:solidFill>
-                <a:latin typeface="Arial"/>
-              </a:defRPr>
-            </a:pPr>
-            <a:r>
-              <a:t>     Infographics Specialist (VectorCraft Studio &amp; Visual Storytelling)</a:t>
-            </a:r>
-          </a:p>
-          <a:p>
-            <a:pPr>
-              <a:defRPr sz="1200" b="1">
+              <a:t>•  Mohamed Hamdy Abdelazez</a:t>
+            </a:r>
+          </a:p>
+          <a:p>
+            <a:pPr>
+              <a:spcAft>
+                <a:spcPts val="800"/>
+              </a:spcAft>
+              <a:defRPr sz="1300" b="1">
                 <a:solidFill>
                   <a:srgbClr val="F8FAFC"/>
                 </a:solidFill>
@@ -4375,28 +4316,15 @@
               </a:defRPr>
             </a:pPr>
             <a:r>
-              <a:t>•  Mohamed Hamdy Abdelazez</a:t>
-            </a:r>
-          </a:p>
-          <a:p>
-            <a:pPr>
-              <a:spcAft>
-                <a:spcPts val="400"/>
-              </a:spcAft>
-              <a:defRPr sz="1000">
-                <a:solidFill>
-                  <a:srgbClr val="94A3B8"/>
-                </a:solidFill>
-                <a:latin typeface="Arial"/>
-              </a:defRPr>
-            </a:pPr>
-            <a:r>
-              <a:t>     Presentation Engine Specialist (DeckCraft &amp; Slide Generation)</a:t>
-            </a:r>
-          </a:p>
-          <a:p>
-            <a:pPr>
-              <a:defRPr sz="1200" b="1">
+              <a:t>•  Asmaa Samy Hagag</a:t>
+            </a:r>
+          </a:p>
+          <a:p>
+            <a:pPr>
+              <a:spcAft>
+                <a:spcPts val="800"/>
+              </a:spcAft>
+              <a:defRPr sz="1300" b="1">
                 <a:solidFill>
                   <a:srgbClr val="F8FAFC"/>
                 </a:solidFill>
@@ -4404,52 +4332,7 @@
               </a:defRPr>
             </a:pPr>
             <a:r>
-              <a:t>•  Asmaa Samy Hagag</a:t>
-            </a:r>
-          </a:p>
-          <a:p>
-            <a:pPr>
-              <a:spcAft>
-                <a:spcPts val="400"/>
-              </a:spcAft>
-              <a:defRPr sz="1000">
-                <a:solidFill>
-                  <a:srgbClr val="94A3B8"/>
-                </a:solidFill>
-                <a:latin typeface="Arial"/>
-              </a:defRPr>
-            </a:pPr>
-            <a:r>
-              <a:t>     Presentation Design Specialist (DeckCraft &amp; Slide Layouts)</a:t>
-            </a:r>
-          </a:p>
-          <a:p>
-            <a:pPr>
-              <a:defRPr sz="1200" b="1">
-                <a:solidFill>
-                  <a:srgbClr val="F8FAFC"/>
-                </a:solidFill>
-                <a:latin typeface="Arial"/>
-              </a:defRPr>
-            </a:pPr>
-            <a:r>
               <a:t>•  Mohamed Abd elhgani el kwatihy</a:t>
-            </a:r>
-          </a:p>
-          <a:p>
-            <a:pPr>
-              <a:spcAft>
-                <a:spcPts val="400"/>
-              </a:spcAft>
-              <a:defRPr sz="1000">
-                <a:solidFill>
-                  <a:srgbClr val="94A3B8"/>
-                </a:solidFill>
-                <a:latin typeface="Arial"/>
-              </a:defRPr>
-            </a:pPr>
-            <a:r>
-              <a:t>     RAG Pipeline Specialist (Knowledge Ingestion &amp; Chunking)</a:t>
             </a:r>
           </a:p>
         </p:txBody>
@@ -7821,7 +7704,7 @@
               </a:defRPr>
             </a:pPr>
             <a:r>
-              <a:t>IDENTITY &amp; HERITAGE</a:t>
+              <a:t>ENGINEERING MILESTONES</a:t>
             </a:r>
           </a:p>
         </p:txBody>
@@ -7857,7 +7740,7 @@
               </a:defRPr>
             </a:pPr>
             <a:r>
-              <a:t>Egyptian Sovereign Persona Suite &amp; Cultural Alignment</a:t>
+              <a:t>The Development Journey: 4 Evolutionary Phases</a:t>
             </a:r>
           </a:p>
         </p:txBody>
@@ -7914,7 +7797,7 @@
         <p:spPr>
           <a:xfrm>
             <a:off x="731520" y="1645920"/>
-            <a:ext cx="5212080" cy="4572000"/>
+            <a:ext cx="5212080" cy="2194560"/>
           </a:xfrm>
           <a:prstGeom prst="roundRect">
             <a:avLst/>
@@ -7958,7 +7841,7 @@
               </a:defRPr>
             </a:pPr>
             <a:r>
-              <a:t>PERSONA GALLERY</a:t>
+              <a:t>PHASE 1: INCEPTION</a:t>
             </a:r>
           </a:p>
           <a:p>
@@ -7974,7 +7857,7 @@
               </a:defRPr>
             </a:pPr>
             <a:r>
-              <a:t>10 Sovereign Egyptian Historical Personas</a:t>
+              <a:t>Phase 1: Foundation &amp; Sovereign Identity</a:t>
             </a:r>
           </a:p>
           <a:p>
@@ -7990,7 +7873,7 @@
               </a:defRPr>
             </a:pPr>
             <a:r>
-              <a:t>•  Rooted in Heritage: Completely replaced generic western AI branding with iconic figures of Egyptian history.</a:t>
+              <a:t>•  Transitioned away from generic third-party code to 100% Egyptian sovereign platform.</a:t>
             </a:r>
           </a:p>
           <a:p>
@@ -8006,55 +7889,7 @@
               </a:defRPr>
             </a:pPr>
             <a:r>
-              <a:t>•  King Tut: The Sovereign Prime Agent — strategic leadership, presentation compiler, and executive director.</a:t>
-            </a:r>
-          </a:p>
-          <a:p>
-            <a:pPr>
-              <a:spcAft>
-                <a:spcPts val="600"/>
-              </a:spcAft>
-              <a:defRPr sz="1200">
-                <a:solidFill>
-                  <a:srgbClr val="94A3B8"/>
-                </a:solidFill>
-                <a:latin typeface="Arial"/>
-              </a:defRPr>
-            </a:pPr>
-            <a:r>
-              <a:t>•  Imhotep: Chief Architect &amp; Engineer — data structures, code analysis, mathematical auditing, and spreadsheets.</a:t>
-            </a:r>
-          </a:p>
-          <a:p>
-            <a:pPr>
-              <a:spcAft>
-                <a:spcPts val="600"/>
-              </a:spcAft>
-              <a:defRPr sz="1200">
-                <a:solidFill>
-                  <a:srgbClr val="94A3B8"/>
-                </a:solidFill>
-                <a:latin typeface="Arial"/>
-              </a:defRPr>
-            </a:pPr>
-            <a:r>
-              <a:t>•  Thoth: The Scribe of Wisdom — research synthesis, deep summarization, document validation, and historical records.</a:t>
-            </a:r>
-          </a:p>
-          <a:p>
-            <a:pPr>
-              <a:spcAft>
-                <a:spcPts val="600"/>
-              </a:spcAft>
-              <a:defRPr sz="1200">
-                <a:solidFill>
-                  <a:srgbClr val="94A3B8"/>
-                </a:solidFill>
-                <a:latin typeface="Arial"/>
-              </a:defRPr>
-            </a:pPr>
-            <a:r>
-              <a:t>•  Horus, Akhenaten, Nefertiti: Specialized defense, governance, and administrative communication agents.</a:t>
+              <a:t>•  Engineered the TuT AI identity: 10 historical personas &amp; 3D holographic cartouche.</a:t>
             </a:r>
           </a:p>
         </p:txBody>
@@ -8068,7 +7903,7 @@
         <p:spPr>
           <a:xfrm>
             <a:off x="6217920" y="1645920"/>
-            <a:ext cx="5212080" cy="4572000"/>
+            <a:ext cx="5212080" cy="2194560"/>
           </a:xfrm>
           <a:prstGeom prst="roundRect">
             <a:avLst/>
@@ -8112,7 +7947,7 @@
               </a:defRPr>
             </a:pPr>
             <a:r>
-              <a:t>USER EXPERIENCE</a:t>
+              <a:t>PHASE 2: ARCHITECTURE</a:t>
             </a:r>
           </a:p>
           <a:p>
@@ -8128,7 +7963,7 @@
               </a:defRPr>
             </a:pPr>
             <a:r>
-              <a:t>Holographic 3D Portrait &amp; Quick-Switcher</a:t>
+              <a:t>Phase 2: Core Engines &amp; Resilient Fixes</a:t>
             </a:r>
           </a:p>
           <a:p>
@@ -8144,7 +7979,7 @@
               </a:defRPr>
             </a:pPr>
             <a:r>
-              <a:t>•  3D Transparent Holographic Avatar: Modeled with an obsidian cartouche and royal gold illuminated rim.</a:t>
+              <a:t>•  Engineered the 3 pillars: Deep Summarization, DeckCraft (.pptx), and VectorCraft (infographics).</a:t>
             </a:r>
           </a:p>
           <a:p>
@@ -8160,7 +7995,81 @@
               </a:defRPr>
             </a:pPr>
             <a:r>
-              <a:t>•  1-Click Avatar Switcher: A dedicated horizontal selector bar in the header allows instantaneous switching between all 10 personas.</a:t>
+              <a:t>•  Resolved TRPC runtime crashes via intelligent local Ollama fallback proxy.</a:t>
+            </a:r>
+          </a:p>
+        </p:txBody>
+      </p:sp>
+      <p:sp>
+        <p:nvSpPr>
+          <p:cNvPr id="8" name="Rounded Rectangle 7"/>
+          <p:cNvSpPr/>
+          <p:nvPr/>
+        </p:nvSpPr>
+        <p:spPr>
+          <a:xfrm>
+            <a:off x="731520" y="4023360"/>
+            <a:ext cx="5212080" cy="2194560"/>
+          </a:xfrm>
+          <a:prstGeom prst="roundRect">
+            <a:avLst/>
+          </a:prstGeom>
+          <a:solidFill>
+            <a:srgbClr val="111827"/>
+          </a:solidFill>
+          <a:ln w="15240">
+            <a:solidFill>
+              <a:srgbClr val="34D399"/>
+            </a:solidFill>
+          </a:ln>
+        </p:spPr>
+        <p:style>
+          <a:lnRef idx="1">
+            <a:schemeClr val="accent1"/>
+          </a:lnRef>
+          <a:fillRef idx="3">
+            <a:schemeClr val="accent1"/>
+          </a:fillRef>
+          <a:effectRef idx="2">
+            <a:schemeClr val="accent1"/>
+          </a:effectRef>
+          <a:fontRef idx="minor">
+            <a:schemeClr val="lt1"/>
+          </a:fontRef>
+        </p:style>
+        <p:txBody>
+          <a:bodyPr rtlCol="0" anchor="ctr" wrap="square" lIns="228600" rIns="228600" tIns="228600" bIns="182880"/>
+          <a:lstStyle/>
+          <a:p>
+            <a:pPr algn="ctr">
+              <a:spcAft>
+                <a:spcPts val="400"/>
+              </a:spcAft>
+              <a:defRPr sz="1000" b="1">
+                <a:solidFill>
+                  <a:srgbClr val="34D399"/>
+                </a:solidFill>
+                <a:latin typeface="Arial"/>
+              </a:defRPr>
+            </a:pPr>
+            <a:r>
+              <a:t>PHASE 3: INTELLIGENCE</a:t>
+            </a:r>
+          </a:p>
+          <a:p>
+            <a:pPr>
+              <a:spcAft>
+                <a:spcPts val="1000"/>
+              </a:spcAft>
+              <a:defRPr sz="1600" b="1">
+                <a:solidFill>
+                  <a:srgbClr val="F8FAFC"/>
+                </a:solidFill>
+                <a:latin typeface="Arial"/>
+              </a:defRPr>
+            </a:pPr>
+            <a:r>
+              <a:t>Phase 3: Model Intelligence &amp; GPU Velocity</a:t>
             </a:r>
           </a:p>
           <a:p>
@@ -8176,7 +8085,7 @@
               </a:defRPr>
             </a:pPr>
             <a:r>
-              <a:t>•  Universal Synchronization: Switching the persona synchronizes the avatar, role title, system prompt, and greeting across all platform agents.</a:t>
+              <a:t>•  Unlocked database to 131,072 context tokens, 16,384 output tokens, and 'pro' reasoning.</a:t>
             </a:r>
           </a:p>
           <a:p>
@@ -8192,7 +8101,113 @@
               </a:defRPr>
             </a:pPr>
             <a:r>
-              <a:t>•  No-Permission Blockers: Fully editable and clickable for all team members.</a:t>
+              <a:t>•  Pinned gemma4:e4b into NVIDIA RTX 4050 GPU VRAM (keep_alive: '-1') for instant streaming.</a:t>
+            </a:r>
+          </a:p>
+        </p:txBody>
+      </p:sp>
+      <p:sp>
+        <p:nvSpPr>
+          <p:cNvPr id="9" name="Rounded Rectangle 8"/>
+          <p:cNvSpPr/>
+          <p:nvPr/>
+        </p:nvSpPr>
+        <p:spPr>
+          <a:xfrm>
+            <a:off x="6217920" y="4023360"/>
+            <a:ext cx="5212080" cy="2194560"/>
+          </a:xfrm>
+          <a:prstGeom prst="roundRect">
+            <a:avLst/>
+          </a:prstGeom>
+          <a:solidFill>
+            <a:srgbClr val="111827"/>
+          </a:solidFill>
+          <a:ln w="15240">
+            <a:solidFill>
+              <a:srgbClr val="F59E0B"/>
+            </a:solidFill>
+          </a:ln>
+        </p:spPr>
+        <p:style>
+          <a:lnRef idx="1">
+            <a:schemeClr val="accent1"/>
+          </a:lnRef>
+          <a:fillRef idx="3">
+            <a:schemeClr val="accent1"/>
+          </a:fillRef>
+          <a:effectRef idx="2">
+            <a:schemeClr val="accent1"/>
+          </a:effectRef>
+          <a:fontRef idx="minor">
+            <a:schemeClr val="lt1"/>
+          </a:fontRef>
+        </p:style>
+        <p:txBody>
+          <a:bodyPr rtlCol="0" anchor="ctr" wrap="square" lIns="228600" rIns="228600" tIns="228600" bIns="182880"/>
+          <a:lstStyle/>
+          <a:p>
+            <a:pPr algn="ctr">
+              <a:spcAft>
+                <a:spcPts val="400"/>
+              </a:spcAft>
+              <a:defRPr sz="1000" b="1">
+                <a:solidFill>
+                  <a:srgbClr val="F59E0B"/>
+                </a:solidFill>
+                <a:latin typeface="Arial"/>
+              </a:defRPr>
+            </a:pPr>
+            <a:r>
+              <a:t>PHASE 4: PRODUCTION</a:t>
+            </a:r>
+          </a:p>
+          <a:p>
+            <a:pPr>
+              <a:spcAft>
+                <a:spcPts val="1000"/>
+              </a:spcAft>
+              <a:defRPr sz="1600" b="1">
+                <a:solidFill>
+                  <a:srgbClr val="F8FAFC"/>
+                </a:solidFill>
+                <a:latin typeface="Arial"/>
+              </a:defRPr>
+            </a:pPr>
+            <a:r>
+              <a:t>Phase 4: Turnkey Production &amp; GitHub Release</a:t>
+            </a:r>
+          </a:p>
+          <a:p>
+            <a:pPr>
+              <a:spcAft>
+                <a:spcPts val="600"/>
+              </a:spcAft>
+              <a:defRPr sz="1200">
+                <a:solidFill>
+                  <a:srgbClr val="94A3B8"/>
+                </a:solidFill>
+                <a:latin typeface="Arial"/>
+              </a:defRPr>
+            </a:pPr>
+            <a:r>
+              <a:t>•  Built self-healing Docker architecture and turnkey 1-click setup scripts (.ps1 and .sh).</a:t>
+            </a:r>
+          </a:p>
+          <a:p>
+            <a:pPr>
+              <a:spcAft>
+                <a:spcPts val="600"/>
+              </a:spcAft>
+              <a:defRPr sz="1200">
+                <a:solidFill>
+                  <a:srgbClr val="94A3B8"/>
+                </a:solidFill>
+                <a:latin typeface="Arial"/>
+              </a:defRPr>
+            </a:pPr>
+            <a:r>
+              <a:t>•  Integrated ONLYOFFICE document server and published full production repo to GitHub.</a:t>
             </a:r>
           </a:p>
         </p:txBody>

--- a/docs/TuT_AI_Marketing_Pitch_Deck.pptx
+++ b/docs/TuT_AI_Marketing_Pitch_Deck.pptx
@@ -17,6 +17,8 @@
     <p:sldId id="265" r:id="rId16"/>
     <p:sldId id="266" r:id="rId17"/>
     <p:sldId id="267" r:id="rId18"/>
+    <p:sldId id="268" r:id="rId19"/>
+    <p:sldId id="269" r:id="rId20"/>
   </p:sldIdLst>
   <p:sldSz cx="12191695" cy="6858000" type="screen4x3"/>
   <p:notesSz cx="6858000" cy="9144000"/>
@@ -3361,7 +3363,7 @@
               </a:defRPr>
             </a:pPr>
             <a:r>
-              <a:t>EVOLUTION</a:t>
+              <a:t>ENGINEERING MILESTONES</a:t>
             </a:r>
           </a:p>
         </p:txBody>
@@ -3397,7 +3399,7 @@
               </a:defRPr>
             </a:pPr>
             <a:r>
-              <a:t>Strategic Future Roadmap: Expanding TuT AI</a:t>
+              <a:t>The Development Journey: 4 Evolutionary Phases</a:t>
             </a:r>
           </a:p>
         </p:txBody>
@@ -3454,6 +3456,112 @@
         <p:spPr>
           <a:xfrm>
             <a:off x="731520" y="1645920"/>
+            <a:ext cx="5212080" cy="2194560"/>
+          </a:xfrm>
+          <a:prstGeom prst="roundRect">
+            <a:avLst/>
+          </a:prstGeom>
+          <a:solidFill>
+            <a:srgbClr val="111827"/>
+          </a:solidFill>
+          <a:ln w="15240">
+            <a:solidFill>
+              <a:srgbClr val="D4AF37"/>
+            </a:solidFill>
+          </a:ln>
+        </p:spPr>
+        <p:style>
+          <a:lnRef idx="1">
+            <a:schemeClr val="accent1"/>
+          </a:lnRef>
+          <a:fillRef idx="3">
+            <a:schemeClr val="accent1"/>
+          </a:fillRef>
+          <a:effectRef idx="2">
+            <a:schemeClr val="accent1"/>
+          </a:effectRef>
+          <a:fontRef idx="minor">
+            <a:schemeClr val="lt1"/>
+          </a:fontRef>
+        </p:style>
+        <p:txBody>
+          <a:bodyPr rtlCol="0" anchor="ctr" wrap="square" lIns="228600" rIns="228600" tIns="228600" bIns="182880"/>
+          <a:lstStyle/>
+          <a:p>
+            <a:pPr algn="ctr">
+              <a:spcAft>
+                <a:spcPts val="400"/>
+              </a:spcAft>
+              <a:defRPr sz="1000" b="1">
+                <a:solidFill>
+                  <a:srgbClr val="D4AF37"/>
+                </a:solidFill>
+                <a:latin typeface="Arial"/>
+              </a:defRPr>
+            </a:pPr>
+            <a:r>
+              <a:t>PHASE 1: INCEPTION</a:t>
+            </a:r>
+          </a:p>
+          <a:p>
+            <a:pPr>
+              <a:spcAft>
+                <a:spcPts val="1000"/>
+              </a:spcAft>
+              <a:defRPr sz="1600" b="1">
+                <a:solidFill>
+                  <a:srgbClr val="F8FAFC"/>
+                </a:solidFill>
+                <a:latin typeface="Arial"/>
+              </a:defRPr>
+            </a:pPr>
+            <a:r>
+              <a:t>Phase 1: Foundation &amp; Sovereign Identity</a:t>
+            </a:r>
+          </a:p>
+          <a:p>
+            <a:pPr>
+              <a:spcAft>
+                <a:spcPts val="600"/>
+              </a:spcAft>
+              <a:defRPr sz="1200">
+                <a:solidFill>
+                  <a:srgbClr val="94A3B8"/>
+                </a:solidFill>
+                <a:latin typeface="Arial"/>
+              </a:defRPr>
+            </a:pPr>
+            <a:r>
+              <a:t>•  Transitioned away from generic third-party code to 100% Egyptian sovereign platform.</a:t>
+            </a:r>
+          </a:p>
+          <a:p>
+            <a:pPr>
+              <a:spcAft>
+                <a:spcPts val="600"/>
+              </a:spcAft>
+              <a:defRPr sz="1200">
+                <a:solidFill>
+                  <a:srgbClr val="94A3B8"/>
+                </a:solidFill>
+                <a:latin typeface="Arial"/>
+              </a:defRPr>
+            </a:pPr>
+            <a:r>
+              <a:t>•  Engineered the TuT AI identity: 10 historical personas &amp; 3D holographic cartouche.</a:t>
+            </a:r>
+          </a:p>
+        </p:txBody>
+      </p:sp>
+      <p:sp>
+        <p:nvSpPr>
+          <p:cNvPr id="7" name="Rounded Rectangle 6"/>
+          <p:cNvSpPr/>
+          <p:nvPr/>
+        </p:nvSpPr>
+        <p:spPr>
+          <a:xfrm>
+            <a:off x="6217920" y="1645920"/>
             <a:ext cx="5212080" cy="2194560"/>
           </a:xfrm>
           <a:prstGeom prst="roundRect">
@@ -3498,7 +3606,7 @@
               </a:defRPr>
             </a:pPr>
             <a:r>
-              <a:t>SPEED</a:t>
+              <a:t>PHASE 2: ARCHITECTURE</a:t>
             </a:r>
           </a:p>
           <a:p>
@@ -3514,7 +3622,7 @@
               </a:defRPr>
             </a:pPr>
             <a:r>
-              <a:t>1. Ultra-Fast Inference via vLLM</a:t>
+              <a:t>Phase 2: Core Engines &amp; Resilient Fixes</a:t>
             </a:r>
           </a:p>
           <a:p>
@@ -3530,7 +3638,7 @@
               </a:defRPr>
             </a:pPr>
             <a:r>
-              <a:t>•  Integrate containerized vLLM with PagedAttention to achieve 60–80+ tokens/sec on RTX GPUs.</a:t>
+              <a:t>•  Engineered the 3 pillars: Deep Summarization, DeckCraft (.pptx), and VectorCraft (infographics).</a:t>
             </a:r>
           </a:p>
           <a:p>
@@ -3546,113 +3654,7 @@
               </a:defRPr>
             </a:pPr>
             <a:r>
-              <a:t>•  Support concurrent multi-user streaming for entire ministerial departments.</a:t>
-            </a:r>
-          </a:p>
-        </p:txBody>
-      </p:sp>
-      <p:sp>
-        <p:nvSpPr>
-          <p:cNvPr id="7" name="Rounded Rectangle 6"/>
-          <p:cNvSpPr/>
-          <p:nvPr/>
-        </p:nvSpPr>
-        <p:spPr>
-          <a:xfrm>
-            <a:off x="6217920" y="1645920"/>
-            <a:ext cx="5212080" cy="2194560"/>
-          </a:xfrm>
-          <a:prstGeom prst="roundRect">
-            <a:avLst/>
-          </a:prstGeom>
-          <a:solidFill>
-            <a:srgbClr val="111827"/>
-          </a:solidFill>
-          <a:ln w="15240">
-            <a:solidFill>
-              <a:srgbClr val="D4AF37"/>
-            </a:solidFill>
-          </a:ln>
-        </p:spPr>
-        <p:style>
-          <a:lnRef idx="1">
-            <a:schemeClr val="accent1"/>
-          </a:lnRef>
-          <a:fillRef idx="3">
-            <a:schemeClr val="accent1"/>
-          </a:fillRef>
-          <a:effectRef idx="2">
-            <a:schemeClr val="accent1"/>
-          </a:effectRef>
-          <a:fontRef idx="minor">
-            <a:schemeClr val="lt1"/>
-          </a:fontRef>
-        </p:style>
-        <p:txBody>
-          <a:bodyPr rtlCol="0" anchor="ctr" wrap="square" lIns="228600" rIns="228600" tIns="228600" bIns="182880"/>
-          <a:lstStyle/>
-          <a:p>
-            <a:pPr algn="ctr">
-              <a:spcAft>
-                <a:spcPts val="400"/>
-              </a:spcAft>
-              <a:defRPr sz="1000" b="1">
-                <a:solidFill>
-                  <a:srgbClr val="D4AF37"/>
-                </a:solidFill>
-                <a:latin typeface="Arial"/>
-              </a:defRPr>
-            </a:pPr>
-            <a:r>
-              <a:t>SPECIALIZATION</a:t>
-            </a:r>
-          </a:p>
-          <a:p>
-            <a:pPr>
-              <a:spcAft>
-                <a:spcPts val="1000"/>
-              </a:spcAft>
-              <a:defRPr sz="1600" b="1">
-                <a:solidFill>
-                  <a:srgbClr val="F8FAFC"/>
-                </a:solidFill>
-                <a:latin typeface="Arial"/>
-              </a:defRPr>
-            </a:pPr>
-            <a:r>
-              <a:t>2. Egyptian Governmental LoRA Fine-Tuning</a:t>
-            </a:r>
-          </a:p>
-          <a:p>
-            <a:pPr>
-              <a:spcAft>
-                <a:spcPts val="600"/>
-              </a:spcAft>
-              <a:defRPr sz="1200">
-                <a:solidFill>
-                  <a:srgbClr val="94A3B8"/>
-                </a:solidFill>
-                <a:latin typeface="Arial"/>
-              </a:defRPr>
-            </a:pPr>
-            <a:r>
-              <a:t>•  Fine-tune specialized LoRA adapters on official ministerial circulars, decrees, and laws.</a:t>
-            </a:r>
-          </a:p>
-          <a:p>
-            <a:pPr>
-              <a:spcAft>
-                <a:spcPts val="600"/>
-              </a:spcAft>
-              <a:defRPr sz="1200">
-                <a:solidFill>
-                  <a:srgbClr val="94A3B8"/>
-                </a:solidFill>
-                <a:latin typeface="Arial"/>
-              </a:defRPr>
-            </a:pPr>
-            <a:r>
-              <a:t>•  Guarantees 100% authentic Egyptian administrative protocol and terminology.</a:t>
+              <a:t>•  Resolved TRPC runtime crashes via intelligent local Ollama fallback proxy.</a:t>
             </a:r>
           </a:p>
         </p:txBody>
@@ -3710,7 +3712,7 @@
               </a:defRPr>
             </a:pPr>
             <a:r>
-              <a:t>VISION</a:t>
+              <a:t>PHASE 3: INTELLIGENCE</a:t>
             </a:r>
           </a:p>
           <a:p>
@@ -3726,7 +3728,7 @@
               </a:defRPr>
             </a:pPr>
             <a:r>
-              <a:t>3. Multimodal Vision for Scanned PDFs</a:t>
+              <a:t>Phase 3: Model Intelligence &amp; GPU Velocity</a:t>
             </a:r>
           </a:p>
           <a:p>
@@ -3742,7 +3744,7 @@
               </a:defRPr>
             </a:pPr>
             <a:r>
-              <a:t>•  Deploy Qwen2-VL or Llama-3.2-Vision to process historical Arabic manuscripts, stamps, and blueprints.</a:t>
+              <a:t>•  Unlocked database to 131,072 context tokens, 16,384 output tokens, and 'pro' reasoning.</a:t>
             </a:r>
           </a:p>
           <a:p>
@@ -3758,7 +3760,7 @@
               </a:defRPr>
             </a:pPr>
             <a:r>
-              <a:t>•  Direct table extraction from paper scans directly into Excel and charts.</a:t>
+              <a:t>•  Pinned gemma4:e4b into NVIDIA RTX 4050 GPU VRAM (keep_alive: '-1') for instant streaming.</a:t>
             </a:r>
           </a:p>
         </p:txBody>
@@ -3816,7 +3818,7 @@
               </a:defRPr>
             </a:pPr>
             <a:r>
-              <a:t>MULTI-AGENT</a:t>
+              <a:t>PHASE 4: PRODUCTION</a:t>
             </a:r>
           </a:p>
           <a:p>
@@ -3832,7 +3834,7 @@
               </a:defRPr>
             </a:pPr>
             <a:r>
-              <a:t>4. Autonomous Multi-Agent Swarms</a:t>
+              <a:t>Phase 4: Turnkey Production &amp; GitHub Release</a:t>
             </a:r>
           </a:p>
           <a:p>
@@ -3848,7 +3850,7 @@
               </a:defRPr>
             </a:pPr>
             <a:r>
-              <a:t>•  Autonomous delegation: Thoth researches, Imhotep audits data, and TuT delivers the final slides.</a:t>
+              <a:t>•  Built self-healing Docker architecture and turnkey 1-click setup scripts (.ps1 and .sh).</a:t>
             </a:r>
           </a:p>
           <a:p>
@@ -3864,7 +3866,7 @@
               </a:defRPr>
             </a:pPr>
             <a:r>
-              <a:t>•  Zero human micromanagement on complex multi-step state projects.</a:t>
+              <a:t>•  Integrated ONLYOFFICE document server and published full production repo to GitHub.</a:t>
             </a:r>
           </a:p>
         </p:txBody>
@@ -3961,7 +3963,7 @@
               </a:defRPr>
             </a:pPr>
             <a:r>
-              <a:t>PEOPLE &amp; GOVERNANCE</a:t>
+              <a:t>INSTITUTIONAL VALUE</a:t>
             </a:r>
           </a:p>
         </p:txBody>
@@ -3997,7 +3999,7 @@
               </a:defRPr>
             </a:pPr>
             <a:r>
-              <a:t>Project Leadership &amp; Development Team</a:t>
+              <a:t>Strategic &amp; Economic Impact for MCIT &amp; Government</a:t>
             </a:r>
           </a:p>
         </p:txBody>
@@ -4054,7 +4056,7 @@
         <p:spPr>
           <a:xfrm>
             <a:off x="731520" y="1645920"/>
-            <a:ext cx="5212080" cy="4572000"/>
+            <a:ext cx="3383280" cy="4572000"/>
           </a:xfrm>
           <a:prstGeom prst="roundRect">
             <a:avLst/>
@@ -4062,9 +4064,9 @@
           <a:solidFill>
             <a:srgbClr val="111827"/>
           </a:solidFill>
-          <a:ln w="19050">
+          <a:ln w="15240">
             <a:solidFill>
-              <a:srgbClr val="D4AF37"/>
+              <a:srgbClr val="34D399"/>
             </a:solidFill>
           </a:ln>
         </p:spPr>
@@ -4083,30 +4085,30 @@
           </a:fontRef>
         </p:style>
         <p:txBody>
-          <a:bodyPr rtlCol="0" anchor="ctr" wrap="square" lIns="274320" tIns="274320"/>
+          <a:bodyPr rtlCol="0" anchor="ctr" wrap="square" lIns="228600" rIns="228600" tIns="228600" bIns="182880"/>
           <a:lstStyle/>
           <a:p>
             <a:pPr algn="ctr">
               <a:spcAft>
-                <a:spcPts val="800"/>
-              </a:spcAft>
-              <a:defRPr sz="1100" b="1">
-                <a:solidFill>
-                  <a:srgbClr val="D4AF37"/>
-                </a:solidFill>
-                <a:latin typeface="Arial"/>
-              </a:defRPr>
-            </a:pPr>
-            <a:r>
-              <a:t>MINISTRY HEADS &amp; SUPERVISION</a:t>
-            </a:r>
-          </a:p>
-          <a:p>
-            <a:pPr>
-              <a:spcAft>
-                <a:spcPts val="1800"/>
-              </a:spcAft>
-              <a:defRPr sz="1800" b="1">
+                <a:spcPts val="400"/>
+              </a:spcAft>
+              <a:defRPr sz="1000" b="1">
+                <a:solidFill>
+                  <a:srgbClr val="34D399"/>
+                </a:solidFill>
+                <a:latin typeface="Arial"/>
+              </a:defRPr>
+            </a:pPr>
+            <a:r>
+              <a:t>SOVEREIGNTY</a:t>
+            </a:r>
+          </a:p>
+          <a:p>
+            <a:pPr>
+              <a:spcAft>
+                <a:spcPts val="1000"/>
+              </a:spcAft>
+              <a:defRPr sz="1600" b="1">
                 <a:solidFill>
                   <a:srgbClr val="F8FAFC"/>
                 </a:solidFill>
@@ -4114,55 +4116,71 @@
               </a:defRPr>
             </a:pPr>
             <a:r>
-              <a:t>Ministry Leadership &amp; Guidance</a:t>
-            </a:r>
-          </a:p>
-          <a:p>
-            <a:pPr>
-              <a:spcAft>
-                <a:spcPts val="2000"/>
-              </a:spcAft>
-              <a:defRPr sz="1500" b="1">
-                <a:solidFill>
-                  <a:srgbClr val="F5D673"/>
-                </a:solidFill>
-                <a:latin typeface="Arial"/>
-              </a:defRPr>
-            </a:pPr>
-            <a:r>
-              <a:t>🎖️  Dr. Mohamed Rehan</a:t>
-            </a:r>
-          </a:p>
-          <a:p>
-            <a:pPr>
-              <a:spcAft>
-                <a:spcPts val="2000"/>
-              </a:spcAft>
-              <a:defRPr sz="1500" b="1">
-                <a:solidFill>
-                  <a:srgbClr val="F5D673"/>
-                </a:solidFill>
-                <a:latin typeface="Arial"/>
-              </a:defRPr>
-            </a:pPr>
-            <a:r>
-              <a:t>🎖️  Eng. Reham Metwally</a:t>
-            </a:r>
-          </a:p>
-          <a:p>
-            <a:pPr>
-              <a:spcAft>
-                <a:spcPts val="2000"/>
-              </a:spcAft>
-              <a:defRPr sz="1500" b="1">
-                <a:solidFill>
-                  <a:srgbClr val="F5D673"/>
-                </a:solidFill>
-                <a:latin typeface="Arial"/>
-              </a:defRPr>
-            </a:pPr>
-            <a:r>
-              <a:t>🎖️  Eng. Mohamed Khalid Mohamed Roshdy</a:t>
+              <a:t>100% Data Sovereignty</a:t>
+            </a:r>
+          </a:p>
+          <a:p>
+            <a:pPr>
+              <a:spcAft>
+                <a:spcPts val="600"/>
+              </a:spcAft>
+              <a:defRPr sz="1200">
+                <a:solidFill>
+                  <a:srgbClr val="94A3B8"/>
+                </a:solidFill>
+                <a:latin typeface="Arial"/>
+              </a:defRPr>
+            </a:pPr>
+            <a:r>
+              <a:t>•  Zero cloud leakage: Classified ministerial files remain within the state firewall.</a:t>
+            </a:r>
+          </a:p>
+          <a:p>
+            <a:pPr>
+              <a:spcAft>
+                <a:spcPts val="600"/>
+              </a:spcAft>
+              <a:defRPr sz="1200">
+                <a:solidFill>
+                  <a:srgbClr val="94A3B8"/>
+                </a:solidFill>
+                <a:latin typeface="Arial"/>
+              </a:defRPr>
+            </a:pPr>
+            <a:r>
+              <a:t>•  Full compliance with national cybersecurity and data protection frameworks.</a:t>
+            </a:r>
+          </a:p>
+          <a:p>
+            <a:pPr>
+              <a:spcAft>
+                <a:spcPts val="600"/>
+              </a:spcAft>
+              <a:defRPr sz="1200">
+                <a:solidFill>
+                  <a:srgbClr val="94A3B8"/>
+                </a:solidFill>
+                <a:latin typeface="Arial"/>
+              </a:defRPr>
+            </a:pPr>
+            <a:r>
+              <a:t>•  Immune to foreign sanctions, cloud pricing hikes, or global connection blackouts.</a:t>
+            </a:r>
+          </a:p>
+          <a:p>
+            <a:pPr>
+              <a:spcAft>
+                <a:spcPts val="600"/>
+              </a:spcAft>
+              <a:defRPr sz="1200">
+                <a:solidFill>
+                  <a:srgbClr val="94A3B8"/>
+                </a:solidFill>
+                <a:latin typeface="Arial"/>
+              </a:defRPr>
+            </a:pPr>
+            <a:r>
+              <a:t>•  Total ownership of code, weights, data, and fine-tuned domain models.</a:t>
             </a:r>
           </a:p>
         </p:txBody>
@@ -4175,8 +4193,8 @@
         </p:nvSpPr>
         <p:spPr>
           <a:xfrm>
-            <a:off x="6217920" y="1645920"/>
-            <a:ext cx="5212080" cy="4572000"/>
+            <a:off x="4389120" y="1645920"/>
+            <a:ext cx="3383280" cy="4572000"/>
           </a:xfrm>
           <a:prstGeom prst="roundRect">
             <a:avLst/>
@@ -4184,9 +4202,9 @@
           <a:solidFill>
             <a:srgbClr val="111827"/>
           </a:solidFill>
-          <a:ln w="19050">
+          <a:ln w="15240">
             <a:solidFill>
-              <a:srgbClr val="38BDF8"/>
+              <a:srgbClr val="D4AF37"/>
             </a:solidFill>
           </a:ln>
         </p:spPr>
@@ -4205,14 +4223,152 @@
           </a:fontRef>
         </p:style>
         <p:txBody>
-          <a:bodyPr rtlCol="0" anchor="ctr" wrap="square" lIns="274320" tIns="274320"/>
+          <a:bodyPr rtlCol="0" anchor="ctr" wrap="square" lIns="228600" rIns="228600" tIns="228600" bIns="182880"/>
           <a:lstStyle/>
           <a:p>
             <a:pPr algn="ctr">
               <a:spcAft>
-                <a:spcPts val="800"/>
-              </a:spcAft>
-              <a:defRPr sz="1100" b="1">
+                <a:spcPts val="400"/>
+              </a:spcAft>
+              <a:defRPr sz="1000" b="1">
+                <a:solidFill>
+                  <a:srgbClr val="D4AF37"/>
+                </a:solidFill>
+                <a:latin typeface="Arial"/>
+              </a:defRPr>
+            </a:pPr>
+            <a:r>
+              <a:t>PRODUCTIVITY</a:t>
+            </a:r>
+          </a:p>
+          <a:p>
+            <a:pPr>
+              <a:spcAft>
+                <a:spcPts val="1000"/>
+              </a:spcAft>
+              <a:defRPr sz="1600" b="1">
+                <a:solidFill>
+                  <a:srgbClr val="F8FAFC"/>
+                </a:solidFill>
+                <a:latin typeface="Arial"/>
+              </a:defRPr>
+            </a:pPr>
+            <a:r>
+              <a:t>10x Operational Speed</a:t>
+            </a:r>
+          </a:p>
+          <a:p>
+            <a:pPr>
+              <a:spcAft>
+                <a:spcPts val="600"/>
+              </a:spcAft>
+              <a:defRPr sz="1200">
+                <a:solidFill>
+                  <a:srgbClr val="94A3B8"/>
+                </a:solidFill>
+                <a:latin typeface="Arial"/>
+              </a:defRPr>
+            </a:pPr>
+            <a:r>
+              <a:t>•  Reduces 4-hour document reading to a 30-second verified executive summary.</a:t>
+            </a:r>
+          </a:p>
+          <a:p>
+            <a:pPr>
+              <a:spcAft>
+                <a:spcPts val="600"/>
+              </a:spcAft>
+              <a:defRPr sz="1200">
+                <a:solidFill>
+                  <a:srgbClr val="94A3B8"/>
+                </a:solidFill>
+                <a:latin typeface="Arial"/>
+              </a:defRPr>
+            </a:pPr>
+            <a:r>
+              <a:t>•  Eliminates external design delays: Generates ready-to-present PowerPoint decks on demand.</a:t>
+            </a:r>
+          </a:p>
+          <a:p>
+            <a:pPr>
+              <a:spcAft>
+                <a:spcPts val="600"/>
+              </a:spcAft>
+              <a:defRPr sz="1200">
+                <a:solidFill>
+                  <a:srgbClr val="94A3B8"/>
+                </a:solidFill>
+                <a:latin typeface="Arial"/>
+              </a:defRPr>
+            </a:pPr>
+            <a:r>
+              <a:t>•  Instant ONLYOFFICE co-editing: Staff collaborate inside the platform without license costs.</a:t>
+            </a:r>
+          </a:p>
+          <a:p>
+            <a:pPr>
+              <a:spcAft>
+                <a:spcPts val="600"/>
+              </a:spcAft>
+              <a:defRPr sz="1200">
+                <a:solidFill>
+                  <a:srgbClr val="94A3B8"/>
+                </a:solidFill>
+                <a:latin typeface="Arial"/>
+              </a:defRPr>
+            </a:pPr>
+            <a:r>
+              <a:t>•  Empowers leadership with real-time strategic briefs during meetings.</a:t>
+            </a:r>
+          </a:p>
+        </p:txBody>
+      </p:sp>
+      <p:sp>
+        <p:nvSpPr>
+          <p:cNvPr id="8" name="Rounded Rectangle 7"/>
+          <p:cNvSpPr/>
+          <p:nvPr/>
+        </p:nvSpPr>
+        <p:spPr>
+          <a:xfrm>
+            <a:off x="8046720" y="1645920"/>
+            <a:ext cx="3383280" cy="4572000"/>
+          </a:xfrm>
+          <a:prstGeom prst="roundRect">
+            <a:avLst/>
+          </a:prstGeom>
+          <a:solidFill>
+            <a:srgbClr val="111827"/>
+          </a:solidFill>
+          <a:ln w="15240">
+            <a:solidFill>
+              <a:srgbClr val="38BDF8"/>
+            </a:solidFill>
+          </a:ln>
+        </p:spPr>
+        <p:style>
+          <a:lnRef idx="1">
+            <a:schemeClr val="accent1"/>
+          </a:lnRef>
+          <a:fillRef idx="3">
+            <a:schemeClr val="accent1"/>
+          </a:fillRef>
+          <a:effectRef idx="2">
+            <a:schemeClr val="accent1"/>
+          </a:effectRef>
+          <a:fontRef idx="minor">
+            <a:schemeClr val="lt1"/>
+          </a:fontRef>
+        </p:style>
+        <p:txBody>
+          <a:bodyPr rtlCol="0" anchor="ctr" wrap="square" lIns="228600" rIns="228600" tIns="228600" bIns="182880"/>
+          <a:lstStyle/>
+          <a:p>
+            <a:pPr algn="ctr">
+              <a:spcAft>
+                <a:spcPts val="400"/>
+              </a:spcAft>
+              <a:defRPr sz="1000" b="1">
                 <a:solidFill>
                   <a:srgbClr val="38BDF8"/>
                 </a:solidFill>
@@ -4220,15 +4376,15 @@
               </a:defRPr>
             </a:pPr>
             <a:r>
-              <a:t>ENGINEERING &amp; DEVELOPMENT TEAM</a:t>
-            </a:r>
-          </a:p>
-          <a:p>
-            <a:pPr>
-              <a:spcAft>
-                <a:spcPts val="1600"/>
-              </a:spcAft>
-              <a:defRPr sz="1800" b="1">
+              <a:t>COST EFFICIENCY</a:t>
+            </a:r>
+          </a:p>
+          <a:p>
+            <a:pPr>
+              <a:spcAft>
+                <a:spcPts val="1000"/>
+              </a:spcAft>
+              <a:defRPr sz="1600" b="1">
                 <a:solidFill>
                   <a:srgbClr val="F8FAFC"/>
                 </a:solidFill>
@@ -4236,103 +4392,71 @@
               </a:defRPr>
             </a:pPr>
             <a:r>
-              <a:t>TuT AI Core Team</a:t>
-            </a:r>
-          </a:p>
-          <a:p>
-            <a:pPr>
-              <a:spcAft>
-                <a:spcPts val="1200"/>
-              </a:spcAft>
-              <a:defRPr sz="1400" b="1">
-                <a:solidFill>
-                  <a:srgbClr val="D4AF37"/>
-                </a:solidFill>
-                <a:latin typeface="Arial"/>
-              </a:defRPr>
-            </a:pPr>
-            <a:r>
-              <a:t>⭐  Ahmed Gamal Sophi Arfa</a:t>
-            </a:r>
-          </a:p>
-          <a:p>
-            <a:pPr>
-              <a:spcAft>
-                <a:spcPts val="800"/>
-              </a:spcAft>
-              <a:defRPr sz="1300" b="1">
-                <a:solidFill>
-                  <a:srgbClr val="F8FAFC"/>
-                </a:solidFill>
-                <a:latin typeface="Arial"/>
-              </a:defRPr>
-            </a:pPr>
-            <a:r>
-              <a:t>•  Abdelrhman Mahmoud Fawzy</a:t>
-            </a:r>
-          </a:p>
-          <a:p>
-            <a:pPr>
-              <a:spcAft>
-                <a:spcPts val="800"/>
-              </a:spcAft>
-              <a:defRPr sz="1300" b="1">
-                <a:solidFill>
-                  <a:srgbClr val="F8FAFC"/>
-                </a:solidFill>
-                <a:latin typeface="Arial"/>
-              </a:defRPr>
-            </a:pPr>
-            <a:r>
-              <a:t>•  Saja Raafat Gaber</a:t>
-            </a:r>
-          </a:p>
-          <a:p>
-            <a:pPr>
-              <a:spcAft>
-                <a:spcPts val="800"/>
-              </a:spcAft>
-              <a:defRPr sz="1300" b="1">
-                <a:solidFill>
-                  <a:srgbClr val="F8FAFC"/>
-                </a:solidFill>
-                <a:latin typeface="Arial"/>
-              </a:defRPr>
-            </a:pPr>
-            <a:r>
-              <a:t>•  Mohamed Hamdy Abdelazez</a:t>
-            </a:r>
-          </a:p>
-          <a:p>
-            <a:pPr>
-              <a:spcAft>
-                <a:spcPts val="800"/>
-              </a:spcAft>
-              <a:defRPr sz="1300" b="1">
-                <a:solidFill>
-                  <a:srgbClr val="F8FAFC"/>
-                </a:solidFill>
-                <a:latin typeface="Arial"/>
-              </a:defRPr>
-            </a:pPr>
-            <a:r>
-              <a:t>•  Asmaa Samy Hagag</a:t>
-            </a:r>
-          </a:p>
-          <a:p>
-            <a:pPr>
-              <a:spcAft>
-                <a:spcPts val="800"/>
-              </a:spcAft>
-              <a:defRPr sz="1300" b="1">
-                <a:solidFill>
-                  <a:srgbClr val="F8FAFC"/>
-                </a:solidFill>
-                <a:latin typeface="Arial"/>
-              </a:defRPr>
-            </a:pPr>
-            <a:r>
-              <a:t>•  Mohamed Abd elhgani el kwatihy</a:t>
+              <a:t>Zero Recurring SaaS Costs</a:t>
+            </a:r>
+          </a:p>
+          <a:p>
+            <a:pPr>
+              <a:spcAft>
+                <a:spcPts val="600"/>
+              </a:spcAft>
+              <a:defRPr sz="1200">
+                <a:solidFill>
+                  <a:srgbClr val="94A3B8"/>
+                </a:solidFill>
+                <a:latin typeface="Arial"/>
+              </a:defRPr>
+            </a:pPr>
+            <a:r>
+              <a:t>•  No per-seat licensing fees (saving thousands of dollars annually on Copilot / ChatGPT Plus).</a:t>
+            </a:r>
+          </a:p>
+          <a:p>
+            <a:pPr>
+              <a:spcAft>
+                <a:spcPts val="600"/>
+              </a:spcAft>
+              <a:defRPr sz="1200">
+                <a:solidFill>
+                  <a:srgbClr val="94A3B8"/>
+                </a:solidFill>
+                <a:latin typeface="Arial"/>
+              </a:defRPr>
+            </a:pPr>
+            <a:r>
+              <a:t>•  Runs on existing departmental GPUs and workstations without expensive cloud clusters.</a:t>
+            </a:r>
+          </a:p>
+          <a:p>
+            <a:pPr>
+              <a:spcAft>
+                <a:spcPts val="600"/>
+              </a:spcAft>
+              <a:defRPr sz="1200">
+                <a:solidFill>
+                  <a:srgbClr val="94A3B8"/>
+                </a:solidFill>
+                <a:latin typeface="Arial"/>
+              </a:defRPr>
+            </a:pPr>
+            <a:r>
+              <a:t>•  Built on robust open-source foundations (SurrealDB, ParadeDB, Next.js, Fastify).</a:t>
+            </a:r>
+          </a:p>
+          <a:p>
+            <a:pPr>
+              <a:spcAft>
+                <a:spcPts val="600"/>
+              </a:spcAft>
+              <a:defRPr sz="1200">
+                <a:solidFill>
+                  <a:srgbClr val="94A3B8"/>
+                </a:solidFill>
+                <a:latin typeface="Arial"/>
+              </a:defRPr>
+            </a:pPr>
+            <a:r>
+              <a:t>•  Future-proof modularity: swap underlying open models seamlessly.</a:t>
             </a:r>
           </a:p>
         </p:txBody>
@@ -4406,6 +4530,1074 @@
         </p:nvSpPr>
         <p:spPr>
           <a:xfrm>
+            <a:off x="731520" y="365760"/>
+            <a:ext cx="10698480" cy="365760"/>
+          </a:xfrm>
+          <a:prstGeom prst="rect">
+            <a:avLst/>
+          </a:prstGeom>
+          <a:noFill/>
+        </p:spPr>
+        <p:txBody>
+          <a:bodyPr wrap="square">
+            <a:spAutoFit/>
+          </a:bodyPr>
+          <a:lstStyle/>
+          <a:p>
+            <a:pPr>
+              <a:defRPr sz="1100" b="1">
+                <a:solidFill>
+                  <a:srgbClr val="D4AF37"/>
+                </a:solidFill>
+                <a:latin typeface="Arial"/>
+              </a:defRPr>
+            </a:pPr>
+            <a:r>
+              <a:t>EVOLUTION</a:t>
+            </a:r>
+          </a:p>
+        </p:txBody>
+      </p:sp>
+      <p:sp>
+        <p:nvSpPr>
+          <p:cNvPr id="4" name="TextBox 3"/>
+          <p:cNvSpPr txBox="1"/>
+          <p:nvPr/>
+        </p:nvSpPr>
+        <p:spPr>
+          <a:xfrm>
+            <a:off x="731520" y="685800"/>
+            <a:ext cx="10698480" cy="640080"/>
+          </a:xfrm>
+          <a:prstGeom prst="rect">
+            <a:avLst/>
+          </a:prstGeom>
+          <a:noFill/>
+        </p:spPr>
+        <p:txBody>
+          <a:bodyPr wrap="square">
+            <a:spAutoFit/>
+          </a:bodyPr>
+          <a:lstStyle/>
+          <a:p>
+            <a:pPr>
+              <a:defRPr sz="2400" b="1">
+                <a:solidFill>
+                  <a:srgbClr val="F8FAFC"/>
+                </a:solidFill>
+                <a:latin typeface="Arial"/>
+              </a:defRPr>
+            </a:pPr>
+            <a:r>
+              <a:t>Strategic Future Roadmap: Expanding TuT AI</a:t>
+            </a:r>
+          </a:p>
+        </p:txBody>
+      </p:sp>
+      <p:sp>
+        <p:nvSpPr>
+          <p:cNvPr id="5" name="Rectangle 4"/>
+          <p:cNvSpPr/>
+          <p:nvPr/>
+        </p:nvSpPr>
+        <p:spPr>
+          <a:xfrm>
+            <a:off x="731520" y="1371600"/>
+            <a:ext cx="10728655" cy="18288"/>
+          </a:xfrm>
+          <a:prstGeom prst="rect">
+            <a:avLst/>
+          </a:prstGeom>
+          <a:solidFill>
+            <a:srgbClr val="D4AF37"/>
+          </a:solidFill>
+          <a:ln>
+            <a:noFill/>
+          </a:ln>
+        </p:spPr>
+        <p:style>
+          <a:lnRef idx="1">
+            <a:schemeClr val="accent1"/>
+          </a:lnRef>
+          <a:fillRef idx="3">
+            <a:schemeClr val="accent1"/>
+          </a:fillRef>
+          <a:effectRef idx="2">
+            <a:schemeClr val="accent1"/>
+          </a:effectRef>
+          <a:fontRef idx="minor">
+            <a:schemeClr val="lt1"/>
+          </a:fontRef>
+        </p:style>
+        <p:txBody>
+          <a:bodyPr rtlCol="0" anchor="ctr"/>
+          <a:lstStyle/>
+          <a:p>
+            <a:pPr algn="ctr"/>
+          </a:p>
+        </p:txBody>
+      </p:sp>
+      <p:sp>
+        <p:nvSpPr>
+          <p:cNvPr id="6" name="Rounded Rectangle 5"/>
+          <p:cNvSpPr/>
+          <p:nvPr/>
+        </p:nvSpPr>
+        <p:spPr>
+          <a:xfrm>
+            <a:off x="731520" y="1645920"/>
+            <a:ext cx="5212080" cy="2194560"/>
+          </a:xfrm>
+          <a:prstGeom prst="roundRect">
+            <a:avLst/>
+          </a:prstGeom>
+          <a:solidFill>
+            <a:srgbClr val="111827"/>
+          </a:solidFill>
+          <a:ln w="15240">
+            <a:solidFill>
+              <a:srgbClr val="38BDF8"/>
+            </a:solidFill>
+          </a:ln>
+        </p:spPr>
+        <p:style>
+          <a:lnRef idx="1">
+            <a:schemeClr val="accent1"/>
+          </a:lnRef>
+          <a:fillRef idx="3">
+            <a:schemeClr val="accent1"/>
+          </a:fillRef>
+          <a:effectRef idx="2">
+            <a:schemeClr val="accent1"/>
+          </a:effectRef>
+          <a:fontRef idx="minor">
+            <a:schemeClr val="lt1"/>
+          </a:fontRef>
+        </p:style>
+        <p:txBody>
+          <a:bodyPr rtlCol="0" anchor="ctr" wrap="square" lIns="228600" rIns="228600" tIns="228600" bIns="182880"/>
+          <a:lstStyle/>
+          <a:p>
+            <a:pPr algn="ctr">
+              <a:spcAft>
+                <a:spcPts val="400"/>
+              </a:spcAft>
+              <a:defRPr sz="1000" b="1">
+                <a:solidFill>
+                  <a:srgbClr val="38BDF8"/>
+                </a:solidFill>
+                <a:latin typeface="Arial"/>
+              </a:defRPr>
+            </a:pPr>
+            <a:r>
+              <a:t>SPEED</a:t>
+            </a:r>
+          </a:p>
+          <a:p>
+            <a:pPr>
+              <a:spcAft>
+                <a:spcPts val="1000"/>
+              </a:spcAft>
+              <a:defRPr sz="1600" b="1">
+                <a:solidFill>
+                  <a:srgbClr val="F8FAFC"/>
+                </a:solidFill>
+                <a:latin typeface="Arial"/>
+              </a:defRPr>
+            </a:pPr>
+            <a:r>
+              <a:t>1. Ultra-Fast Inference via vLLM</a:t>
+            </a:r>
+          </a:p>
+          <a:p>
+            <a:pPr>
+              <a:spcAft>
+                <a:spcPts val="600"/>
+              </a:spcAft>
+              <a:defRPr sz="1200">
+                <a:solidFill>
+                  <a:srgbClr val="94A3B8"/>
+                </a:solidFill>
+                <a:latin typeface="Arial"/>
+              </a:defRPr>
+            </a:pPr>
+            <a:r>
+              <a:t>•  Integrate containerized vLLM with PagedAttention to achieve 60–80+ tokens/sec on RTX GPUs.</a:t>
+            </a:r>
+          </a:p>
+          <a:p>
+            <a:pPr>
+              <a:spcAft>
+                <a:spcPts val="600"/>
+              </a:spcAft>
+              <a:defRPr sz="1200">
+                <a:solidFill>
+                  <a:srgbClr val="94A3B8"/>
+                </a:solidFill>
+                <a:latin typeface="Arial"/>
+              </a:defRPr>
+            </a:pPr>
+            <a:r>
+              <a:t>•  Support concurrent multi-user streaming for entire ministerial departments.</a:t>
+            </a:r>
+          </a:p>
+        </p:txBody>
+      </p:sp>
+      <p:sp>
+        <p:nvSpPr>
+          <p:cNvPr id="7" name="Rounded Rectangle 6"/>
+          <p:cNvSpPr/>
+          <p:nvPr/>
+        </p:nvSpPr>
+        <p:spPr>
+          <a:xfrm>
+            <a:off x="6217920" y="1645920"/>
+            <a:ext cx="5212080" cy="2194560"/>
+          </a:xfrm>
+          <a:prstGeom prst="roundRect">
+            <a:avLst/>
+          </a:prstGeom>
+          <a:solidFill>
+            <a:srgbClr val="111827"/>
+          </a:solidFill>
+          <a:ln w="15240">
+            <a:solidFill>
+              <a:srgbClr val="D4AF37"/>
+            </a:solidFill>
+          </a:ln>
+        </p:spPr>
+        <p:style>
+          <a:lnRef idx="1">
+            <a:schemeClr val="accent1"/>
+          </a:lnRef>
+          <a:fillRef idx="3">
+            <a:schemeClr val="accent1"/>
+          </a:fillRef>
+          <a:effectRef idx="2">
+            <a:schemeClr val="accent1"/>
+          </a:effectRef>
+          <a:fontRef idx="minor">
+            <a:schemeClr val="lt1"/>
+          </a:fontRef>
+        </p:style>
+        <p:txBody>
+          <a:bodyPr rtlCol="0" anchor="ctr" wrap="square" lIns="228600" rIns="228600" tIns="228600" bIns="182880"/>
+          <a:lstStyle/>
+          <a:p>
+            <a:pPr algn="ctr">
+              <a:spcAft>
+                <a:spcPts val="400"/>
+              </a:spcAft>
+              <a:defRPr sz="1000" b="1">
+                <a:solidFill>
+                  <a:srgbClr val="D4AF37"/>
+                </a:solidFill>
+                <a:latin typeface="Arial"/>
+              </a:defRPr>
+            </a:pPr>
+            <a:r>
+              <a:t>SPECIALIZATION</a:t>
+            </a:r>
+          </a:p>
+          <a:p>
+            <a:pPr>
+              <a:spcAft>
+                <a:spcPts val="1000"/>
+              </a:spcAft>
+              <a:defRPr sz="1600" b="1">
+                <a:solidFill>
+                  <a:srgbClr val="F8FAFC"/>
+                </a:solidFill>
+                <a:latin typeface="Arial"/>
+              </a:defRPr>
+            </a:pPr>
+            <a:r>
+              <a:t>2. Egyptian Governmental LoRA Fine-Tuning</a:t>
+            </a:r>
+          </a:p>
+          <a:p>
+            <a:pPr>
+              <a:spcAft>
+                <a:spcPts val="600"/>
+              </a:spcAft>
+              <a:defRPr sz="1200">
+                <a:solidFill>
+                  <a:srgbClr val="94A3B8"/>
+                </a:solidFill>
+                <a:latin typeface="Arial"/>
+              </a:defRPr>
+            </a:pPr>
+            <a:r>
+              <a:t>•  Fine-tune specialized LoRA adapters on official ministerial circulars, decrees, and laws.</a:t>
+            </a:r>
+          </a:p>
+          <a:p>
+            <a:pPr>
+              <a:spcAft>
+                <a:spcPts val="600"/>
+              </a:spcAft>
+              <a:defRPr sz="1200">
+                <a:solidFill>
+                  <a:srgbClr val="94A3B8"/>
+                </a:solidFill>
+                <a:latin typeface="Arial"/>
+              </a:defRPr>
+            </a:pPr>
+            <a:r>
+              <a:t>•  Guarantees 100% authentic Egyptian administrative protocol and terminology.</a:t>
+            </a:r>
+          </a:p>
+        </p:txBody>
+      </p:sp>
+      <p:sp>
+        <p:nvSpPr>
+          <p:cNvPr id="8" name="Rounded Rectangle 7"/>
+          <p:cNvSpPr/>
+          <p:nvPr/>
+        </p:nvSpPr>
+        <p:spPr>
+          <a:xfrm>
+            <a:off x="731520" y="4023360"/>
+            <a:ext cx="5212080" cy="2194560"/>
+          </a:xfrm>
+          <a:prstGeom prst="roundRect">
+            <a:avLst/>
+          </a:prstGeom>
+          <a:solidFill>
+            <a:srgbClr val="111827"/>
+          </a:solidFill>
+          <a:ln w="15240">
+            <a:solidFill>
+              <a:srgbClr val="34D399"/>
+            </a:solidFill>
+          </a:ln>
+        </p:spPr>
+        <p:style>
+          <a:lnRef idx="1">
+            <a:schemeClr val="accent1"/>
+          </a:lnRef>
+          <a:fillRef idx="3">
+            <a:schemeClr val="accent1"/>
+          </a:fillRef>
+          <a:effectRef idx="2">
+            <a:schemeClr val="accent1"/>
+          </a:effectRef>
+          <a:fontRef idx="minor">
+            <a:schemeClr val="lt1"/>
+          </a:fontRef>
+        </p:style>
+        <p:txBody>
+          <a:bodyPr rtlCol="0" anchor="ctr" wrap="square" lIns="228600" rIns="228600" tIns="228600" bIns="182880"/>
+          <a:lstStyle/>
+          <a:p>
+            <a:pPr algn="ctr">
+              <a:spcAft>
+                <a:spcPts val="400"/>
+              </a:spcAft>
+              <a:defRPr sz="1000" b="1">
+                <a:solidFill>
+                  <a:srgbClr val="34D399"/>
+                </a:solidFill>
+                <a:latin typeface="Arial"/>
+              </a:defRPr>
+            </a:pPr>
+            <a:r>
+              <a:t>VISION</a:t>
+            </a:r>
+          </a:p>
+          <a:p>
+            <a:pPr>
+              <a:spcAft>
+                <a:spcPts val="1000"/>
+              </a:spcAft>
+              <a:defRPr sz="1600" b="1">
+                <a:solidFill>
+                  <a:srgbClr val="F8FAFC"/>
+                </a:solidFill>
+                <a:latin typeface="Arial"/>
+              </a:defRPr>
+            </a:pPr>
+            <a:r>
+              <a:t>3. Multimodal Vision for Scanned PDFs</a:t>
+            </a:r>
+          </a:p>
+          <a:p>
+            <a:pPr>
+              <a:spcAft>
+                <a:spcPts val="600"/>
+              </a:spcAft>
+              <a:defRPr sz="1200">
+                <a:solidFill>
+                  <a:srgbClr val="94A3B8"/>
+                </a:solidFill>
+                <a:latin typeface="Arial"/>
+              </a:defRPr>
+            </a:pPr>
+            <a:r>
+              <a:t>•  Deploy Qwen2-VL or Llama-3.2-Vision to process historical Arabic manuscripts, stamps, and blueprints.</a:t>
+            </a:r>
+          </a:p>
+          <a:p>
+            <a:pPr>
+              <a:spcAft>
+                <a:spcPts val="600"/>
+              </a:spcAft>
+              <a:defRPr sz="1200">
+                <a:solidFill>
+                  <a:srgbClr val="94A3B8"/>
+                </a:solidFill>
+                <a:latin typeface="Arial"/>
+              </a:defRPr>
+            </a:pPr>
+            <a:r>
+              <a:t>•  Direct table extraction from paper scans directly into Excel and charts.</a:t>
+            </a:r>
+          </a:p>
+        </p:txBody>
+      </p:sp>
+      <p:sp>
+        <p:nvSpPr>
+          <p:cNvPr id="9" name="Rounded Rectangle 8"/>
+          <p:cNvSpPr/>
+          <p:nvPr/>
+        </p:nvSpPr>
+        <p:spPr>
+          <a:xfrm>
+            <a:off x="6217920" y="4023360"/>
+            <a:ext cx="5212080" cy="2194560"/>
+          </a:xfrm>
+          <a:prstGeom prst="roundRect">
+            <a:avLst/>
+          </a:prstGeom>
+          <a:solidFill>
+            <a:srgbClr val="111827"/>
+          </a:solidFill>
+          <a:ln w="15240">
+            <a:solidFill>
+              <a:srgbClr val="F59E0B"/>
+            </a:solidFill>
+          </a:ln>
+        </p:spPr>
+        <p:style>
+          <a:lnRef idx="1">
+            <a:schemeClr val="accent1"/>
+          </a:lnRef>
+          <a:fillRef idx="3">
+            <a:schemeClr val="accent1"/>
+          </a:fillRef>
+          <a:effectRef idx="2">
+            <a:schemeClr val="accent1"/>
+          </a:effectRef>
+          <a:fontRef idx="minor">
+            <a:schemeClr val="lt1"/>
+          </a:fontRef>
+        </p:style>
+        <p:txBody>
+          <a:bodyPr rtlCol="0" anchor="ctr" wrap="square" lIns="228600" rIns="228600" tIns="228600" bIns="182880"/>
+          <a:lstStyle/>
+          <a:p>
+            <a:pPr algn="ctr">
+              <a:spcAft>
+                <a:spcPts val="400"/>
+              </a:spcAft>
+              <a:defRPr sz="1000" b="1">
+                <a:solidFill>
+                  <a:srgbClr val="F59E0B"/>
+                </a:solidFill>
+                <a:latin typeface="Arial"/>
+              </a:defRPr>
+            </a:pPr>
+            <a:r>
+              <a:t>MULTI-AGENT</a:t>
+            </a:r>
+          </a:p>
+          <a:p>
+            <a:pPr>
+              <a:spcAft>
+                <a:spcPts val="1000"/>
+              </a:spcAft>
+              <a:defRPr sz="1600" b="1">
+                <a:solidFill>
+                  <a:srgbClr val="F8FAFC"/>
+                </a:solidFill>
+                <a:latin typeface="Arial"/>
+              </a:defRPr>
+            </a:pPr>
+            <a:r>
+              <a:t>4. Autonomous Multi-Agent Swarms</a:t>
+            </a:r>
+          </a:p>
+          <a:p>
+            <a:pPr>
+              <a:spcAft>
+                <a:spcPts val="600"/>
+              </a:spcAft>
+              <a:defRPr sz="1200">
+                <a:solidFill>
+                  <a:srgbClr val="94A3B8"/>
+                </a:solidFill>
+                <a:latin typeface="Arial"/>
+              </a:defRPr>
+            </a:pPr>
+            <a:r>
+              <a:t>•  Autonomous delegation: Thoth researches, Imhotep audits data, and TuT delivers the final slides.</a:t>
+            </a:r>
+          </a:p>
+          <a:p>
+            <a:pPr>
+              <a:spcAft>
+                <a:spcPts val="600"/>
+              </a:spcAft>
+              <a:defRPr sz="1200">
+                <a:solidFill>
+                  <a:srgbClr val="94A3B8"/>
+                </a:solidFill>
+                <a:latin typeface="Arial"/>
+              </a:defRPr>
+            </a:pPr>
+            <a:r>
+              <a:t>•  Zero human micromanagement on complex multi-step state projects.</a:t>
+            </a:r>
+          </a:p>
+        </p:txBody>
+      </p:sp>
+    </p:spTree>
+  </p:cSld>
+  <p:clrMapOvr>
+    <a:masterClrMapping/>
+  </p:clrMapOvr>
+</p:sld>
+</file>
+
+<file path=ppt/slides/slide13.xml><?xml version="1.0" encoding="utf-8"?>
+<p:sld xmlns:a="http://schemas.openxmlformats.org/drawingml/2006/main" xmlns:p="http://schemas.openxmlformats.org/presentationml/2006/main" xmlns:r="http://schemas.openxmlformats.org/officeDocument/2006/relationships">
+  <p:cSld>
+    <p:spTree>
+      <p:nvGrpSpPr>
+        <p:cNvPr id="1" name=""/>
+        <p:cNvGrpSpPr/>
+        <p:nvPr/>
+      </p:nvGrpSpPr>
+      <p:grpSpPr/>
+      <p:sp>
+        <p:nvSpPr>
+          <p:cNvPr id="2" name="Rectangle 1"/>
+          <p:cNvSpPr/>
+          <p:nvPr/>
+        </p:nvSpPr>
+        <p:spPr>
+          <a:xfrm>
+            <a:off x="0" y="0"/>
+            <a:ext cx="12191695" cy="6858000"/>
+          </a:xfrm>
+          <a:prstGeom prst="rect">
+            <a:avLst/>
+          </a:prstGeom>
+          <a:solidFill>
+            <a:srgbClr val="0A0E17"/>
+          </a:solidFill>
+          <a:ln>
+            <a:noFill/>
+          </a:ln>
+        </p:spPr>
+        <p:style>
+          <a:lnRef idx="1">
+            <a:schemeClr val="accent1"/>
+          </a:lnRef>
+          <a:fillRef idx="3">
+            <a:schemeClr val="accent1"/>
+          </a:fillRef>
+          <a:effectRef idx="2">
+            <a:schemeClr val="accent1"/>
+          </a:effectRef>
+          <a:fontRef idx="minor">
+            <a:schemeClr val="lt1"/>
+          </a:fontRef>
+        </p:style>
+        <p:txBody>
+          <a:bodyPr rtlCol="0" anchor="ctr"/>
+          <a:lstStyle/>
+          <a:p>
+            <a:pPr algn="ctr"/>
+          </a:p>
+        </p:txBody>
+      </p:sp>
+      <p:sp>
+        <p:nvSpPr>
+          <p:cNvPr id="3" name="TextBox 2"/>
+          <p:cNvSpPr txBox="1"/>
+          <p:nvPr/>
+        </p:nvSpPr>
+        <p:spPr>
+          <a:xfrm>
+            <a:off x="731520" y="365760"/>
+            <a:ext cx="10698480" cy="365760"/>
+          </a:xfrm>
+          <a:prstGeom prst="rect">
+            <a:avLst/>
+          </a:prstGeom>
+          <a:noFill/>
+        </p:spPr>
+        <p:txBody>
+          <a:bodyPr wrap="square">
+            <a:spAutoFit/>
+          </a:bodyPr>
+          <a:lstStyle/>
+          <a:p>
+            <a:pPr>
+              <a:defRPr sz="1100" b="1">
+                <a:solidFill>
+                  <a:srgbClr val="D4AF37"/>
+                </a:solidFill>
+                <a:latin typeface="Arial"/>
+              </a:defRPr>
+            </a:pPr>
+            <a:r>
+              <a:t>PEOPLE &amp; GOVERNANCE</a:t>
+            </a:r>
+          </a:p>
+        </p:txBody>
+      </p:sp>
+      <p:sp>
+        <p:nvSpPr>
+          <p:cNvPr id="4" name="TextBox 3"/>
+          <p:cNvSpPr txBox="1"/>
+          <p:nvPr/>
+        </p:nvSpPr>
+        <p:spPr>
+          <a:xfrm>
+            <a:off x="731520" y="685800"/>
+            <a:ext cx="10698480" cy="640080"/>
+          </a:xfrm>
+          <a:prstGeom prst="rect">
+            <a:avLst/>
+          </a:prstGeom>
+          <a:noFill/>
+        </p:spPr>
+        <p:txBody>
+          <a:bodyPr wrap="square">
+            <a:spAutoFit/>
+          </a:bodyPr>
+          <a:lstStyle/>
+          <a:p>
+            <a:pPr>
+              <a:defRPr sz="2400" b="1">
+                <a:solidFill>
+                  <a:srgbClr val="F8FAFC"/>
+                </a:solidFill>
+                <a:latin typeface="Arial"/>
+              </a:defRPr>
+            </a:pPr>
+            <a:r>
+              <a:t>Project Leadership &amp; Development Team</a:t>
+            </a:r>
+          </a:p>
+        </p:txBody>
+      </p:sp>
+      <p:sp>
+        <p:nvSpPr>
+          <p:cNvPr id="5" name="Rectangle 4"/>
+          <p:cNvSpPr/>
+          <p:nvPr/>
+        </p:nvSpPr>
+        <p:spPr>
+          <a:xfrm>
+            <a:off x="731520" y="1371600"/>
+            <a:ext cx="10728655" cy="18288"/>
+          </a:xfrm>
+          <a:prstGeom prst="rect">
+            <a:avLst/>
+          </a:prstGeom>
+          <a:solidFill>
+            <a:srgbClr val="D4AF37"/>
+          </a:solidFill>
+          <a:ln>
+            <a:noFill/>
+          </a:ln>
+        </p:spPr>
+        <p:style>
+          <a:lnRef idx="1">
+            <a:schemeClr val="accent1"/>
+          </a:lnRef>
+          <a:fillRef idx="3">
+            <a:schemeClr val="accent1"/>
+          </a:fillRef>
+          <a:effectRef idx="2">
+            <a:schemeClr val="accent1"/>
+          </a:effectRef>
+          <a:fontRef idx="minor">
+            <a:schemeClr val="lt1"/>
+          </a:fontRef>
+        </p:style>
+        <p:txBody>
+          <a:bodyPr rtlCol="0" anchor="ctr"/>
+          <a:lstStyle/>
+          <a:p>
+            <a:pPr algn="ctr"/>
+          </a:p>
+        </p:txBody>
+      </p:sp>
+      <p:sp>
+        <p:nvSpPr>
+          <p:cNvPr id="6" name="Rounded Rectangle 5"/>
+          <p:cNvSpPr/>
+          <p:nvPr/>
+        </p:nvSpPr>
+        <p:spPr>
+          <a:xfrm>
+            <a:off x="731520" y="1645920"/>
+            <a:ext cx="5212080" cy="4572000"/>
+          </a:xfrm>
+          <a:prstGeom prst="roundRect">
+            <a:avLst/>
+          </a:prstGeom>
+          <a:solidFill>
+            <a:srgbClr val="111827"/>
+          </a:solidFill>
+          <a:ln w="19050">
+            <a:solidFill>
+              <a:srgbClr val="D4AF37"/>
+            </a:solidFill>
+          </a:ln>
+        </p:spPr>
+        <p:style>
+          <a:lnRef idx="1">
+            <a:schemeClr val="accent1"/>
+          </a:lnRef>
+          <a:fillRef idx="3">
+            <a:schemeClr val="accent1"/>
+          </a:fillRef>
+          <a:effectRef idx="2">
+            <a:schemeClr val="accent1"/>
+          </a:effectRef>
+          <a:fontRef idx="minor">
+            <a:schemeClr val="lt1"/>
+          </a:fontRef>
+        </p:style>
+        <p:txBody>
+          <a:bodyPr rtlCol="0" anchor="ctr" wrap="square" lIns="274320" tIns="274320"/>
+          <a:lstStyle/>
+          <a:p>
+            <a:pPr algn="ctr">
+              <a:spcAft>
+                <a:spcPts val="800"/>
+              </a:spcAft>
+              <a:defRPr sz="1100" b="1">
+                <a:solidFill>
+                  <a:srgbClr val="D4AF37"/>
+                </a:solidFill>
+                <a:latin typeface="Arial"/>
+              </a:defRPr>
+            </a:pPr>
+            <a:r>
+              <a:t>MINISTRY HEADS &amp; SUPERVISION</a:t>
+            </a:r>
+          </a:p>
+          <a:p>
+            <a:pPr>
+              <a:spcAft>
+                <a:spcPts val="1800"/>
+              </a:spcAft>
+              <a:defRPr sz="1800" b="1">
+                <a:solidFill>
+                  <a:srgbClr val="F8FAFC"/>
+                </a:solidFill>
+                <a:latin typeface="Arial"/>
+              </a:defRPr>
+            </a:pPr>
+            <a:r>
+              <a:t>Ministry Leadership &amp; Guidance</a:t>
+            </a:r>
+          </a:p>
+          <a:p>
+            <a:pPr>
+              <a:spcAft>
+                <a:spcPts val="2000"/>
+              </a:spcAft>
+              <a:defRPr sz="1500" b="1">
+                <a:solidFill>
+                  <a:srgbClr val="F5D673"/>
+                </a:solidFill>
+                <a:latin typeface="Arial"/>
+              </a:defRPr>
+            </a:pPr>
+            <a:r>
+              <a:t>🎖️  Dr. Mohamed Rehan</a:t>
+            </a:r>
+          </a:p>
+          <a:p>
+            <a:pPr>
+              <a:spcAft>
+                <a:spcPts val="2000"/>
+              </a:spcAft>
+              <a:defRPr sz="1500" b="1">
+                <a:solidFill>
+                  <a:srgbClr val="F5D673"/>
+                </a:solidFill>
+                <a:latin typeface="Arial"/>
+              </a:defRPr>
+            </a:pPr>
+            <a:r>
+              <a:t>🎖️  Eng. Reham Metwally</a:t>
+            </a:r>
+          </a:p>
+          <a:p>
+            <a:pPr>
+              <a:spcAft>
+                <a:spcPts val="2000"/>
+              </a:spcAft>
+              <a:defRPr sz="1500" b="1">
+                <a:solidFill>
+                  <a:srgbClr val="F5D673"/>
+                </a:solidFill>
+                <a:latin typeface="Arial"/>
+              </a:defRPr>
+            </a:pPr>
+            <a:r>
+              <a:t>🎖️  Eng. Mohamed Khalid Mohamed Roshdy</a:t>
+            </a:r>
+          </a:p>
+        </p:txBody>
+      </p:sp>
+      <p:sp>
+        <p:nvSpPr>
+          <p:cNvPr id="7" name="Rounded Rectangle 6"/>
+          <p:cNvSpPr/>
+          <p:nvPr/>
+        </p:nvSpPr>
+        <p:spPr>
+          <a:xfrm>
+            <a:off x="6217920" y="1645920"/>
+            <a:ext cx="5212080" cy="4572000"/>
+          </a:xfrm>
+          <a:prstGeom prst="roundRect">
+            <a:avLst/>
+          </a:prstGeom>
+          <a:solidFill>
+            <a:srgbClr val="111827"/>
+          </a:solidFill>
+          <a:ln w="19050">
+            <a:solidFill>
+              <a:srgbClr val="38BDF8"/>
+            </a:solidFill>
+          </a:ln>
+        </p:spPr>
+        <p:style>
+          <a:lnRef idx="1">
+            <a:schemeClr val="accent1"/>
+          </a:lnRef>
+          <a:fillRef idx="3">
+            <a:schemeClr val="accent1"/>
+          </a:fillRef>
+          <a:effectRef idx="2">
+            <a:schemeClr val="accent1"/>
+          </a:effectRef>
+          <a:fontRef idx="minor">
+            <a:schemeClr val="lt1"/>
+          </a:fontRef>
+        </p:style>
+        <p:txBody>
+          <a:bodyPr rtlCol="0" anchor="ctr" wrap="square" lIns="274320" tIns="274320"/>
+          <a:lstStyle/>
+          <a:p>
+            <a:pPr algn="ctr">
+              <a:spcAft>
+                <a:spcPts val="800"/>
+              </a:spcAft>
+              <a:defRPr sz="1100" b="1">
+                <a:solidFill>
+                  <a:srgbClr val="38BDF8"/>
+                </a:solidFill>
+                <a:latin typeface="Arial"/>
+              </a:defRPr>
+            </a:pPr>
+            <a:r>
+              <a:t>ENGINEERING &amp; DEVELOPMENT TEAM</a:t>
+            </a:r>
+          </a:p>
+          <a:p>
+            <a:pPr>
+              <a:spcAft>
+                <a:spcPts val="1600"/>
+              </a:spcAft>
+              <a:defRPr sz="1800" b="1">
+                <a:solidFill>
+                  <a:srgbClr val="F8FAFC"/>
+                </a:solidFill>
+                <a:latin typeface="Arial"/>
+              </a:defRPr>
+            </a:pPr>
+            <a:r>
+              <a:t>TuT AI Core Team</a:t>
+            </a:r>
+          </a:p>
+          <a:p>
+            <a:pPr>
+              <a:spcAft>
+                <a:spcPts val="1200"/>
+              </a:spcAft>
+              <a:defRPr sz="1400" b="1">
+                <a:solidFill>
+                  <a:srgbClr val="D4AF37"/>
+                </a:solidFill>
+                <a:latin typeface="Arial"/>
+              </a:defRPr>
+            </a:pPr>
+            <a:r>
+              <a:t>⭐  Ahmed Gamal Sophi Arfa</a:t>
+            </a:r>
+          </a:p>
+          <a:p>
+            <a:pPr>
+              <a:spcAft>
+                <a:spcPts val="800"/>
+              </a:spcAft>
+              <a:defRPr sz="1300" b="1">
+                <a:solidFill>
+                  <a:srgbClr val="F8FAFC"/>
+                </a:solidFill>
+                <a:latin typeface="Arial"/>
+              </a:defRPr>
+            </a:pPr>
+            <a:r>
+              <a:t>•  Abdelrhman Mahmoud Fawzy</a:t>
+            </a:r>
+          </a:p>
+          <a:p>
+            <a:pPr>
+              <a:spcAft>
+                <a:spcPts val="800"/>
+              </a:spcAft>
+              <a:defRPr sz="1300" b="1">
+                <a:solidFill>
+                  <a:srgbClr val="F8FAFC"/>
+                </a:solidFill>
+                <a:latin typeface="Arial"/>
+              </a:defRPr>
+            </a:pPr>
+            <a:r>
+              <a:t>•  Saja Raafat Gaber</a:t>
+            </a:r>
+          </a:p>
+          <a:p>
+            <a:pPr>
+              <a:spcAft>
+                <a:spcPts val="800"/>
+              </a:spcAft>
+              <a:defRPr sz="1300" b="1">
+                <a:solidFill>
+                  <a:srgbClr val="F8FAFC"/>
+                </a:solidFill>
+                <a:latin typeface="Arial"/>
+              </a:defRPr>
+            </a:pPr>
+            <a:r>
+              <a:t>•  Mohamed Hamdy Abdelazez</a:t>
+            </a:r>
+          </a:p>
+          <a:p>
+            <a:pPr>
+              <a:spcAft>
+                <a:spcPts val="800"/>
+              </a:spcAft>
+              <a:defRPr sz="1300" b="1">
+                <a:solidFill>
+                  <a:srgbClr val="F8FAFC"/>
+                </a:solidFill>
+                <a:latin typeface="Arial"/>
+              </a:defRPr>
+            </a:pPr>
+            <a:r>
+              <a:t>•  Asmaa Samy Hagag</a:t>
+            </a:r>
+          </a:p>
+          <a:p>
+            <a:pPr>
+              <a:spcAft>
+                <a:spcPts val="800"/>
+              </a:spcAft>
+              <a:defRPr sz="1300" b="1">
+                <a:solidFill>
+                  <a:srgbClr val="F8FAFC"/>
+                </a:solidFill>
+                <a:latin typeface="Arial"/>
+              </a:defRPr>
+            </a:pPr>
+            <a:r>
+              <a:t>•  Mohamed Abd elhgani el kwatihy</a:t>
+            </a:r>
+          </a:p>
+        </p:txBody>
+      </p:sp>
+    </p:spTree>
+  </p:cSld>
+  <p:clrMapOvr>
+    <a:masterClrMapping/>
+  </p:clrMapOvr>
+</p:sld>
+</file>
+
+<file path=ppt/slides/slide14.xml><?xml version="1.0" encoding="utf-8"?>
+<p:sld xmlns:a="http://schemas.openxmlformats.org/drawingml/2006/main" xmlns:p="http://schemas.openxmlformats.org/presentationml/2006/main" xmlns:r="http://schemas.openxmlformats.org/officeDocument/2006/relationships">
+  <p:cSld>
+    <p:spTree>
+      <p:nvGrpSpPr>
+        <p:cNvPr id="1" name=""/>
+        <p:cNvGrpSpPr/>
+        <p:nvPr/>
+      </p:nvGrpSpPr>
+      <p:grpSpPr/>
+      <p:sp>
+        <p:nvSpPr>
+          <p:cNvPr id="2" name="Rectangle 1"/>
+          <p:cNvSpPr/>
+          <p:nvPr/>
+        </p:nvSpPr>
+        <p:spPr>
+          <a:xfrm>
+            <a:off x="0" y="0"/>
+            <a:ext cx="12191695" cy="6858000"/>
+          </a:xfrm>
+          <a:prstGeom prst="rect">
+            <a:avLst/>
+          </a:prstGeom>
+          <a:solidFill>
+            <a:srgbClr val="0A0E17"/>
+          </a:solidFill>
+          <a:ln>
+            <a:noFill/>
+          </a:ln>
+        </p:spPr>
+        <p:style>
+          <a:lnRef idx="1">
+            <a:schemeClr val="accent1"/>
+          </a:lnRef>
+          <a:fillRef idx="3">
+            <a:schemeClr val="accent1"/>
+          </a:fillRef>
+          <a:effectRef idx="2">
+            <a:schemeClr val="accent1"/>
+          </a:effectRef>
+          <a:fontRef idx="minor">
+            <a:schemeClr val="lt1"/>
+          </a:fontRef>
+        </p:style>
+        <p:txBody>
+          <a:bodyPr rtlCol="0" anchor="ctr"/>
+          <a:lstStyle/>
+          <a:p>
+            <a:pPr algn="ctr"/>
+          </a:p>
+        </p:txBody>
+      </p:sp>
+      <p:sp>
+        <p:nvSpPr>
+          <p:cNvPr id="3" name="TextBox 2"/>
+          <p:cNvSpPr txBox="1"/>
+          <p:nvPr/>
+        </p:nvSpPr>
+        <p:spPr>
+          <a:xfrm>
             <a:off x="1371600" y="1371600"/>
             <a:ext cx="9445752" cy="4114800"/>
           </a:xfrm>
@@ -7114,7 +8306,7 @@
               </a:defRPr>
             </a:pPr>
             <a:r>
-              <a:t>ENGINEERING RIGOR</a:t>
+              <a:t>LIVE SYSTEM INTERFACE</a:t>
             </a:r>
           </a:p>
         </p:txBody>
@@ -7150,7 +8342,7 @@
               </a:defRPr>
             </a:pPr>
             <a:r>
-              <a:t>Technical Breakthroughs: 131k Context &amp; GPU Acceleration</a:t>
+              <a:t>Live Platform Showcase: Knowledge Notebooks &amp; Multi-Source RAG</a:t>
             </a:r>
           </a:p>
         </p:txBody>
@@ -7206,8 +8398,183 @@
         </p:nvSpPr>
         <p:spPr>
           <a:xfrm>
-            <a:off x="731520" y="1645920"/>
-            <a:ext cx="3383280" cy="4572000"/>
+            <a:off x="676656" y="1728216"/>
+            <a:ext cx="6876288" cy="4114800"/>
+          </a:xfrm>
+          <a:prstGeom prst="roundRect">
+            <a:avLst/>
+          </a:prstGeom>
+          <a:solidFill>
+            <a:srgbClr val="111827"/>
+          </a:solidFill>
+          <a:ln w="19050">
+            <a:solidFill>
+              <a:srgbClr val="D4AF37"/>
+            </a:solidFill>
+          </a:ln>
+        </p:spPr>
+        <p:style>
+          <a:lnRef idx="1">
+            <a:schemeClr val="accent1"/>
+          </a:lnRef>
+          <a:fillRef idx="3">
+            <a:schemeClr val="accent1"/>
+          </a:fillRef>
+          <a:effectRef idx="2">
+            <a:schemeClr val="accent1"/>
+          </a:effectRef>
+          <a:fontRef idx="minor">
+            <a:schemeClr val="lt1"/>
+          </a:fontRef>
+        </p:style>
+        <p:txBody>
+          <a:bodyPr rtlCol="0" anchor="ctr"/>
+          <a:lstStyle/>
+          <a:p>
+            <a:pPr algn="ctr"/>
+          </a:p>
+        </p:txBody>
+      </p:sp>
+      <p:pic>
+        <p:nvPicPr>
+          <p:cNvPr id="7" name="Picture 6" descr="tut_ui_notebooks.png"/>
+          <p:cNvPicPr>
+            <a:picLocks noChangeAspect="1"/>
+          </p:cNvPicPr>
+          <p:nvPr/>
+        </p:nvPicPr>
+        <p:blipFill>
+          <a:blip r:embed="rId2"/>
+          <a:stretch>
+            <a:fillRect/>
+          </a:stretch>
+        </p:blipFill>
+        <p:spPr>
+          <a:xfrm>
+            <a:off x="731520" y="1783080"/>
+            <a:ext cx="6766560" cy="4005072"/>
+          </a:xfrm>
+          <a:prstGeom prst="rect">
+            <a:avLst/>
+          </a:prstGeom>
+        </p:spPr>
+      </p:pic>
+      <p:sp>
+        <p:nvSpPr>
+          <p:cNvPr id="8" name="Rounded Rectangle 7"/>
+          <p:cNvSpPr/>
+          <p:nvPr/>
+        </p:nvSpPr>
+        <p:spPr>
+          <a:xfrm>
+            <a:off x="7772400" y="1719072"/>
+            <a:ext cx="3685032" cy="1353312"/>
+          </a:xfrm>
+          <a:prstGeom prst="roundRect">
+            <a:avLst/>
+          </a:prstGeom>
+          <a:solidFill>
+            <a:srgbClr val="111827"/>
+          </a:solidFill>
+          <a:ln w="15240">
+            <a:solidFill>
+              <a:srgbClr val="D4AF37"/>
+            </a:solidFill>
+          </a:ln>
+        </p:spPr>
+        <p:style>
+          <a:lnRef idx="1">
+            <a:schemeClr val="accent1"/>
+          </a:lnRef>
+          <a:fillRef idx="3">
+            <a:schemeClr val="accent1"/>
+          </a:fillRef>
+          <a:effectRef idx="2">
+            <a:schemeClr val="accent1"/>
+          </a:effectRef>
+          <a:fontRef idx="minor">
+            <a:schemeClr val="lt1"/>
+          </a:fontRef>
+        </p:style>
+        <p:txBody>
+          <a:bodyPr rtlCol="0" anchor="ctr" wrap="square" lIns="182880" rIns="182880" tIns="109728" bIns="73152"/>
+          <a:lstStyle/>
+          <a:p>
+            <a:pPr algn="ctr">
+              <a:spcAft>
+                <a:spcPts val="200"/>
+              </a:spcAft>
+              <a:defRPr sz="900" b="1">
+                <a:solidFill>
+                  <a:srgbClr val="D4AF37"/>
+                </a:solidFill>
+                <a:latin typeface="Arial"/>
+              </a:defRPr>
+            </a:pPr>
+            <a:r>
+              <a:t>DATA INGESTION</a:t>
+            </a:r>
+          </a:p>
+          <a:p>
+            <a:pPr>
+              <a:spcAft>
+                <a:spcPts val="400"/>
+              </a:spcAft>
+              <a:defRPr sz="1300" b="1">
+                <a:solidFill>
+                  <a:srgbClr val="F8FAFC"/>
+                </a:solidFill>
+                <a:latin typeface="Arial"/>
+              </a:defRPr>
+            </a:pPr>
+            <a:r>
+              <a:t>Multi-Source Knowledge Ingestion</a:t>
+            </a:r>
+          </a:p>
+          <a:p>
+            <a:pPr>
+              <a:spcAft>
+                <a:spcPts val="200"/>
+              </a:spcAft>
+              <a:defRPr sz="1050">
+                <a:solidFill>
+                  <a:srgbClr val="94A3B8"/>
+                </a:solidFill>
+                <a:latin typeface="Arial"/>
+              </a:defRPr>
+            </a:pPr>
+            <a:r>
+              <a:t>•  Ingests massive governmental PDFs (e.g. WEF Global Risks Report 2024), decrees, and spreadsheets.</a:t>
+            </a:r>
+          </a:p>
+          <a:p>
+            <a:pPr>
+              <a:spcAft>
+                <a:spcPts val="200"/>
+              </a:spcAft>
+              <a:defRPr sz="1050">
+                <a:solidFill>
+                  <a:srgbClr val="94A3B8"/>
+                </a:solidFill>
+                <a:latin typeface="Arial"/>
+              </a:defRPr>
+            </a:pPr>
+            <a:r>
+              <a:t>•  Full-text search &amp; vector embeddings extracted and stored 100% locally.</a:t>
+            </a:r>
+          </a:p>
+        </p:txBody>
+      </p:sp>
+      <p:sp>
+        <p:nvSpPr>
+          <p:cNvPr id="9" name="Rounded Rectangle 8"/>
+          <p:cNvSpPr/>
+          <p:nvPr/>
+        </p:nvSpPr>
+        <p:spPr>
+          <a:xfrm>
+            <a:off x="7772400" y="3218688"/>
+            <a:ext cx="3685032" cy="1353312"/>
           </a:xfrm>
           <a:prstGeom prst="roundRect">
             <a:avLst/>
@@ -7236,30 +8603,30 @@
           </a:fontRef>
         </p:style>
         <p:txBody>
-          <a:bodyPr rtlCol="0" anchor="ctr" wrap="square" lIns="228600" rIns="228600" tIns="228600" bIns="182880"/>
+          <a:bodyPr rtlCol="0" anchor="ctr" wrap="square" lIns="182880" rIns="182880" tIns="109728" bIns="73152"/>
           <a:lstStyle/>
           <a:p>
             <a:pPr algn="ctr">
               <a:spcAft>
+                <a:spcPts val="200"/>
+              </a:spcAft>
+              <a:defRPr sz="900" b="1">
+                <a:solidFill>
+                  <a:srgbClr val="38BDF8"/>
+                </a:solidFill>
+                <a:latin typeface="Arial"/>
+              </a:defRPr>
+            </a:pPr>
+            <a:r>
+              <a:t>SECURITY &amp; ISOLATION</a:t>
+            </a:r>
+          </a:p>
+          <a:p>
+            <a:pPr>
+              <a:spcAft>
                 <a:spcPts val="400"/>
               </a:spcAft>
-              <a:defRPr sz="1000" b="1">
-                <a:solidFill>
-                  <a:srgbClr val="38BDF8"/>
-                </a:solidFill>
-                <a:latin typeface="Arial"/>
-              </a:defRPr>
-            </a:pPr>
-            <a:r>
-              <a:t>MODEL CAPACITY</a:t>
-            </a:r>
-          </a:p>
-          <a:p>
-            <a:pPr>
-              <a:spcAft>
-                <a:spcPts val="1000"/>
-              </a:spcAft>
-              <a:defRPr sz="1600" b="1">
+              <a:defRPr sz="1300" b="1">
                 <a:solidFill>
                   <a:srgbClr val="F8FAFC"/>
                 </a:solidFill>
@@ -7267,15 +8634,15 @@
               </a:defRPr>
             </a:pPr>
             <a:r>
-              <a:t>131k Context Window</a:t>
-            </a:r>
-          </a:p>
-          <a:p>
-            <a:pPr>
-              <a:spcAft>
-                <a:spcPts val="600"/>
-              </a:spcAft>
-              <a:defRPr sz="1200">
+              <a:t>Departmental Notebook Sandboxing</a:t>
+            </a:r>
+          </a:p>
+          <a:p>
+            <a:pPr>
+              <a:spcAft>
+                <a:spcPts val="200"/>
+              </a:spcAft>
+              <a:defRPr sz="1050">
                 <a:solidFill>
                   <a:srgbClr val="94A3B8"/>
                 </a:solidFill>
@@ -7283,15 +8650,15 @@
               </a:defRPr>
             </a:pPr>
             <a:r>
-              <a:t>•  PostgreSQL database tables unlocked to 131,072 context tokens.</a:t>
-            </a:r>
-          </a:p>
-          <a:p>
-            <a:pPr>
-              <a:spcAft>
-                <a:spcPts val="600"/>
-              </a:spcAft>
-              <a:defRPr sz="1200">
+              <a:t>•  Isolated sovereign workspaces ('dsc', 'klh', 'arfa', 'eg') protect departmental boundaries.</a:t>
+            </a:r>
+          </a:p>
+          <a:p>
+            <a:pPr>
+              <a:spcAft>
+                <a:spcPts val="200"/>
+              </a:spcAft>
+              <a:defRPr sz="1050">
                 <a:solidFill>
                   <a:srgbClr val="94A3B8"/>
                 </a:solidFill>
@@ -7299,191 +8666,21 @@
               </a:defRPr>
             </a:pPr>
             <a:r>
-              <a:t>•  16,384 maximum output tokens for exhaustive document generation.</a:t>
-            </a:r>
-          </a:p>
-          <a:p>
-            <a:pPr>
-              <a:spcAft>
-                <a:spcPts val="600"/>
-              </a:spcAft>
-              <a:defRPr sz="1200">
-                <a:solidFill>
-                  <a:srgbClr val="94A3B8"/>
-                </a:solidFill>
-                <a:latin typeface="Arial"/>
-              </a:defRPr>
-            </a:pPr>
-            <a:r>
-              <a:t>•  Eliminates memory truncation: Ingest entire decree books without losing context.</a:t>
-            </a:r>
-          </a:p>
-          <a:p>
-            <a:pPr>
-              <a:spcAft>
-                <a:spcPts val="600"/>
-              </a:spcAft>
-              <a:defRPr sz="1200">
-                <a:solidFill>
-                  <a:srgbClr val="94A3B8"/>
-                </a:solidFill>
-                <a:latin typeface="Arial"/>
-              </a:defRPr>
-            </a:pPr>
-            <a:r>
-              <a:t>•  Reasoning mode: 'pro' with 8,192 dedicated thinking budget.</a:t>
-            </a:r>
-          </a:p>
-        </p:txBody>
-      </p:sp>
-      <p:sp>
-        <p:nvSpPr>
-          <p:cNvPr id="7" name="Rounded Rectangle 6"/>
+              <a:t>•  Prevents data cross-contamination with secure account-level isolation.</a:t>
+            </a:r>
+          </a:p>
+        </p:txBody>
+      </p:sp>
+      <p:sp>
+        <p:nvSpPr>
+          <p:cNvPr id="10" name="Rounded Rectangle 9"/>
           <p:cNvSpPr/>
           <p:nvPr/>
         </p:nvSpPr>
         <p:spPr>
           <a:xfrm>
-            <a:off x="4389120" y="1645920"/>
-            <a:ext cx="3383280" cy="4572000"/>
-          </a:xfrm>
-          <a:prstGeom prst="roundRect">
-            <a:avLst/>
-          </a:prstGeom>
-          <a:solidFill>
-            <a:srgbClr val="111827"/>
-          </a:solidFill>
-          <a:ln w="15240">
-            <a:solidFill>
-              <a:srgbClr val="D4AF37"/>
-            </a:solidFill>
-          </a:ln>
-        </p:spPr>
-        <p:style>
-          <a:lnRef idx="1">
-            <a:schemeClr val="accent1"/>
-          </a:lnRef>
-          <a:fillRef idx="3">
-            <a:schemeClr val="accent1"/>
-          </a:fillRef>
-          <a:effectRef idx="2">
-            <a:schemeClr val="accent1"/>
-          </a:effectRef>
-          <a:fontRef idx="minor">
-            <a:schemeClr val="lt1"/>
-          </a:fontRef>
-        </p:style>
-        <p:txBody>
-          <a:bodyPr rtlCol="0" anchor="ctr" wrap="square" lIns="228600" rIns="228600" tIns="228600" bIns="182880"/>
-          <a:lstStyle/>
-          <a:p>
-            <a:pPr algn="ctr">
-              <a:spcAft>
-                <a:spcPts val="400"/>
-              </a:spcAft>
-              <a:defRPr sz="1000" b="1">
-                <a:solidFill>
-                  <a:srgbClr val="D4AF37"/>
-                </a:solidFill>
-                <a:latin typeface="Arial"/>
-              </a:defRPr>
-            </a:pPr>
-            <a:r>
-              <a:t>VELOCITY</a:t>
-            </a:r>
-          </a:p>
-          <a:p>
-            <a:pPr>
-              <a:spcAft>
-                <a:spcPts val="1000"/>
-              </a:spcAft>
-              <a:defRPr sz="1600" b="1">
-                <a:solidFill>
-                  <a:srgbClr val="F8FAFC"/>
-                </a:solidFill>
-                <a:latin typeface="Arial"/>
-              </a:defRPr>
-            </a:pPr>
-            <a:r>
-              <a:t>NVIDIA RTX 4050 GPU VRAM</a:t>
-            </a:r>
-          </a:p>
-          <a:p>
-            <a:pPr>
-              <a:spcAft>
-                <a:spcPts val="600"/>
-              </a:spcAft>
-              <a:defRPr sz="1200">
-                <a:solidFill>
-                  <a:srgbClr val="94A3B8"/>
-                </a:solidFill>
-                <a:latin typeface="Arial"/>
-              </a:defRPr>
-            </a:pPr>
-            <a:r>
-              <a:t>•  Pinned local gemma4:e4b weights in dedicated 5.1 GB GPU VRAM.</a:t>
-            </a:r>
-          </a:p>
-          <a:p>
-            <a:pPr>
-              <a:spcAft>
-                <a:spcPts val="600"/>
-              </a:spcAft>
-              <a:defRPr sz="1200">
-                <a:solidFill>
-                  <a:srgbClr val="94A3B8"/>
-                </a:solidFill>
-                <a:latin typeface="Arial"/>
-              </a:defRPr>
-            </a:pPr>
-            <a:r>
-              <a:t>•  Configured keep_alive: '-1' to completely eliminate cold-start unloading.</a:t>
-            </a:r>
-          </a:p>
-          <a:p>
-            <a:pPr>
-              <a:spcAft>
-                <a:spcPts val="600"/>
-              </a:spcAft>
-              <a:defRPr sz="1200">
-                <a:solidFill>
-                  <a:srgbClr val="94A3B8"/>
-                </a:solidFill>
-                <a:latin typeface="Arial"/>
-              </a:defRPr>
-            </a:pPr>
-            <a:r>
-              <a:t>•  Instant response velocity: First token streamed in milliseconds.</a:t>
-            </a:r>
-          </a:p>
-          <a:p>
-            <a:pPr>
-              <a:spcAft>
-                <a:spcPts val="600"/>
-              </a:spcAft>
-              <a:defRPr sz="1200">
-                <a:solidFill>
-                  <a:srgbClr val="94A3B8"/>
-                </a:solidFill>
-                <a:latin typeface="Arial"/>
-              </a:defRPr>
-            </a:pPr>
-            <a:r>
-              <a:t>•  Optimized for smooth pair programming and multi-turn conversational agents.</a:t>
-            </a:r>
-          </a:p>
-        </p:txBody>
-      </p:sp>
-      <p:sp>
-        <p:nvSpPr>
-          <p:cNvPr id="8" name="Rounded Rectangle 7"/>
-          <p:cNvSpPr/>
-          <p:nvPr/>
-        </p:nvSpPr>
-        <p:spPr>
-          <a:xfrm>
-            <a:off x="8046720" y="1645920"/>
-            <a:ext cx="3383280" cy="4572000"/>
+            <a:off x="7772400" y="4718304"/>
+            <a:ext cx="3685032" cy="1353312"/>
           </a:xfrm>
           <a:prstGeom prst="roundRect">
             <a:avLst/>
@@ -7512,30 +8709,30 @@
           </a:fontRef>
         </p:style>
         <p:txBody>
-          <a:bodyPr rtlCol="0" anchor="ctr" wrap="square" lIns="228600" rIns="228600" tIns="228600" bIns="182880"/>
+          <a:bodyPr rtlCol="0" anchor="ctr" wrap="square" lIns="182880" rIns="182880" tIns="109728" bIns="73152"/>
           <a:lstStyle/>
           <a:p>
             <a:pPr algn="ctr">
               <a:spcAft>
+                <a:spcPts val="200"/>
+              </a:spcAft>
+              <a:defRPr sz="900" b="1">
+                <a:solidFill>
+                  <a:srgbClr val="34D399"/>
+                </a:solidFill>
+                <a:latin typeface="Arial"/>
+              </a:defRPr>
+            </a:pPr>
+            <a:r>
+              <a:t>MCIT PROVENANCE</a:t>
+            </a:r>
+          </a:p>
+          <a:p>
+            <a:pPr>
+              <a:spcAft>
                 <a:spcPts val="400"/>
               </a:spcAft>
-              <a:defRPr sz="1000" b="1">
-                <a:solidFill>
-                  <a:srgbClr val="34D399"/>
-                </a:solidFill>
-                <a:latin typeface="Arial"/>
-              </a:defRPr>
-            </a:pPr>
-            <a:r>
-              <a:t>RESILIENCE</a:t>
-            </a:r>
-          </a:p>
-          <a:p>
-            <a:pPr>
-              <a:spcAft>
-                <a:spcPts val="1000"/>
-              </a:spcAft>
-              <a:defRPr sz="1600" b="1">
+              <a:defRPr sz="1300" b="1">
                 <a:solidFill>
                   <a:srgbClr val="F8FAFC"/>
                 </a:solidFill>
@@ -7543,15 +8740,15 @@
               </a:defRPr>
             </a:pPr>
             <a:r>
-              <a:t>Self-Healing Docker Stack</a:t>
-            </a:r>
-          </a:p>
-          <a:p>
-            <a:pPr>
-              <a:spcAft>
-                <a:spcPts val="600"/>
-              </a:spcAft>
-              <a:defRPr sz="1200">
+              <a:t>Sovereign National Attribution</a:t>
+            </a:r>
+          </a:p>
+          <a:p>
+            <a:pPr>
+              <a:spcAft>
+                <a:spcPts val="200"/>
+              </a:spcAft>
+              <a:defRPr sz="1050">
                 <a:solidFill>
                   <a:srgbClr val="94A3B8"/>
                 </a:solidFill>
@@ -7559,15 +8756,15 @@
               </a:defRPr>
             </a:pPr>
             <a:r>
-              <a:t>•  11 isolated Docker services: Agent, Platform, ONLYOFFICE, SurrealDB, Postgres, Redis, Kokoro.</a:t>
-            </a:r>
-          </a:p>
-          <a:p>
-            <a:pPr>
-              <a:spcAft>
-                <a:spcPts val="600"/>
-              </a:spcAft>
-              <a:defRPr sz="1200">
+              <a:t>•  Custom-built for the Ministry of Communications &amp; Information Technology.</a:t>
+            </a:r>
+          </a:p>
+          <a:p>
+            <a:pPr>
+              <a:spcAft>
+                <a:spcPts val="200"/>
+              </a:spcAft>
+              <a:defRPr sz="1050">
                 <a:solidFill>
                   <a:srgbClr val="94A3B8"/>
                 </a:solidFill>
@@ -7575,39 +8772,7 @@
               </a:defRPr>
             </a:pPr>
             <a:r>
-              <a:t>•  Built-in runtime self-patching in startServer.js guarantees TRPC stability on container boot.</a:t>
-            </a:r>
-          </a:p>
-          <a:p>
-            <a:pPr>
-              <a:spcAft>
-                <a:spcPts val="600"/>
-              </a:spcAft>
-              <a:defRPr sz="1200">
-                <a:solidFill>
-                  <a:srgbClr val="94A3B8"/>
-                </a:solidFill>
-                <a:latin typeface="Arial"/>
-              </a:defRPr>
-            </a:pPr>
-            <a:r>
-              <a:t>•  Turnkey 1-click bootstrap scripts (.ps1 and .sh) launch the full ecosystem in under 15 seconds.</a:t>
-            </a:r>
-          </a:p>
-          <a:p>
-            <a:pPr>
-              <a:spcAft>
-                <a:spcPts val="600"/>
-              </a:spcAft>
-              <a:defRPr sz="1200">
-                <a:solidFill>
-                  <a:srgbClr val="94A3B8"/>
-                </a:solidFill>
-                <a:latin typeface="Arial"/>
-              </a:defRPr>
-            </a:pPr>
-            <a:r>
-              <a:t>•  All source code versioned on GitHub: AhmdArFa/TuT-AI.</a:t>
+              <a:t>•  Verified interface attribution: 'Developed by Eng Ahmed Arfa for MCIT'.</a:t>
             </a:r>
           </a:p>
         </p:txBody>
@@ -7704,7 +8869,7 @@
               </a:defRPr>
             </a:pPr>
             <a:r>
-              <a:t>ENGINEERING MILESTONES</a:t>
+              <a:t>CONVERSATIONAL INTELLIGENCE</a:t>
             </a:r>
           </a:p>
         </p:txBody>
@@ -7740,7 +8905,7 @@
               </a:defRPr>
             </a:pPr>
             <a:r>
-              <a:t>The Development Journey: 4 Evolutionary Phases</a:t>
+              <a:t>Live Agent Showcase: In-Chat Deck Generation &amp; 3D Avatar</a:t>
             </a:r>
           </a:p>
         </p:txBody>
@@ -7796,8 +8961,77 @@
         </p:nvSpPr>
         <p:spPr>
           <a:xfrm>
-            <a:off x="731520" y="1645920"/>
-            <a:ext cx="5212080" cy="2194560"/>
+            <a:off x="676656" y="1728216"/>
+            <a:ext cx="6876288" cy="4114800"/>
+          </a:xfrm>
+          <a:prstGeom prst="roundRect">
+            <a:avLst/>
+          </a:prstGeom>
+          <a:solidFill>
+            <a:srgbClr val="111827"/>
+          </a:solidFill>
+          <a:ln w="19050">
+            <a:solidFill>
+              <a:srgbClr val="38BDF8"/>
+            </a:solidFill>
+          </a:ln>
+        </p:spPr>
+        <p:style>
+          <a:lnRef idx="1">
+            <a:schemeClr val="accent1"/>
+          </a:lnRef>
+          <a:fillRef idx="3">
+            <a:schemeClr val="accent1"/>
+          </a:fillRef>
+          <a:effectRef idx="2">
+            <a:schemeClr val="accent1"/>
+          </a:effectRef>
+          <a:fontRef idx="minor">
+            <a:schemeClr val="lt1"/>
+          </a:fontRef>
+        </p:style>
+        <p:txBody>
+          <a:bodyPr rtlCol="0" anchor="ctr"/>
+          <a:lstStyle/>
+          <a:p>
+            <a:pPr algn="ctr"/>
+          </a:p>
+        </p:txBody>
+      </p:sp>
+      <p:pic>
+        <p:nvPicPr>
+          <p:cNvPr id="7" name="Picture 6" descr="tut_ui_agent.png"/>
+          <p:cNvPicPr>
+            <a:picLocks noChangeAspect="1"/>
+          </p:cNvPicPr>
+          <p:nvPr/>
+        </p:nvPicPr>
+        <p:blipFill>
+          <a:blip r:embed="rId2"/>
+          <a:stretch>
+            <a:fillRect/>
+          </a:stretch>
+        </p:blipFill>
+        <p:spPr>
+          <a:xfrm>
+            <a:off x="731520" y="1783080"/>
+            <a:ext cx="6766560" cy="4005072"/>
+          </a:xfrm>
+          <a:prstGeom prst="rect">
+            <a:avLst/>
+          </a:prstGeom>
+        </p:spPr>
+      </p:pic>
+      <p:sp>
+        <p:nvSpPr>
+          <p:cNvPr id="8" name="Rounded Rectangle 7"/>
+          <p:cNvSpPr/>
+          <p:nvPr/>
+        </p:nvSpPr>
+        <p:spPr>
+          <a:xfrm>
+            <a:off x="7772400" y="1719072"/>
+            <a:ext cx="3685032" cy="1353312"/>
           </a:xfrm>
           <a:prstGeom prst="roundRect">
             <a:avLst/>
@@ -7826,30 +9060,30 @@
           </a:fontRef>
         </p:style>
         <p:txBody>
-          <a:bodyPr rtlCol="0" anchor="ctr" wrap="square" lIns="228600" rIns="228600" tIns="228600" bIns="182880"/>
+          <a:bodyPr rtlCol="0" anchor="ctr" wrap="square" lIns="182880" rIns="182880" tIns="109728" bIns="73152"/>
           <a:lstStyle/>
           <a:p>
             <a:pPr algn="ctr">
               <a:spcAft>
+                <a:spcPts val="200"/>
+              </a:spcAft>
+              <a:defRPr sz="900" b="1">
+                <a:solidFill>
+                  <a:srgbClr val="D4AF37"/>
+                </a:solidFill>
+                <a:latin typeface="Arial"/>
+              </a:defRPr>
+            </a:pPr>
+            <a:r>
+              <a:t>SOVEREIGN IDENTITY</a:t>
+            </a:r>
+          </a:p>
+          <a:p>
+            <a:pPr>
+              <a:spcAft>
                 <a:spcPts val="400"/>
               </a:spcAft>
-              <a:defRPr sz="1000" b="1">
-                <a:solidFill>
-                  <a:srgbClr val="D4AF37"/>
-                </a:solidFill>
-                <a:latin typeface="Arial"/>
-              </a:defRPr>
-            </a:pPr>
-            <a:r>
-              <a:t>PHASE 1: INCEPTION</a:t>
-            </a:r>
-          </a:p>
-          <a:p>
-            <a:pPr>
-              <a:spcAft>
-                <a:spcPts val="1000"/>
-              </a:spcAft>
-              <a:defRPr sz="1600" b="1">
+              <a:defRPr sz="1300" b="1">
                 <a:solidFill>
                   <a:srgbClr val="F8FAFC"/>
                 </a:solidFill>
@@ -7857,15 +9091,15 @@
               </a:defRPr>
             </a:pPr>
             <a:r>
-              <a:t>Phase 1: Foundation &amp; Sovereign Identity</a:t>
-            </a:r>
-          </a:p>
-          <a:p>
-            <a:pPr>
-              <a:spcAft>
-                <a:spcPts val="600"/>
-              </a:spcAft>
-              <a:defRPr sz="1200">
+              <a:t>3D Holographic Sovereign Avatar</a:t>
+            </a:r>
+          </a:p>
+          <a:p>
+            <a:pPr>
+              <a:spcAft>
+                <a:spcPts val="200"/>
+              </a:spcAft>
+              <a:defRPr sz="1050">
                 <a:solidFill>
                   <a:srgbClr val="94A3B8"/>
                 </a:solidFill>
@@ -7873,15 +9107,15 @@
               </a:defRPr>
             </a:pPr>
             <a:r>
-              <a:t>•  Transitioned away from generic third-party code to 100% Egyptian sovereign platform.</a:t>
-            </a:r>
-          </a:p>
-          <a:p>
-            <a:pPr>
-              <a:spcAft>
-                <a:spcPts val="600"/>
-              </a:spcAft>
-              <a:defRPr sz="1200">
+              <a:t>•  Interactive real-time 3D King Tut avatar blending Egyptian heritage with state-of-the-art AI.</a:t>
+            </a:r>
+          </a:p>
+          <a:p>
+            <a:pPr>
+              <a:spcAft>
+                <a:spcPts val="200"/>
+              </a:spcAft>
+              <a:defRPr sz="1050">
                 <a:solidFill>
                   <a:srgbClr val="94A3B8"/>
                 </a:solidFill>
@@ -7889,21 +9123,21 @@
               </a:defRPr>
             </a:pPr>
             <a:r>
-              <a:t>•  Engineered the TuT AI identity: 10 historical personas &amp; 3D holographic cartouche.</a:t>
-            </a:r>
-          </a:p>
-        </p:txBody>
-      </p:sp>
-      <p:sp>
-        <p:nvSpPr>
-          <p:cNvPr id="7" name="Rounded Rectangle 6"/>
+              <a:t>•  Dynamic state cues respond to thought cycles and generation stages.</a:t>
+            </a:r>
+          </a:p>
+        </p:txBody>
+      </p:sp>
+      <p:sp>
+        <p:nvSpPr>
+          <p:cNvPr id="9" name="Rounded Rectangle 8"/>
           <p:cNvSpPr/>
           <p:nvPr/>
         </p:nvSpPr>
         <p:spPr>
           <a:xfrm>
-            <a:off x="6217920" y="1645920"/>
-            <a:ext cx="5212080" cy="2194560"/>
+            <a:off x="7772400" y="3218688"/>
+            <a:ext cx="3685032" cy="1353312"/>
           </a:xfrm>
           <a:prstGeom prst="roundRect">
             <a:avLst/>
@@ -7932,30 +9166,30 @@
           </a:fontRef>
         </p:style>
         <p:txBody>
-          <a:bodyPr rtlCol="0" anchor="ctr" wrap="square" lIns="228600" rIns="228600" tIns="228600" bIns="182880"/>
+          <a:bodyPr rtlCol="0" anchor="ctr" wrap="square" lIns="182880" rIns="182880" tIns="109728" bIns="73152"/>
           <a:lstStyle/>
           <a:p>
             <a:pPr algn="ctr">
               <a:spcAft>
+                <a:spcPts val="200"/>
+              </a:spcAft>
+              <a:defRPr sz="900" b="1">
+                <a:solidFill>
+                  <a:srgbClr val="38BDF8"/>
+                </a:solidFill>
+                <a:latin typeface="Arial"/>
+              </a:defRPr>
+            </a:pPr>
+            <a:r>
+              <a:t>DECKCRAFT ENGINE</a:t>
+            </a:r>
+          </a:p>
+          <a:p>
+            <a:pPr>
+              <a:spcAft>
                 <a:spcPts val="400"/>
               </a:spcAft>
-              <a:defRPr sz="1000" b="1">
-                <a:solidFill>
-                  <a:srgbClr val="38BDF8"/>
-                </a:solidFill>
-                <a:latin typeface="Arial"/>
-              </a:defRPr>
-            </a:pPr>
-            <a:r>
-              <a:t>PHASE 2: ARCHITECTURE</a:t>
-            </a:r>
-          </a:p>
-          <a:p>
-            <a:pPr>
-              <a:spcAft>
-                <a:spcPts val="1000"/>
-              </a:spcAft>
-              <a:defRPr sz="1600" b="1">
+              <a:defRPr sz="1300" b="1">
                 <a:solidFill>
                   <a:srgbClr val="F8FAFC"/>
                 </a:solidFill>
@@ -7963,15 +9197,15 @@
               </a:defRPr>
             </a:pPr>
             <a:r>
-              <a:t>Phase 2: Core Engines &amp; Resilient Fixes</a:t>
-            </a:r>
-          </a:p>
-          <a:p>
-            <a:pPr>
-              <a:spcAft>
-                <a:spcPts val="600"/>
-              </a:spcAft>
-              <a:defRPr sz="1200">
+              <a:t>In-Chat Autonomous Presentation Engine</a:t>
+            </a:r>
+          </a:p>
+          <a:p>
+            <a:pPr>
+              <a:spcAft>
+                <a:spcPts val="200"/>
+              </a:spcAft>
+              <a:defRPr sz="1050">
                 <a:solidFill>
                   <a:srgbClr val="94A3B8"/>
                 </a:solidFill>
@@ -7979,15 +9213,15 @@
               </a:defRPr>
             </a:pPr>
             <a:r>
-              <a:t>•  Engineered the 3 pillars: Deep Summarization, DeckCraft (.pptx), and VectorCraft (infographics).</a:t>
-            </a:r>
-          </a:p>
-          <a:p>
-            <a:pPr>
-              <a:spcAft>
-                <a:spcPts val="600"/>
-              </a:spcAft>
-              <a:defRPr sz="1200">
+              <a:t>•  Live conversational workflow: User asks in Arabic for presentations on complex national topics.</a:t>
+            </a:r>
+          </a:p>
+          <a:p>
+            <a:pPr>
+              <a:spcAft>
+                <a:spcPts val="200"/>
+              </a:spcAft>
+              <a:defRPr sz="1050">
                 <a:solidFill>
                   <a:srgbClr val="94A3B8"/>
                 </a:solidFill>
@@ -7995,21 +9229,21 @@
               </a:defRPr>
             </a:pPr>
             <a:r>
-              <a:t>•  Resolved TRPC runtime crashes via intelligent local Ollama fallback proxy.</a:t>
-            </a:r>
-          </a:p>
-        </p:txBody>
-      </p:sp>
-      <p:sp>
-        <p:nvSpPr>
-          <p:cNvPr id="8" name="Rounded Rectangle 7"/>
+              <a:t>•  Generates genuine, fully editable PowerPoint decks (.pptx) right inside chat.</a:t>
+            </a:r>
+          </a:p>
+        </p:txBody>
+      </p:sp>
+      <p:sp>
+        <p:nvSpPr>
+          <p:cNvPr id="10" name="Rounded Rectangle 9"/>
           <p:cNvSpPr/>
           <p:nvPr/>
         </p:nvSpPr>
         <p:spPr>
           <a:xfrm>
-            <a:off x="731520" y="4023360"/>
-            <a:ext cx="5212080" cy="2194560"/>
+            <a:off x="7772400" y="4718304"/>
+            <a:ext cx="3685032" cy="1353312"/>
           </a:xfrm>
           <a:prstGeom prst="roundRect">
             <a:avLst/>
@@ -8038,30 +9272,30 @@
           </a:fontRef>
         </p:style>
         <p:txBody>
-          <a:bodyPr rtlCol="0" anchor="ctr" wrap="square" lIns="228600" rIns="228600" tIns="228600" bIns="182880"/>
+          <a:bodyPr rtlCol="0" anchor="ctr" wrap="square" lIns="182880" rIns="182880" tIns="109728" bIns="73152"/>
           <a:lstStyle/>
           <a:p>
             <a:pPr algn="ctr">
               <a:spcAft>
+                <a:spcPts val="200"/>
+              </a:spcAft>
+              <a:defRPr sz="900" b="1">
+                <a:solidFill>
+                  <a:srgbClr val="34D399"/>
+                </a:solidFill>
+                <a:latin typeface="Arial"/>
+              </a:defRPr>
+            </a:pPr>
+            <a:r>
+              <a:t>GPU ACCELERATION</a:t>
+            </a:r>
+          </a:p>
+          <a:p>
+            <a:pPr>
+              <a:spcAft>
                 <a:spcPts val="400"/>
               </a:spcAft>
-              <a:defRPr sz="1000" b="1">
-                <a:solidFill>
-                  <a:srgbClr val="34D399"/>
-                </a:solidFill>
-                <a:latin typeface="Arial"/>
-              </a:defRPr>
-            </a:pPr>
-            <a:r>
-              <a:t>PHASE 3: INTELLIGENCE</a:t>
-            </a:r>
-          </a:p>
-          <a:p>
-            <a:pPr>
-              <a:spcAft>
-                <a:spcPts val="1000"/>
-              </a:spcAft>
-              <a:defRPr sz="1600" b="1">
+              <a:defRPr sz="1300" b="1">
                 <a:solidFill>
                   <a:srgbClr val="F8FAFC"/>
                 </a:solidFill>
@@ -8069,15 +9303,15 @@
               </a:defRPr>
             </a:pPr>
             <a:r>
-              <a:t>Phase 3: Model Intelligence &amp; GPU Velocity</a:t>
-            </a:r>
-          </a:p>
-          <a:p>
-            <a:pPr>
-              <a:spcAft>
-                <a:spcPts val="600"/>
-              </a:spcAft>
-              <a:defRPr sz="1200">
+              <a:t>Pinned Local Gemma 4 Engine</a:t>
+            </a:r>
+          </a:p>
+          <a:p>
+            <a:pPr>
+              <a:spcAft>
+                <a:spcPts val="200"/>
+              </a:spcAft>
+              <a:defRPr sz="1050">
                 <a:solidFill>
                   <a:srgbClr val="94A3B8"/>
                 </a:solidFill>
@@ -8085,15 +9319,15 @@
               </a:defRPr>
             </a:pPr>
             <a:r>
-              <a:t>•  Unlocked database to 131,072 context tokens, 16,384 output tokens, and 'pro' reasoning.</a:t>
-            </a:r>
-          </a:p>
-          <a:p>
-            <a:pPr>
-              <a:spcAft>
-                <a:spcPts val="600"/>
-              </a:spcAft>
-              <a:defRPr sz="1200">
+              <a:t>•  Powered by Gemma 4 e4b pinned directly in NVIDIA RTX GPU VRAM.</a:t>
+            </a:r>
+          </a:p>
+          <a:p>
+            <a:pPr>
+              <a:spcAft>
+                <a:spcPts val="200"/>
+              </a:spcAft>
+              <a:defRPr sz="1050">
                 <a:solidFill>
                   <a:srgbClr val="94A3B8"/>
                 </a:solidFill>
@@ -8101,113 +9335,7 @@
               </a:defRPr>
             </a:pPr>
             <a:r>
-              <a:t>•  Pinned gemma4:e4b into NVIDIA RTX 4050 GPU VRAM (keep_alive: '-1') for instant streaming.</a:t>
-            </a:r>
-          </a:p>
-        </p:txBody>
-      </p:sp>
-      <p:sp>
-        <p:nvSpPr>
-          <p:cNvPr id="9" name="Rounded Rectangle 8"/>
-          <p:cNvSpPr/>
-          <p:nvPr/>
-        </p:nvSpPr>
-        <p:spPr>
-          <a:xfrm>
-            <a:off x="6217920" y="4023360"/>
-            <a:ext cx="5212080" cy="2194560"/>
-          </a:xfrm>
-          <a:prstGeom prst="roundRect">
-            <a:avLst/>
-          </a:prstGeom>
-          <a:solidFill>
-            <a:srgbClr val="111827"/>
-          </a:solidFill>
-          <a:ln w="15240">
-            <a:solidFill>
-              <a:srgbClr val="F59E0B"/>
-            </a:solidFill>
-          </a:ln>
-        </p:spPr>
-        <p:style>
-          <a:lnRef idx="1">
-            <a:schemeClr val="accent1"/>
-          </a:lnRef>
-          <a:fillRef idx="3">
-            <a:schemeClr val="accent1"/>
-          </a:fillRef>
-          <a:effectRef idx="2">
-            <a:schemeClr val="accent1"/>
-          </a:effectRef>
-          <a:fontRef idx="minor">
-            <a:schemeClr val="lt1"/>
-          </a:fontRef>
-        </p:style>
-        <p:txBody>
-          <a:bodyPr rtlCol="0" anchor="ctr" wrap="square" lIns="228600" rIns="228600" tIns="228600" bIns="182880"/>
-          <a:lstStyle/>
-          <a:p>
-            <a:pPr algn="ctr">
-              <a:spcAft>
-                <a:spcPts val="400"/>
-              </a:spcAft>
-              <a:defRPr sz="1000" b="1">
-                <a:solidFill>
-                  <a:srgbClr val="F59E0B"/>
-                </a:solidFill>
-                <a:latin typeface="Arial"/>
-              </a:defRPr>
-            </a:pPr>
-            <a:r>
-              <a:t>PHASE 4: PRODUCTION</a:t>
-            </a:r>
-          </a:p>
-          <a:p>
-            <a:pPr>
-              <a:spcAft>
-                <a:spcPts val="1000"/>
-              </a:spcAft>
-              <a:defRPr sz="1600" b="1">
-                <a:solidFill>
-                  <a:srgbClr val="F8FAFC"/>
-                </a:solidFill>
-                <a:latin typeface="Arial"/>
-              </a:defRPr>
-            </a:pPr>
-            <a:r>
-              <a:t>Phase 4: Turnkey Production &amp; GitHub Release</a:t>
-            </a:r>
-          </a:p>
-          <a:p>
-            <a:pPr>
-              <a:spcAft>
-                <a:spcPts val="600"/>
-              </a:spcAft>
-              <a:defRPr sz="1200">
-                <a:solidFill>
-                  <a:srgbClr val="94A3B8"/>
-                </a:solidFill>
-                <a:latin typeface="Arial"/>
-              </a:defRPr>
-            </a:pPr>
-            <a:r>
-              <a:t>•  Built self-healing Docker architecture and turnkey 1-click setup scripts (.ps1 and .sh).</a:t>
-            </a:r>
-          </a:p>
-          <a:p>
-            <a:pPr>
-              <a:spcAft>
-                <a:spcPts val="600"/>
-              </a:spcAft>
-              <a:defRPr sz="1200">
-                <a:solidFill>
-                  <a:srgbClr val="94A3B8"/>
-                </a:solidFill>
-                <a:latin typeface="Arial"/>
-              </a:defRPr>
-            </a:pPr>
-            <a:r>
-              <a:t>•  Integrated ONLYOFFICE document server and published full production repo to GitHub.</a:t>
+              <a:t>•  Instant token streaming with zero latency and 100% offline data privacy.</a:t>
             </a:r>
           </a:p>
         </p:txBody>
@@ -8304,7 +9432,7 @@
               </a:defRPr>
             </a:pPr>
             <a:r>
-              <a:t>INSTITUTIONAL VALUE</a:t>
+              <a:t>ENGINEERING RIGOR</a:t>
             </a:r>
           </a:p>
         </p:txBody>
@@ -8340,7 +9468,7 @@
               </a:defRPr>
             </a:pPr>
             <a:r>
-              <a:t>Strategic &amp; Economic Impact for MCIT &amp; Government</a:t>
+              <a:t>Technical Breakthroughs: 131k Context &amp; GPU Acceleration</a:t>
             </a:r>
           </a:p>
         </p:txBody>
@@ -8397,6 +9525,282 @@
         <p:spPr>
           <a:xfrm>
             <a:off x="731520" y="1645920"/>
+            <a:ext cx="3383280" cy="4572000"/>
+          </a:xfrm>
+          <a:prstGeom prst="roundRect">
+            <a:avLst/>
+          </a:prstGeom>
+          <a:solidFill>
+            <a:srgbClr val="111827"/>
+          </a:solidFill>
+          <a:ln w="15240">
+            <a:solidFill>
+              <a:srgbClr val="38BDF8"/>
+            </a:solidFill>
+          </a:ln>
+        </p:spPr>
+        <p:style>
+          <a:lnRef idx="1">
+            <a:schemeClr val="accent1"/>
+          </a:lnRef>
+          <a:fillRef idx="3">
+            <a:schemeClr val="accent1"/>
+          </a:fillRef>
+          <a:effectRef idx="2">
+            <a:schemeClr val="accent1"/>
+          </a:effectRef>
+          <a:fontRef idx="minor">
+            <a:schemeClr val="lt1"/>
+          </a:fontRef>
+        </p:style>
+        <p:txBody>
+          <a:bodyPr rtlCol="0" anchor="ctr" wrap="square" lIns="228600" rIns="228600" tIns="228600" bIns="182880"/>
+          <a:lstStyle/>
+          <a:p>
+            <a:pPr algn="ctr">
+              <a:spcAft>
+                <a:spcPts val="400"/>
+              </a:spcAft>
+              <a:defRPr sz="1000" b="1">
+                <a:solidFill>
+                  <a:srgbClr val="38BDF8"/>
+                </a:solidFill>
+                <a:latin typeface="Arial"/>
+              </a:defRPr>
+            </a:pPr>
+            <a:r>
+              <a:t>MODEL CAPACITY</a:t>
+            </a:r>
+          </a:p>
+          <a:p>
+            <a:pPr>
+              <a:spcAft>
+                <a:spcPts val="1000"/>
+              </a:spcAft>
+              <a:defRPr sz="1600" b="1">
+                <a:solidFill>
+                  <a:srgbClr val="F8FAFC"/>
+                </a:solidFill>
+                <a:latin typeface="Arial"/>
+              </a:defRPr>
+            </a:pPr>
+            <a:r>
+              <a:t>131k Context Window</a:t>
+            </a:r>
+          </a:p>
+          <a:p>
+            <a:pPr>
+              <a:spcAft>
+                <a:spcPts val="600"/>
+              </a:spcAft>
+              <a:defRPr sz="1200">
+                <a:solidFill>
+                  <a:srgbClr val="94A3B8"/>
+                </a:solidFill>
+                <a:latin typeface="Arial"/>
+              </a:defRPr>
+            </a:pPr>
+            <a:r>
+              <a:t>•  PostgreSQL database tables unlocked to 131,072 context tokens.</a:t>
+            </a:r>
+          </a:p>
+          <a:p>
+            <a:pPr>
+              <a:spcAft>
+                <a:spcPts val="600"/>
+              </a:spcAft>
+              <a:defRPr sz="1200">
+                <a:solidFill>
+                  <a:srgbClr val="94A3B8"/>
+                </a:solidFill>
+                <a:latin typeface="Arial"/>
+              </a:defRPr>
+            </a:pPr>
+            <a:r>
+              <a:t>•  16,384 maximum output tokens for exhaustive document generation.</a:t>
+            </a:r>
+          </a:p>
+          <a:p>
+            <a:pPr>
+              <a:spcAft>
+                <a:spcPts val="600"/>
+              </a:spcAft>
+              <a:defRPr sz="1200">
+                <a:solidFill>
+                  <a:srgbClr val="94A3B8"/>
+                </a:solidFill>
+                <a:latin typeface="Arial"/>
+              </a:defRPr>
+            </a:pPr>
+            <a:r>
+              <a:t>•  Eliminates memory truncation: Ingest entire decree books without losing context.</a:t>
+            </a:r>
+          </a:p>
+          <a:p>
+            <a:pPr>
+              <a:spcAft>
+                <a:spcPts val="600"/>
+              </a:spcAft>
+              <a:defRPr sz="1200">
+                <a:solidFill>
+                  <a:srgbClr val="94A3B8"/>
+                </a:solidFill>
+                <a:latin typeface="Arial"/>
+              </a:defRPr>
+            </a:pPr>
+            <a:r>
+              <a:t>•  Reasoning mode: 'pro' with 8,192 dedicated thinking budget.</a:t>
+            </a:r>
+          </a:p>
+        </p:txBody>
+      </p:sp>
+      <p:sp>
+        <p:nvSpPr>
+          <p:cNvPr id="7" name="Rounded Rectangle 6"/>
+          <p:cNvSpPr/>
+          <p:nvPr/>
+        </p:nvSpPr>
+        <p:spPr>
+          <a:xfrm>
+            <a:off x="4389120" y="1645920"/>
+            <a:ext cx="3383280" cy="4572000"/>
+          </a:xfrm>
+          <a:prstGeom prst="roundRect">
+            <a:avLst/>
+          </a:prstGeom>
+          <a:solidFill>
+            <a:srgbClr val="111827"/>
+          </a:solidFill>
+          <a:ln w="15240">
+            <a:solidFill>
+              <a:srgbClr val="D4AF37"/>
+            </a:solidFill>
+          </a:ln>
+        </p:spPr>
+        <p:style>
+          <a:lnRef idx="1">
+            <a:schemeClr val="accent1"/>
+          </a:lnRef>
+          <a:fillRef idx="3">
+            <a:schemeClr val="accent1"/>
+          </a:fillRef>
+          <a:effectRef idx="2">
+            <a:schemeClr val="accent1"/>
+          </a:effectRef>
+          <a:fontRef idx="minor">
+            <a:schemeClr val="lt1"/>
+          </a:fontRef>
+        </p:style>
+        <p:txBody>
+          <a:bodyPr rtlCol="0" anchor="ctr" wrap="square" lIns="228600" rIns="228600" tIns="228600" bIns="182880"/>
+          <a:lstStyle/>
+          <a:p>
+            <a:pPr algn="ctr">
+              <a:spcAft>
+                <a:spcPts val="400"/>
+              </a:spcAft>
+              <a:defRPr sz="1000" b="1">
+                <a:solidFill>
+                  <a:srgbClr val="D4AF37"/>
+                </a:solidFill>
+                <a:latin typeface="Arial"/>
+              </a:defRPr>
+            </a:pPr>
+            <a:r>
+              <a:t>VELOCITY</a:t>
+            </a:r>
+          </a:p>
+          <a:p>
+            <a:pPr>
+              <a:spcAft>
+                <a:spcPts val="1000"/>
+              </a:spcAft>
+              <a:defRPr sz="1600" b="1">
+                <a:solidFill>
+                  <a:srgbClr val="F8FAFC"/>
+                </a:solidFill>
+                <a:latin typeface="Arial"/>
+              </a:defRPr>
+            </a:pPr>
+            <a:r>
+              <a:t>NVIDIA RTX 4050 GPU VRAM</a:t>
+            </a:r>
+          </a:p>
+          <a:p>
+            <a:pPr>
+              <a:spcAft>
+                <a:spcPts val="600"/>
+              </a:spcAft>
+              <a:defRPr sz="1200">
+                <a:solidFill>
+                  <a:srgbClr val="94A3B8"/>
+                </a:solidFill>
+                <a:latin typeface="Arial"/>
+              </a:defRPr>
+            </a:pPr>
+            <a:r>
+              <a:t>•  Pinned local gemma4:e4b weights in dedicated 5.1 GB GPU VRAM.</a:t>
+            </a:r>
+          </a:p>
+          <a:p>
+            <a:pPr>
+              <a:spcAft>
+                <a:spcPts val="600"/>
+              </a:spcAft>
+              <a:defRPr sz="1200">
+                <a:solidFill>
+                  <a:srgbClr val="94A3B8"/>
+                </a:solidFill>
+                <a:latin typeface="Arial"/>
+              </a:defRPr>
+            </a:pPr>
+            <a:r>
+              <a:t>•  Configured keep_alive: '-1' to completely eliminate cold-start unloading.</a:t>
+            </a:r>
+          </a:p>
+          <a:p>
+            <a:pPr>
+              <a:spcAft>
+                <a:spcPts val="600"/>
+              </a:spcAft>
+              <a:defRPr sz="1200">
+                <a:solidFill>
+                  <a:srgbClr val="94A3B8"/>
+                </a:solidFill>
+                <a:latin typeface="Arial"/>
+              </a:defRPr>
+            </a:pPr>
+            <a:r>
+              <a:t>•  Instant response velocity: First token streamed in milliseconds.</a:t>
+            </a:r>
+          </a:p>
+          <a:p>
+            <a:pPr>
+              <a:spcAft>
+                <a:spcPts val="600"/>
+              </a:spcAft>
+              <a:defRPr sz="1200">
+                <a:solidFill>
+                  <a:srgbClr val="94A3B8"/>
+                </a:solidFill>
+                <a:latin typeface="Arial"/>
+              </a:defRPr>
+            </a:pPr>
+            <a:r>
+              <a:t>•  Optimized for smooth pair programming and multi-turn conversational agents.</a:t>
+            </a:r>
+          </a:p>
+        </p:txBody>
+      </p:sp>
+      <p:sp>
+        <p:nvSpPr>
+          <p:cNvPr id="8" name="Rounded Rectangle 7"/>
+          <p:cNvSpPr/>
+          <p:nvPr/>
+        </p:nvSpPr>
+        <p:spPr>
+          <a:xfrm>
+            <a:off x="8046720" y="1645920"/>
             <a:ext cx="3383280" cy="4572000"/>
           </a:xfrm>
           <a:prstGeom prst="roundRect">
@@ -8441,7 +9845,7 @@
               </a:defRPr>
             </a:pPr>
             <a:r>
-              <a:t>SOVEREIGNTY</a:t>
+              <a:t>RESILIENCE</a:t>
             </a:r>
           </a:p>
           <a:p>
@@ -8457,7 +9861,7 @@
               </a:defRPr>
             </a:pPr>
             <a:r>
-              <a:t>100% Data Sovereignty</a:t>
+              <a:t>Self-Healing Docker Stack</a:t>
             </a:r>
           </a:p>
           <a:p>
@@ -8473,7 +9877,7 @@
               </a:defRPr>
             </a:pPr>
             <a:r>
-              <a:t>•  Zero cloud leakage: Classified ministerial files remain within the state firewall.</a:t>
+              <a:t>•  11 isolated Docker services: Agent, Platform, ONLYOFFICE, SurrealDB, Postgres, Redis, Kokoro.</a:t>
             </a:r>
           </a:p>
           <a:p>
@@ -8489,7 +9893,7 @@
               </a:defRPr>
             </a:pPr>
             <a:r>
-              <a:t>•  Full compliance with national cybersecurity and data protection frameworks.</a:t>
+              <a:t>•  Built-in runtime self-patching in startServer.js guarantees TRPC stability on container boot.</a:t>
             </a:r>
           </a:p>
           <a:p>
@@ -8505,7 +9909,7 @@
               </a:defRPr>
             </a:pPr>
             <a:r>
-              <a:t>•  Immune to foreign sanctions, cloud pricing hikes, or global connection blackouts.</a:t>
+              <a:t>•  Turnkey 1-click bootstrap scripts (.ps1 and .sh) launch the full ecosystem in under 15 seconds.</a:t>
             </a:r>
           </a:p>
           <a:p>
@@ -8521,283 +9925,7 @@
               </a:defRPr>
             </a:pPr>
             <a:r>
-              <a:t>•  Total ownership of code, weights, data, and fine-tuned domain models.</a:t>
-            </a:r>
-          </a:p>
-        </p:txBody>
-      </p:sp>
-      <p:sp>
-        <p:nvSpPr>
-          <p:cNvPr id="7" name="Rounded Rectangle 6"/>
-          <p:cNvSpPr/>
-          <p:nvPr/>
-        </p:nvSpPr>
-        <p:spPr>
-          <a:xfrm>
-            <a:off x="4389120" y="1645920"/>
-            <a:ext cx="3383280" cy="4572000"/>
-          </a:xfrm>
-          <a:prstGeom prst="roundRect">
-            <a:avLst/>
-          </a:prstGeom>
-          <a:solidFill>
-            <a:srgbClr val="111827"/>
-          </a:solidFill>
-          <a:ln w="15240">
-            <a:solidFill>
-              <a:srgbClr val="D4AF37"/>
-            </a:solidFill>
-          </a:ln>
-        </p:spPr>
-        <p:style>
-          <a:lnRef idx="1">
-            <a:schemeClr val="accent1"/>
-          </a:lnRef>
-          <a:fillRef idx="3">
-            <a:schemeClr val="accent1"/>
-          </a:fillRef>
-          <a:effectRef idx="2">
-            <a:schemeClr val="accent1"/>
-          </a:effectRef>
-          <a:fontRef idx="minor">
-            <a:schemeClr val="lt1"/>
-          </a:fontRef>
-        </p:style>
-        <p:txBody>
-          <a:bodyPr rtlCol="0" anchor="ctr" wrap="square" lIns="228600" rIns="228600" tIns="228600" bIns="182880"/>
-          <a:lstStyle/>
-          <a:p>
-            <a:pPr algn="ctr">
-              <a:spcAft>
-                <a:spcPts val="400"/>
-              </a:spcAft>
-              <a:defRPr sz="1000" b="1">
-                <a:solidFill>
-                  <a:srgbClr val="D4AF37"/>
-                </a:solidFill>
-                <a:latin typeface="Arial"/>
-              </a:defRPr>
-            </a:pPr>
-            <a:r>
-              <a:t>PRODUCTIVITY</a:t>
-            </a:r>
-          </a:p>
-          <a:p>
-            <a:pPr>
-              <a:spcAft>
-                <a:spcPts val="1000"/>
-              </a:spcAft>
-              <a:defRPr sz="1600" b="1">
-                <a:solidFill>
-                  <a:srgbClr val="F8FAFC"/>
-                </a:solidFill>
-                <a:latin typeface="Arial"/>
-              </a:defRPr>
-            </a:pPr>
-            <a:r>
-              <a:t>10x Operational Speed</a:t>
-            </a:r>
-          </a:p>
-          <a:p>
-            <a:pPr>
-              <a:spcAft>
-                <a:spcPts val="600"/>
-              </a:spcAft>
-              <a:defRPr sz="1200">
-                <a:solidFill>
-                  <a:srgbClr val="94A3B8"/>
-                </a:solidFill>
-                <a:latin typeface="Arial"/>
-              </a:defRPr>
-            </a:pPr>
-            <a:r>
-              <a:t>•  Reduces 4-hour document reading to a 30-second verified executive summary.</a:t>
-            </a:r>
-          </a:p>
-          <a:p>
-            <a:pPr>
-              <a:spcAft>
-                <a:spcPts val="600"/>
-              </a:spcAft>
-              <a:defRPr sz="1200">
-                <a:solidFill>
-                  <a:srgbClr val="94A3B8"/>
-                </a:solidFill>
-                <a:latin typeface="Arial"/>
-              </a:defRPr>
-            </a:pPr>
-            <a:r>
-              <a:t>•  Eliminates external design delays: Generates ready-to-present PowerPoint decks on demand.</a:t>
-            </a:r>
-          </a:p>
-          <a:p>
-            <a:pPr>
-              <a:spcAft>
-                <a:spcPts val="600"/>
-              </a:spcAft>
-              <a:defRPr sz="1200">
-                <a:solidFill>
-                  <a:srgbClr val="94A3B8"/>
-                </a:solidFill>
-                <a:latin typeface="Arial"/>
-              </a:defRPr>
-            </a:pPr>
-            <a:r>
-              <a:t>•  Instant ONLYOFFICE co-editing: Staff collaborate inside the platform without license costs.</a:t>
-            </a:r>
-          </a:p>
-          <a:p>
-            <a:pPr>
-              <a:spcAft>
-                <a:spcPts val="600"/>
-              </a:spcAft>
-              <a:defRPr sz="1200">
-                <a:solidFill>
-                  <a:srgbClr val="94A3B8"/>
-                </a:solidFill>
-                <a:latin typeface="Arial"/>
-              </a:defRPr>
-            </a:pPr>
-            <a:r>
-              <a:t>•  Empowers leadership with real-time strategic briefs during meetings.</a:t>
-            </a:r>
-          </a:p>
-        </p:txBody>
-      </p:sp>
-      <p:sp>
-        <p:nvSpPr>
-          <p:cNvPr id="8" name="Rounded Rectangle 7"/>
-          <p:cNvSpPr/>
-          <p:nvPr/>
-        </p:nvSpPr>
-        <p:spPr>
-          <a:xfrm>
-            <a:off x="8046720" y="1645920"/>
-            <a:ext cx="3383280" cy="4572000"/>
-          </a:xfrm>
-          <a:prstGeom prst="roundRect">
-            <a:avLst/>
-          </a:prstGeom>
-          <a:solidFill>
-            <a:srgbClr val="111827"/>
-          </a:solidFill>
-          <a:ln w="15240">
-            <a:solidFill>
-              <a:srgbClr val="38BDF8"/>
-            </a:solidFill>
-          </a:ln>
-        </p:spPr>
-        <p:style>
-          <a:lnRef idx="1">
-            <a:schemeClr val="accent1"/>
-          </a:lnRef>
-          <a:fillRef idx="3">
-            <a:schemeClr val="accent1"/>
-          </a:fillRef>
-          <a:effectRef idx="2">
-            <a:schemeClr val="accent1"/>
-          </a:effectRef>
-          <a:fontRef idx="minor">
-            <a:schemeClr val="lt1"/>
-          </a:fontRef>
-        </p:style>
-        <p:txBody>
-          <a:bodyPr rtlCol="0" anchor="ctr" wrap="square" lIns="228600" rIns="228600" tIns="228600" bIns="182880"/>
-          <a:lstStyle/>
-          <a:p>
-            <a:pPr algn="ctr">
-              <a:spcAft>
-                <a:spcPts val="400"/>
-              </a:spcAft>
-              <a:defRPr sz="1000" b="1">
-                <a:solidFill>
-                  <a:srgbClr val="38BDF8"/>
-                </a:solidFill>
-                <a:latin typeface="Arial"/>
-              </a:defRPr>
-            </a:pPr>
-            <a:r>
-              <a:t>COST EFFICIENCY</a:t>
-            </a:r>
-          </a:p>
-          <a:p>
-            <a:pPr>
-              <a:spcAft>
-                <a:spcPts val="1000"/>
-              </a:spcAft>
-              <a:defRPr sz="1600" b="1">
-                <a:solidFill>
-                  <a:srgbClr val="F8FAFC"/>
-                </a:solidFill>
-                <a:latin typeface="Arial"/>
-              </a:defRPr>
-            </a:pPr>
-            <a:r>
-              <a:t>Zero Recurring SaaS Costs</a:t>
-            </a:r>
-          </a:p>
-          <a:p>
-            <a:pPr>
-              <a:spcAft>
-                <a:spcPts val="600"/>
-              </a:spcAft>
-              <a:defRPr sz="1200">
-                <a:solidFill>
-                  <a:srgbClr val="94A3B8"/>
-                </a:solidFill>
-                <a:latin typeface="Arial"/>
-              </a:defRPr>
-            </a:pPr>
-            <a:r>
-              <a:t>•  No per-seat licensing fees (saving thousands of dollars annually on Copilot / ChatGPT Plus).</a:t>
-            </a:r>
-          </a:p>
-          <a:p>
-            <a:pPr>
-              <a:spcAft>
-                <a:spcPts val="600"/>
-              </a:spcAft>
-              <a:defRPr sz="1200">
-                <a:solidFill>
-                  <a:srgbClr val="94A3B8"/>
-                </a:solidFill>
-                <a:latin typeface="Arial"/>
-              </a:defRPr>
-            </a:pPr>
-            <a:r>
-              <a:t>•  Runs on existing departmental GPUs and workstations without expensive cloud clusters.</a:t>
-            </a:r>
-          </a:p>
-          <a:p>
-            <a:pPr>
-              <a:spcAft>
-                <a:spcPts val="600"/>
-              </a:spcAft>
-              <a:defRPr sz="1200">
-                <a:solidFill>
-                  <a:srgbClr val="94A3B8"/>
-                </a:solidFill>
-                <a:latin typeface="Arial"/>
-              </a:defRPr>
-            </a:pPr>
-            <a:r>
-              <a:t>•  Built on robust open-source foundations (SurrealDB, ParadeDB, Next.js, Fastify).</a:t>
-            </a:r>
-          </a:p>
-          <a:p>
-            <a:pPr>
-              <a:spcAft>
-                <a:spcPts val="600"/>
-              </a:spcAft>
-              <a:defRPr sz="1200">
-                <a:solidFill>
-                  <a:srgbClr val="94A3B8"/>
-                </a:solidFill>
-                <a:latin typeface="Arial"/>
-              </a:defRPr>
-            </a:pPr>
-            <a:r>
-              <a:t>•  Future-proof modularity: swap underlying open models seamlessly.</a:t>
+              <a:t>•  All source code versioned on GitHub: AhmdArFa/TuT-AI.</a:t>
             </a:r>
           </a:p>
         </p:txBody>

--- a/docs/TuT_AI_Marketing_Pitch_Deck.pptx
+++ b/docs/TuT_AI_Marketing_Pitch_Deck.pptx
@@ -5669,7 +5669,7 @@
               </a:defRPr>
             </a:pPr>
             <a:r>
-              <a:t>GitHub Repository: https://github.com/AhmdArFa/TuT-AI</a:t>
+              <a:t>GitHub Repository: https://github.com/MCIT-DEPI/DEPI-PPTX</a:t>
             </a:r>
             <a:br/>
             <a:r>
@@ -9925,7 +9925,7 @@
               </a:defRPr>
             </a:pPr>
             <a:r>
-              <a:t>•  All source code versioned on GitHub: AhmdArFa/TuT-AI.</a:t>
+              <a:t>•  All source code versioned on GitHub: MCIT-DEPI/DEPI-PPTX.</a:t>
             </a:r>
           </a:p>
         </p:txBody>

--- a/docs/TuT_AI_Marketing_Pitch_Deck.pptx
+++ b/docs/TuT_AI_Marketing_Pitch_Deck.pptx
@@ -3144,16 +3144,40 @@
           </a:p>
         </p:txBody>
       </p:sp>
-      <p:sp>
-        <p:nvSpPr>
-          <p:cNvPr id="3" name="Rectangle 2"/>
+      <p:pic>
+        <p:nvPicPr>
+          <p:cNvPr id="3" name="Picture 2" descr="mcit-logo.png"/>
+          <p:cNvPicPr>
+            <a:picLocks noChangeAspect="1"/>
+          </p:cNvPicPr>
+          <p:nvPr/>
+        </p:nvPicPr>
+        <p:blipFill>
+          <a:blip r:embed="rId2"/>
+          <a:stretch>
+            <a:fillRect/>
+          </a:stretch>
+        </p:blipFill>
+        <p:spPr>
+          <a:xfrm>
+            <a:off x="1097280" y="731520"/>
+            <a:ext cx="1691640" cy="877824"/>
+          </a:xfrm>
+          <a:prstGeom prst="rect">
+            <a:avLst/>
+          </a:prstGeom>
+        </p:spPr>
+      </p:pic>
+      <p:sp>
+        <p:nvSpPr>
+          <p:cNvPr id="4" name="Rectangle 3"/>
           <p:cNvSpPr/>
           <p:nvPr/>
         </p:nvSpPr>
         <p:spPr>
           <a:xfrm>
-            <a:off x="731520" y="1645920"/>
-            <a:ext cx="109728" cy="3474720"/>
+            <a:off x="731520" y="1920240"/>
+            <a:ext cx="109728" cy="3291840"/>
           </a:xfrm>
           <a:prstGeom prst="rect">
             <a:avLst/>
@@ -3189,13 +3213,13 @@
       </p:sp>
       <p:sp>
         <p:nvSpPr>
-          <p:cNvPr id="4" name="TextBox 3"/>
+          <p:cNvPr id="5" name="TextBox 4"/>
           <p:cNvSpPr txBox="1"/>
           <p:nvPr/>
         </p:nvSpPr>
         <p:spPr>
           <a:xfrm>
-            <a:off x="1097280" y="1463040"/>
+            <a:off x="1097280" y="1737360"/>
             <a:ext cx="10058400" cy="3657600"/>
           </a:xfrm>
           <a:prstGeom prst="rect">
@@ -3243,7 +3267,7 @@
           <a:p>
             <a:pPr>
               <a:spcAft>
-                <a:spcPts val="2800"/>
+                <a:spcPts val="1600"/>
               </a:spcAft>
               <a:defRPr sz="1800">
                 <a:solidFill>
@@ -3254,19 +3278,6 @@
             </a:pPr>
             <a:r>
               <a:t>Strategic Pitch Deck — 100% Offline National Intelligence, Deep Summarization, Autonomous Presentations &amp; Vector Infographics</a:t>
-            </a:r>
-          </a:p>
-          <a:p>
-            <a:pPr>
-              <a:defRPr sz="1300" b="1">
-                <a:solidFill>
-                  <a:srgbClr val="F5D673"/>
-                </a:solidFill>
-                <a:latin typeface="Arial"/>
-              </a:defRPr>
-            </a:pPr>
-            <a:r>
-              <a:t>Principal Architect &amp; Project Lead: Ahmed Gamal Sophi Arfa | Under the Supervision of MCIT Leadership</a:t>
             </a:r>
           </a:p>
         </p:txBody>
@@ -3341,7 +3352,7 @@
         <p:spPr>
           <a:xfrm>
             <a:off x="731520" y="365760"/>
-            <a:ext cx="10698480" cy="365760"/>
+            <a:ext cx="8961120" cy="365760"/>
           </a:xfrm>
           <a:prstGeom prst="rect">
             <a:avLst/>
@@ -3377,7 +3388,7 @@
         <p:spPr>
           <a:xfrm>
             <a:off x="731520" y="685800"/>
-            <a:ext cx="10698480" cy="640080"/>
+            <a:ext cx="8961120" cy="640080"/>
           </a:xfrm>
           <a:prstGeom prst="rect">
             <a:avLst/>
@@ -3404,9 +3415,33 @@
           </a:p>
         </p:txBody>
       </p:sp>
-      <p:sp>
-        <p:nvSpPr>
-          <p:cNvPr id="5" name="Rectangle 4"/>
+      <p:pic>
+        <p:nvPicPr>
+          <p:cNvPr id="5" name="Picture 4" descr="mcit-logo.png"/>
+          <p:cNvPicPr>
+            <a:picLocks noChangeAspect="1"/>
+          </p:cNvPicPr>
+          <p:nvPr/>
+        </p:nvPicPr>
+        <p:blipFill>
+          <a:blip r:embed="rId2"/>
+          <a:stretch>
+            <a:fillRect/>
+          </a:stretch>
+        </p:blipFill>
+        <p:spPr>
+          <a:xfrm>
+            <a:off x="10149840" y="384048"/>
+            <a:ext cx="1307592" cy="685800"/>
+          </a:xfrm>
+          <a:prstGeom prst="rect">
+            <a:avLst/>
+          </a:prstGeom>
+        </p:spPr>
+      </p:pic>
+      <p:sp>
+        <p:nvSpPr>
+          <p:cNvPr id="6" name="Rectangle 5"/>
           <p:cNvSpPr/>
           <p:nvPr/>
         </p:nvSpPr>
@@ -3449,7 +3484,7 @@
       </p:sp>
       <p:sp>
         <p:nvSpPr>
-          <p:cNvPr id="6" name="Rounded Rectangle 5"/>
+          <p:cNvPr id="7" name="Rounded Rectangle 6"/>
           <p:cNvSpPr/>
           <p:nvPr/>
         </p:nvSpPr>
@@ -3555,7 +3590,7 @@
       </p:sp>
       <p:sp>
         <p:nvSpPr>
-          <p:cNvPr id="7" name="Rounded Rectangle 6"/>
+          <p:cNvPr id="8" name="Rounded Rectangle 7"/>
           <p:cNvSpPr/>
           <p:nvPr/>
         </p:nvSpPr>
@@ -3661,7 +3696,7 @@
       </p:sp>
       <p:sp>
         <p:nvSpPr>
-          <p:cNvPr id="8" name="Rounded Rectangle 7"/>
+          <p:cNvPr id="9" name="Rounded Rectangle 8"/>
           <p:cNvSpPr/>
           <p:nvPr/>
         </p:nvSpPr>
@@ -3767,7 +3802,7 @@
       </p:sp>
       <p:sp>
         <p:nvSpPr>
-          <p:cNvPr id="9" name="Rounded Rectangle 8"/>
+          <p:cNvPr id="10" name="Rounded Rectangle 9"/>
           <p:cNvSpPr/>
           <p:nvPr/>
         </p:nvSpPr>
@@ -3941,7 +3976,7 @@
         <p:spPr>
           <a:xfrm>
             <a:off x="731520" y="365760"/>
-            <a:ext cx="10698480" cy="365760"/>
+            <a:ext cx="8961120" cy="365760"/>
           </a:xfrm>
           <a:prstGeom prst="rect">
             <a:avLst/>
@@ -3977,7 +4012,7 @@
         <p:spPr>
           <a:xfrm>
             <a:off x="731520" y="685800"/>
-            <a:ext cx="10698480" cy="640080"/>
+            <a:ext cx="8961120" cy="640080"/>
           </a:xfrm>
           <a:prstGeom prst="rect">
             <a:avLst/>
@@ -4004,9 +4039,33 @@
           </a:p>
         </p:txBody>
       </p:sp>
-      <p:sp>
-        <p:nvSpPr>
-          <p:cNvPr id="5" name="Rectangle 4"/>
+      <p:pic>
+        <p:nvPicPr>
+          <p:cNvPr id="5" name="Picture 4" descr="mcit-logo.png"/>
+          <p:cNvPicPr>
+            <a:picLocks noChangeAspect="1"/>
+          </p:cNvPicPr>
+          <p:nvPr/>
+        </p:nvPicPr>
+        <p:blipFill>
+          <a:blip r:embed="rId2"/>
+          <a:stretch>
+            <a:fillRect/>
+          </a:stretch>
+        </p:blipFill>
+        <p:spPr>
+          <a:xfrm>
+            <a:off x="10149840" y="384048"/>
+            <a:ext cx="1307592" cy="685800"/>
+          </a:xfrm>
+          <a:prstGeom prst="rect">
+            <a:avLst/>
+          </a:prstGeom>
+        </p:spPr>
+      </p:pic>
+      <p:sp>
+        <p:nvSpPr>
+          <p:cNvPr id="6" name="Rectangle 5"/>
           <p:cNvSpPr/>
           <p:nvPr/>
         </p:nvSpPr>
@@ -4049,7 +4108,7 @@
       </p:sp>
       <p:sp>
         <p:nvSpPr>
-          <p:cNvPr id="6" name="Rounded Rectangle 5"/>
+          <p:cNvPr id="7" name="Rounded Rectangle 6"/>
           <p:cNvSpPr/>
           <p:nvPr/>
         </p:nvSpPr>
@@ -4187,7 +4246,7 @@
       </p:sp>
       <p:sp>
         <p:nvSpPr>
-          <p:cNvPr id="7" name="Rounded Rectangle 6"/>
+          <p:cNvPr id="8" name="Rounded Rectangle 7"/>
           <p:cNvSpPr/>
           <p:nvPr/>
         </p:nvSpPr>
@@ -4325,7 +4384,7 @@
       </p:sp>
       <p:sp>
         <p:nvSpPr>
-          <p:cNvPr id="8" name="Rounded Rectangle 7"/>
+          <p:cNvPr id="9" name="Rounded Rectangle 8"/>
           <p:cNvSpPr/>
           <p:nvPr/>
         </p:nvSpPr>
@@ -4531,7 +4590,7 @@
         <p:spPr>
           <a:xfrm>
             <a:off x="731520" y="365760"/>
-            <a:ext cx="10698480" cy="365760"/>
+            <a:ext cx="8961120" cy="365760"/>
           </a:xfrm>
           <a:prstGeom prst="rect">
             <a:avLst/>
@@ -4567,7 +4626,7 @@
         <p:spPr>
           <a:xfrm>
             <a:off x="731520" y="685800"/>
-            <a:ext cx="10698480" cy="640080"/>
+            <a:ext cx="8961120" cy="640080"/>
           </a:xfrm>
           <a:prstGeom prst="rect">
             <a:avLst/>
@@ -4594,9 +4653,33 @@
           </a:p>
         </p:txBody>
       </p:sp>
-      <p:sp>
-        <p:nvSpPr>
-          <p:cNvPr id="5" name="Rectangle 4"/>
+      <p:pic>
+        <p:nvPicPr>
+          <p:cNvPr id="5" name="Picture 4" descr="mcit-logo.png"/>
+          <p:cNvPicPr>
+            <a:picLocks noChangeAspect="1"/>
+          </p:cNvPicPr>
+          <p:nvPr/>
+        </p:nvPicPr>
+        <p:blipFill>
+          <a:blip r:embed="rId2"/>
+          <a:stretch>
+            <a:fillRect/>
+          </a:stretch>
+        </p:blipFill>
+        <p:spPr>
+          <a:xfrm>
+            <a:off x="10149840" y="384048"/>
+            <a:ext cx="1307592" cy="685800"/>
+          </a:xfrm>
+          <a:prstGeom prst="rect">
+            <a:avLst/>
+          </a:prstGeom>
+        </p:spPr>
+      </p:pic>
+      <p:sp>
+        <p:nvSpPr>
+          <p:cNvPr id="6" name="Rectangle 5"/>
           <p:cNvSpPr/>
           <p:nvPr/>
         </p:nvSpPr>
@@ -4639,7 +4722,7 @@
       </p:sp>
       <p:sp>
         <p:nvSpPr>
-          <p:cNvPr id="6" name="Rounded Rectangle 5"/>
+          <p:cNvPr id="7" name="Rounded Rectangle 6"/>
           <p:cNvSpPr/>
           <p:nvPr/>
         </p:nvSpPr>
@@ -4745,7 +4828,7 @@
       </p:sp>
       <p:sp>
         <p:nvSpPr>
-          <p:cNvPr id="7" name="Rounded Rectangle 6"/>
+          <p:cNvPr id="8" name="Rounded Rectangle 7"/>
           <p:cNvSpPr/>
           <p:nvPr/>
         </p:nvSpPr>
@@ -4851,7 +4934,7 @@
       </p:sp>
       <p:sp>
         <p:nvSpPr>
-          <p:cNvPr id="8" name="Rounded Rectangle 7"/>
+          <p:cNvPr id="9" name="Rounded Rectangle 8"/>
           <p:cNvSpPr/>
           <p:nvPr/>
         </p:nvSpPr>
@@ -4957,7 +5040,7 @@
       </p:sp>
       <p:sp>
         <p:nvSpPr>
-          <p:cNvPr id="9" name="Rounded Rectangle 8"/>
+          <p:cNvPr id="10" name="Rounded Rectangle 9"/>
           <p:cNvSpPr/>
           <p:nvPr/>
         </p:nvSpPr>
@@ -5131,7 +5214,7 @@
         <p:spPr>
           <a:xfrm>
             <a:off x="731520" y="365760"/>
-            <a:ext cx="10698480" cy="365760"/>
+            <a:ext cx="8961120" cy="365760"/>
           </a:xfrm>
           <a:prstGeom prst="rect">
             <a:avLst/>
@@ -5167,7 +5250,7 @@
         <p:spPr>
           <a:xfrm>
             <a:off x="731520" y="685800"/>
-            <a:ext cx="10698480" cy="640080"/>
+            <a:ext cx="8961120" cy="640080"/>
           </a:xfrm>
           <a:prstGeom prst="rect">
             <a:avLst/>
@@ -5194,9 +5277,33 @@
           </a:p>
         </p:txBody>
       </p:sp>
-      <p:sp>
-        <p:nvSpPr>
-          <p:cNvPr id="5" name="Rectangle 4"/>
+      <p:pic>
+        <p:nvPicPr>
+          <p:cNvPr id="5" name="Picture 4" descr="mcit-logo.png"/>
+          <p:cNvPicPr>
+            <a:picLocks noChangeAspect="1"/>
+          </p:cNvPicPr>
+          <p:nvPr/>
+        </p:nvPicPr>
+        <p:blipFill>
+          <a:blip r:embed="rId2"/>
+          <a:stretch>
+            <a:fillRect/>
+          </a:stretch>
+        </p:blipFill>
+        <p:spPr>
+          <a:xfrm>
+            <a:off x="10149840" y="384048"/>
+            <a:ext cx="1307592" cy="685800"/>
+          </a:xfrm>
+          <a:prstGeom prst="rect">
+            <a:avLst/>
+          </a:prstGeom>
+        </p:spPr>
+      </p:pic>
+      <p:sp>
+        <p:nvSpPr>
+          <p:cNvPr id="6" name="Rectangle 5"/>
           <p:cNvSpPr/>
           <p:nvPr/>
         </p:nvSpPr>
@@ -5239,7 +5346,7 @@
       </p:sp>
       <p:sp>
         <p:nvSpPr>
-          <p:cNvPr id="6" name="Rounded Rectangle 5"/>
+          <p:cNvPr id="7" name="Rounded Rectangle 6"/>
           <p:cNvSpPr/>
           <p:nvPr/>
         </p:nvSpPr>
@@ -5361,7 +5468,7 @@
       </p:sp>
       <p:sp>
         <p:nvSpPr>
-          <p:cNvPr id="7" name="Rounded Rectangle 6"/>
+          <p:cNvPr id="8" name="Rounded Rectangle 7"/>
           <p:cNvSpPr/>
           <p:nvPr/>
         </p:nvSpPr>
@@ -5590,15 +5697,39 @@
           </a:p>
         </p:txBody>
       </p:sp>
-      <p:sp>
-        <p:nvSpPr>
-          <p:cNvPr id="3" name="TextBox 2"/>
+      <p:pic>
+        <p:nvPicPr>
+          <p:cNvPr id="3" name="Picture 2" descr="mcit-logo.png"/>
+          <p:cNvPicPr>
+            <a:picLocks noChangeAspect="1"/>
+          </p:cNvPicPr>
+          <p:nvPr/>
+        </p:nvPicPr>
+        <p:blipFill>
+          <a:blip r:embed="rId2"/>
+          <a:stretch>
+            <a:fillRect/>
+          </a:stretch>
+        </p:blipFill>
+        <p:spPr>
+          <a:xfrm>
+            <a:off x="5230368" y="548640"/>
+            <a:ext cx="1719072" cy="896112"/>
+          </a:xfrm>
+          <a:prstGeom prst="rect">
+            <a:avLst/>
+          </a:prstGeom>
+        </p:spPr>
+      </p:pic>
+      <p:sp>
+        <p:nvSpPr>
+          <p:cNvPr id="4" name="TextBox 3"/>
           <p:cNvSpPr txBox="1"/>
           <p:nvPr/>
         </p:nvSpPr>
         <p:spPr>
           <a:xfrm>
-            <a:off x="1371600" y="1371600"/>
+            <a:off x="1371600" y="1554480"/>
             <a:ext cx="9445752" cy="4114800"/>
           </a:xfrm>
           <a:prstGeom prst="rect">
@@ -5748,7 +5879,7 @@
         <p:spPr>
           <a:xfrm>
             <a:off x="731520" y="365760"/>
-            <a:ext cx="10698480" cy="365760"/>
+            <a:ext cx="8961120" cy="365760"/>
           </a:xfrm>
           <a:prstGeom prst="rect">
             <a:avLst/>
@@ -5784,7 +5915,7 @@
         <p:spPr>
           <a:xfrm>
             <a:off x="731520" y="685800"/>
-            <a:ext cx="10698480" cy="640080"/>
+            <a:ext cx="8961120" cy="640080"/>
           </a:xfrm>
           <a:prstGeom prst="rect">
             <a:avLst/>
@@ -5811,9 +5942,33 @@
           </a:p>
         </p:txBody>
       </p:sp>
-      <p:sp>
-        <p:nvSpPr>
-          <p:cNvPr id="5" name="Rectangle 4"/>
+      <p:pic>
+        <p:nvPicPr>
+          <p:cNvPr id="5" name="Picture 4" descr="mcit-logo.png"/>
+          <p:cNvPicPr>
+            <a:picLocks noChangeAspect="1"/>
+          </p:cNvPicPr>
+          <p:nvPr/>
+        </p:nvPicPr>
+        <p:blipFill>
+          <a:blip r:embed="rId2"/>
+          <a:stretch>
+            <a:fillRect/>
+          </a:stretch>
+        </p:blipFill>
+        <p:spPr>
+          <a:xfrm>
+            <a:off x="10149840" y="384048"/>
+            <a:ext cx="1307592" cy="685800"/>
+          </a:xfrm>
+          <a:prstGeom prst="rect">
+            <a:avLst/>
+          </a:prstGeom>
+        </p:spPr>
+      </p:pic>
+      <p:sp>
+        <p:nvSpPr>
+          <p:cNvPr id="6" name="Rectangle 5"/>
           <p:cNvSpPr/>
           <p:nvPr/>
         </p:nvSpPr>
@@ -5856,7 +6011,7 @@
       </p:sp>
       <p:sp>
         <p:nvSpPr>
-          <p:cNvPr id="6" name="Rounded Rectangle 5"/>
+          <p:cNvPr id="7" name="Rounded Rectangle 6"/>
           <p:cNvSpPr/>
           <p:nvPr/>
         </p:nvSpPr>
@@ -5994,7 +6149,7 @@
       </p:sp>
       <p:sp>
         <p:nvSpPr>
-          <p:cNvPr id="7" name="Rounded Rectangle 6"/>
+          <p:cNvPr id="8" name="Rounded Rectangle 7"/>
           <p:cNvSpPr/>
           <p:nvPr/>
         </p:nvSpPr>
@@ -6132,7 +6287,7 @@
       </p:sp>
       <p:sp>
         <p:nvSpPr>
-          <p:cNvPr id="8" name="Rounded Rectangle 7"/>
+          <p:cNvPr id="9" name="Rounded Rectangle 8"/>
           <p:cNvSpPr/>
           <p:nvPr/>
         </p:nvSpPr>
@@ -6338,7 +6493,7 @@
         <p:spPr>
           <a:xfrm>
             <a:off x="731520" y="365760"/>
-            <a:ext cx="10698480" cy="365760"/>
+            <a:ext cx="8961120" cy="365760"/>
           </a:xfrm>
           <a:prstGeom prst="rect">
             <a:avLst/>
@@ -6374,7 +6529,7 @@
         <p:spPr>
           <a:xfrm>
             <a:off x="731520" y="685800"/>
-            <a:ext cx="10698480" cy="640080"/>
+            <a:ext cx="8961120" cy="640080"/>
           </a:xfrm>
           <a:prstGeom prst="rect">
             <a:avLst/>
@@ -6401,9 +6556,33 @@
           </a:p>
         </p:txBody>
       </p:sp>
-      <p:sp>
-        <p:nvSpPr>
-          <p:cNvPr id="5" name="Rectangle 4"/>
+      <p:pic>
+        <p:nvPicPr>
+          <p:cNvPr id="5" name="Picture 4" descr="mcit-logo.png"/>
+          <p:cNvPicPr>
+            <a:picLocks noChangeAspect="1"/>
+          </p:cNvPicPr>
+          <p:nvPr/>
+        </p:nvPicPr>
+        <p:blipFill>
+          <a:blip r:embed="rId2"/>
+          <a:stretch>
+            <a:fillRect/>
+          </a:stretch>
+        </p:blipFill>
+        <p:spPr>
+          <a:xfrm>
+            <a:off x="10149840" y="384048"/>
+            <a:ext cx="1307592" cy="685800"/>
+          </a:xfrm>
+          <a:prstGeom prst="rect">
+            <a:avLst/>
+          </a:prstGeom>
+        </p:spPr>
+      </p:pic>
+      <p:sp>
+        <p:nvSpPr>
+          <p:cNvPr id="6" name="Rectangle 5"/>
           <p:cNvSpPr/>
           <p:nvPr/>
         </p:nvSpPr>
@@ -6446,7 +6625,7 @@
       </p:sp>
       <p:sp>
         <p:nvSpPr>
-          <p:cNvPr id="6" name="Rounded Rectangle 5"/>
+          <p:cNvPr id="7" name="Rounded Rectangle 6"/>
           <p:cNvSpPr/>
           <p:nvPr/>
         </p:nvSpPr>
@@ -6584,7 +6763,7 @@
       </p:sp>
       <p:sp>
         <p:nvSpPr>
-          <p:cNvPr id="7" name="Rounded Rectangle 6"/>
+          <p:cNvPr id="8" name="Rounded Rectangle 7"/>
           <p:cNvSpPr/>
           <p:nvPr/>
         </p:nvSpPr>
@@ -6722,7 +6901,7 @@
       </p:sp>
       <p:sp>
         <p:nvSpPr>
-          <p:cNvPr id="8" name="Rounded Rectangle 7"/>
+          <p:cNvPr id="9" name="Rounded Rectangle 8"/>
           <p:cNvSpPr/>
           <p:nvPr/>
         </p:nvSpPr>
@@ -6928,7 +7107,7 @@
         <p:spPr>
           <a:xfrm>
             <a:off x="731520" y="365760"/>
-            <a:ext cx="10698480" cy="365760"/>
+            <a:ext cx="8961120" cy="365760"/>
           </a:xfrm>
           <a:prstGeom prst="rect">
             <a:avLst/>
@@ -6964,7 +7143,7 @@
         <p:spPr>
           <a:xfrm>
             <a:off x="731520" y="685800"/>
-            <a:ext cx="10698480" cy="640080"/>
+            <a:ext cx="8961120" cy="640080"/>
           </a:xfrm>
           <a:prstGeom prst="rect">
             <a:avLst/>
@@ -6991,9 +7170,33 @@
           </a:p>
         </p:txBody>
       </p:sp>
-      <p:sp>
-        <p:nvSpPr>
-          <p:cNvPr id="5" name="Rectangle 4"/>
+      <p:pic>
+        <p:nvPicPr>
+          <p:cNvPr id="5" name="Picture 4" descr="mcit-logo.png"/>
+          <p:cNvPicPr>
+            <a:picLocks noChangeAspect="1"/>
+          </p:cNvPicPr>
+          <p:nvPr/>
+        </p:nvPicPr>
+        <p:blipFill>
+          <a:blip r:embed="rId2"/>
+          <a:stretch>
+            <a:fillRect/>
+          </a:stretch>
+        </p:blipFill>
+        <p:spPr>
+          <a:xfrm>
+            <a:off x="10149840" y="384048"/>
+            <a:ext cx="1307592" cy="685800"/>
+          </a:xfrm>
+          <a:prstGeom prst="rect">
+            <a:avLst/>
+          </a:prstGeom>
+        </p:spPr>
+      </p:pic>
+      <p:sp>
+        <p:nvSpPr>
+          <p:cNvPr id="6" name="Rectangle 5"/>
           <p:cNvSpPr/>
           <p:nvPr/>
         </p:nvSpPr>
@@ -7036,7 +7239,7 @@
       </p:sp>
       <p:sp>
         <p:nvSpPr>
-          <p:cNvPr id="6" name="Rounded Rectangle 5"/>
+          <p:cNvPr id="7" name="Rounded Rectangle 6"/>
           <p:cNvSpPr/>
           <p:nvPr/>
         </p:nvSpPr>
@@ -7174,7 +7377,7 @@
       </p:sp>
       <p:sp>
         <p:nvSpPr>
-          <p:cNvPr id="7" name="Rounded Rectangle 6"/>
+          <p:cNvPr id="8" name="Rounded Rectangle 7"/>
           <p:cNvSpPr/>
           <p:nvPr/>
         </p:nvSpPr>
@@ -7380,7 +7583,7 @@
         <p:spPr>
           <a:xfrm>
             <a:off x="731520" y="365760"/>
-            <a:ext cx="10698480" cy="365760"/>
+            <a:ext cx="8961120" cy="365760"/>
           </a:xfrm>
           <a:prstGeom prst="rect">
             <a:avLst/>
@@ -7416,7 +7619,7 @@
         <p:spPr>
           <a:xfrm>
             <a:off x="731520" y="685800"/>
-            <a:ext cx="10698480" cy="640080"/>
+            <a:ext cx="8961120" cy="640080"/>
           </a:xfrm>
           <a:prstGeom prst="rect">
             <a:avLst/>
@@ -7443,9 +7646,33 @@
           </a:p>
         </p:txBody>
       </p:sp>
-      <p:sp>
-        <p:nvSpPr>
-          <p:cNvPr id="5" name="Rectangle 4"/>
+      <p:pic>
+        <p:nvPicPr>
+          <p:cNvPr id="5" name="Picture 4" descr="mcit-logo.png"/>
+          <p:cNvPicPr>
+            <a:picLocks noChangeAspect="1"/>
+          </p:cNvPicPr>
+          <p:nvPr/>
+        </p:nvPicPr>
+        <p:blipFill>
+          <a:blip r:embed="rId2"/>
+          <a:stretch>
+            <a:fillRect/>
+          </a:stretch>
+        </p:blipFill>
+        <p:spPr>
+          <a:xfrm>
+            <a:off x="10149840" y="384048"/>
+            <a:ext cx="1307592" cy="685800"/>
+          </a:xfrm>
+          <a:prstGeom prst="rect">
+            <a:avLst/>
+          </a:prstGeom>
+        </p:spPr>
+      </p:pic>
+      <p:sp>
+        <p:nvSpPr>
+          <p:cNvPr id="6" name="Rectangle 5"/>
           <p:cNvSpPr/>
           <p:nvPr/>
         </p:nvSpPr>
@@ -7488,7 +7715,7 @@
       </p:sp>
       <p:sp>
         <p:nvSpPr>
-          <p:cNvPr id="6" name="Rounded Rectangle 5"/>
+          <p:cNvPr id="7" name="Rounded Rectangle 6"/>
           <p:cNvSpPr/>
           <p:nvPr/>
         </p:nvSpPr>
@@ -7626,7 +7853,7 @@
       </p:sp>
       <p:sp>
         <p:nvSpPr>
-          <p:cNvPr id="7" name="Rounded Rectangle 6"/>
+          <p:cNvPr id="8" name="Rounded Rectangle 7"/>
           <p:cNvSpPr/>
           <p:nvPr/>
         </p:nvSpPr>
@@ -7832,7 +8059,7 @@
         <p:spPr>
           <a:xfrm>
             <a:off x="731520" y="365760"/>
-            <a:ext cx="10698480" cy="365760"/>
+            <a:ext cx="8961120" cy="365760"/>
           </a:xfrm>
           <a:prstGeom prst="rect">
             <a:avLst/>
@@ -7868,7 +8095,7 @@
         <p:spPr>
           <a:xfrm>
             <a:off x="731520" y="685800"/>
-            <a:ext cx="10698480" cy="640080"/>
+            <a:ext cx="8961120" cy="640080"/>
           </a:xfrm>
           <a:prstGeom prst="rect">
             <a:avLst/>
@@ -7895,9 +8122,33 @@
           </a:p>
         </p:txBody>
       </p:sp>
-      <p:sp>
-        <p:nvSpPr>
-          <p:cNvPr id="5" name="Rectangle 4"/>
+      <p:pic>
+        <p:nvPicPr>
+          <p:cNvPr id="5" name="Picture 4" descr="mcit-logo.png"/>
+          <p:cNvPicPr>
+            <a:picLocks noChangeAspect="1"/>
+          </p:cNvPicPr>
+          <p:nvPr/>
+        </p:nvPicPr>
+        <p:blipFill>
+          <a:blip r:embed="rId2"/>
+          <a:stretch>
+            <a:fillRect/>
+          </a:stretch>
+        </p:blipFill>
+        <p:spPr>
+          <a:xfrm>
+            <a:off x="10149840" y="384048"/>
+            <a:ext cx="1307592" cy="685800"/>
+          </a:xfrm>
+          <a:prstGeom prst="rect">
+            <a:avLst/>
+          </a:prstGeom>
+        </p:spPr>
+      </p:pic>
+      <p:sp>
+        <p:nvSpPr>
+          <p:cNvPr id="6" name="Rectangle 5"/>
           <p:cNvSpPr/>
           <p:nvPr/>
         </p:nvSpPr>
@@ -7940,7 +8191,7 @@
       </p:sp>
       <p:sp>
         <p:nvSpPr>
-          <p:cNvPr id="6" name="Rounded Rectangle 5"/>
+          <p:cNvPr id="7" name="Rounded Rectangle 6"/>
           <p:cNvSpPr/>
           <p:nvPr/>
         </p:nvSpPr>
@@ -8078,7 +8329,7 @@
       </p:sp>
       <p:sp>
         <p:nvSpPr>
-          <p:cNvPr id="7" name="Rounded Rectangle 6"/>
+          <p:cNvPr id="8" name="Rounded Rectangle 7"/>
           <p:cNvSpPr/>
           <p:nvPr/>
         </p:nvSpPr>
@@ -8284,7 +8535,7 @@
         <p:spPr>
           <a:xfrm>
             <a:off x="731520" y="365760"/>
-            <a:ext cx="10698480" cy="365760"/>
+            <a:ext cx="8961120" cy="365760"/>
           </a:xfrm>
           <a:prstGeom prst="rect">
             <a:avLst/>
@@ -8320,7 +8571,7 @@
         <p:spPr>
           <a:xfrm>
             <a:off x="731520" y="685800"/>
-            <a:ext cx="10698480" cy="640080"/>
+            <a:ext cx="8961120" cy="640080"/>
           </a:xfrm>
           <a:prstGeom prst="rect">
             <a:avLst/>
@@ -8347,97 +8598,9 @@
           </a:p>
         </p:txBody>
       </p:sp>
-      <p:sp>
-        <p:nvSpPr>
-          <p:cNvPr id="5" name="Rectangle 4"/>
-          <p:cNvSpPr/>
-          <p:nvPr/>
-        </p:nvSpPr>
-        <p:spPr>
-          <a:xfrm>
-            <a:off x="731520" y="1371600"/>
-            <a:ext cx="10728655" cy="18288"/>
-          </a:xfrm>
-          <a:prstGeom prst="rect">
-            <a:avLst/>
-          </a:prstGeom>
-          <a:solidFill>
-            <a:srgbClr val="D4AF37"/>
-          </a:solidFill>
-          <a:ln>
-            <a:noFill/>
-          </a:ln>
-        </p:spPr>
-        <p:style>
-          <a:lnRef idx="1">
-            <a:schemeClr val="accent1"/>
-          </a:lnRef>
-          <a:fillRef idx="3">
-            <a:schemeClr val="accent1"/>
-          </a:fillRef>
-          <a:effectRef idx="2">
-            <a:schemeClr val="accent1"/>
-          </a:effectRef>
-          <a:fontRef idx="minor">
-            <a:schemeClr val="lt1"/>
-          </a:fontRef>
-        </p:style>
-        <p:txBody>
-          <a:bodyPr rtlCol="0" anchor="ctr"/>
-          <a:lstStyle/>
-          <a:p>
-            <a:pPr algn="ctr"/>
-          </a:p>
-        </p:txBody>
-      </p:sp>
-      <p:sp>
-        <p:nvSpPr>
-          <p:cNvPr id="6" name="Rounded Rectangle 5"/>
-          <p:cNvSpPr/>
-          <p:nvPr/>
-        </p:nvSpPr>
-        <p:spPr>
-          <a:xfrm>
-            <a:off x="676656" y="1728216"/>
-            <a:ext cx="6876288" cy="4114800"/>
-          </a:xfrm>
-          <a:prstGeom prst="roundRect">
-            <a:avLst/>
-          </a:prstGeom>
-          <a:solidFill>
-            <a:srgbClr val="111827"/>
-          </a:solidFill>
-          <a:ln w="19050">
-            <a:solidFill>
-              <a:srgbClr val="D4AF37"/>
-            </a:solidFill>
-          </a:ln>
-        </p:spPr>
-        <p:style>
-          <a:lnRef idx="1">
-            <a:schemeClr val="accent1"/>
-          </a:lnRef>
-          <a:fillRef idx="3">
-            <a:schemeClr val="accent1"/>
-          </a:fillRef>
-          <a:effectRef idx="2">
-            <a:schemeClr val="accent1"/>
-          </a:effectRef>
-          <a:fontRef idx="minor">
-            <a:schemeClr val="lt1"/>
-          </a:fontRef>
-        </p:style>
-        <p:txBody>
-          <a:bodyPr rtlCol="0" anchor="ctr"/>
-          <a:lstStyle/>
-          <a:p>
-            <a:pPr algn="ctr"/>
-          </a:p>
-        </p:txBody>
-      </p:sp>
       <p:pic>
         <p:nvPicPr>
-          <p:cNvPr id="7" name="Picture 6" descr="tut_ui_notebooks.png"/>
+          <p:cNvPr id="5" name="Picture 4" descr="mcit-logo.png"/>
           <p:cNvPicPr>
             <a:picLocks noChangeAspect="1"/>
           </p:cNvPicPr>
@@ -8451,6 +8614,118 @@
         </p:blipFill>
         <p:spPr>
           <a:xfrm>
+            <a:off x="10149840" y="384048"/>
+            <a:ext cx="1307592" cy="685800"/>
+          </a:xfrm>
+          <a:prstGeom prst="rect">
+            <a:avLst/>
+          </a:prstGeom>
+        </p:spPr>
+      </p:pic>
+      <p:sp>
+        <p:nvSpPr>
+          <p:cNvPr id="6" name="Rectangle 5"/>
+          <p:cNvSpPr/>
+          <p:nvPr/>
+        </p:nvSpPr>
+        <p:spPr>
+          <a:xfrm>
+            <a:off x="731520" y="1371600"/>
+            <a:ext cx="10728655" cy="18288"/>
+          </a:xfrm>
+          <a:prstGeom prst="rect">
+            <a:avLst/>
+          </a:prstGeom>
+          <a:solidFill>
+            <a:srgbClr val="D4AF37"/>
+          </a:solidFill>
+          <a:ln>
+            <a:noFill/>
+          </a:ln>
+        </p:spPr>
+        <p:style>
+          <a:lnRef idx="1">
+            <a:schemeClr val="accent1"/>
+          </a:lnRef>
+          <a:fillRef idx="3">
+            <a:schemeClr val="accent1"/>
+          </a:fillRef>
+          <a:effectRef idx="2">
+            <a:schemeClr val="accent1"/>
+          </a:effectRef>
+          <a:fontRef idx="minor">
+            <a:schemeClr val="lt1"/>
+          </a:fontRef>
+        </p:style>
+        <p:txBody>
+          <a:bodyPr rtlCol="0" anchor="ctr"/>
+          <a:lstStyle/>
+          <a:p>
+            <a:pPr algn="ctr"/>
+          </a:p>
+        </p:txBody>
+      </p:sp>
+      <p:sp>
+        <p:nvSpPr>
+          <p:cNvPr id="7" name="Rounded Rectangle 6"/>
+          <p:cNvSpPr/>
+          <p:nvPr/>
+        </p:nvSpPr>
+        <p:spPr>
+          <a:xfrm>
+            <a:off x="676656" y="1728216"/>
+            <a:ext cx="6876288" cy="4114800"/>
+          </a:xfrm>
+          <a:prstGeom prst="roundRect">
+            <a:avLst/>
+          </a:prstGeom>
+          <a:solidFill>
+            <a:srgbClr val="111827"/>
+          </a:solidFill>
+          <a:ln w="19050">
+            <a:solidFill>
+              <a:srgbClr val="D4AF37"/>
+            </a:solidFill>
+          </a:ln>
+        </p:spPr>
+        <p:style>
+          <a:lnRef idx="1">
+            <a:schemeClr val="accent1"/>
+          </a:lnRef>
+          <a:fillRef idx="3">
+            <a:schemeClr val="accent1"/>
+          </a:fillRef>
+          <a:effectRef idx="2">
+            <a:schemeClr val="accent1"/>
+          </a:effectRef>
+          <a:fontRef idx="minor">
+            <a:schemeClr val="lt1"/>
+          </a:fontRef>
+        </p:style>
+        <p:txBody>
+          <a:bodyPr rtlCol="0" anchor="ctr"/>
+          <a:lstStyle/>
+          <a:p>
+            <a:pPr algn="ctr"/>
+          </a:p>
+        </p:txBody>
+      </p:sp>
+      <p:pic>
+        <p:nvPicPr>
+          <p:cNvPr id="8" name="Picture 7" descr="tut_ui_notebooks.png"/>
+          <p:cNvPicPr>
+            <a:picLocks noChangeAspect="1"/>
+          </p:cNvPicPr>
+          <p:nvPr/>
+        </p:nvPicPr>
+        <p:blipFill>
+          <a:blip r:embed="rId3"/>
+          <a:stretch>
+            <a:fillRect/>
+          </a:stretch>
+        </p:blipFill>
+        <p:spPr>
+          <a:xfrm>
             <a:off x="731520" y="1783080"/>
             <a:ext cx="6766560" cy="4005072"/>
           </a:xfrm>
@@ -8461,7 +8736,7 @@
       </p:pic>
       <p:sp>
         <p:nvSpPr>
-          <p:cNvPr id="8" name="Rounded Rectangle 7"/>
+          <p:cNvPr id="9" name="Rounded Rectangle 8"/>
           <p:cNvSpPr/>
           <p:nvPr/>
         </p:nvSpPr>
@@ -8567,7 +8842,7 @@
       </p:sp>
       <p:sp>
         <p:nvSpPr>
-          <p:cNvPr id="9" name="Rounded Rectangle 8"/>
+          <p:cNvPr id="10" name="Rounded Rectangle 9"/>
           <p:cNvSpPr/>
           <p:nvPr/>
         </p:nvSpPr>
@@ -8673,7 +8948,7 @@
       </p:sp>
       <p:sp>
         <p:nvSpPr>
-          <p:cNvPr id="10" name="Rounded Rectangle 9"/>
+          <p:cNvPr id="11" name="Rounded Rectangle 10"/>
           <p:cNvSpPr/>
           <p:nvPr/>
         </p:nvSpPr>
@@ -8847,7 +9122,7 @@
         <p:spPr>
           <a:xfrm>
             <a:off x="731520" y="365760"/>
-            <a:ext cx="10698480" cy="365760"/>
+            <a:ext cx="8961120" cy="365760"/>
           </a:xfrm>
           <a:prstGeom prst="rect">
             <a:avLst/>
@@ -8883,7 +9158,7 @@
         <p:spPr>
           <a:xfrm>
             <a:off x="731520" y="685800"/>
-            <a:ext cx="10698480" cy="640080"/>
+            <a:ext cx="8961120" cy="640080"/>
           </a:xfrm>
           <a:prstGeom prst="rect">
             <a:avLst/>
@@ -8910,97 +9185,9 @@
           </a:p>
         </p:txBody>
       </p:sp>
-      <p:sp>
-        <p:nvSpPr>
-          <p:cNvPr id="5" name="Rectangle 4"/>
-          <p:cNvSpPr/>
-          <p:nvPr/>
-        </p:nvSpPr>
-        <p:spPr>
-          <a:xfrm>
-            <a:off x="731520" y="1371600"/>
-            <a:ext cx="10728655" cy="18288"/>
-          </a:xfrm>
-          <a:prstGeom prst="rect">
-            <a:avLst/>
-          </a:prstGeom>
-          <a:solidFill>
-            <a:srgbClr val="D4AF37"/>
-          </a:solidFill>
-          <a:ln>
-            <a:noFill/>
-          </a:ln>
-        </p:spPr>
-        <p:style>
-          <a:lnRef idx="1">
-            <a:schemeClr val="accent1"/>
-          </a:lnRef>
-          <a:fillRef idx="3">
-            <a:schemeClr val="accent1"/>
-          </a:fillRef>
-          <a:effectRef idx="2">
-            <a:schemeClr val="accent1"/>
-          </a:effectRef>
-          <a:fontRef idx="minor">
-            <a:schemeClr val="lt1"/>
-          </a:fontRef>
-        </p:style>
-        <p:txBody>
-          <a:bodyPr rtlCol="0" anchor="ctr"/>
-          <a:lstStyle/>
-          <a:p>
-            <a:pPr algn="ctr"/>
-          </a:p>
-        </p:txBody>
-      </p:sp>
-      <p:sp>
-        <p:nvSpPr>
-          <p:cNvPr id="6" name="Rounded Rectangle 5"/>
-          <p:cNvSpPr/>
-          <p:nvPr/>
-        </p:nvSpPr>
-        <p:spPr>
-          <a:xfrm>
-            <a:off x="676656" y="1728216"/>
-            <a:ext cx="6876288" cy="4114800"/>
-          </a:xfrm>
-          <a:prstGeom prst="roundRect">
-            <a:avLst/>
-          </a:prstGeom>
-          <a:solidFill>
-            <a:srgbClr val="111827"/>
-          </a:solidFill>
-          <a:ln w="19050">
-            <a:solidFill>
-              <a:srgbClr val="38BDF8"/>
-            </a:solidFill>
-          </a:ln>
-        </p:spPr>
-        <p:style>
-          <a:lnRef idx="1">
-            <a:schemeClr val="accent1"/>
-          </a:lnRef>
-          <a:fillRef idx="3">
-            <a:schemeClr val="accent1"/>
-          </a:fillRef>
-          <a:effectRef idx="2">
-            <a:schemeClr val="accent1"/>
-          </a:effectRef>
-          <a:fontRef idx="minor">
-            <a:schemeClr val="lt1"/>
-          </a:fontRef>
-        </p:style>
-        <p:txBody>
-          <a:bodyPr rtlCol="0" anchor="ctr"/>
-          <a:lstStyle/>
-          <a:p>
-            <a:pPr algn="ctr"/>
-          </a:p>
-        </p:txBody>
-      </p:sp>
       <p:pic>
         <p:nvPicPr>
-          <p:cNvPr id="7" name="Picture 6" descr="tut_ui_agent.png"/>
+          <p:cNvPr id="5" name="Picture 4" descr="mcit-logo.png"/>
           <p:cNvPicPr>
             <a:picLocks noChangeAspect="1"/>
           </p:cNvPicPr>
@@ -9014,6 +9201,118 @@
         </p:blipFill>
         <p:spPr>
           <a:xfrm>
+            <a:off x="10149840" y="384048"/>
+            <a:ext cx="1307592" cy="685800"/>
+          </a:xfrm>
+          <a:prstGeom prst="rect">
+            <a:avLst/>
+          </a:prstGeom>
+        </p:spPr>
+      </p:pic>
+      <p:sp>
+        <p:nvSpPr>
+          <p:cNvPr id="6" name="Rectangle 5"/>
+          <p:cNvSpPr/>
+          <p:nvPr/>
+        </p:nvSpPr>
+        <p:spPr>
+          <a:xfrm>
+            <a:off x="731520" y="1371600"/>
+            <a:ext cx="10728655" cy="18288"/>
+          </a:xfrm>
+          <a:prstGeom prst="rect">
+            <a:avLst/>
+          </a:prstGeom>
+          <a:solidFill>
+            <a:srgbClr val="D4AF37"/>
+          </a:solidFill>
+          <a:ln>
+            <a:noFill/>
+          </a:ln>
+        </p:spPr>
+        <p:style>
+          <a:lnRef idx="1">
+            <a:schemeClr val="accent1"/>
+          </a:lnRef>
+          <a:fillRef idx="3">
+            <a:schemeClr val="accent1"/>
+          </a:fillRef>
+          <a:effectRef idx="2">
+            <a:schemeClr val="accent1"/>
+          </a:effectRef>
+          <a:fontRef idx="minor">
+            <a:schemeClr val="lt1"/>
+          </a:fontRef>
+        </p:style>
+        <p:txBody>
+          <a:bodyPr rtlCol="0" anchor="ctr"/>
+          <a:lstStyle/>
+          <a:p>
+            <a:pPr algn="ctr"/>
+          </a:p>
+        </p:txBody>
+      </p:sp>
+      <p:sp>
+        <p:nvSpPr>
+          <p:cNvPr id="7" name="Rounded Rectangle 6"/>
+          <p:cNvSpPr/>
+          <p:nvPr/>
+        </p:nvSpPr>
+        <p:spPr>
+          <a:xfrm>
+            <a:off x="676656" y="1728216"/>
+            <a:ext cx="6876288" cy="4114800"/>
+          </a:xfrm>
+          <a:prstGeom prst="roundRect">
+            <a:avLst/>
+          </a:prstGeom>
+          <a:solidFill>
+            <a:srgbClr val="111827"/>
+          </a:solidFill>
+          <a:ln w="19050">
+            <a:solidFill>
+              <a:srgbClr val="38BDF8"/>
+            </a:solidFill>
+          </a:ln>
+        </p:spPr>
+        <p:style>
+          <a:lnRef idx="1">
+            <a:schemeClr val="accent1"/>
+          </a:lnRef>
+          <a:fillRef idx="3">
+            <a:schemeClr val="accent1"/>
+          </a:fillRef>
+          <a:effectRef idx="2">
+            <a:schemeClr val="accent1"/>
+          </a:effectRef>
+          <a:fontRef idx="minor">
+            <a:schemeClr val="lt1"/>
+          </a:fontRef>
+        </p:style>
+        <p:txBody>
+          <a:bodyPr rtlCol="0" anchor="ctr"/>
+          <a:lstStyle/>
+          <a:p>
+            <a:pPr algn="ctr"/>
+          </a:p>
+        </p:txBody>
+      </p:sp>
+      <p:pic>
+        <p:nvPicPr>
+          <p:cNvPr id="8" name="Picture 7" descr="tut_ui_agent.png"/>
+          <p:cNvPicPr>
+            <a:picLocks noChangeAspect="1"/>
+          </p:cNvPicPr>
+          <p:nvPr/>
+        </p:nvPicPr>
+        <p:blipFill>
+          <a:blip r:embed="rId3"/>
+          <a:stretch>
+            <a:fillRect/>
+          </a:stretch>
+        </p:blipFill>
+        <p:spPr>
+          <a:xfrm>
             <a:off x="731520" y="1783080"/>
             <a:ext cx="6766560" cy="4005072"/>
           </a:xfrm>
@@ -9024,7 +9323,7 @@
       </p:pic>
       <p:sp>
         <p:nvSpPr>
-          <p:cNvPr id="8" name="Rounded Rectangle 7"/>
+          <p:cNvPr id="9" name="Rounded Rectangle 8"/>
           <p:cNvSpPr/>
           <p:nvPr/>
         </p:nvSpPr>
@@ -9130,7 +9429,7 @@
       </p:sp>
       <p:sp>
         <p:nvSpPr>
-          <p:cNvPr id="9" name="Rounded Rectangle 8"/>
+          <p:cNvPr id="10" name="Rounded Rectangle 9"/>
           <p:cNvSpPr/>
           <p:nvPr/>
         </p:nvSpPr>
@@ -9236,7 +9535,7 @@
       </p:sp>
       <p:sp>
         <p:nvSpPr>
-          <p:cNvPr id="10" name="Rounded Rectangle 9"/>
+          <p:cNvPr id="11" name="Rounded Rectangle 10"/>
           <p:cNvSpPr/>
           <p:nvPr/>
         </p:nvSpPr>
@@ -9410,7 +9709,7 @@
         <p:spPr>
           <a:xfrm>
             <a:off x="731520" y="365760"/>
-            <a:ext cx="10698480" cy="365760"/>
+            <a:ext cx="8961120" cy="365760"/>
           </a:xfrm>
           <a:prstGeom prst="rect">
             <a:avLst/>
@@ -9446,7 +9745,7 @@
         <p:spPr>
           <a:xfrm>
             <a:off x="731520" y="685800"/>
-            <a:ext cx="10698480" cy="640080"/>
+            <a:ext cx="8961120" cy="640080"/>
           </a:xfrm>
           <a:prstGeom prst="rect">
             <a:avLst/>
@@ -9473,9 +9772,33 @@
           </a:p>
         </p:txBody>
       </p:sp>
-      <p:sp>
-        <p:nvSpPr>
-          <p:cNvPr id="5" name="Rectangle 4"/>
+      <p:pic>
+        <p:nvPicPr>
+          <p:cNvPr id="5" name="Picture 4" descr="mcit-logo.png"/>
+          <p:cNvPicPr>
+            <a:picLocks noChangeAspect="1"/>
+          </p:cNvPicPr>
+          <p:nvPr/>
+        </p:nvPicPr>
+        <p:blipFill>
+          <a:blip r:embed="rId2"/>
+          <a:stretch>
+            <a:fillRect/>
+          </a:stretch>
+        </p:blipFill>
+        <p:spPr>
+          <a:xfrm>
+            <a:off x="10149840" y="384048"/>
+            <a:ext cx="1307592" cy="685800"/>
+          </a:xfrm>
+          <a:prstGeom prst="rect">
+            <a:avLst/>
+          </a:prstGeom>
+        </p:spPr>
+      </p:pic>
+      <p:sp>
+        <p:nvSpPr>
+          <p:cNvPr id="6" name="Rectangle 5"/>
           <p:cNvSpPr/>
           <p:nvPr/>
         </p:nvSpPr>
@@ -9518,7 +9841,7 @@
       </p:sp>
       <p:sp>
         <p:nvSpPr>
-          <p:cNvPr id="6" name="Rounded Rectangle 5"/>
+          <p:cNvPr id="7" name="Rounded Rectangle 6"/>
           <p:cNvSpPr/>
           <p:nvPr/>
         </p:nvSpPr>
@@ -9656,7 +9979,7 @@
       </p:sp>
       <p:sp>
         <p:nvSpPr>
-          <p:cNvPr id="7" name="Rounded Rectangle 6"/>
+          <p:cNvPr id="8" name="Rounded Rectangle 7"/>
           <p:cNvSpPr/>
           <p:nvPr/>
         </p:nvSpPr>
@@ -9794,7 +10117,7 @@
       </p:sp>
       <p:sp>
         <p:nvSpPr>
-          <p:cNvPr id="8" name="Rounded Rectangle 7"/>
+          <p:cNvPr id="9" name="Rounded Rectangle 8"/>
           <p:cNvSpPr/>
           <p:nvPr/>
         </p:nvSpPr>

--- a/docs/TuT_AI_Marketing_Pitch_Deck.pptx
+++ b/docs/TuT_AI_Marketing_Pitch_Deck.pptx
@@ -19,6 +19,8 @@
     <p:sldId id="267" r:id="rId18"/>
     <p:sldId id="268" r:id="rId19"/>
     <p:sldId id="269" r:id="rId20"/>
+    <p:sldId id="270" r:id="rId21"/>
+    <p:sldId id="271" r:id="rId22"/>
   </p:sldIdLst>
   <p:sldSz cx="12191695" cy="6858000" type="screen4x3"/>
   <p:notesSz cx="6858000" cy="9144000"/>
@@ -3374,7 +3376,7 @@
               </a:defRPr>
             </a:pPr>
             <a:r>
-              <a:t>ENGINEERING MILESTONES</a:t>
+              <a:t>CONVERSATIONAL INTELLIGENCE</a:t>
             </a:r>
           </a:p>
         </p:txBody>
@@ -3410,7 +3412,7 @@
               </a:defRPr>
             </a:pPr>
             <a:r>
-              <a:t>The Development Journey: 4 Evolutionary Phases</a:t>
+              <a:t>Live Agent Showcase: In-Chat Deck Generation &amp; 3D Avatar</a:t>
             </a:r>
           </a:p>
         </p:txBody>
@@ -3490,8 +3492,77 @@
         </p:nvSpPr>
         <p:spPr>
           <a:xfrm>
-            <a:off x="731520" y="1645920"/>
-            <a:ext cx="5212080" cy="2194560"/>
+            <a:off x="676656" y="1728216"/>
+            <a:ext cx="6876288" cy="4114800"/>
+          </a:xfrm>
+          <a:prstGeom prst="roundRect">
+            <a:avLst/>
+          </a:prstGeom>
+          <a:solidFill>
+            <a:srgbClr val="111827"/>
+          </a:solidFill>
+          <a:ln w="19050">
+            <a:solidFill>
+              <a:srgbClr val="38BDF8"/>
+            </a:solidFill>
+          </a:ln>
+        </p:spPr>
+        <p:style>
+          <a:lnRef idx="1">
+            <a:schemeClr val="accent1"/>
+          </a:lnRef>
+          <a:fillRef idx="3">
+            <a:schemeClr val="accent1"/>
+          </a:fillRef>
+          <a:effectRef idx="2">
+            <a:schemeClr val="accent1"/>
+          </a:effectRef>
+          <a:fontRef idx="minor">
+            <a:schemeClr val="lt1"/>
+          </a:fontRef>
+        </p:style>
+        <p:txBody>
+          <a:bodyPr rtlCol="0" anchor="ctr"/>
+          <a:lstStyle/>
+          <a:p>
+            <a:pPr algn="ctr"/>
+          </a:p>
+        </p:txBody>
+      </p:sp>
+      <p:pic>
+        <p:nvPicPr>
+          <p:cNvPr id="8" name="Picture 7" descr="tut_ui_agent.png"/>
+          <p:cNvPicPr>
+            <a:picLocks noChangeAspect="1"/>
+          </p:cNvPicPr>
+          <p:nvPr/>
+        </p:nvPicPr>
+        <p:blipFill>
+          <a:blip r:embed="rId3"/>
+          <a:stretch>
+            <a:fillRect/>
+          </a:stretch>
+        </p:blipFill>
+        <p:spPr>
+          <a:xfrm>
+            <a:off x="731520" y="1783080"/>
+            <a:ext cx="6766560" cy="4005072"/>
+          </a:xfrm>
+          <a:prstGeom prst="rect">
+            <a:avLst/>
+          </a:prstGeom>
+        </p:spPr>
+      </p:pic>
+      <p:sp>
+        <p:nvSpPr>
+          <p:cNvPr id="9" name="Rounded Rectangle 8"/>
+          <p:cNvSpPr/>
+          <p:nvPr/>
+        </p:nvSpPr>
+        <p:spPr>
+          <a:xfrm>
+            <a:off x="7772400" y="1719072"/>
+            <a:ext cx="3685032" cy="1353312"/>
           </a:xfrm>
           <a:prstGeom prst="roundRect">
             <a:avLst/>
@@ -3520,30 +3591,30 @@
           </a:fontRef>
         </p:style>
         <p:txBody>
-          <a:bodyPr rtlCol="0" anchor="ctr" wrap="square" lIns="228600" rIns="228600" tIns="228600" bIns="182880"/>
+          <a:bodyPr rtlCol="0" anchor="ctr" wrap="square" lIns="182880" rIns="182880" tIns="109728" bIns="73152"/>
           <a:lstStyle/>
           <a:p>
             <a:pPr algn="ctr">
               <a:spcAft>
+                <a:spcPts val="200"/>
+              </a:spcAft>
+              <a:defRPr sz="900" b="1">
+                <a:solidFill>
+                  <a:srgbClr val="D4AF37"/>
+                </a:solidFill>
+                <a:latin typeface="Arial"/>
+              </a:defRPr>
+            </a:pPr>
+            <a:r>
+              <a:t>SOVEREIGN IDENTITY</a:t>
+            </a:r>
+          </a:p>
+          <a:p>
+            <a:pPr>
+              <a:spcAft>
                 <a:spcPts val="400"/>
               </a:spcAft>
-              <a:defRPr sz="1000" b="1">
-                <a:solidFill>
-                  <a:srgbClr val="D4AF37"/>
-                </a:solidFill>
-                <a:latin typeface="Arial"/>
-              </a:defRPr>
-            </a:pPr>
-            <a:r>
-              <a:t>PHASE 1: INCEPTION</a:t>
-            </a:r>
-          </a:p>
-          <a:p>
-            <a:pPr>
-              <a:spcAft>
-                <a:spcPts val="1000"/>
-              </a:spcAft>
-              <a:defRPr sz="1600" b="1">
+              <a:defRPr sz="1300" b="1">
                 <a:solidFill>
                   <a:srgbClr val="F8FAFC"/>
                 </a:solidFill>
@@ -3551,53 +3622,53 @@
               </a:defRPr>
             </a:pPr>
             <a:r>
-              <a:t>Phase 1: Foundation &amp; Sovereign Identity</a:t>
-            </a:r>
-          </a:p>
-          <a:p>
-            <a:pPr>
-              <a:spcAft>
-                <a:spcPts val="600"/>
-              </a:spcAft>
-              <a:defRPr sz="1200">
-                <a:solidFill>
-                  <a:srgbClr val="94A3B8"/>
-                </a:solidFill>
-                <a:latin typeface="Arial"/>
-              </a:defRPr>
-            </a:pPr>
-            <a:r>
-              <a:t>•  Transitioned away from generic third-party code to 100% Egyptian sovereign platform.</a:t>
-            </a:r>
-          </a:p>
-          <a:p>
-            <a:pPr>
-              <a:spcAft>
-                <a:spcPts val="600"/>
-              </a:spcAft>
-              <a:defRPr sz="1200">
-                <a:solidFill>
-                  <a:srgbClr val="94A3B8"/>
-                </a:solidFill>
-                <a:latin typeface="Arial"/>
-              </a:defRPr>
-            </a:pPr>
-            <a:r>
-              <a:t>•  Engineered the TuT AI identity: 10 historical personas &amp; 3D holographic cartouche.</a:t>
-            </a:r>
-          </a:p>
-        </p:txBody>
-      </p:sp>
-      <p:sp>
-        <p:nvSpPr>
-          <p:cNvPr id="8" name="Rounded Rectangle 7"/>
+              <a:t>3D Holographic Sovereign Avatar</a:t>
+            </a:r>
+          </a:p>
+          <a:p>
+            <a:pPr>
+              <a:spcAft>
+                <a:spcPts val="200"/>
+              </a:spcAft>
+              <a:defRPr sz="1050">
+                <a:solidFill>
+                  <a:srgbClr val="94A3B8"/>
+                </a:solidFill>
+                <a:latin typeface="Arial"/>
+              </a:defRPr>
+            </a:pPr>
+            <a:r>
+              <a:t>•  Interactive real-time 3D King Tut avatar blending Egyptian heritage with state-of-the-art AI.</a:t>
+            </a:r>
+          </a:p>
+          <a:p>
+            <a:pPr>
+              <a:spcAft>
+                <a:spcPts val="200"/>
+              </a:spcAft>
+              <a:defRPr sz="1050">
+                <a:solidFill>
+                  <a:srgbClr val="94A3B8"/>
+                </a:solidFill>
+                <a:latin typeface="Arial"/>
+              </a:defRPr>
+            </a:pPr>
+            <a:r>
+              <a:t>•  Dynamic state cues respond to thought cycles and generation stages.</a:t>
+            </a:r>
+          </a:p>
+        </p:txBody>
+      </p:sp>
+      <p:sp>
+        <p:nvSpPr>
+          <p:cNvPr id="10" name="Rounded Rectangle 9"/>
           <p:cNvSpPr/>
           <p:nvPr/>
         </p:nvSpPr>
         <p:spPr>
           <a:xfrm>
-            <a:off x="6217920" y="1645920"/>
-            <a:ext cx="5212080" cy="2194560"/>
+            <a:off x="7772400" y="3218688"/>
+            <a:ext cx="3685032" cy="1353312"/>
           </a:xfrm>
           <a:prstGeom prst="roundRect">
             <a:avLst/>
@@ -3626,30 +3697,30 @@
           </a:fontRef>
         </p:style>
         <p:txBody>
-          <a:bodyPr rtlCol="0" anchor="ctr" wrap="square" lIns="228600" rIns="228600" tIns="228600" bIns="182880"/>
+          <a:bodyPr rtlCol="0" anchor="ctr" wrap="square" lIns="182880" rIns="182880" tIns="109728" bIns="73152"/>
           <a:lstStyle/>
           <a:p>
             <a:pPr algn="ctr">
               <a:spcAft>
+                <a:spcPts val="200"/>
+              </a:spcAft>
+              <a:defRPr sz="900" b="1">
+                <a:solidFill>
+                  <a:srgbClr val="38BDF8"/>
+                </a:solidFill>
+                <a:latin typeface="Arial"/>
+              </a:defRPr>
+            </a:pPr>
+            <a:r>
+              <a:t>DECKCRAFT ENGINE</a:t>
+            </a:r>
+          </a:p>
+          <a:p>
+            <a:pPr>
+              <a:spcAft>
                 <a:spcPts val="400"/>
               </a:spcAft>
-              <a:defRPr sz="1000" b="1">
-                <a:solidFill>
-                  <a:srgbClr val="38BDF8"/>
-                </a:solidFill>
-                <a:latin typeface="Arial"/>
-              </a:defRPr>
-            </a:pPr>
-            <a:r>
-              <a:t>PHASE 2: ARCHITECTURE</a:t>
-            </a:r>
-          </a:p>
-          <a:p>
-            <a:pPr>
-              <a:spcAft>
-                <a:spcPts val="1000"/>
-              </a:spcAft>
-              <a:defRPr sz="1600" b="1">
+              <a:defRPr sz="1300" b="1">
                 <a:solidFill>
                   <a:srgbClr val="F8FAFC"/>
                 </a:solidFill>
@@ -3657,53 +3728,53 @@
               </a:defRPr>
             </a:pPr>
             <a:r>
-              <a:t>Phase 2: Core Engines &amp; Resilient Fixes</a:t>
-            </a:r>
-          </a:p>
-          <a:p>
-            <a:pPr>
-              <a:spcAft>
-                <a:spcPts val="600"/>
-              </a:spcAft>
-              <a:defRPr sz="1200">
-                <a:solidFill>
-                  <a:srgbClr val="94A3B8"/>
-                </a:solidFill>
-                <a:latin typeface="Arial"/>
-              </a:defRPr>
-            </a:pPr>
-            <a:r>
-              <a:t>•  Engineered the 3 pillars: Deep Summarization, DeckCraft (.pptx), and VectorCraft (infographics).</a:t>
-            </a:r>
-          </a:p>
-          <a:p>
-            <a:pPr>
-              <a:spcAft>
-                <a:spcPts val="600"/>
-              </a:spcAft>
-              <a:defRPr sz="1200">
-                <a:solidFill>
-                  <a:srgbClr val="94A3B8"/>
-                </a:solidFill>
-                <a:latin typeface="Arial"/>
-              </a:defRPr>
-            </a:pPr>
-            <a:r>
-              <a:t>•  Resolved TRPC runtime crashes via intelligent local Ollama fallback proxy.</a:t>
-            </a:r>
-          </a:p>
-        </p:txBody>
-      </p:sp>
-      <p:sp>
-        <p:nvSpPr>
-          <p:cNvPr id="9" name="Rounded Rectangle 8"/>
+              <a:t>In-Chat Autonomous Presentation Engine</a:t>
+            </a:r>
+          </a:p>
+          <a:p>
+            <a:pPr>
+              <a:spcAft>
+                <a:spcPts val="200"/>
+              </a:spcAft>
+              <a:defRPr sz="1050">
+                <a:solidFill>
+                  <a:srgbClr val="94A3B8"/>
+                </a:solidFill>
+                <a:latin typeface="Arial"/>
+              </a:defRPr>
+            </a:pPr>
+            <a:r>
+              <a:t>•  Live conversational workflow: User asks in Arabic for presentations on complex national topics.</a:t>
+            </a:r>
+          </a:p>
+          <a:p>
+            <a:pPr>
+              <a:spcAft>
+                <a:spcPts val="200"/>
+              </a:spcAft>
+              <a:defRPr sz="1050">
+                <a:solidFill>
+                  <a:srgbClr val="94A3B8"/>
+                </a:solidFill>
+                <a:latin typeface="Arial"/>
+              </a:defRPr>
+            </a:pPr>
+            <a:r>
+              <a:t>•  Generates genuine, fully editable PowerPoint decks (.pptx) right inside chat.</a:t>
+            </a:r>
+          </a:p>
+        </p:txBody>
+      </p:sp>
+      <p:sp>
+        <p:nvSpPr>
+          <p:cNvPr id="11" name="Rounded Rectangle 10"/>
           <p:cNvSpPr/>
           <p:nvPr/>
         </p:nvSpPr>
         <p:spPr>
           <a:xfrm>
-            <a:off x="731520" y="4023360"/>
-            <a:ext cx="5212080" cy="2194560"/>
+            <a:off x="7772400" y="4718304"/>
+            <a:ext cx="3685032" cy="1353312"/>
           </a:xfrm>
           <a:prstGeom prst="roundRect">
             <a:avLst/>
@@ -3732,30 +3803,30 @@
           </a:fontRef>
         </p:style>
         <p:txBody>
-          <a:bodyPr rtlCol="0" anchor="ctr" wrap="square" lIns="228600" rIns="228600" tIns="228600" bIns="182880"/>
+          <a:bodyPr rtlCol="0" anchor="ctr" wrap="square" lIns="182880" rIns="182880" tIns="109728" bIns="73152"/>
           <a:lstStyle/>
           <a:p>
             <a:pPr algn="ctr">
               <a:spcAft>
+                <a:spcPts val="200"/>
+              </a:spcAft>
+              <a:defRPr sz="900" b="1">
+                <a:solidFill>
+                  <a:srgbClr val="34D399"/>
+                </a:solidFill>
+                <a:latin typeface="Arial"/>
+              </a:defRPr>
+            </a:pPr>
+            <a:r>
+              <a:t>GPU ACCELERATION</a:t>
+            </a:r>
+          </a:p>
+          <a:p>
+            <a:pPr>
+              <a:spcAft>
                 <a:spcPts val="400"/>
               </a:spcAft>
-              <a:defRPr sz="1000" b="1">
-                <a:solidFill>
-                  <a:srgbClr val="34D399"/>
-                </a:solidFill>
-                <a:latin typeface="Arial"/>
-              </a:defRPr>
-            </a:pPr>
-            <a:r>
-              <a:t>PHASE 3: INTELLIGENCE</a:t>
-            </a:r>
-          </a:p>
-          <a:p>
-            <a:pPr>
-              <a:spcAft>
-                <a:spcPts val="1000"/>
-              </a:spcAft>
-              <a:defRPr sz="1600" b="1">
+              <a:defRPr sz="1300" b="1">
                 <a:solidFill>
                   <a:srgbClr val="F8FAFC"/>
                 </a:solidFill>
@@ -3763,145 +3834,39 @@
               </a:defRPr>
             </a:pPr>
             <a:r>
-              <a:t>Phase 3: Model Intelligence &amp; GPU Velocity</a:t>
-            </a:r>
-          </a:p>
-          <a:p>
-            <a:pPr>
-              <a:spcAft>
-                <a:spcPts val="600"/>
-              </a:spcAft>
-              <a:defRPr sz="1200">
-                <a:solidFill>
-                  <a:srgbClr val="94A3B8"/>
-                </a:solidFill>
-                <a:latin typeface="Arial"/>
-              </a:defRPr>
-            </a:pPr>
-            <a:r>
-              <a:t>•  Unlocked database to 131,072 context tokens, 16,384 output tokens, and 'pro' reasoning.</a:t>
-            </a:r>
-          </a:p>
-          <a:p>
-            <a:pPr>
-              <a:spcAft>
-                <a:spcPts val="600"/>
-              </a:spcAft>
-              <a:defRPr sz="1200">
-                <a:solidFill>
-                  <a:srgbClr val="94A3B8"/>
-                </a:solidFill>
-                <a:latin typeface="Arial"/>
-              </a:defRPr>
-            </a:pPr>
-            <a:r>
-              <a:t>•  Pinned gemma4:e4b into NVIDIA RTX 4050 GPU VRAM (keep_alive: '-1') for instant streaming.</a:t>
-            </a:r>
-          </a:p>
-        </p:txBody>
-      </p:sp>
-      <p:sp>
-        <p:nvSpPr>
-          <p:cNvPr id="10" name="Rounded Rectangle 9"/>
-          <p:cNvSpPr/>
-          <p:nvPr/>
-        </p:nvSpPr>
-        <p:spPr>
-          <a:xfrm>
-            <a:off x="6217920" y="4023360"/>
-            <a:ext cx="5212080" cy="2194560"/>
-          </a:xfrm>
-          <a:prstGeom prst="roundRect">
-            <a:avLst/>
-          </a:prstGeom>
-          <a:solidFill>
-            <a:srgbClr val="111827"/>
-          </a:solidFill>
-          <a:ln w="15240">
-            <a:solidFill>
-              <a:srgbClr val="F59E0B"/>
-            </a:solidFill>
-          </a:ln>
-        </p:spPr>
-        <p:style>
-          <a:lnRef idx="1">
-            <a:schemeClr val="accent1"/>
-          </a:lnRef>
-          <a:fillRef idx="3">
-            <a:schemeClr val="accent1"/>
-          </a:fillRef>
-          <a:effectRef idx="2">
-            <a:schemeClr val="accent1"/>
-          </a:effectRef>
-          <a:fontRef idx="minor">
-            <a:schemeClr val="lt1"/>
-          </a:fontRef>
-        </p:style>
-        <p:txBody>
-          <a:bodyPr rtlCol="0" anchor="ctr" wrap="square" lIns="228600" rIns="228600" tIns="228600" bIns="182880"/>
-          <a:lstStyle/>
-          <a:p>
-            <a:pPr algn="ctr">
-              <a:spcAft>
-                <a:spcPts val="400"/>
-              </a:spcAft>
-              <a:defRPr sz="1000" b="1">
-                <a:solidFill>
-                  <a:srgbClr val="F59E0B"/>
-                </a:solidFill>
-                <a:latin typeface="Arial"/>
-              </a:defRPr>
-            </a:pPr>
-            <a:r>
-              <a:t>PHASE 4: PRODUCTION</a:t>
-            </a:r>
-          </a:p>
-          <a:p>
-            <a:pPr>
-              <a:spcAft>
-                <a:spcPts val="1000"/>
-              </a:spcAft>
-              <a:defRPr sz="1600" b="1">
-                <a:solidFill>
-                  <a:srgbClr val="F8FAFC"/>
-                </a:solidFill>
-                <a:latin typeface="Arial"/>
-              </a:defRPr>
-            </a:pPr>
-            <a:r>
-              <a:t>Phase 4: Turnkey Production &amp; GitHub Release</a:t>
-            </a:r>
-          </a:p>
-          <a:p>
-            <a:pPr>
-              <a:spcAft>
-                <a:spcPts val="600"/>
-              </a:spcAft>
-              <a:defRPr sz="1200">
-                <a:solidFill>
-                  <a:srgbClr val="94A3B8"/>
-                </a:solidFill>
-                <a:latin typeface="Arial"/>
-              </a:defRPr>
-            </a:pPr>
-            <a:r>
-              <a:t>•  Built self-healing Docker architecture and turnkey 1-click setup scripts (.ps1 and .sh).</a:t>
-            </a:r>
-          </a:p>
-          <a:p>
-            <a:pPr>
-              <a:spcAft>
-                <a:spcPts val="600"/>
-              </a:spcAft>
-              <a:defRPr sz="1200">
-                <a:solidFill>
-                  <a:srgbClr val="94A3B8"/>
-                </a:solidFill>
-                <a:latin typeface="Arial"/>
-              </a:defRPr>
-            </a:pPr>
-            <a:r>
-              <a:t>•  Integrated ONLYOFFICE document server and published full production repo to GitHub.</a:t>
+              <a:t>Pinned Local Gemma 4 Engine</a:t>
+            </a:r>
+          </a:p>
+          <a:p>
+            <a:pPr>
+              <a:spcAft>
+                <a:spcPts val="200"/>
+              </a:spcAft>
+              <a:defRPr sz="1050">
+                <a:solidFill>
+                  <a:srgbClr val="94A3B8"/>
+                </a:solidFill>
+                <a:latin typeface="Arial"/>
+              </a:defRPr>
+            </a:pPr>
+            <a:r>
+              <a:t>•  Powered by Gemma 4 e4b pinned directly in NVIDIA RTX GPU VRAM.</a:t>
+            </a:r>
+          </a:p>
+          <a:p>
+            <a:pPr>
+              <a:spcAft>
+                <a:spcPts val="200"/>
+              </a:spcAft>
+              <a:defRPr sz="1050">
+                <a:solidFill>
+                  <a:srgbClr val="94A3B8"/>
+                </a:solidFill>
+                <a:latin typeface="Arial"/>
+              </a:defRPr>
+            </a:pPr>
+            <a:r>
+              <a:t>•  Instant token streaming with zero latency and 100% offline data privacy.</a:t>
             </a:r>
           </a:p>
         </p:txBody>
@@ -3998,7 +3963,7 @@
               </a:defRPr>
             </a:pPr>
             <a:r>
-              <a:t>INSTITUTIONAL VALUE</a:t>
+              <a:t>ENGINEERING RIGOR</a:t>
             </a:r>
           </a:p>
         </p:txBody>
@@ -4034,7 +3999,7 @@
               </a:defRPr>
             </a:pPr>
             <a:r>
-              <a:t>Strategic &amp; Economic Impact for MCIT &amp; Government</a:t>
+              <a:t>Technical Breakthroughs: 131k Context &amp; GPU Acceleration</a:t>
             </a:r>
           </a:p>
         </p:txBody>
@@ -4115,6 +4080,282 @@
         <p:spPr>
           <a:xfrm>
             <a:off x="731520" y="1645920"/>
+            <a:ext cx="3383280" cy="4572000"/>
+          </a:xfrm>
+          <a:prstGeom prst="roundRect">
+            <a:avLst/>
+          </a:prstGeom>
+          <a:solidFill>
+            <a:srgbClr val="111827"/>
+          </a:solidFill>
+          <a:ln w="15240">
+            <a:solidFill>
+              <a:srgbClr val="38BDF8"/>
+            </a:solidFill>
+          </a:ln>
+        </p:spPr>
+        <p:style>
+          <a:lnRef idx="1">
+            <a:schemeClr val="accent1"/>
+          </a:lnRef>
+          <a:fillRef idx="3">
+            <a:schemeClr val="accent1"/>
+          </a:fillRef>
+          <a:effectRef idx="2">
+            <a:schemeClr val="accent1"/>
+          </a:effectRef>
+          <a:fontRef idx="minor">
+            <a:schemeClr val="lt1"/>
+          </a:fontRef>
+        </p:style>
+        <p:txBody>
+          <a:bodyPr rtlCol="0" anchor="ctr" wrap="square" lIns="228600" rIns="228600" tIns="228600" bIns="182880"/>
+          <a:lstStyle/>
+          <a:p>
+            <a:pPr algn="ctr">
+              <a:spcAft>
+                <a:spcPts val="400"/>
+              </a:spcAft>
+              <a:defRPr sz="1000" b="1">
+                <a:solidFill>
+                  <a:srgbClr val="38BDF8"/>
+                </a:solidFill>
+                <a:latin typeface="Arial"/>
+              </a:defRPr>
+            </a:pPr>
+            <a:r>
+              <a:t>MODEL CAPACITY</a:t>
+            </a:r>
+          </a:p>
+          <a:p>
+            <a:pPr>
+              <a:spcAft>
+                <a:spcPts val="1000"/>
+              </a:spcAft>
+              <a:defRPr sz="1600" b="1">
+                <a:solidFill>
+                  <a:srgbClr val="F8FAFC"/>
+                </a:solidFill>
+                <a:latin typeface="Arial"/>
+              </a:defRPr>
+            </a:pPr>
+            <a:r>
+              <a:t>131k Context Window</a:t>
+            </a:r>
+          </a:p>
+          <a:p>
+            <a:pPr>
+              <a:spcAft>
+                <a:spcPts val="600"/>
+              </a:spcAft>
+              <a:defRPr sz="1200">
+                <a:solidFill>
+                  <a:srgbClr val="94A3B8"/>
+                </a:solidFill>
+                <a:latin typeface="Arial"/>
+              </a:defRPr>
+            </a:pPr>
+            <a:r>
+              <a:t>•  PostgreSQL database tables unlocked to 131,072 context tokens.</a:t>
+            </a:r>
+          </a:p>
+          <a:p>
+            <a:pPr>
+              <a:spcAft>
+                <a:spcPts val="600"/>
+              </a:spcAft>
+              <a:defRPr sz="1200">
+                <a:solidFill>
+                  <a:srgbClr val="94A3B8"/>
+                </a:solidFill>
+                <a:latin typeface="Arial"/>
+              </a:defRPr>
+            </a:pPr>
+            <a:r>
+              <a:t>•  16,384 maximum output tokens for exhaustive document generation.</a:t>
+            </a:r>
+          </a:p>
+          <a:p>
+            <a:pPr>
+              <a:spcAft>
+                <a:spcPts val="600"/>
+              </a:spcAft>
+              <a:defRPr sz="1200">
+                <a:solidFill>
+                  <a:srgbClr val="94A3B8"/>
+                </a:solidFill>
+                <a:latin typeface="Arial"/>
+              </a:defRPr>
+            </a:pPr>
+            <a:r>
+              <a:t>•  Eliminates memory truncation: Ingest entire decree books without losing context.</a:t>
+            </a:r>
+          </a:p>
+          <a:p>
+            <a:pPr>
+              <a:spcAft>
+                <a:spcPts val="600"/>
+              </a:spcAft>
+              <a:defRPr sz="1200">
+                <a:solidFill>
+                  <a:srgbClr val="94A3B8"/>
+                </a:solidFill>
+                <a:latin typeface="Arial"/>
+              </a:defRPr>
+            </a:pPr>
+            <a:r>
+              <a:t>•  Reasoning mode: 'pro' with 8,192 dedicated thinking budget.</a:t>
+            </a:r>
+          </a:p>
+        </p:txBody>
+      </p:sp>
+      <p:sp>
+        <p:nvSpPr>
+          <p:cNvPr id="8" name="Rounded Rectangle 7"/>
+          <p:cNvSpPr/>
+          <p:nvPr/>
+        </p:nvSpPr>
+        <p:spPr>
+          <a:xfrm>
+            <a:off x="4389120" y="1645920"/>
+            <a:ext cx="3383280" cy="4572000"/>
+          </a:xfrm>
+          <a:prstGeom prst="roundRect">
+            <a:avLst/>
+          </a:prstGeom>
+          <a:solidFill>
+            <a:srgbClr val="111827"/>
+          </a:solidFill>
+          <a:ln w="15240">
+            <a:solidFill>
+              <a:srgbClr val="D4AF37"/>
+            </a:solidFill>
+          </a:ln>
+        </p:spPr>
+        <p:style>
+          <a:lnRef idx="1">
+            <a:schemeClr val="accent1"/>
+          </a:lnRef>
+          <a:fillRef idx="3">
+            <a:schemeClr val="accent1"/>
+          </a:fillRef>
+          <a:effectRef idx="2">
+            <a:schemeClr val="accent1"/>
+          </a:effectRef>
+          <a:fontRef idx="minor">
+            <a:schemeClr val="lt1"/>
+          </a:fontRef>
+        </p:style>
+        <p:txBody>
+          <a:bodyPr rtlCol="0" anchor="ctr" wrap="square" lIns="228600" rIns="228600" tIns="228600" bIns="182880"/>
+          <a:lstStyle/>
+          <a:p>
+            <a:pPr algn="ctr">
+              <a:spcAft>
+                <a:spcPts val="400"/>
+              </a:spcAft>
+              <a:defRPr sz="1000" b="1">
+                <a:solidFill>
+                  <a:srgbClr val="D4AF37"/>
+                </a:solidFill>
+                <a:latin typeface="Arial"/>
+              </a:defRPr>
+            </a:pPr>
+            <a:r>
+              <a:t>VELOCITY</a:t>
+            </a:r>
+          </a:p>
+          <a:p>
+            <a:pPr>
+              <a:spcAft>
+                <a:spcPts val="1000"/>
+              </a:spcAft>
+              <a:defRPr sz="1600" b="1">
+                <a:solidFill>
+                  <a:srgbClr val="F8FAFC"/>
+                </a:solidFill>
+                <a:latin typeface="Arial"/>
+              </a:defRPr>
+            </a:pPr>
+            <a:r>
+              <a:t>NVIDIA RTX 4050 GPU VRAM</a:t>
+            </a:r>
+          </a:p>
+          <a:p>
+            <a:pPr>
+              <a:spcAft>
+                <a:spcPts val="600"/>
+              </a:spcAft>
+              <a:defRPr sz="1200">
+                <a:solidFill>
+                  <a:srgbClr val="94A3B8"/>
+                </a:solidFill>
+                <a:latin typeface="Arial"/>
+              </a:defRPr>
+            </a:pPr>
+            <a:r>
+              <a:t>•  Pinned local gemma4:e4b weights in dedicated 5.1 GB GPU VRAM.</a:t>
+            </a:r>
+          </a:p>
+          <a:p>
+            <a:pPr>
+              <a:spcAft>
+                <a:spcPts val="600"/>
+              </a:spcAft>
+              <a:defRPr sz="1200">
+                <a:solidFill>
+                  <a:srgbClr val="94A3B8"/>
+                </a:solidFill>
+                <a:latin typeface="Arial"/>
+              </a:defRPr>
+            </a:pPr>
+            <a:r>
+              <a:t>•  Configured keep_alive: '-1' to completely eliminate cold-start unloading.</a:t>
+            </a:r>
+          </a:p>
+          <a:p>
+            <a:pPr>
+              <a:spcAft>
+                <a:spcPts val="600"/>
+              </a:spcAft>
+              <a:defRPr sz="1200">
+                <a:solidFill>
+                  <a:srgbClr val="94A3B8"/>
+                </a:solidFill>
+                <a:latin typeface="Arial"/>
+              </a:defRPr>
+            </a:pPr>
+            <a:r>
+              <a:t>•  Instant response velocity: First token streamed in milliseconds.</a:t>
+            </a:r>
+          </a:p>
+          <a:p>
+            <a:pPr>
+              <a:spcAft>
+                <a:spcPts val="600"/>
+              </a:spcAft>
+              <a:defRPr sz="1200">
+                <a:solidFill>
+                  <a:srgbClr val="94A3B8"/>
+                </a:solidFill>
+                <a:latin typeface="Arial"/>
+              </a:defRPr>
+            </a:pPr>
+            <a:r>
+              <a:t>•  Optimized for smooth pair programming and multi-turn conversational agents.</a:t>
+            </a:r>
+          </a:p>
+        </p:txBody>
+      </p:sp>
+      <p:sp>
+        <p:nvSpPr>
+          <p:cNvPr id="9" name="Rounded Rectangle 8"/>
+          <p:cNvSpPr/>
+          <p:nvPr/>
+        </p:nvSpPr>
+        <p:spPr>
+          <a:xfrm>
+            <a:off x="8046720" y="1645920"/>
             <a:ext cx="3383280" cy="4572000"/>
           </a:xfrm>
           <a:prstGeom prst="roundRect">
@@ -4159,7 +4400,7 @@
               </a:defRPr>
             </a:pPr>
             <a:r>
-              <a:t>SOVEREIGNTY</a:t>
+              <a:t>RESILIENCE</a:t>
             </a:r>
           </a:p>
           <a:p>
@@ -4175,7 +4416,7 @@
               </a:defRPr>
             </a:pPr>
             <a:r>
-              <a:t>100% Data Sovereignty</a:t>
+              <a:t>Self-Healing Docker Stack</a:t>
             </a:r>
           </a:p>
           <a:p>
@@ -4191,7 +4432,7 @@
               </a:defRPr>
             </a:pPr>
             <a:r>
-              <a:t>•  Zero cloud leakage: Classified ministerial files remain within the state firewall.</a:t>
+              <a:t>•  11 isolated Docker services: Agent, Platform, ONLYOFFICE, SurrealDB, Postgres, Redis, Kokoro.</a:t>
             </a:r>
           </a:p>
           <a:p>
@@ -4207,7 +4448,7 @@
               </a:defRPr>
             </a:pPr>
             <a:r>
-              <a:t>•  Full compliance with national cybersecurity and data protection frameworks.</a:t>
+              <a:t>•  Built-in runtime self-patching in startServer.js guarantees TRPC stability on container boot.</a:t>
             </a:r>
           </a:p>
           <a:p>
@@ -4223,7 +4464,7 @@
               </a:defRPr>
             </a:pPr>
             <a:r>
-              <a:t>•  Immune to foreign sanctions, cloud pricing hikes, or global connection blackouts.</a:t>
+              <a:t>•  Turnkey 1-click bootstrap scripts (.ps1 and .sh) launch the full ecosystem in under 15 seconds.</a:t>
             </a:r>
           </a:p>
           <a:p>
@@ -4239,283 +4480,7 @@
               </a:defRPr>
             </a:pPr>
             <a:r>
-              <a:t>•  Total ownership of code, weights, data, and fine-tuned domain models.</a:t>
-            </a:r>
-          </a:p>
-        </p:txBody>
-      </p:sp>
-      <p:sp>
-        <p:nvSpPr>
-          <p:cNvPr id="8" name="Rounded Rectangle 7"/>
-          <p:cNvSpPr/>
-          <p:nvPr/>
-        </p:nvSpPr>
-        <p:spPr>
-          <a:xfrm>
-            <a:off x="4389120" y="1645920"/>
-            <a:ext cx="3383280" cy="4572000"/>
-          </a:xfrm>
-          <a:prstGeom prst="roundRect">
-            <a:avLst/>
-          </a:prstGeom>
-          <a:solidFill>
-            <a:srgbClr val="111827"/>
-          </a:solidFill>
-          <a:ln w="15240">
-            <a:solidFill>
-              <a:srgbClr val="D4AF37"/>
-            </a:solidFill>
-          </a:ln>
-        </p:spPr>
-        <p:style>
-          <a:lnRef idx="1">
-            <a:schemeClr val="accent1"/>
-          </a:lnRef>
-          <a:fillRef idx="3">
-            <a:schemeClr val="accent1"/>
-          </a:fillRef>
-          <a:effectRef idx="2">
-            <a:schemeClr val="accent1"/>
-          </a:effectRef>
-          <a:fontRef idx="minor">
-            <a:schemeClr val="lt1"/>
-          </a:fontRef>
-        </p:style>
-        <p:txBody>
-          <a:bodyPr rtlCol="0" anchor="ctr" wrap="square" lIns="228600" rIns="228600" tIns="228600" bIns="182880"/>
-          <a:lstStyle/>
-          <a:p>
-            <a:pPr algn="ctr">
-              <a:spcAft>
-                <a:spcPts val="400"/>
-              </a:spcAft>
-              <a:defRPr sz="1000" b="1">
-                <a:solidFill>
-                  <a:srgbClr val="D4AF37"/>
-                </a:solidFill>
-                <a:latin typeface="Arial"/>
-              </a:defRPr>
-            </a:pPr>
-            <a:r>
-              <a:t>PRODUCTIVITY</a:t>
-            </a:r>
-          </a:p>
-          <a:p>
-            <a:pPr>
-              <a:spcAft>
-                <a:spcPts val="1000"/>
-              </a:spcAft>
-              <a:defRPr sz="1600" b="1">
-                <a:solidFill>
-                  <a:srgbClr val="F8FAFC"/>
-                </a:solidFill>
-                <a:latin typeface="Arial"/>
-              </a:defRPr>
-            </a:pPr>
-            <a:r>
-              <a:t>10x Operational Speed</a:t>
-            </a:r>
-          </a:p>
-          <a:p>
-            <a:pPr>
-              <a:spcAft>
-                <a:spcPts val="600"/>
-              </a:spcAft>
-              <a:defRPr sz="1200">
-                <a:solidFill>
-                  <a:srgbClr val="94A3B8"/>
-                </a:solidFill>
-                <a:latin typeface="Arial"/>
-              </a:defRPr>
-            </a:pPr>
-            <a:r>
-              <a:t>•  Reduces 4-hour document reading to a 30-second verified executive summary.</a:t>
-            </a:r>
-          </a:p>
-          <a:p>
-            <a:pPr>
-              <a:spcAft>
-                <a:spcPts val="600"/>
-              </a:spcAft>
-              <a:defRPr sz="1200">
-                <a:solidFill>
-                  <a:srgbClr val="94A3B8"/>
-                </a:solidFill>
-                <a:latin typeface="Arial"/>
-              </a:defRPr>
-            </a:pPr>
-            <a:r>
-              <a:t>•  Eliminates external design delays: Generates ready-to-present PowerPoint decks on demand.</a:t>
-            </a:r>
-          </a:p>
-          <a:p>
-            <a:pPr>
-              <a:spcAft>
-                <a:spcPts val="600"/>
-              </a:spcAft>
-              <a:defRPr sz="1200">
-                <a:solidFill>
-                  <a:srgbClr val="94A3B8"/>
-                </a:solidFill>
-                <a:latin typeface="Arial"/>
-              </a:defRPr>
-            </a:pPr>
-            <a:r>
-              <a:t>•  Instant ONLYOFFICE co-editing: Staff collaborate inside the platform without license costs.</a:t>
-            </a:r>
-          </a:p>
-          <a:p>
-            <a:pPr>
-              <a:spcAft>
-                <a:spcPts val="600"/>
-              </a:spcAft>
-              <a:defRPr sz="1200">
-                <a:solidFill>
-                  <a:srgbClr val="94A3B8"/>
-                </a:solidFill>
-                <a:latin typeface="Arial"/>
-              </a:defRPr>
-            </a:pPr>
-            <a:r>
-              <a:t>•  Empowers leadership with real-time strategic briefs during meetings.</a:t>
-            </a:r>
-          </a:p>
-        </p:txBody>
-      </p:sp>
-      <p:sp>
-        <p:nvSpPr>
-          <p:cNvPr id="9" name="Rounded Rectangle 8"/>
-          <p:cNvSpPr/>
-          <p:nvPr/>
-        </p:nvSpPr>
-        <p:spPr>
-          <a:xfrm>
-            <a:off x="8046720" y="1645920"/>
-            <a:ext cx="3383280" cy="4572000"/>
-          </a:xfrm>
-          <a:prstGeom prst="roundRect">
-            <a:avLst/>
-          </a:prstGeom>
-          <a:solidFill>
-            <a:srgbClr val="111827"/>
-          </a:solidFill>
-          <a:ln w="15240">
-            <a:solidFill>
-              <a:srgbClr val="38BDF8"/>
-            </a:solidFill>
-          </a:ln>
-        </p:spPr>
-        <p:style>
-          <a:lnRef idx="1">
-            <a:schemeClr val="accent1"/>
-          </a:lnRef>
-          <a:fillRef idx="3">
-            <a:schemeClr val="accent1"/>
-          </a:fillRef>
-          <a:effectRef idx="2">
-            <a:schemeClr val="accent1"/>
-          </a:effectRef>
-          <a:fontRef idx="minor">
-            <a:schemeClr val="lt1"/>
-          </a:fontRef>
-        </p:style>
-        <p:txBody>
-          <a:bodyPr rtlCol="0" anchor="ctr" wrap="square" lIns="228600" rIns="228600" tIns="228600" bIns="182880"/>
-          <a:lstStyle/>
-          <a:p>
-            <a:pPr algn="ctr">
-              <a:spcAft>
-                <a:spcPts val="400"/>
-              </a:spcAft>
-              <a:defRPr sz="1000" b="1">
-                <a:solidFill>
-                  <a:srgbClr val="38BDF8"/>
-                </a:solidFill>
-                <a:latin typeface="Arial"/>
-              </a:defRPr>
-            </a:pPr>
-            <a:r>
-              <a:t>COST EFFICIENCY</a:t>
-            </a:r>
-          </a:p>
-          <a:p>
-            <a:pPr>
-              <a:spcAft>
-                <a:spcPts val="1000"/>
-              </a:spcAft>
-              <a:defRPr sz="1600" b="1">
-                <a:solidFill>
-                  <a:srgbClr val="F8FAFC"/>
-                </a:solidFill>
-                <a:latin typeface="Arial"/>
-              </a:defRPr>
-            </a:pPr>
-            <a:r>
-              <a:t>Zero Recurring SaaS Costs</a:t>
-            </a:r>
-          </a:p>
-          <a:p>
-            <a:pPr>
-              <a:spcAft>
-                <a:spcPts val="600"/>
-              </a:spcAft>
-              <a:defRPr sz="1200">
-                <a:solidFill>
-                  <a:srgbClr val="94A3B8"/>
-                </a:solidFill>
-                <a:latin typeface="Arial"/>
-              </a:defRPr>
-            </a:pPr>
-            <a:r>
-              <a:t>•  No per-seat licensing fees (saving thousands of dollars annually on Copilot / ChatGPT Plus).</a:t>
-            </a:r>
-          </a:p>
-          <a:p>
-            <a:pPr>
-              <a:spcAft>
-                <a:spcPts val="600"/>
-              </a:spcAft>
-              <a:defRPr sz="1200">
-                <a:solidFill>
-                  <a:srgbClr val="94A3B8"/>
-                </a:solidFill>
-                <a:latin typeface="Arial"/>
-              </a:defRPr>
-            </a:pPr>
-            <a:r>
-              <a:t>•  Runs on existing departmental GPUs and workstations without expensive cloud clusters.</a:t>
-            </a:r>
-          </a:p>
-          <a:p>
-            <a:pPr>
-              <a:spcAft>
-                <a:spcPts val="600"/>
-              </a:spcAft>
-              <a:defRPr sz="1200">
-                <a:solidFill>
-                  <a:srgbClr val="94A3B8"/>
-                </a:solidFill>
-                <a:latin typeface="Arial"/>
-              </a:defRPr>
-            </a:pPr>
-            <a:r>
-              <a:t>•  Built on robust open-source foundations (SurrealDB, ParadeDB, Next.js, Fastify).</a:t>
-            </a:r>
-          </a:p>
-          <a:p>
-            <a:pPr>
-              <a:spcAft>
-                <a:spcPts val="600"/>
-              </a:spcAft>
-              <a:defRPr sz="1200">
-                <a:solidFill>
-                  <a:srgbClr val="94A3B8"/>
-                </a:solidFill>
-                <a:latin typeface="Arial"/>
-              </a:defRPr>
-            </a:pPr>
-            <a:r>
-              <a:t>•  Future-proof modularity: swap underlying open models seamlessly.</a:t>
+              <a:t>•  All source code versioned on GitHub: MCIT-DEPI/DEPI-PPTX.</a:t>
             </a:r>
           </a:p>
         </p:txBody>
@@ -4612,7 +4577,7 @@
               </a:defRPr>
             </a:pPr>
             <a:r>
-              <a:t>EVOLUTION</a:t>
+              <a:t>ENGINEERING MILESTONES</a:t>
             </a:r>
           </a:p>
         </p:txBody>
@@ -4648,7 +4613,7 @@
               </a:defRPr>
             </a:pPr>
             <a:r>
-              <a:t>Strategic Future Roadmap: Expanding TuT AI</a:t>
+              <a:t>The Development Journey: 4 Evolutionary Phases</a:t>
             </a:r>
           </a:p>
         </p:txBody>
@@ -4729,6 +4694,112 @@
         <p:spPr>
           <a:xfrm>
             <a:off x="731520" y="1645920"/>
+            <a:ext cx="5212080" cy="2194560"/>
+          </a:xfrm>
+          <a:prstGeom prst="roundRect">
+            <a:avLst/>
+          </a:prstGeom>
+          <a:solidFill>
+            <a:srgbClr val="111827"/>
+          </a:solidFill>
+          <a:ln w="15240">
+            <a:solidFill>
+              <a:srgbClr val="D4AF37"/>
+            </a:solidFill>
+          </a:ln>
+        </p:spPr>
+        <p:style>
+          <a:lnRef idx="1">
+            <a:schemeClr val="accent1"/>
+          </a:lnRef>
+          <a:fillRef idx="3">
+            <a:schemeClr val="accent1"/>
+          </a:fillRef>
+          <a:effectRef idx="2">
+            <a:schemeClr val="accent1"/>
+          </a:effectRef>
+          <a:fontRef idx="minor">
+            <a:schemeClr val="lt1"/>
+          </a:fontRef>
+        </p:style>
+        <p:txBody>
+          <a:bodyPr rtlCol="0" anchor="ctr" wrap="square" lIns="228600" rIns="228600" tIns="228600" bIns="182880"/>
+          <a:lstStyle/>
+          <a:p>
+            <a:pPr algn="ctr">
+              <a:spcAft>
+                <a:spcPts val="400"/>
+              </a:spcAft>
+              <a:defRPr sz="1000" b="1">
+                <a:solidFill>
+                  <a:srgbClr val="D4AF37"/>
+                </a:solidFill>
+                <a:latin typeface="Arial"/>
+              </a:defRPr>
+            </a:pPr>
+            <a:r>
+              <a:t>PHASE 1: INCEPTION</a:t>
+            </a:r>
+          </a:p>
+          <a:p>
+            <a:pPr>
+              <a:spcAft>
+                <a:spcPts val="1000"/>
+              </a:spcAft>
+              <a:defRPr sz="1600" b="1">
+                <a:solidFill>
+                  <a:srgbClr val="F8FAFC"/>
+                </a:solidFill>
+                <a:latin typeface="Arial"/>
+              </a:defRPr>
+            </a:pPr>
+            <a:r>
+              <a:t>Phase 1: Foundation &amp; Sovereign Identity</a:t>
+            </a:r>
+          </a:p>
+          <a:p>
+            <a:pPr>
+              <a:spcAft>
+                <a:spcPts val="600"/>
+              </a:spcAft>
+              <a:defRPr sz="1200">
+                <a:solidFill>
+                  <a:srgbClr val="94A3B8"/>
+                </a:solidFill>
+                <a:latin typeface="Arial"/>
+              </a:defRPr>
+            </a:pPr>
+            <a:r>
+              <a:t>•  Transitioned away from generic third-party code to 100% Egyptian sovereign platform.</a:t>
+            </a:r>
+          </a:p>
+          <a:p>
+            <a:pPr>
+              <a:spcAft>
+                <a:spcPts val="600"/>
+              </a:spcAft>
+              <a:defRPr sz="1200">
+                <a:solidFill>
+                  <a:srgbClr val="94A3B8"/>
+                </a:solidFill>
+                <a:latin typeface="Arial"/>
+              </a:defRPr>
+            </a:pPr>
+            <a:r>
+              <a:t>•  Engineered the TuT AI identity: 10 historical personas &amp; 3D holographic cartouche.</a:t>
+            </a:r>
+          </a:p>
+        </p:txBody>
+      </p:sp>
+      <p:sp>
+        <p:nvSpPr>
+          <p:cNvPr id="8" name="Rounded Rectangle 7"/>
+          <p:cNvSpPr/>
+          <p:nvPr/>
+        </p:nvSpPr>
+        <p:spPr>
+          <a:xfrm>
+            <a:off x="6217920" y="1645920"/>
             <a:ext cx="5212080" cy="2194560"/>
           </a:xfrm>
           <a:prstGeom prst="roundRect">
@@ -4773,7 +4844,7 @@
               </a:defRPr>
             </a:pPr>
             <a:r>
-              <a:t>SPEED</a:t>
+              <a:t>PHASE 2: ARCHITECTURE</a:t>
             </a:r>
           </a:p>
           <a:p>
@@ -4789,7 +4860,7 @@
               </a:defRPr>
             </a:pPr>
             <a:r>
-              <a:t>1. Ultra-Fast Inference via vLLM</a:t>
+              <a:t>Phase 2: Core Engines &amp; Resilient Fixes</a:t>
             </a:r>
           </a:p>
           <a:p>
@@ -4805,7 +4876,7 @@
               </a:defRPr>
             </a:pPr>
             <a:r>
-              <a:t>•  Integrate containerized vLLM with PagedAttention to achieve 60–80+ tokens/sec on RTX GPUs.</a:t>
+              <a:t>•  Engineered the 3 pillars: Deep Summarization, DeckCraft (.pptx), and VectorCraft (infographics).</a:t>
             </a:r>
           </a:p>
           <a:p>
@@ -4821,113 +4892,7 @@
               </a:defRPr>
             </a:pPr>
             <a:r>
-              <a:t>•  Support concurrent multi-user streaming for entire ministerial departments.</a:t>
-            </a:r>
-          </a:p>
-        </p:txBody>
-      </p:sp>
-      <p:sp>
-        <p:nvSpPr>
-          <p:cNvPr id="8" name="Rounded Rectangle 7"/>
-          <p:cNvSpPr/>
-          <p:nvPr/>
-        </p:nvSpPr>
-        <p:spPr>
-          <a:xfrm>
-            <a:off x="6217920" y="1645920"/>
-            <a:ext cx="5212080" cy="2194560"/>
-          </a:xfrm>
-          <a:prstGeom prst="roundRect">
-            <a:avLst/>
-          </a:prstGeom>
-          <a:solidFill>
-            <a:srgbClr val="111827"/>
-          </a:solidFill>
-          <a:ln w="15240">
-            <a:solidFill>
-              <a:srgbClr val="D4AF37"/>
-            </a:solidFill>
-          </a:ln>
-        </p:spPr>
-        <p:style>
-          <a:lnRef idx="1">
-            <a:schemeClr val="accent1"/>
-          </a:lnRef>
-          <a:fillRef idx="3">
-            <a:schemeClr val="accent1"/>
-          </a:fillRef>
-          <a:effectRef idx="2">
-            <a:schemeClr val="accent1"/>
-          </a:effectRef>
-          <a:fontRef idx="minor">
-            <a:schemeClr val="lt1"/>
-          </a:fontRef>
-        </p:style>
-        <p:txBody>
-          <a:bodyPr rtlCol="0" anchor="ctr" wrap="square" lIns="228600" rIns="228600" tIns="228600" bIns="182880"/>
-          <a:lstStyle/>
-          <a:p>
-            <a:pPr algn="ctr">
-              <a:spcAft>
-                <a:spcPts val="400"/>
-              </a:spcAft>
-              <a:defRPr sz="1000" b="1">
-                <a:solidFill>
-                  <a:srgbClr val="D4AF37"/>
-                </a:solidFill>
-                <a:latin typeface="Arial"/>
-              </a:defRPr>
-            </a:pPr>
-            <a:r>
-              <a:t>SPECIALIZATION</a:t>
-            </a:r>
-          </a:p>
-          <a:p>
-            <a:pPr>
-              <a:spcAft>
-                <a:spcPts val="1000"/>
-              </a:spcAft>
-              <a:defRPr sz="1600" b="1">
-                <a:solidFill>
-                  <a:srgbClr val="F8FAFC"/>
-                </a:solidFill>
-                <a:latin typeface="Arial"/>
-              </a:defRPr>
-            </a:pPr>
-            <a:r>
-              <a:t>2. Egyptian Governmental LoRA Fine-Tuning</a:t>
-            </a:r>
-          </a:p>
-          <a:p>
-            <a:pPr>
-              <a:spcAft>
-                <a:spcPts val="600"/>
-              </a:spcAft>
-              <a:defRPr sz="1200">
-                <a:solidFill>
-                  <a:srgbClr val="94A3B8"/>
-                </a:solidFill>
-                <a:latin typeface="Arial"/>
-              </a:defRPr>
-            </a:pPr>
-            <a:r>
-              <a:t>•  Fine-tune specialized LoRA adapters on official ministerial circulars, decrees, and laws.</a:t>
-            </a:r>
-          </a:p>
-          <a:p>
-            <a:pPr>
-              <a:spcAft>
-                <a:spcPts val="600"/>
-              </a:spcAft>
-              <a:defRPr sz="1200">
-                <a:solidFill>
-                  <a:srgbClr val="94A3B8"/>
-                </a:solidFill>
-                <a:latin typeface="Arial"/>
-              </a:defRPr>
-            </a:pPr>
-            <a:r>
-              <a:t>•  Guarantees 100% authentic Egyptian administrative protocol and terminology.</a:t>
+              <a:t>•  Resolved TRPC runtime crashes via intelligent local Ollama fallback proxy.</a:t>
             </a:r>
           </a:p>
         </p:txBody>
@@ -4985,7 +4950,7 @@
               </a:defRPr>
             </a:pPr>
             <a:r>
-              <a:t>VISION</a:t>
+              <a:t>PHASE 3: INTELLIGENCE</a:t>
             </a:r>
           </a:p>
           <a:p>
@@ -5001,7 +4966,7 @@
               </a:defRPr>
             </a:pPr>
             <a:r>
-              <a:t>3. Multimodal Vision for Scanned PDFs</a:t>
+              <a:t>Phase 3: Model Intelligence &amp; GPU Velocity</a:t>
             </a:r>
           </a:p>
           <a:p>
@@ -5017,7 +4982,7 @@
               </a:defRPr>
             </a:pPr>
             <a:r>
-              <a:t>•  Deploy Qwen2-VL or Llama-3.2-Vision to process historical Arabic manuscripts, stamps, and blueprints.</a:t>
+              <a:t>•  Unlocked database to 131,072 context tokens, 16,384 output tokens, and 'pro' reasoning.</a:t>
             </a:r>
           </a:p>
           <a:p>
@@ -5033,7 +4998,7 @@
               </a:defRPr>
             </a:pPr>
             <a:r>
-              <a:t>•  Direct table extraction from paper scans directly into Excel and charts.</a:t>
+              <a:t>•  Pinned gemma4:e4b into NVIDIA RTX 4050 GPU VRAM (keep_alive: '-1') for instant streaming.</a:t>
             </a:r>
           </a:p>
         </p:txBody>
@@ -5091,7 +5056,7 @@
               </a:defRPr>
             </a:pPr>
             <a:r>
-              <a:t>MULTI-AGENT</a:t>
+              <a:t>PHASE 4: PRODUCTION</a:t>
             </a:r>
           </a:p>
           <a:p>
@@ -5107,7 +5072,7 @@
               </a:defRPr>
             </a:pPr>
             <a:r>
-              <a:t>4. Autonomous Multi-Agent Swarms</a:t>
+              <a:t>Phase 4: Turnkey Production &amp; GitHub Release</a:t>
             </a:r>
           </a:p>
           <a:p>
@@ -5123,7 +5088,7 @@
               </a:defRPr>
             </a:pPr>
             <a:r>
-              <a:t>•  Autonomous delegation: Thoth researches, Imhotep audits data, and TuT delivers the final slides.</a:t>
+              <a:t>•  Built self-healing Docker architecture and turnkey 1-click setup scripts (.ps1 and .sh).</a:t>
             </a:r>
           </a:p>
           <a:p>
@@ -5139,7 +5104,7 @@
               </a:defRPr>
             </a:pPr>
             <a:r>
-              <a:t>•  Zero human micromanagement on complex multi-step state projects.</a:t>
+              <a:t>•  Integrated ONLYOFFICE document server and published full production repo to GitHub.</a:t>
             </a:r>
           </a:p>
         </p:txBody>
@@ -5236,7 +5201,7 @@
               </a:defRPr>
             </a:pPr>
             <a:r>
-              <a:t>PEOPLE &amp; GOVERNANCE</a:t>
+              <a:t>INSTITUTIONAL VALUE</a:t>
             </a:r>
           </a:p>
         </p:txBody>
@@ -5272,7 +5237,7 @@
               </a:defRPr>
             </a:pPr>
             <a:r>
-              <a:t>Project Leadership &amp; Development Team</a:t>
+              <a:t>Strategic &amp; Economic Impact for MCIT &amp; Government</a:t>
             </a:r>
           </a:p>
         </p:txBody>
@@ -5353,7 +5318,7 @@
         <p:spPr>
           <a:xfrm>
             <a:off x="731520" y="1645920"/>
-            <a:ext cx="5212080" cy="4572000"/>
+            <a:ext cx="3383280" cy="4572000"/>
           </a:xfrm>
           <a:prstGeom prst="roundRect">
             <a:avLst/>
@@ -5361,9 +5326,9 @@
           <a:solidFill>
             <a:srgbClr val="111827"/>
           </a:solidFill>
-          <a:ln w="19050">
+          <a:ln w="15240">
             <a:solidFill>
-              <a:srgbClr val="D4AF37"/>
+              <a:srgbClr val="34D399"/>
             </a:solidFill>
           </a:ln>
         </p:spPr>
@@ -5382,30 +5347,30 @@
           </a:fontRef>
         </p:style>
         <p:txBody>
-          <a:bodyPr rtlCol="0" anchor="ctr" wrap="square" lIns="274320" tIns="274320"/>
+          <a:bodyPr rtlCol="0" anchor="ctr" wrap="square" lIns="228600" rIns="228600" tIns="228600" bIns="182880"/>
           <a:lstStyle/>
           <a:p>
             <a:pPr algn="ctr">
               <a:spcAft>
-                <a:spcPts val="800"/>
-              </a:spcAft>
-              <a:defRPr sz="1100" b="1">
-                <a:solidFill>
-                  <a:srgbClr val="D4AF37"/>
-                </a:solidFill>
-                <a:latin typeface="Arial"/>
-              </a:defRPr>
-            </a:pPr>
-            <a:r>
-              <a:t>MINISTRY HEADS &amp; SUPERVISION</a:t>
-            </a:r>
-          </a:p>
-          <a:p>
-            <a:pPr>
-              <a:spcAft>
-                <a:spcPts val="1800"/>
-              </a:spcAft>
-              <a:defRPr sz="1800" b="1">
+                <a:spcPts val="400"/>
+              </a:spcAft>
+              <a:defRPr sz="1000" b="1">
+                <a:solidFill>
+                  <a:srgbClr val="34D399"/>
+                </a:solidFill>
+                <a:latin typeface="Arial"/>
+              </a:defRPr>
+            </a:pPr>
+            <a:r>
+              <a:t>SOVEREIGNTY</a:t>
+            </a:r>
+          </a:p>
+          <a:p>
+            <a:pPr>
+              <a:spcAft>
+                <a:spcPts val="1000"/>
+              </a:spcAft>
+              <a:defRPr sz="1600" b="1">
                 <a:solidFill>
                   <a:srgbClr val="F8FAFC"/>
                 </a:solidFill>
@@ -5413,55 +5378,71 @@
               </a:defRPr>
             </a:pPr>
             <a:r>
-              <a:t>Ministry Leadership &amp; Guidance</a:t>
-            </a:r>
-          </a:p>
-          <a:p>
-            <a:pPr>
-              <a:spcAft>
-                <a:spcPts val="2000"/>
-              </a:spcAft>
-              <a:defRPr sz="1500" b="1">
-                <a:solidFill>
-                  <a:srgbClr val="F5D673"/>
-                </a:solidFill>
-                <a:latin typeface="Arial"/>
-              </a:defRPr>
-            </a:pPr>
-            <a:r>
-              <a:t>🎖️  Dr. Mohamed Rehan</a:t>
-            </a:r>
-          </a:p>
-          <a:p>
-            <a:pPr>
-              <a:spcAft>
-                <a:spcPts val="2000"/>
-              </a:spcAft>
-              <a:defRPr sz="1500" b="1">
-                <a:solidFill>
-                  <a:srgbClr val="F5D673"/>
-                </a:solidFill>
-                <a:latin typeface="Arial"/>
-              </a:defRPr>
-            </a:pPr>
-            <a:r>
-              <a:t>🎖️  Eng. Reham Metwally</a:t>
-            </a:r>
-          </a:p>
-          <a:p>
-            <a:pPr>
-              <a:spcAft>
-                <a:spcPts val="2000"/>
-              </a:spcAft>
-              <a:defRPr sz="1500" b="1">
-                <a:solidFill>
-                  <a:srgbClr val="F5D673"/>
-                </a:solidFill>
-                <a:latin typeface="Arial"/>
-              </a:defRPr>
-            </a:pPr>
-            <a:r>
-              <a:t>🎖️  Eng. Mohamed Khalid Mohamed Roshdy</a:t>
+              <a:t>100% Data Sovereignty</a:t>
+            </a:r>
+          </a:p>
+          <a:p>
+            <a:pPr>
+              <a:spcAft>
+                <a:spcPts val="600"/>
+              </a:spcAft>
+              <a:defRPr sz="1200">
+                <a:solidFill>
+                  <a:srgbClr val="94A3B8"/>
+                </a:solidFill>
+                <a:latin typeface="Arial"/>
+              </a:defRPr>
+            </a:pPr>
+            <a:r>
+              <a:t>•  Zero cloud leakage: Classified ministerial files remain within the state firewall.</a:t>
+            </a:r>
+          </a:p>
+          <a:p>
+            <a:pPr>
+              <a:spcAft>
+                <a:spcPts val="600"/>
+              </a:spcAft>
+              <a:defRPr sz="1200">
+                <a:solidFill>
+                  <a:srgbClr val="94A3B8"/>
+                </a:solidFill>
+                <a:latin typeface="Arial"/>
+              </a:defRPr>
+            </a:pPr>
+            <a:r>
+              <a:t>•  Full compliance with national cybersecurity and data protection frameworks.</a:t>
+            </a:r>
+          </a:p>
+          <a:p>
+            <a:pPr>
+              <a:spcAft>
+                <a:spcPts val="600"/>
+              </a:spcAft>
+              <a:defRPr sz="1200">
+                <a:solidFill>
+                  <a:srgbClr val="94A3B8"/>
+                </a:solidFill>
+                <a:latin typeface="Arial"/>
+              </a:defRPr>
+            </a:pPr>
+            <a:r>
+              <a:t>•  Immune to foreign sanctions, cloud pricing hikes, or global connection blackouts.</a:t>
+            </a:r>
+          </a:p>
+          <a:p>
+            <a:pPr>
+              <a:spcAft>
+                <a:spcPts val="600"/>
+              </a:spcAft>
+              <a:defRPr sz="1200">
+                <a:solidFill>
+                  <a:srgbClr val="94A3B8"/>
+                </a:solidFill>
+                <a:latin typeface="Arial"/>
+              </a:defRPr>
+            </a:pPr>
+            <a:r>
+              <a:t>•  Total ownership of code, weights, data, and fine-tuned domain models.</a:t>
             </a:r>
           </a:p>
         </p:txBody>
@@ -5474,8 +5455,8 @@
         </p:nvSpPr>
         <p:spPr>
           <a:xfrm>
-            <a:off x="6217920" y="1645920"/>
-            <a:ext cx="5212080" cy="4572000"/>
+            <a:off x="4389120" y="1645920"/>
+            <a:ext cx="3383280" cy="4572000"/>
           </a:xfrm>
           <a:prstGeom prst="roundRect">
             <a:avLst/>
@@ -5483,9 +5464,9 @@
           <a:solidFill>
             <a:srgbClr val="111827"/>
           </a:solidFill>
-          <a:ln w="19050">
+          <a:ln w="15240">
             <a:solidFill>
-              <a:srgbClr val="38BDF8"/>
+              <a:srgbClr val="D4AF37"/>
             </a:solidFill>
           </a:ln>
         </p:spPr>
@@ -5504,14 +5485,152 @@
           </a:fontRef>
         </p:style>
         <p:txBody>
-          <a:bodyPr rtlCol="0" anchor="ctr" wrap="square" lIns="274320" tIns="274320"/>
+          <a:bodyPr rtlCol="0" anchor="ctr" wrap="square" lIns="228600" rIns="228600" tIns="228600" bIns="182880"/>
           <a:lstStyle/>
           <a:p>
             <a:pPr algn="ctr">
               <a:spcAft>
-                <a:spcPts val="800"/>
-              </a:spcAft>
-              <a:defRPr sz="1100" b="1">
+                <a:spcPts val="400"/>
+              </a:spcAft>
+              <a:defRPr sz="1000" b="1">
+                <a:solidFill>
+                  <a:srgbClr val="D4AF37"/>
+                </a:solidFill>
+                <a:latin typeface="Arial"/>
+              </a:defRPr>
+            </a:pPr>
+            <a:r>
+              <a:t>PRODUCTIVITY</a:t>
+            </a:r>
+          </a:p>
+          <a:p>
+            <a:pPr>
+              <a:spcAft>
+                <a:spcPts val="1000"/>
+              </a:spcAft>
+              <a:defRPr sz="1600" b="1">
+                <a:solidFill>
+                  <a:srgbClr val="F8FAFC"/>
+                </a:solidFill>
+                <a:latin typeface="Arial"/>
+              </a:defRPr>
+            </a:pPr>
+            <a:r>
+              <a:t>10x Operational Speed</a:t>
+            </a:r>
+          </a:p>
+          <a:p>
+            <a:pPr>
+              <a:spcAft>
+                <a:spcPts val="600"/>
+              </a:spcAft>
+              <a:defRPr sz="1200">
+                <a:solidFill>
+                  <a:srgbClr val="94A3B8"/>
+                </a:solidFill>
+                <a:latin typeface="Arial"/>
+              </a:defRPr>
+            </a:pPr>
+            <a:r>
+              <a:t>•  Reduces 4-hour document reading to a 30-second verified executive summary.</a:t>
+            </a:r>
+          </a:p>
+          <a:p>
+            <a:pPr>
+              <a:spcAft>
+                <a:spcPts val="600"/>
+              </a:spcAft>
+              <a:defRPr sz="1200">
+                <a:solidFill>
+                  <a:srgbClr val="94A3B8"/>
+                </a:solidFill>
+                <a:latin typeface="Arial"/>
+              </a:defRPr>
+            </a:pPr>
+            <a:r>
+              <a:t>•  Eliminates external design delays: Generates ready-to-present PowerPoint decks on demand.</a:t>
+            </a:r>
+          </a:p>
+          <a:p>
+            <a:pPr>
+              <a:spcAft>
+                <a:spcPts val="600"/>
+              </a:spcAft>
+              <a:defRPr sz="1200">
+                <a:solidFill>
+                  <a:srgbClr val="94A3B8"/>
+                </a:solidFill>
+                <a:latin typeface="Arial"/>
+              </a:defRPr>
+            </a:pPr>
+            <a:r>
+              <a:t>•  Instant ONLYOFFICE co-editing: Staff collaborate inside the platform without license costs.</a:t>
+            </a:r>
+          </a:p>
+          <a:p>
+            <a:pPr>
+              <a:spcAft>
+                <a:spcPts val="600"/>
+              </a:spcAft>
+              <a:defRPr sz="1200">
+                <a:solidFill>
+                  <a:srgbClr val="94A3B8"/>
+                </a:solidFill>
+                <a:latin typeface="Arial"/>
+              </a:defRPr>
+            </a:pPr>
+            <a:r>
+              <a:t>•  Empowers leadership with real-time strategic briefs during meetings.</a:t>
+            </a:r>
+          </a:p>
+        </p:txBody>
+      </p:sp>
+      <p:sp>
+        <p:nvSpPr>
+          <p:cNvPr id="9" name="Rounded Rectangle 8"/>
+          <p:cNvSpPr/>
+          <p:nvPr/>
+        </p:nvSpPr>
+        <p:spPr>
+          <a:xfrm>
+            <a:off x="8046720" y="1645920"/>
+            <a:ext cx="3383280" cy="4572000"/>
+          </a:xfrm>
+          <a:prstGeom prst="roundRect">
+            <a:avLst/>
+          </a:prstGeom>
+          <a:solidFill>
+            <a:srgbClr val="111827"/>
+          </a:solidFill>
+          <a:ln w="15240">
+            <a:solidFill>
+              <a:srgbClr val="38BDF8"/>
+            </a:solidFill>
+          </a:ln>
+        </p:spPr>
+        <p:style>
+          <a:lnRef idx="1">
+            <a:schemeClr val="accent1"/>
+          </a:lnRef>
+          <a:fillRef idx="3">
+            <a:schemeClr val="accent1"/>
+          </a:fillRef>
+          <a:effectRef idx="2">
+            <a:schemeClr val="accent1"/>
+          </a:effectRef>
+          <a:fontRef idx="minor">
+            <a:schemeClr val="lt1"/>
+          </a:fontRef>
+        </p:style>
+        <p:txBody>
+          <a:bodyPr rtlCol="0" anchor="ctr" wrap="square" lIns="228600" rIns="228600" tIns="228600" bIns="182880"/>
+          <a:lstStyle/>
+          <a:p>
+            <a:pPr algn="ctr">
+              <a:spcAft>
+                <a:spcPts val="400"/>
+              </a:spcAft>
+              <a:defRPr sz="1000" b="1">
                 <a:solidFill>
                   <a:srgbClr val="38BDF8"/>
                 </a:solidFill>
@@ -5519,15 +5638,15 @@
               </a:defRPr>
             </a:pPr>
             <a:r>
-              <a:t>ENGINEERING &amp; DEVELOPMENT TEAM</a:t>
-            </a:r>
-          </a:p>
-          <a:p>
-            <a:pPr>
-              <a:spcAft>
-                <a:spcPts val="1600"/>
-              </a:spcAft>
-              <a:defRPr sz="1800" b="1">
+              <a:t>COST EFFICIENCY</a:t>
+            </a:r>
+          </a:p>
+          <a:p>
+            <a:pPr>
+              <a:spcAft>
+                <a:spcPts val="1000"/>
+              </a:spcAft>
+              <a:defRPr sz="1600" b="1">
                 <a:solidFill>
                   <a:srgbClr val="F8FAFC"/>
                 </a:solidFill>
@@ -5535,103 +5654,71 @@
               </a:defRPr>
             </a:pPr>
             <a:r>
-              <a:t>TuT AI Core Team</a:t>
-            </a:r>
-          </a:p>
-          <a:p>
-            <a:pPr>
-              <a:spcAft>
-                <a:spcPts val="1200"/>
-              </a:spcAft>
-              <a:defRPr sz="1400" b="1">
-                <a:solidFill>
-                  <a:srgbClr val="D4AF37"/>
-                </a:solidFill>
-                <a:latin typeface="Arial"/>
-              </a:defRPr>
-            </a:pPr>
-            <a:r>
-              <a:t>⭐  Ahmed Gamal Sophi Arfa</a:t>
-            </a:r>
-          </a:p>
-          <a:p>
-            <a:pPr>
-              <a:spcAft>
-                <a:spcPts val="800"/>
-              </a:spcAft>
-              <a:defRPr sz="1300" b="1">
-                <a:solidFill>
-                  <a:srgbClr val="F8FAFC"/>
-                </a:solidFill>
-                <a:latin typeface="Arial"/>
-              </a:defRPr>
-            </a:pPr>
-            <a:r>
-              <a:t>•  Abdelrhman Mahmoud Fawzy</a:t>
-            </a:r>
-          </a:p>
-          <a:p>
-            <a:pPr>
-              <a:spcAft>
-                <a:spcPts val="800"/>
-              </a:spcAft>
-              <a:defRPr sz="1300" b="1">
-                <a:solidFill>
-                  <a:srgbClr val="F8FAFC"/>
-                </a:solidFill>
-                <a:latin typeface="Arial"/>
-              </a:defRPr>
-            </a:pPr>
-            <a:r>
-              <a:t>•  Saja Raafat Gaber</a:t>
-            </a:r>
-          </a:p>
-          <a:p>
-            <a:pPr>
-              <a:spcAft>
-                <a:spcPts val="800"/>
-              </a:spcAft>
-              <a:defRPr sz="1300" b="1">
-                <a:solidFill>
-                  <a:srgbClr val="F8FAFC"/>
-                </a:solidFill>
-                <a:latin typeface="Arial"/>
-              </a:defRPr>
-            </a:pPr>
-            <a:r>
-              <a:t>•  Mohamed Hamdy Abdelazez</a:t>
-            </a:r>
-          </a:p>
-          <a:p>
-            <a:pPr>
-              <a:spcAft>
-                <a:spcPts val="800"/>
-              </a:spcAft>
-              <a:defRPr sz="1300" b="1">
-                <a:solidFill>
-                  <a:srgbClr val="F8FAFC"/>
-                </a:solidFill>
-                <a:latin typeface="Arial"/>
-              </a:defRPr>
-            </a:pPr>
-            <a:r>
-              <a:t>•  Asmaa Samy Hagag</a:t>
-            </a:r>
-          </a:p>
-          <a:p>
-            <a:pPr>
-              <a:spcAft>
-                <a:spcPts val="800"/>
-              </a:spcAft>
-              <a:defRPr sz="1300" b="1">
-                <a:solidFill>
-                  <a:srgbClr val="F8FAFC"/>
-                </a:solidFill>
-                <a:latin typeface="Arial"/>
-              </a:defRPr>
-            </a:pPr>
-            <a:r>
-              <a:t>•  Mohamed Abd elhgani el kwatihy</a:t>
+              <a:t>Zero Recurring SaaS Costs</a:t>
+            </a:r>
+          </a:p>
+          <a:p>
+            <a:pPr>
+              <a:spcAft>
+                <a:spcPts val="600"/>
+              </a:spcAft>
+              <a:defRPr sz="1200">
+                <a:solidFill>
+                  <a:srgbClr val="94A3B8"/>
+                </a:solidFill>
+                <a:latin typeface="Arial"/>
+              </a:defRPr>
+            </a:pPr>
+            <a:r>
+              <a:t>•  No per-seat licensing fees (saving thousands of dollars annually on Copilot / ChatGPT Plus).</a:t>
+            </a:r>
+          </a:p>
+          <a:p>
+            <a:pPr>
+              <a:spcAft>
+                <a:spcPts val="600"/>
+              </a:spcAft>
+              <a:defRPr sz="1200">
+                <a:solidFill>
+                  <a:srgbClr val="94A3B8"/>
+                </a:solidFill>
+                <a:latin typeface="Arial"/>
+              </a:defRPr>
+            </a:pPr>
+            <a:r>
+              <a:t>•  Runs on existing departmental GPUs and workstations without expensive cloud clusters.</a:t>
+            </a:r>
+          </a:p>
+          <a:p>
+            <a:pPr>
+              <a:spcAft>
+                <a:spcPts val="600"/>
+              </a:spcAft>
+              <a:defRPr sz="1200">
+                <a:solidFill>
+                  <a:srgbClr val="94A3B8"/>
+                </a:solidFill>
+                <a:latin typeface="Arial"/>
+              </a:defRPr>
+            </a:pPr>
+            <a:r>
+              <a:t>•  Built on robust open-source foundations (SurrealDB, ParadeDB, Next.js, Fastify).</a:t>
+            </a:r>
+          </a:p>
+          <a:p>
+            <a:pPr>
+              <a:spcAft>
+                <a:spcPts val="600"/>
+              </a:spcAft>
+              <a:defRPr sz="1200">
+                <a:solidFill>
+                  <a:srgbClr val="94A3B8"/>
+                </a:solidFill>
+                <a:latin typeface="Arial"/>
+              </a:defRPr>
+            </a:pPr>
+            <a:r>
+              <a:t>•  Future-proof modularity: swap underlying open models seamlessly.</a:t>
             </a:r>
           </a:p>
         </p:txBody>
@@ -5697,6 +5784,1122 @@
           </a:p>
         </p:txBody>
       </p:sp>
+      <p:sp>
+        <p:nvSpPr>
+          <p:cNvPr id="3" name="TextBox 2"/>
+          <p:cNvSpPr txBox="1"/>
+          <p:nvPr/>
+        </p:nvSpPr>
+        <p:spPr>
+          <a:xfrm>
+            <a:off x="731520" y="365760"/>
+            <a:ext cx="8961120" cy="365760"/>
+          </a:xfrm>
+          <a:prstGeom prst="rect">
+            <a:avLst/>
+          </a:prstGeom>
+          <a:noFill/>
+        </p:spPr>
+        <p:txBody>
+          <a:bodyPr wrap="square">
+            <a:spAutoFit/>
+          </a:bodyPr>
+          <a:lstStyle/>
+          <a:p>
+            <a:pPr>
+              <a:defRPr sz="1100" b="1">
+                <a:solidFill>
+                  <a:srgbClr val="D4AF37"/>
+                </a:solidFill>
+                <a:latin typeface="Arial"/>
+              </a:defRPr>
+            </a:pPr>
+            <a:r>
+              <a:t>EVOLUTION</a:t>
+            </a:r>
+          </a:p>
+        </p:txBody>
+      </p:sp>
+      <p:sp>
+        <p:nvSpPr>
+          <p:cNvPr id="4" name="TextBox 3"/>
+          <p:cNvSpPr txBox="1"/>
+          <p:nvPr/>
+        </p:nvSpPr>
+        <p:spPr>
+          <a:xfrm>
+            <a:off x="731520" y="685800"/>
+            <a:ext cx="8961120" cy="640080"/>
+          </a:xfrm>
+          <a:prstGeom prst="rect">
+            <a:avLst/>
+          </a:prstGeom>
+          <a:noFill/>
+        </p:spPr>
+        <p:txBody>
+          <a:bodyPr wrap="square">
+            <a:spAutoFit/>
+          </a:bodyPr>
+          <a:lstStyle/>
+          <a:p>
+            <a:pPr>
+              <a:defRPr sz="2400" b="1">
+                <a:solidFill>
+                  <a:srgbClr val="F8FAFC"/>
+                </a:solidFill>
+                <a:latin typeface="Arial"/>
+              </a:defRPr>
+            </a:pPr>
+            <a:r>
+              <a:t>Strategic Future Roadmap: Expanding TuT AI</a:t>
+            </a:r>
+          </a:p>
+        </p:txBody>
+      </p:sp>
+      <p:pic>
+        <p:nvPicPr>
+          <p:cNvPr id="5" name="Picture 4" descr="mcit-logo.png"/>
+          <p:cNvPicPr>
+            <a:picLocks noChangeAspect="1"/>
+          </p:cNvPicPr>
+          <p:nvPr/>
+        </p:nvPicPr>
+        <p:blipFill>
+          <a:blip r:embed="rId2"/>
+          <a:stretch>
+            <a:fillRect/>
+          </a:stretch>
+        </p:blipFill>
+        <p:spPr>
+          <a:xfrm>
+            <a:off x="10149840" y="384048"/>
+            <a:ext cx="1307592" cy="685800"/>
+          </a:xfrm>
+          <a:prstGeom prst="rect">
+            <a:avLst/>
+          </a:prstGeom>
+        </p:spPr>
+      </p:pic>
+      <p:sp>
+        <p:nvSpPr>
+          <p:cNvPr id="6" name="Rectangle 5"/>
+          <p:cNvSpPr/>
+          <p:nvPr/>
+        </p:nvSpPr>
+        <p:spPr>
+          <a:xfrm>
+            <a:off x="731520" y="1371600"/>
+            <a:ext cx="10728655" cy="18288"/>
+          </a:xfrm>
+          <a:prstGeom prst="rect">
+            <a:avLst/>
+          </a:prstGeom>
+          <a:solidFill>
+            <a:srgbClr val="D4AF37"/>
+          </a:solidFill>
+          <a:ln>
+            <a:noFill/>
+          </a:ln>
+        </p:spPr>
+        <p:style>
+          <a:lnRef idx="1">
+            <a:schemeClr val="accent1"/>
+          </a:lnRef>
+          <a:fillRef idx="3">
+            <a:schemeClr val="accent1"/>
+          </a:fillRef>
+          <a:effectRef idx="2">
+            <a:schemeClr val="accent1"/>
+          </a:effectRef>
+          <a:fontRef idx="minor">
+            <a:schemeClr val="lt1"/>
+          </a:fontRef>
+        </p:style>
+        <p:txBody>
+          <a:bodyPr rtlCol="0" anchor="ctr"/>
+          <a:lstStyle/>
+          <a:p>
+            <a:pPr algn="ctr"/>
+          </a:p>
+        </p:txBody>
+      </p:sp>
+      <p:sp>
+        <p:nvSpPr>
+          <p:cNvPr id="7" name="Rounded Rectangle 6"/>
+          <p:cNvSpPr/>
+          <p:nvPr/>
+        </p:nvSpPr>
+        <p:spPr>
+          <a:xfrm>
+            <a:off x="731520" y="1645920"/>
+            <a:ext cx="5212080" cy="2194560"/>
+          </a:xfrm>
+          <a:prstGeom prst="roundRect">
+            <a:avLst/>
+          </a:prstGeom>
+          <a:solidFill>
+            <a:srgbClr val="111827"/>
+          </a:solidFill>
+          <a:ln w="15240">
+            <a:solidFill>
+              <a:srgbClr val="38BDF8"/>
+            </a:solidFill>
+          </a:ln>
+        </p:spPr>
+        <p:style>
+          <a:lnRef idx="1">
+            <a:schemeClr val="accent1"/>
+          </a:lnRef>
+          <a:fillRef idx="3">
+            <a:schemeClr val="accent1"/>
+          </a:fillRef>
+          <a:effectRef idx="2">
+            <a:schemeClr val="accent1"/>
+          </a:effectRef>
+          <a:fontRef idx="minor">
+            <a:schemeClr val="lt1"/>
+          </a:fontRef>
+        </p:style>
+        <p:txBody>
+          <a:bodyPr rtlCol="0" anchor="ctr" wrap="square" lIns="228600" rIns="228600" tIns="228600" bIns="182880"/>
+          <a:lstStyle/>
+          <a:p>
+            <a:pPr algn="ctr">
+              <a:spcAft>
+                <a:spcPts val="400"/>
+              </a:spcAft>
+              <a:defRPr sz="1000" b="1">
+                <a:solidFill>
+                  <a:srgbClr val="38BDF8"/>
+                </a:solidFill>
+                <a:latin typeface="Arial"/>
+              </a:defRPr>
+            </a:pPr>
+            <a:r>
+              <a:t>SPEED</a:t>
+            </a:r>
+          </a:p>
+          <a:p>
+            <a:pPr>
+              <a:spcAft>
+                <a:spcPts val="1000"/>
+              </a:spcAft>
+              <a:defRPr sz="1600" b="1">
+                <a:solidFill>
+                  <a:srgbClr val="F8FAFC"/>
+                </a:solidFill>
+                <a:latin typeface="Arial"/>
+              </a:defRPr>
+            </a:pPr>
+            <a:r>
+              <a:t>1. Ultra-Fast Inference via vLLM</a:t>
+            </a:r>
+          </a:p>
+          <a:p>
+            <a:pPr>
+              <a:spcAft>
+                <a:spcPts val="600"/>
+              </a:spcAft>
+              <a:defRPr sz="1200">
+                <a:solidFill>
+                  <a:srgbClr val="94A3B8"/>
+                </a:solidFill>
+                <a:latin typeface="Arial"/>
+              </a:defRPr>
+            </a:pPr>
+            <a:r>
+              <a:t>•  Integrate containerized vLLM with PagedAttention to achieve 60–80+ tokens/sec on RTX GPUs.</a:t>
+            </a:r>
+          </a:p>
+          <a:p>
+            <a:pPr>
+              <a:spcAft>
+                <a:spcPts val="600"/>
+              </a:spcAft>
+              <a:defRPr sz="1200">
+                <a:solidFill>
+                  <a:srgbClr val="94A3B8"/>
+                </a:solidFill>
+                <a:latin typeface="Arial"/>
+              </a:defRPr>
+            </a:pPr>
+            <a:r>
+              <a:t>•  Support concurrent multi-user streaming for entire ministerial departments.</a:t>
+            </a:r>
+          </a:p>
+        </p:txBody>
+      </p:sp>
+      <p:sp>
+        <p:nvSpPr>
+          <p:cNvPr id="8" name="Rounded Rectangle 7"/>
+          <p:cNvSpPr/>
+          <p:nvPr/>
+        </p:nvSpPr>
+        <p:spPr>
+          <a:xfrm>
+            <a:off x="6217920" y="1645920"/>
+            <a:ext cx="5212080" cy="2194560"/>
+          </a:xfrm>
+          <a:prstGeom prst="roundRect">
+            <a:avLst/>
+          </a:prstGeom>
+          <a:solidFill>
+            <a:srgbClr val="111827"/>
+          </a:solidFill>
+          <a:ln w="15240">
+            <a:solidFill>
+              <a:srgbClr val="D4AF37"/>
+            </a:solidFill>
+          </a:ln>
+        </p:spPr>
+        <p:style>
+          <a:lnRef idx="1">
+            <a:schemeClr val="accent1"/>
+          </a:lnRef>
+          <a:fillRef idx="3">
+            <a:schemeClr val="accent1"/>
+          </a:fillRef>
+          <a:effectRef idx="2">
+            <a:schemeClr val="accent1"/>
+          </a:effectRef>
+          <a:fontRef idx="minor">
+            <a:schemeClr val="lt1"/>
+          </a:fontRef>
+        </p:style>
+        <p:txBody>
+          <a:bodyPr rtlCol="0" anchor="ctr" wrap="square" lIns="228600" rIns="228600" tIns="228600" bIns="182880"/>
+          <a:lstStyle/>
+          <a:p>
+            <a:pPr algn="ctr">
+              <a:spcAft>
+                <a:spcPts val="400"/>
+              </a:spcAft>
+              <a:defRPr sz="1000" b="1">
+                <a:solidFill>
+                  <a:srgbClr val="D4AF37"/>
+                </a:solidFill>
+                <a:latin typeface="Arial"/>
+              </a:defRPr>
+            </a:pPr>
+            <a:r>
+              <a:t>SPECIALIZATION</a:t>
+            </a:r>
+          </a:p>
+          <a:p>
+            <a:pPr>
+              <a:spcAft>
+                <a:spcPts val="1000"/>
+              </a:spcAft>
+              <a:defRPr sz="1600" b="1">
+                <a:solidFill>
+                  <a:srgbClr val="F8FAFC"/>
+                </a:solidFill>
+                <a:latin typeface="Arial"/>
+              </a:defRPr>
+            </a:pPr>
+            <a:r>
+              <a:t>2. Egyptian Governmental LoRA Fine-Tuning</a:t>
+            </a:r>
+          </a:p>
+          <a:p>
+            <a:pPr>
+              <a:spcAft>
+                <a:spcPts val="600"/>
+              </a:spcAft>
+              <a:defRPr sz="1200">
+                <a:solidFill>
+                  <a:srgbClr val="94A3B8"/>
+                </a:solidFill>
+                <a:latin typeface="Arial"/>
+              </a:defRPr>
+            </a:pPr>
+            <a:r>
+              <a:t>•  Fine-tune specialized LoRA adapters on official ministerial circulars, decrees, and laws.</a:t>
+            </a:r>
+          </a:p>
+          <a:p>
+            <a:pPr>
+              <a:spcAft>
+                <a:spcPts val="600"/>
+              </a:spcAft>
+              <a:defRPr sz="1200">
+                <a:solidFill>
+                  <a:srgbClr val="94A3B8"/>
+                </a:solidFill>
+                <a:latin typeface="Arial"/>
+              </a:defRPr>
+            </a:pPr>
+            <a:r>
+              <a:t>•  Guarantees 100% authentic Egyptian administrative protocol and terminology.</a:t>
+            </a:r>
+          </a:p>
+        </p:txBody>
+      </p:sp>
+      <p:sp>
+        <p:nvSpPr>
+          <p:cNvPr id="9" name="Rounded Rectangle 8"/>
+          <p:cNvSpPr/>
+          <p:nvPr/>
+        </p:nvSpPr>
+        <p:spPr>
+          <a:xfrm>
+            <a:off x="731520" y="4023360"/>
+            <a:ext cx="5212080" cy="2194560"/>
+          </a:xfrm>
+          <a:prstGeom prst="roundRect">
+            <a:avLst/>
+          </a:prstGeom>
+          <a:solidFill>
+            <a:srgbClr val="111827"/>
+          </a:solidFill>
+          <a:ln w="15240">
+            <a:solidFill>
+              <a:srgbClr val="34D399"/>
+            </a:solidFill>
+          </a:ln>
+        </p:spPr>
+        <p:style>
+          <a:lnRef idx="1">
+            <a:schemeClr val="accent1"/>
+          </a:lnRef>
+          <a:fillRef idx="3">
+            <a:schemeClr val="accent1"/>
+          </a:fillRef>
+          <a:effectRef idx="2">
+            <a:schemeClr val="accent1"/>
+          </a:effectRef>
+          <a:fontRef idx="minor">
+            <a:schemeClr val="lt1"/>
+          </a:fontRef>
+        </p:style>
+        <p:txBody>
+          <a:bodyPr rtlCol="0" anchor="ctr" wrap="square" lIns="228600" rIns="228600" tIns="228600" bIns="182880"/>
+          <a:lstStyle/>
+          <a:p>
+            <a:pPr algn="ctr">
+              <a:spcAft>
+                <a:spcPts val="400"/>
+              </a:spcAft>
+              <a:defRPr sz="1000" b="1">
+                <a:solidFill>
+                  <a:srgbClr val="34D399"/>
+                </a:solidFill>
+                <a:latin typeface="Arial"/>
+              </a:defRPr>
+            </a:pPr>
+            <a:r>
+              <a:t>VISION</a:t>
+            </a:r>
+          </a:p>
+          <a:p>
+            <a:pPr>
+              <a:spcAft>
+                <a:spcPts val="1000"/>
+              </a:spcAft>
+              <a:defRPr sz="1600" b="1">
+                <a:solidFill>
+                  <a:srgbClr val="F8FAFC"/>
+                </a:solidFill>
+                <a:latin typeface="Arial"/>
+              </a:defRPr>
+            </a:pPr>
+            <a:r>
+              <a:t>3. Multimodal Vision for Scanned PDFs</a:t>
+            </a:r>
+          </a:p>
+          <a:p>
+            <a:pPr>
+              <a:spcAft>
+                <a:spcPts val="600"/>
+              </a:spcAft>
+              <a:defRPr sz="1200">
+                <a:solidFill>
+                  <a:srgbClr val="94A3B8"/>
+                </a:solidFill>
+                <a:latin typeface="Arial"/>
+              </a:defRPr>
+            </a:pPr>
+            <a:r>
+              <a:t>•  Deploy Qwen2-VL or Llama-3.2-Vision to process historical Arabic manuscripts, stamps, and blueprints.</a:t>
+            </a:r>
+          </a:p>
+          <a:p>
+            <a:pPr>
+              <a:spcAft>
+                <a:spcPts val="600"/>
+              </a:spcAft>
+              <a:defRPr sz="1200">
+                <a:solidFill>
+                  <a:srgbClr val="94A3B8"/>
+                </a:solidFill>
+                <a:latin typeface="Arial"/>
+              </a:defRPr>
+            </a:pPr>
+            <a:r>
+              <a:t>•  Direct table extraction from paper scans directly into Excel and charts.</a:t>
+            </a:r>
+          </a:p>
+        </p:txBody>
+      </p:sp>
+      <p:sp>
+        <p:nvSpPr>
+          <p:cNvPr id="10" name="Rounded Rectangle 9"/>
+          <p:cNvSpPr/>
+          <p:nvPr/>
+        </p:nvSpPr>
+        <p:spPr>
+          <a:xfrm>
+            <a:off x="6217920" y="4023360"/>
+            <a:ext cx="5212080" cy="2194560"/>
+          </a:xfrm>
+          <a:prstGeom prst="roundRect">
+            <a:avLst/>
+          </a:prstGeom>
+          <a:solidFill>
+            <a:srgbClr val="111827"/>
+          </a:solidFill>
+          <a:ln w="15240">
+            <a:solidFill>
+              <a:srgbClr val="F59E0B"/>
+            </a:solidFill>
+          </a:ln>
+        </p:spPr>
+        <p:style>
+          <a:lnRef idx="1">
+            <a:schemeClr val="accent1"/>
+          </a:lnRef>
+          <a:fillRef idx="3">
+            <a:schemeClr val="accent1"/>
+          </a:fillRef>
+          <a:effectRef idx="2">
+            <a:schemeClr val="accent1"/>
+          </a:effectRef>
+          <a:fontRef idx="minor">
+            <a:schemeClr val="lt1"/>
+          </a:fontRef>
+        </p:style>
+        <p:txBody>
+          <a:bodyPr rtlCol="0" anchor="ctr" wrap="square" lIns="228600" rIns="228600" tIns="228600" bIns="182880"/>
+          <a:lstStyle/>
+          <a:p>
+            <a:pPr algn="ctr">
+              <a:spcAft>
+                <a:spcPts val="400"/>
+              </a:spcAft>
+              <a:defRPr sz="1000" b="1">
+                <a:solidFill>
+                  <a:srgbClr val="F59E0B"/>
+                </a:solidFill>
+                <a:latin typeface="Arial"/>
+              </a:defRPr>
+            </a:pPr>
+            <a:r>
+              <a:t>MULTI-AGENT</a:t>
+            </a:r>
+          </a:p>
+          <a:p>
+            <a:pPr>
+              <a:spcAft>
+                <a:spcPts val="1000"/>
+              </a:spcAft>
+              <a:defRPr sz="1600" b="1">
+                <a:solidFill>
+                  <a:srgbClr val="F8FAFC"/>
+                </a:solidFill>
+                <a:latin typeface="Arial"/>
+              </a:defRPr>
+            </a:pPr>
+            <a:r>
+              <a:t>4. Autonomous Multi-Agent Swarms</a:t>
+            </a:r>
+          </a:p>
+          <a:p>
+            <a:pPr>
+              <a:spcAft>
+                <a:spcPts val="600"/>
+              </a:spcAft>
+              <a:defRPr sz="1200">
+                <a:solidFill>
+                  <a:srgbClr val="94A3B8"/>
+                </a:solidFill>
+                <a:latin typeface="Arial"/>
+              </a:defRPr>
+            </a:pPr>
+            <a:r>
+              <a:t>•  Autonomous delegation: Thoth researches, Imhotep audits data, and TuT delivers the final slides.</a:t>
+            </a:r>
+          </a:p>
+          <a:p>
+            <a:pPr>
+              <a:spcAft>
+                <a:spcPts val="600"/>
+              </a:spcAft>
+              <a:defRPr sz="1200">
+                <a:solidFill>
+                  <a:srgbClr val="94A3B8"/>
+                </a:solidFill>
+                <a:latin typeface="Arial"/>
+              </a:defRPr>
+            </a:pPr>
+            <a:r>
+              <a:t>•  Zero human micromanagement on complex multi-step state projects.</a:t>
+            </a:r>
+          </a:p>
+        </p:txBody>
+      </p:sp>
+    </p:spTree>
+  </p:cSld>
+  <p:clrMapOvr>
+    <a:masterClrMapping/>
+  </p:clrMapOvr>
+</p:sld>
+</file>
+
+<file path=ppt/slides/slide15.xml><?xml version="1.0" encoding="utf-8"?>
+<p:sld xmlns:a="http://schemas.openxmlformats.org/drawingml/2006/main" xmlns:p="http://schemas.openxmlformats.org/presentationml/2006/main" xmlns:r="http://schemas.openxmlformats.org/officeDocument/2006/relationships">
+  <p:cSld>
+    <p:spTree>
+      <p:nvGrpSpPr>
+        <p:cNvPr id="1" name=""/>
+        <p:cNvGrpSpPr/>
+        <p:nvPr/>
+      </p:nvGrpSpPr>
+      <p:grpSpPr/>
+      <p:sp>
+        <p:nvSpPr>
+          <p:cNvPr id="2" name="Rectangle 1"/>
+          <p:cNvSpPr/>
+          <p:nvPr/>
+        </p:nvSpPr>
+        <p:spPr>
+          <a:xfrm>
+            <a:off x="0" y="0"/>
+            <a:ext cx="12191695" cy="6858000"/>
+          </a:xfrm>
+          <a:prstGeom prst="rect">
+            <a:avLst/>
+          </a:prstGeom>
+          <a:solidFill>
+            <a:srgbClr val="0A0E17"/>
+          </a:solidFill>
+          <a:ln>
+            <a:noFill/>
+          </a:ln>
+        </p:spPr>
+        <p:style>
+          <a:lnRef idx="1">
+            <a:schemeClr val="accent1"/>
+          </a:lnRef>
+          <a:fillRef idx="3">
+            <a:schemeClr val="accent1"/>
+          </a:fillRef>
+          <a:effectRef idx="2">
+            <a:schemeClr val="accent1"/>
+          </a:effectRef>
+          <a:fontRef idx="minor">
+            <a:schemeClr val="lt1"/>
+          </a:fontRef>
+        </p:style>
+        <p:txBody>
+          <a:bodyPr rtlCol="0" anchor="ctr"/>
+          <a:lstStyle/>
+          <a:p>
+            <a:pPr algn="ctr"/>
+          </a:p>
+        </p:txBody>
+      </p:sp>
+      <p:sp>
+        <p:nvSpPr>
+          <p:cNvPr id="3" name="TextBox 2"/>
+          <p:cNvSpPr txBox="1"/>
+          <p:nvPr/>
+        </p:nvSpPr>
+        <p:spPr>
+          <a:xfrm>
+            <a:off x="731520" y="365760"/>
+            <a:ext cx="8961120" cy="365760"/>
+          </a:xfrm>
+          <a:prstGeom prst="rect">
+            <a:avLst/>
+          </a:prstGeom>
+          <a:noFill/>
+        </p:spPr>
+        <p:txBody>
+          <a:bodyPr wrap="square">
+            <a:spAutoFit/>
+          </a:bodyPr>
+          <a:lstStyle/>
+          <a:p>
+            <a:pPr>
+              <a:defRPr sz="1100" b="1">
+                <a:solidFill>
+                  <a:srgbClr val="D4AF37"/>
+                </a:solidFill>
+                <a:latin typeface="Arial"/>
+              </a:defRPr>
+            </a:pPr>
+            <a:r>
+              <a:t>PEOPLE &amp; GOVERNANCE</a:t>
+            </a:r>
+          </a:p>
+        </p:txBody>
+      </p:sp>
+      <p:sp>
+        <p:nvSpPr>
+          <p:cNvPr id="4" name="TextBox 3"/>
+          <p:cNvSpPr txBox="1"/>
+          <p:nvPr/>
+        </p:nvSpPr>
+        <p:spPr>
+          <a:xfrm>
+            <a:off x="731520" y="685800"/>
+            <a:ext cx="8961120" cy="640080"/>
+          </a:xfrm>
+          <a:prstGeom prst="rect">
+            <a:avLst/>
+          </a:prstGeom>
+          <a:noFill/>
+        </p:spPr>
+        <p:txBody>
+          <a:bodyPr wrap="square">
+            <a:spAutoFit/>
+          </a:bodyPr>
+          <a:lstStyle/>
+          <a:p>
+            <a:pPr>
+              <a:defRPr sz="2400" b="1">
+                <a:solidFill>
+                  <a:srgbClr val="F8FAFC"/>
+                </a:solidFill>
+                <a:latin typeface="Arial"/>
+              </a:defRPr>
+            </a:pPr>
+            <a:r>
+              <a:t>Project Leadership &amp; Development Team</a:t>
+            </a:r>
+          </a:p>
+        </p:txBody>
+      </p:sp>
+      <p:pic>
+        <p:nvPicPr>
+          <p:cNvPr id="5" name="Picture 4" descr="mcit-logo.png"/>
+          <p:cNvPicPr>
+            <a:picLocks noChangeAspect="1"/>
+          </p:cNvPicPr>
+          <p:nvPr/>
+        </p:nvPicPr>
+        <p:blipFill>
+          <a:blip r:embed="rId2"/>
+          <a:stretch>
+            <a:fillRect/>
+          </a:stretch>
+        </p:blipFill>
+        <p:spPr>
+          <a:xfrm>
+            <a:off x="10149840" y="384048"/>
+            <a:ext cx="1307592" cy="685800"/>
+          </a:xfrm>
+          <a:prstGeom prst="rect">
+            <a:avLst/>
+          </a:prstGeom>
+        </p:spPr>
+      </p:pic>
+      <p:sp>
+        <p:nvSpPr>
+          <p:cNvPr id="6" name="Rectangle 5"/>
+          <p:cNvSpPr/>
+          <p:nvPr/>
+        </p:nvSpPr>
+        <p:spPr>
+          <a:xfrm>
+            <a:off x="731520" y="1371600"/>
+            <a:ext cx="10728655" cy="18288"/>
+          </a:xfrm>
+          <a:prstGeom prst="rect">
+            <a:avLst/>
+          </a:prstGeom>
+          <a:solidFill>
+            <a:srgbClr val="D4AF37"/>
+          </a:solidFill>
+          <a:ln>
+            <a:noFill/>
+          </a:ln>
+        </p:spPr>
+        <p:style>
+          <a:lnRef idx="1">
+            <a:schemeClr val="accent1"/>
+          </a:lnRef>
+          <a:fillRef idx="3">
+            <a:schemeClr val="accent1"/>
+          </a:fillRef>
+          <a:effectRef idx="2">
+            <a:schemeClr val="accent1"/>
+          </a:effectRef>
+          <a:fontRef idx="minor">
+            <a:schemeClr val="lt1"/>
+          </a:fontRef>
+        </p:style>
+        <p:txBody>
+          <a:bodyPr rtlCol="0" anchor="ctr"/>
+          <a:lstStyle/>
+          <a:p>
+            <a:pPr algn="ctr"/>
+          </a:p>
+        </p:txBody>
+      </p:sp>
+      <p:sp>
+        <p:nvSpPr>
+          <p:cNvPr id="7" name="Rounded Rectangle 6"/>
+          <p:cNvSpPr/>
+          <p:nvPr/>
+        </p:nvSpPr>
+        <p:spPr>
+          <a:xfrm>
+            <a:off x="731520" y="1645920"/>
+            <a:ext cx="5212080" cy="4572000"/>
+          </a:xfrm>
+          <a:prstGeom prst="roundRect">
+            <a:avLst/>
+          </a:prstGeom>
+          <a:solidFill>
+            <a:srgbClr val="111827"/>
+          </a:solidFill>
+          <a:ln w="19050">
+            <a:solidFill>
+              <a:srgbClr val="D4AF37"/>
+            </a:solidFill>
+          </a:ln>
+        </p:spPr>
+        <p:style>
+          <a:lnRef idx="1">
+            <a:schemeClr val="accent1"/>
+          </a:lnRef>
+          <a:fillRef idx="3">
+            <a:schemeClr val="accent1"/>
+          </a:fillRef>
+          <a:effectRef idx="2">
+            <a:schemeClr val="accent1"/>
+          </a:effectRef>
+          <a:fontRef idx="minor">
+            <a:schemeClr val="lt1"/>
+          </a:fontRef>
+        </p:style>
+        <p:txBody>
+          <a:bodyPr rtlCol="0" anchor="ctr" wrap="square" lIns="274320" tIns="274320"/>
+          <a:lstStyle/>
+          <a:p>
+            <a:pPr algn="ctr">
+              <a:spcAft>
+                <a:spcPts val="800"/>
+              </a:spcAft>
+              <a:defRPr sz="1100" b="1">
+                <a:solidFill>
+                  <a:srgbClr val="D4AF37"/>
+                </a:solidFill>
+                <a:latin typeface="Arial"/>
+              </a:defRPr>
+            </a:pPr>
+            <a:r>
+              <a:t>MINISTRY HEADS &amp; SUPERVISION</a:t>
+            </a:r>
+          </a:p>
+          <a:p>
+            <a:pPr>
+              <a:spcAft>
+                <a:spcPts val="1800"/>
+              </a:spcAft>
+              <a:defRPr sz="1800" b="1">
+                <a:solidFill>
+                  <a:srgbClr val="F8FAFC"/>
+                </a:solidFill>
+                <a:latin typeface="Arial"/>
+              </a:defRPr>
+            </a:pPr>
+            <a:r>
+              <a:t>Ministry Leadership &amp; Guidance</a:t>
+            </a:r>
+          </a:p>
+          <a:p>
+            <a:pPr>
+              <a:spcAft>
+                <a:spcPts val="2000"/>
+              </a:spcAft>
+              <a:defRPr sz="1500" b="1">
+                <a:solidFill>
+                  <a:srgbClr val="F5D673"/>
+                </a:solidFill>
+                <a:latin typeface="Arial"/>
+              </a:defRPr>
+            </a:pPr>
+            <a:r>
+              <a:t>🎖️  Dr. Mohamed Rehan</a:t>
+            </a:r>
+          </a:p>
+          <a:p>
+            <a:pPr>
+              <a:spcAft>
+                <a:spcPts val="2000"/>
+              </a:spcAft>
+              <a:defRPr sz="1500" b="1">
+                <a:solidFill>
+                  <a:srgbClr val="F5D673"/>
+                </a:solidFill>
+                <a:latin typeface="Arial"/>
+              </a:defRPr>
+            </a:pPr>
+            <a:r>
+              <a:t>🎖️  Eng. Reham Metwally</a:t>
+            </a:r>
+          </a:p>
+          <a:p>
+            <a:pPr>
+              <a:spcAft>
+                <a:spcPts val="2000"/>
+              </a:spcAft>
+              <a:defRPr sz="1500" b="1">
+                <a:solidFill>
+                  <a:srgbClr val="F5D673"/>
+                </a:solidFill>
+                <a:latin typeface="Arial"/>
+              </a:defRPr>
+            </a:pPr>
+            <a:r>
+              <a:t>🎖️  Eng. Mohamed Khalid Mohamed Roshdy</a:t>
+            </a:r>
+          </a:p>
+        </p:txBody>
+      </p:sp>
+      <p:sp>
+        <p:nvSpPr>
+          <p:cNvPr id="8" name="Rounded Rectangle 7"/>
+          <p:cNvSpPr/>
+          <p:nvPr/>
+        </p:nvSpPr>
+        <p:spPr>
+          <a:xfrm>
+            <a:off x="6217920" y="1645920"/>
+            <a:ext cx="5212080" cy="4572000"/>
+          </a:xfrm>
+          <a:prstGeom prst="roundRect">
+            <a:avLst/>
+          </a:prstGeom>
+          <a:solidFill>
+            <a:srgbClr val="111827"/>
+          </a:solidFill>
+          <a:ln w="19050">
+            <a:solidFill>
+              <a:srgbClr val="38BDF8"/>
+            </a:solidFill>
+          </a:ln>
+        </p:spPr>
+        <p:style>
+          <a:lnRef idx="1">
+            <a:schemeClr val="accent1"/>
+          </a:lnRef>
+          <a:fillRef idx="3">
+            <a:schemeClr val="accent1"/>
+          </a:fillRef>
+          <a:effectRef idx="2">
+            <a:schemeClr val="accent1"/>
+          </a:effectRef>
+          <a:fontRef idx="minor">
+            <a:schemeClr val="lt1"/>
+          </a:fontRef>
+        </p:style>
+        <p:txBody>
+          <a:bodyPr rtlCol="0" anchor="ctr" wrap="square" lIns="274320" tIns="274320"/>
+          <a:lstStyle/>
+          <a:p>
+            <a:pPr algn="ctr">
+              <a:spcAft>
+                <a:spcPts val="800"/>
+              </a:spcAft>
+              <a:defRPr sz="1100" b="1">
+                <a:solidFill>
+                  <a:srgbClr val="38BDF8"/>
+                </a:solidFill>
+                <a:latin typeface="Arial"/>
+              </a:defRPr>
+            </a:pPr>
+            <a:r>
+              <a:t>ENGINEERING &amp; DEVELOPMENT TEAM</a:t>
+            </a:r>
+          </a:p>
+          <a:p>
+            <a:pPr>
+              <a:spcAft>
+                <a:spcPts val="1600"/>
+              </a:spcAft>
+              <a:defRPr sz="1800" b="1">
+                <a:solidFill>
+                  <a:srgbClr val="F8FAFC"/>
+                </a:solidFill>
+                <a:latin typeface="Arial"/>
+              </a:defRPr>
+            </a:pPr>
+            <a:r>
+              <a:t>TuT AI Core Team</a:t>
+            </a:r>
+          </a:p>
+          <a:p>
+            <a:pPr>
+              <a:spcAft>
+                <a:spcPts val="1200"/>
+              </a:spcAft>
+              <a:defRPr sz="1400" b="1">
+                <a:solidFill>
+                  <a:srgbClr val="D4AF37"/>
+                </a:solidFill>
+                <a:latin typeface="Arial"/>
+              </a:defRPr>
+            </a:pPr>
+            <a:r>
+              <a:t>⭐  Ahmed Gamal Sophi Arfa</a:t>
+            </a:r>
+          </a:p>
+          <a:p>
+            <a:pPr>
+              <a:spcAft>
+                <a:spcPts val="800"/>
+              </a:spcAft>
+              <a:defRPr sz="1300" b="1">
+                <a:solidFill>
+                  <a:srgbClr val="F8FAFC"/>
+                </a:solidFill>
+                <a:latin typeface="Arial"/>
+              </a:defRPr>
+            </a:pPr>
+            <a:r>
+              <a:t>•  Abdelrhman Mahmoud Fawzy</a:t>
+            </a:r>
+          </a:p>
+          <a:p>
+            <a:pPr>
+              <a:spcAft>
+                <a:spcPts val="800"/>
+              </a:spcAft>
+              <a:defRPr sz="1300" b="1">
+                <a:solidFill>
+                  <a:srgbClr val="F8FAFC"/>
+                </a:solidFill>
+                <a:latin typeface="Arial"/>
+              </a:defRPr>
+            </a:pPr>
+            <a:r>
+              <a:t>•  Saja Raafat Gaber</a:t>
+            </a:r>
+          </a:p>
+          <a:p>
+            <a:pPr>
+              <a:spcAft>
+                <a:spcPts val="800"/>
+              </a:spcAft>
+              <a:defRPr sz="1300" b="1">
+                <a:solidFill>
+                  <a:srgbClr val="F8FAFC"/>
+                </a:solidFill>
+                <a:latin typeface="Arial"/>
+              </a:defRPr>
+            </a:pPr>
+            <a:r>
+              <a:t>•  Mohamed Hamdy Abdelazez</a:t>
+            </a:r>
+          </a:p>
+          <a:p>
+            <a:pPr>
+              <a:spcAft>
+                <a:spcPts val="800"/>
+              </a:spcAft>
+              <a:defRPr sz="1300" b="1">
+                <a:solidFill>
+                  <a:srgbClr val="F8FAFC"/>
+                </a:solidFill>
+                <a:latin typeface="Arial"/>
+              </a:defRPr>
+            </a:pPr>
+            <a:r>
+              <a:t>•  Asmaa Samy Hagag</a:t>
+            </a:r>
+          </a:p>
+          <a:p>
+            <a:pPr>
+              <a:spcAft>
+                <a:spcPts val="800"/>
+              </a:spcAft>
+              <a:defRPr sz="1300" b="1">
+                <a:solidFill>
+                  <a:srgbClr val="F8FAFC"/>
+                </a:solidFill>
+                <a:latin typeface="Arial"/>
+              </a:defRPr>
+            </a:pPr>
+            <a:r>
+              <a:t>•  Mohamed Abd elhgani el kwatihy</a:t>
+            </a:r>
+          </a:p>
+        </p:txBody>
+      </p:sp>
+    </p:spTree>
+  </p:cSld>
+  <p:clrMapOvr>
+    <a:masterClrMapping/>
+  </p:clrMapOvr>
+</p:sld>
+</file>
+
+<file path=ppt/slides/slide16.xml><?xml version="1.0" encoding="utf-8"?>
+<p:sld xmlns:a="http://schemas.openxmlformats.org/drawingml/2006/main" xmlns:p="http://schemas.openxmlformats.org/presentationml/2006/main" xmlns:r="http://schemas.openxmlformats.org/officeDocument/2006/relationships">
+  <p:cSld>
+    <p:spTree>
+      <p:nvGrpSpPr>
+        <p:cNvPr id="1" name=""/>
+        <p:cNvGrpSpPr/>
+        <p:nvPr/>
+      </p:nvGrpSpPr>
+      <p:grpSpPr/>
+      <p:sp>
+        <p:nvSpPr>
+          <p:cNvPr id="2" name="Rectangle 1"/>
+          <p:cNvSpPr/>
+          <p:nvPr/>
+        </p:nvSpPr>
+        <p:spPr>
+          <a:xfrm>
+            <a:off x="0" y="0"/>
+            <a:ext cx="12191695" cy="6858000"/>
+          </a:xfrm>
+          <a:prstGeom prst="rect">
+            <a:avLst/>
+          </a:prstGeom>
+          <a:solidFill>
+            <a:srgbClr val="0A0E17"/>
+          </a:solidFill>
+          <a:ln>
+            <a:noFill/>
+          </a:ln>
+        </p:spPr>
+        <p:style>
+          <a:lnRef idx="1">
+            <a:schemeClr val="accent1"/>
+          </a:lnRef>
+          <a:fillRef idx="3">
+            <a:schemeClr val="accent1"/>
+          </a:fillRef>
+          <a:effectRef idx="2">
+            <a:schemeClr val="accent1"/>
+          </a:effectRef>
+          <a:fontRef idx="minor">
+            <a:schemeClr val="lt1"/>
+          </a:fontRef>
+        </p:style>
+        <p:txBody>
+          <a:bodyPr rtlCol="0" anchor="ctr"/>
+          <a:lstStyle/>
+          <a:p>
+            <a:pPr algn="ctr"/>
+          </a:p>
+        </p:txBody>
+      </p:sp>
       <p:pic>
         <p:nvPicPr>
           <p:cNvPr id="3" name="Picture 2" descr="mcit-logo.png"/>
@@ -5901,7 +7104,7 @@
               </a:defRPr>
             </a:pPr>
             <a:r>
-              <a:t>CHALLENGE &amp; OPPORTUNITY</a:t>
+              <a:t>SYSTEM RUNTIME &amp; SETUP</a:t>
             </a:r>
           </a:p>
         </p:txBody>
@@ -5937,7 +7140,7 @@
               </a:defRPr>
             </a:pPr>
             <a:r>
-              <a:t>The Strategic Imperative: Why Sovereign Local AI Matters</a:t>
+              <a:t>System Execution: 1-Click Turnkey Deployment &amp; Local Setup</a:t>
             </a:r>
           </a:p>
         </p:txBody>
@@ -6028,7 +7231,7 @@
           </a:solidFill>
           <a:ln w="15240">
             <a:solidFill>
-              <a:srgbClr val="EF4444"/>
+              <a:srgbClr val="38BDF8"/>
             </a:solidFill>
           </a:ln>
         </p:spPr>
@@ -6056,13 +7259,13 @@
               </a:spcAft>
               <a:defRPr sz="1000" b="1">
                 <a:solidFill>
-                  <a:srgbClr val="EF4444"/>
-                </a:solidFill>
-                <a:latin typeface="Arial"/>
-              </a:defRPr>
-            </a:pPr>
-            <a:r>
-              <a:t>VULNERABILITY</a:t>
+                  <a:srgbClr val="38BDF8"/>
+                </a:solidFill>
+                <a:latin typeface="Arial"/>
+              </a:defRPr>
+            </a:pPr>
+            <a:r>
+              <a:t>ENVIRONMENT</a:t>
             </a:r>
           </a:p>
           <a:p>
@@ -6078,7 +7281,7 @@
               </a:defRPr>
             </a:pPr>
             <a:r>
-              <a:t>1. Severe Data Security Risks</a:t>
+              <a:t>1. Air-Gapped Prerequisites</a:t>
             </a:r>
           </a:p>
           <a:p>
@@ -6094,7 +7297,7 @@
               </a:defRPr>
             </a:pPr>
             <a:r>
-              <a:t>•  Relying on foreign commercial clouds (OpenAI, Claude) means confidential state data leaves Egypt.</a:t>
+              <a:t>•  100% Offline Local Execution: Operates entirely on on-premise hardware without internet connectivity.</a:t>
             </a:r>
           </a:p>
           <a:p>
@@ -6110,7 +7313,7 @@
               </a:defRPr>
             </a:pPr>
             <a:r>
-              <a:t>•  Strict government data laws forbid storing ministerial decrees and citizen archives abroad.</a:t>
+              <a:t>•  Hardware Sizing: 16 GB RAM minimum; NVIDIA RTX GPU recommended for instant GPU token acceleration.</a:t>
             </a:r>
           </a:p>
           <a:p>
@@ -6126,7 +7329,7 @@
               </a:defRPr>
             </a:pPr>
             <a:r>
-              <a:t>•  Risk of third-party model retraining on sensitive Egyptian intellectual property.</a:t>
+              <a:t>•  Software Prerequisites: Docker Desktop with Compose v2 + Local Ollama engine running on host machine.</a:t>
             </a:r>
           </a:p>
           <a:p>
@@ -6142,7 +7345,7 @@
               </a:defRPr>
             </a:pPr>
             <a:r>
-              <a:t>•  Cloud services remain vulnerable to international outages, embargoes, and rate limits.</a:t>
+              <a:t>•  Zero External SaaS: No OpenAI/Claude API keys, no monthly seat fees, and zero cloud data leakage.</a:t>
             </a:r>
           </a:p>
         </p:txBody>
@@ -6166,7 +7369,7 @@
           </a:solidFill>
           <a:ln w="15240">
             <a:solidFill>
-              <a:srgbClr val="F59E0B"/>
+              <a:srgbClr val="D4AF37"/>
             </a:solidFill>
           </a:ln>
         </p:spPr>
@@ -6194,13 +7397,13 @@
               </a:spcAft>
               <a:defRPr sz="1000" b="1">
                 <a:solidFill>
-                  <a:srgbClr val="F59E0B"/>
-                </a:solidFill>
-                <a:latin typeface="Arial"/>
-              </a:defRPr>
-            </a:pPr>
-            <a:r>
-              <a:t>OPERATIONAL FRICTION</a:t>
+                  <a:srgbClr val="D4AF37"/>
+                </a:solidFill>
+                <a:latin typeface="Arial"/>
+              </a:defRPr>
+            </a:pPr>
+            <a:r>
+              <a:t>EXECUTION ROUTINE</a:t>
             </a:r>
           </a:p>
           <a:p>
@@ -6216,7 +7419,7 @@
               </a:defRPr>
             </a:pPr>
             <a:r>
-              <a:t>2. The Document Bottleneck</a:t>
+              <a:t>2. Automated 1-Click Launch</a:t>
             </a:r>
           </a:p>
           <a:p>
@@ -6232,7 +7435,7 @@
               </a:defRPr>
             </a:pPr>
             <a:r>
-              <a:t>•  Ministries process thousands of 100+ page technical specs, legal decrees, and briefs daily.</a:t>
+              <a:t>•  Single PowerShell Command: .\scripts\setup_tut_ai.ps1 (or ./scripts/setup_tut_ai.sh on Linux/WSL).</a:t>
             </a:r>
           </a:p>
           <a:p>
@@ -6248,7 +7451,7 @@
               </a:defRPr>
             </a:pPr>
             <a:r>
-              <a:t>•  Human summarization takes hours or days, causing executive bottlenecks in decision-making.</a:t>
+              <a:t>•  Automated Cluster Boot: Copies .env, runs DB migrations, and spins up 11 microservices in &lt;15 seconds.</a:t>
             </a:r>
           </a:p>
           <a:p>
@@ -6264,7 +7467,7 @@
               </a:defRPr>
             </a:pPr>
             <a:r>
-              <a:t>•  Building slide presentations and executive infographics requires multiple manual designers.</a:t>
+              <a:t>•  Runtime Self-Patching: Automatically unlocks 131,072 context tokens in Postgres and patches TRPC stability.</a:t>
             </a:r>
           </a:p>
           <a:p>
@@ -6280,7 +7483,7 @@
               </a:defRPr>
             </a:pPr>
             <a:r>
-              <a:t>•  High recurring SaaS subscription fees for disparate design and AI editing platforms.</a:t>
+              <a:t>•  GPU VRAM Residency: Automatically pins gemma4:e4b into GPU memory (keep_alive: -1) to eliminate cold starts.</a:t>
             </a:r>
           </a:p>
         </p:txBody>
@@ -6338,7 +7541,7 @@
               </a:defRPr>
             </a:pPr>
             <a:r>
-              <a:t>SOVEREIGN SOLUTION</a:t>
+              <a:t>PORT ENDPOINTS</a:t>
             </a:r>
           </a:p>
           <a:p>
@@ -6354,7 +7557,7 @@
               </a:defRPr>
             </a:pPr>
             <a:r>
-              <a:t>3. The TuT AI Breakthrough</a:t>
+              <a:t>3. Active Endpoints &amp; Sign-In</a:t>
             </a:r>
           </a:p>
           <a:p>
@@ -6370,7 +7573,7 @@
               </a:defRPr>
             </a:pPr>
             <a:r>
-              <a:t>•  100% On-Premise, Air-Gapped execution on local Egyptian infrastructure.</a:t>
+              <a:t>•  http://localhost:8502: TuT AI Platform (Multi-source knowledge notebooks &amp; document craft studio).</a:t>
             </a:r>
           </a:p>
           <a:p>
@@ -6386,7 +7589,7 @@
               </a:defRPr>
             </a:pPr>
             <a:r>
-              <a:t>•  Zero cloud transmission — works completely offline without internet connectivity.</a:t>
+              <a:t>•  http://localhost:3210: TuT Agent (3D sovereign cartouche avatar &amp; in-chat document generation).</a:t>
             </a:r>
           </a:p>
           <a:p>
@@ -6402,7 +7605,7 @@
               </a:defRPr>
             </a:pPr>
             <a:r>
-              <a:t>•  Unifies deep research, document drafting, slides, and spreadsheet audit in one single sign-on.</a:t>
+              <a:t>•  http://localhost:8082: ONLYOFFICE Docs (Integrated in-browser document editing server).</a:t>
             </a:r>
           </a:p>
           <a:p>
@@ -6418,7 +7621,7 @@
               </a:defRPr>
             </a:pPr>
             <a:r>
-              <a:t>•  Maximizes local hardware via dedicated NVIDIA GPU acceleration.</a:t>
+              <a:t>•  Default Administrator: Username: admin | Password: 1234 (fully managed via local auth).</a:t>
             </a:r>
           </a:p>
         </p:txBody>
@@ -6515,7 +7718,7 @@
               </a:defRPr>
             </a:pPr>
             <a:r>
-              <a:t>PLATFORM CAPABILITIES</a:t>
+              <a:t>PRACTICAL WORKFLOW</a:t>
             </a:r>
           </a:p>
         </p:txBody>
@@ -6551,7 +7754,7 @@
               </a:defRPr>
             </a:pPr>
             <a:r>
-              <a:t>TuT AI Core Engine: Three Deliverable Powerhouses</a:t>
+              <a:t>Operational Workflow: End-to-End System Execution in Practice</a:t>
             </a:r>
           </a:p>
         </p:txBody>
@@ -6632,6 +7835,144 @@
         <p:spPr>
           <a:xfrm>
             <a:off x="731520" y="1645920"/>
+            <a:ext cx="3383280" cy="4572000"/>
+          </a:xfrm>
+          <a:prstGeom prst="roundRect">
+            <a:avLst/>
+          </a:prstGeom>
+          <a:solidFill>
+            <a:srgbClr val="111827"/>
+          </a:solidFill>
+          <a:ln w="15240">
+            <a:solidFill>
+              <a:srgbClr val="D4AF37"/>
+            </a:solidFill>
+          </a:ln>
+        </p:spPr>
+        <p:style>
+          <a:lnRef idx="1">
+            <a:schemeClr val="accent1"/>
+          </a:lnRef>
+          <a:fillRef idx="3">
+            <a:schemeClr val="accent1"/>
+          </a:fillRef>
+          <a:effectRef idx="2">
+            <a:schemeClr val="accent1"/>
+          </a:effectRef>
+          <a:fontRef idx="minor">
+            <a:schemeClr val="lt1"/>
+          </a:fontRef>
+        </p:style>
+        <p:txBody>
+          <a:bodyPr rtlCol="0" anchor="ctr" wrap="square" lIns="228600" rIns="228600" tIns="228600" bIns="182880"/>
+          <a:lstStyle/>
+          <a:p>
+            <a:pPr algn="ctr">
+              <a:spcAft>
+                <a:spcPts val="400"/>
+              </a:spcAft>
+              <a:defRPr sz="1000" b="1">
+                <a:solidFill>
+                  <a:srgbClr val="D4AF37"/>
+                </a:solidFill>
+                <a:latin typeface="Arial"/>
+              </a:defRPr>
+            </a:pPr>
+            <a:r>
+              <a:t>STEP 1: INGESTION</a:t>
+            </a:r>
+          </a:p>
+          <a:p>
+            <a:pPr>
+              <a:spcAft>
+                <a:spcPts val="1000"/>
+              </a:spcAft>
+              <a:defRPr sz="1600" b="1">
+                <a:solidFill>
+                  <a:srgbClr val="F8FAFC"/>
+                </a:solidFill>
+                <a:latin typeface="Arial"/>
+              </a:defRPr>
+            </a:pPr>
+            <a:r>
+              <a:t>Step 1: Ingest &amp; Sandboxing</a:t>
+            </a:r>
+          </a:p>
+          <a:p>
+            <a:pPr>
+              <a:spcAft>
+                <a:spcPts val="600"/>
+              </a:spcAft>
+              <a:defRPr sz="1200">
+                <a:solidFill>
+                  <a:srgbClr val="94A3B8"/>
+                </a:solidFill>
+                <a:latin typeface="Arial"/>
+              </a:defRPr>
+            </a:pPr>
+            <a:r>
+              <a:t>•  Sign In to Platform (:8502): Open browser and navigate to the sovereign knowledge portal.</a:t>
+            </a:r>
+          </a:p>
+          <a:p>
+            <a:pPr>
+              <a:spcAft>
+                <a:spcPts val="600"/>
+              </a:spcAft>
+              <a:defRPr sz="1200">
+                <a:solidFill>
+                  <a:srgbClr val="94A3B8"/>
+                </a:solidFill>
+                <a:latin typeface="Arial"/>
+              </a:defRPr>
+            </a:pPr>
+            <a:r>
+              <a:t>•  Departmental Sandboxing: Select or create an isolated notebook workspace (e.g., 'dsc', 'klh', 'eg').</a:t>
+            </a:r>
+          </a:p>
+          <a:p>
+            <a:pPr>
+              <a:spcAft>
+                <a:spcPts val="600"/>
+              </a:spcAft>
+              <a:defRPr sz="1200">
+                <a:solidFill>
+                  <a:srgbClr val="94A3B8"/>
+                </a:solidFill>
+                <a:latin typeface="Arial"/>
+              </a:defRPr>
+            </a:pPr>
+            <a:r>
+              <a:t>•  Drag-and-Drop Ingestion: Upload 100+ page ministerial decrees, complex PDFs (WEF 2024), Word, or Excel.</a:t>
+            </a:r>
+          </a:p>
+          <a:p>
+            <a:pPr>
+              <a:spcAft>
+                <a:spcPts val="600"/>
+              </a:spcAft>
+              <a:defRPr sz="1200">
+                <a:solidFill>
+                  <a:srgbClr val="94A3B8"/>
+                </a:solidFill>
+                <a:latin typeface="Arial"/>
+              </a:defRPr>
+            </a:pPr>
+            <a:r>
+              <a:t>•  Local Hybrid RAG: Extracts full-text passages and computes vector embeddings locally via nomic-embed-text.</a:t>
+            </a:r>
+          </a:p>
+        </p:txBody>
+      </p:sp>
+      <p:sp>
+        <p:nvSpPr>
+          <p:cNvPr id="8" name="Rounded Rectangle 7"/>
+          <p:cNvSpPr/>
+          <p:nvPr/>
+        </p:nvSpPr>
+        <p:spPr>
+          <a:xfrm>
+            <a:off x="4389120" y="1645920"/>
             <a:ext cx="3383280" cy="4572000"/>
           </a:xfrm>
           <a:prstGeom prst="roundRect">
@@ -6676,7 +8017,7 @@
               </a:defRPr>
             </a:pPr>
             <a:r>
-              <a:t>RESEARCH ENGINE</a:t>
+              <a:t>STEP 2: TASK PROMPTING</a:t>
             </a:r>
           </a:p>
           <a:p>
@@ -6692,7 +8033,7 @@
               </a:defRPr>
             </a:pPr>
             <a:r>
-              <a:t>📑 Deep Summarization</a:t>
+              <a:t>Step 2: Conversational Tasking</a:t>
             </a:r>
           </a:p>
           <a:p>
@@ -6708,7 +8049,7 @@
               </a:defRPr>
             </a:pPr>
             <a:r>
-              <a:t>•  Ingests 100+ page PDFs, Word docs, decrees, and raw spreadsheets into local notebooks.</a:t>
+              <a:t>•  Open TuT Agent (:3210): Engage with the 3D Holographic Cartouche avatar in natural language.</a:t>
             </a:r>
           </a:p>
           <a:p>
@@ -6724,7 +8065,7 @@
               </a:defRPr>
             </a:pPr>
             <a:r>
-              <a:t>•  Hierarchical multi-tier synthesis: Executive Brief, Chapter Breakdown, and Key Deliverables.</a:t>
+              <a:t>•  Bilingual Arabic/English: Ask: 'لخص تقرير المخاطر واستخرج بنود الطاقة' or 'Create a 12-slide presentation'.</a:t>
             </a:r>
           </a:p>
           <a:p>
@@ -6740,7 +8081,7 @@
               </a:defRPr>
             </a:pPr>
             <a:r>
-              <a:t>•  Grounded passage citations: Every bullet point is bound to exact numbered passage references.</a:t>
+              <a:t>•  Sub-Second Response: Pinned local Gemma 4 streams first tokens in milliseconds on RTX GPU VRAM.</a:t>
             </a:r>
           </a:p>
           <a:p>
@@ -6756,145 +8097,7 @@
               </a:defRPr>
             </a:pPr>
             <a:r>
-              <a:t>•  Guaranteed Zero-Hallucination via local vector and full-text hybrid RAG retrieval.</a:t>
-            </a:r>
-          </a:p>
-        </p:txBody>
-      </p:sp>
-      <p:sp>
-        <p:nvSpPr>
-          <p:cNvPr id="8" name="Rounded Rectangle 7"/>
-          <p:cNvSpPr/>
-          <p:nvPr/>
-        </p:nvSpPr>
-        <p:spPr>
-          <a:xfrm>
-            <a:off x="4389120" y="1645920"/>
-            <a:ext cx="3383280" cy="4572000"/>
-          </a:xfrm>
-          <a:prstGeom prst="roundRect">
-            <a:avLst/>
-          </a:prstGeom>
-          <a:solidFill>
-            <a:srgbClr val="111827"/>
-          </a:solidFill>
-          <a:ln w="15240">
-            <a:solidFill>
-              <a:srgbClr val="D4AF37"/>
-            </a:solidFill>
-          </a:ln>
-        </p:spPr>
-        <p:style>
-          <a:lnRef idx="1">
-            <a:schemeClr val="accent1"/>
-          </a:lnRef>
-          <a:fillRef idx="3">
-            <a:schemeClr val="accent1"/>
-          </a:fillRef>
-          <a:effectRef idx="2">
-            <a:schemeClr val="accent1"/>
-          </a:effectRef>
-          <a:fontRef idx="minor">
-            <a:schemeClr val="lt1"/>
-          </a:fontRef>
-        </p:style>
-        <p:txBody>
-          <a:bodyPr rtlCol="0" anchor="ctr" wrap="square" lIns="228600" rIns="228600" tIns="228600" bIns="182880"/>
-          <a:lstStyle/>
-          <a:p>
-            <a:pPr algn="ctr">
-              <a:spcAft>
-                <a:spcPts val="400"/>
-              </a:spcAft>
-              <a:defRPr sz="1000" b="1">
-                <a:solidFill>
-                  <a:srgbClr val="D4AF37"/>
-                </a:solidFill>
-                <a:latin typeface="Arial"/>
-              </a:defRPr>
-            </a:pPr>
-            <a:r>
-              <a:t>DECKCRAFT STUDIO</a:t>
-            </a:r>
-          </a:p>
-          <a:p>
-            <a:pPr>
-              <a:spcAft>
-                <a:spcPts val="1000"/>
-              </a:spcAft>
-              <a:defRPr sz="1600" b="1">
-                <a:solidFill>
-                  <a:srgbClr val="F8FAFC"/>
-                </a:solidFill>
-                <a:latin typeface="Arial"/>
-              </a:defRPr>
-            </a:pPr>
-            <a:r>
-              <a:t>📊 Autonomous Presentations</a:t>
-            </a:r>
-          </a:p>
-          <a:p>
-            <a:pPr>
-              <a:spcAft>
-                <a:spcPts val="600"/>
-              </a:spcAft>
-              <a:defRPr sz="1200">
-                <a:solidFill>
-                  <a:srgbClr val="94A3B8"/>
-                </a:solidFill>
-                <a:latin typeface="Arial"/>
-              </a:defRPr>
-            </a:pPr>
-            <a:r>
-              <a:t>•  Prompts in natural language directly generate complete 12+ slide PowerPoint decks (.pptx).</a:t>
-            </a:r>
-          </a:p>
-          <a:p>
-            <a:pPr>
-              <a:spcAft>
-                <a:spcPts val="600"/>
-              </a:spcAft>
-              <a:defRPr sz="1200">
-                <a:solidFill>
-                  <a:srgbClr val="94A3B8"/>
-                </a:solidFill>
-                <a:latin typeface="Arial"/>
-              </a:defRPr>
-            </a:pPr>
-            <a:r>
-              <a:t>•  DeckCraft local engine with strict MCIT branding, Nohemi typography, and royal gold accents.</a:t>
-            </a:r>
-          </a:p>
-          <a:p>
-            <a:pPr>
-              <a:spcAft>
-                <a:spcPts val="600"/>
-              </a:spcAft>
-              <a:defRPr sz="1200">
-                <a:solidFill>
-                  <a:srgbClr val="94A3B8"/>
-                </a:solidFill>
-                <a:latin typeface="Arial"/>
-              </a:defRPr>
-            </a:pPr>
-            <a:r>
-              <a:t>•  5-pass automated layout audit loop fixes text overflow, card alignment, and visual balance.</a:t>
-            </a:r>
-          </a:p>
-          <a:p>
-            <a:pPr>
-              <a:spcAft>
-                <a:spcPts val="600"/>
-              </a:spcAft>
-              <a:defRPr sz="1200">
-                <a:solidFill>
-                  <a:srgbClr val="94A3B8"/>
-                </a:solidFill>
-                <a:latin typeface="Arial"/>
-              </a:defRPr>
-            </a:pPr>
-            <a:r>
-              <a:t>•  Direct download in chat &amp; instant editing via integrated ONLYOFFICE Document Server.</a:t>
+              <a:t>•  Zero-Hallucination: Strictly context-locked to retrieved passages with clickable numbered citations [1], [2].</a:t>
             </a:r>
           </a:p>
         </p:txBody>
@@ -6952,7 +8155,7 @@
               </a:defRPr>
             </a:pPr>
             <a:r>
-              <a:t>VECTORCRAFT STUDIO</a:t>
+              <a:t>STEP 3: DELIVERABLE &amp; EDIT</a:t>
             </a:r>
           </a:p>
           <a:p>
@@ -6968,7 +8171,7 @@
               </a:defRPr>
             </a:pPr>
             <a:r>
-              <a:t>🎨 Vector Infographics</a:t>
+              <a:t>Step 3: Autonomous Output</a:t>
             </a:r>
           </a:p>
           <a:p>
@@ -6984,7 +8187,7 @@
               </a:defRPr>
             </a:pPr>
             <a:r>
-              <a:t>•  Translates complex metrics, policy timelines, and architectures into visual sketchnotes.</a:t>
+              <a:t>•  Autonomous MCP Execution: Agent triggers local DeckCraft (.pptx) or VectorCraft (.svg) tools in real time.</a:t>
             </a:r>
           </a:p>
           <a:p>
@@ -7000,7 +8203,7 @@
               </a:defRPr>
             </a:pPr>
             <a:r>
-              <a:t>•  VectorCraft engine integrates Open Doodles, structured flowchart arrows, and metric badges.</a:t>
+              <a:t>•  In-Chat Delivery: Complete, professional PowerPoint decks and infographics are delivered right in chat.</a:t>
             </a:r>
           </a:p>
           <a:p>
@@ -7016,7 +8219,7 @@
               </a:defRPr>
             </a:pPr>
             <a:r>
-              <a:t>•  High-resolution exports in PNG, scalable SVG, and print-ready vector PDF.</a:t>
+              <a:t>•  Instant ONLYOFFICE Editing: 1-click opens port :8082 to preview, edit, and co-author without MS Office.</a:t>
             </a:r>
           </a:p>
           <a:p>
@@ -7032,7 +8235,7 @@
               </a:defRPr>
             </a:pPr>
             <a:r>
-              <a:t>•  Instantly embeds into official ministerial publications and social media briefs.</a:t>
+              <a:t>•  Ministerial Production: Ready for high-stakes executive briefings, state publications, or print.</a:t>
             </a:r>
           </a:p>
         </p:txBody>
@@ -7129,7 +8332,7 @@
               </a:defRPr>
             </a:pPr>
             <a:r>
-              <a:t>CORE FEATURE DEEP-DIVE</a:t>
+              <a:t>CHALLENGE &amp; OPPORTUNITY</a:t>
             </a:r>
           </a:p>
         </p:txBody>
@@ -7165,7 +8368,7 @@
               </a:defRPr>
             </a:pPr>
             <a:r>
-              <a:t>Pillar 1: Intelligent Deep Summarization Engine</a:t>
+              <a:t>The Strategic Imperative: Why Sovereign Local AI Matters</a:t>
             </a:r>
           </a:p>
         </p:txBody>
@@ -7246,7 +8449,7 @@
         <p:spPr>
           <a:xfrm>
             <a:off x="731520" y="1645920"/>
-            <a:ext cx="5212080" cy="4572000"/>
+            <a:ext cx="3383280" cy="4572000"/>
           </a:xfrm>
           <a:prstGeom prst="roundRect">
             <a:avLst/>
@@ -7256,7 +8459,7 @@
           </a:solidFill>
           <a:ln w="15240">
             <a:solidFill>
-              <a:srgbClr val="38BDF8"/>
+              <a:srgbClr val="EF4444"/>
             </a:solidFill>
           </a:ln>
         </p:spPr>
@@ -7284,13 +8487,13 @@
               </a:spcAft>
               <a:defRPr sz="1000" b="1">
                 <a:solidFill>
-                  <a:srgbClr val="38BDF8"/>
-                </a:solidFill>
-                <a:latin typeface="Arial"/>
-              </a:defRPr>
-            </a:pPr>
-            <a:r>
-              <a:t>ARCHITECTURE</a:t>
+                  <a:srgbClr val="EF4444"/>
+                </a:solidFill>
+                <a:latin typeface="Arial"/>
+              </a:defRPr>
+            </a:pPr>
+            <a:r>
+              <a:t>VULNERABILITY</a:t>
             </a:r>
           </a:p>
           <a:p>
@@ -7306,7 +8509,7 @@
               </a:defRPr>
             </a:pPr>
             <a:r>
-              <a:t>Multi-Source Knowledge Digestion</a:t>
+              <a:t>1. Severe Data Security Risks</a:t>
             </a:r>
           </a:p>
           <a:p>
@@ -7322,7 +8525,7 @@
               </a:defRPr>
             </a:pPr>
             <a:r>
-              <a:t>•  Omni-Channel Ingestion: Scanned and text PDFs, Word (.docx), Excel spreadsheets, audio transcripts, and HTML portals.</a:t>
+              <a:t>•  Relying on foreign commercial clouds (OpenAI, Claude) means confidential state data leaves Egypt.</a:t>
             </a:r>
           </a:p>
           <a:p>
@@ -7338,7 +8541,7 @@
               </a:defRPr>
             </a:pPr>
             <a:r>
-              <a:t>•  Local Chunking &amp; Vectorization: Embeddings generated on-premise using nomic-embed-text via local Ollama bridge.</a:t>
+              <a:t>•  Strict government data laws forbid storing ministerial decrees and citizen archives abroad.</a:t>
             </a:r>
           </a:p>
           <a:p>
@@ -7354,7 +8557,7 @@
               </a:defRPr>
             </a:pPr>
             <a:r>
-              <a:t>•  SurrealDB Account Isolation: Each ministry department and user operates in a segregated, sandboxed database.</a:t>
+              <a:t>•  Risk of third-party model retraining on sensitive Egyptian intellectual property.</a:t>
             </a:r>
           </a:p>
           <a:p>
@@ -7370,7 +8573,7 @@
               </a:defRPr>
             </a:pPr>
             <a:r>
-              <a:t>•  Lightning Synthesis: Synthesizes complex multi-volume reports into an executive brief in under 20 seconds.</a:t>
+              <a:t>•  Cloud services remain vulnerable to international outages, embargoes, and rate limits.</a:t>
             </a:r>
           </a:p>
         </p:txBody>
@@ -7383,8 +8586,8 @@
         </p:nvSpPr>
         <p:spPr>
           <a:xfrm>
-            <a:off x="6217920" y="1645920"/>
-            <a:ext cx="5212080" cy="4572000"/>
+            <a:off x="4389120" y="1645920"/>
+            <a:ext cx="3383280" cy="4572000"/>
           </a:xfrm>
           <a:prstGeom prst="roundRect">
             <a:avLst/>
@@ -7394,7 +8597,7 @@
           </a:solidFill>
           <a:ln w="15240">
             <a:solidFill>
-              <a:srgbClr val="D4AF37"/>
+              <a:srgbClr val="F59E0B"/>
             </a:solidFill>
           </a:ln>
         </p:spPr>
@@ -7422,13 +8625,13 @@
               </a:spcAft>
               <a:defRPr sz="1000" b="1">
                 <a:solidFill>
-                  <a:srgbClr val="D4AF37"/>
-                </a:solidFill>
-                <a:latin typeface="Arial"/>
-              </a:defRPr>
-            </a:pPr>
-            <a:r>
-              <a:t>VERIFICATION</a:t>
+                  <a:srgbClr val="F59E0B"/>
+                </a:solidFill>
+                <a:latin typeface="Arial"/>
+              </a:defRPr>
+            </a:pPr>
+            <a:r>
+              <a:t>OPERATIONAL FRICTION</a:t>
             </a:r>
           </a:p>
           <a:p>
@@ -7444,7 +8647,7 @@
               </a:defRPr>
             </a:pPr>
             <a:r>
-              <a:t>Grounded Trust &amp; Zero-Hallucination</a:t>
+              <a:t>2. The Document Bottleneck</a:t>
             </a:r>
           </a:p>
           <a:p>
@@ -7460,7 +8663,7 @@
               </a:defRPr>
             </a:pPr>
             <a:r>
-              <a:t>•  Numbered Citation System: Summary sentences display [1], [2] clickable references pointing back to the exact passage.</a:t>
+              <a:t>•  Ministries process thousands of 100+ page technical specs, legal decrees, and briefs daily.</a:t>
             </a:r>
           </a:p>
           <a:p>
@@ -7476,7 +8679,7 @@
               </a:defRPr>
             </a:pPr>
             <a:r>
-              <a:t>•  Context-Locked LLM: The model is strictly instructed to answer only from verified retrieved passages.</a:t>
+              <a:t>•  Human summarization takes hours or days, causing executive bottlenecks in decision-making.</a:t>
             </a:r>
           </a:p>
           <a:p>
@@ -7492,7 +8695,7 @@
               </a:defRPr>
             </a:pPr>
             <a:r>
-              <a:t>•  Executive Summary Tiers: Switch between a 1-page High-Level Digest, a 5-page Comprehensive Study, or a Table of Deliverables.</a:t>
+              <a:t>•  Building slide presentations and executive infographics requires multiple manual designers.</a:t>
             </a:r>
           </a:p>
           <a:p>
@@ -7508,7 +8711,145 @@
               </a:defRPr>
             </a:pPr>
             <a:r>
-              <a:t>•  Arabic &amp; English Mastery: Full bilingual comprehension of complex Egyptian administrative and legal phrasing.</a:t>
+              <a:t>•  High recurring SaaS subscription fees for disparate design and AI editing platforms.</a:t>
+            </a:r>
+          </a:p>
+        </p:txBody>
+      </p:sp>
+      <p:sp>
+        <p:nvSpPr>
+          <p:cNvPr id="9" name="Rounded Rectangle 8"/>
+          <p:cNvSpPr/>
+          <p:nvPr/>
+        </p:nvSpPr>
+        <p:spPr>
+          <a:xfrm>
+            <a:off x="8046720" y="1645920"/>
+            <a:ext cx="3383280" cy="4572000"/>
+          </a:xfrm>
+          <a:prstGeom prst="roundRect">
+            <a:avLst/>
+          </a:prstGeom>
+          <a:solidFill>
+            <a:srgbClr val="111827"/>
+          </a:solidFill>
+          <a:ln w="15240">
+            <a:solidFill>
+              <a:srgbClr val="34D399"/>
+            </a:solidFill>
+          </a:ln>
+        </p:spPr>
+        <p:style>
+          <a:lnRef idx="1">
+            <a:schemeClr val="accent1"/>
+          </a:lnRef>
+          <a:fillRef idx="3">
+            <a:schemeClr val="accent1"/>
+          </a:fillRef>
+          <a:effectRef idx="2">
+            <a:schemeClr val="accent1"/>
+          </a:effectRef>
+          <a:fontRef idx="minor">
+            <a:schemeClr val="lt1"/>
+          </a:fontRef>
+        </p:style>
+        <p:txBody>
+          <a:bodyPr rtlCol="0" anchor="ctr" wrap="square" lIns="228600" rIns="228600" tIns="228600" bIns="182880"/>
+          <a:lstStyle/>
+          <a:p>
+            <a:pPr algn="ctr">
+              <a:spcAft>
+                <a:spcPts val="400"/>
+              </a:spcAft>
+              <a:defRPr sz="1000" b="1">
+                <a:solidFill>
+                  <a:srgbClr val="34D399"/>
+                </a:solidFill>
+                <a:latin typeface="Arial"/>
+              </a:defRPr>
+            </a:pPr>
+            <a:r>
+              <a:t>SOVEREIGN SOLUTION</a:t>
+            </a:r>
+          </a:p>
+          <a:p>
+            <a:pPr>
+              <a:spcAft>
+                <a:spcPts val="1000"/>
+              </a:spcAft>
+              <a:defRPr sz="1600" b="1">
+                <a:solidFill>
+                  <a:srgbClr val="F8FAFC"/>
+                </a:solidFill>
+                <a:latin typeface="Arial"/>
+              </a:defRPr>
+            </a:pPr>
+            <a:r>
+              <a:t>3. The TuT AI Breakthrough</a:t>
+            </a:r>
+          </a:p>
+          <a:p>
+            <a:pPr>
+              <a:spcAft>
+                <a:spcPts val="600"/>
+              </a:spcAft>
+              <a:defRPr sz="1200">
+                <a:solidFill>
+                  <a:srgbClr val="94A3B8"/>
+                </a:solidFill>
+                <a:latin typeface="Arial"/>
+              </a:defRPr>
+            </a:pPr>
+            <a:r>
+              <a:t>•  100% On-Premise, Air-Gapped execution on local Egyptian infrastructure.</a:t>
+            </a:r>
+          </a:p>
+          <a:p>
+            <a:pPr>
+              <a:spcAft>
+                <a:spcPts val="600"/>
+              </a:spcAft>
+              <a:defRPr sz="1200">
+                <a:solidFill>
+                  <a:srgbClr val="94A3B8"/>
+                </a:solidFill>
+                <a:latin typeface="Arial"/>
+              </a:defRPr>
+            </a:pPr>
+            <a:r>
+              <a:t>•  Zero cloud transmission — works completely offline without internet connectivity.</a:t>
+            </a:r>
+          </a:p>
+          <a:p>
+            <a:pPr>
+              <a:spcAft>
+                <a:spcPts val="600"/>
+              </a:spcAft>
+              <a:defRPr sz="1200">
+                <a:solidFill>
+                  <a:srgbClr val="94A3B8"/>
+                </a:solidFill>
+                <a:latin typeface="Arial"/>
+              </a:defRPr>
+            </a:pPr>
+            <a:r>
+              <a:t>•  Unifies deep research, document drafting, slides, and spreadsheet audit in one single sign-on.</a:t>
+            </a:r>
+          </a:p>
+          <a:p>
+            <a:pPr>
+              <a:spcAft>
+                <a:spcPts val="600"/>
+              </a:spcAft>
+              <a:defRPr sz="1200">
+                <a:solidFill>
+                  <a:srgbClr val="94A3B8"/>
+                </a:solidFill>
+                <a:latin typeface="Arial"/>
+              </a:defRPr>
+            </a:pPr>
+            <a:r>
+              <a:t>•  Maximizes local hardware via dedicated NVIDIA GPU acceleration.</a:t>
             </a:r>
           </a:p>
         </p:txBody>
@@ -7605,7 +8946,7 @@
               </a:defRPr>
             </a:pPr>
             <a:r>
-              <a:t>CORE FEATURE DEEP-DIVE</a:t>
+              <a:t>PLATFORM CAPABILITIES</a:t>
             </a:r>
           </a:p>
         </p:txBody>
@@ -7641,7 +8982,7 @@
               </a:defRPr>
             </a:pPr>
             <a:r>
-              <a:t>Pillar 2: Autonomous PowerPoint Presentation Engine</a:t>
+              <a:t>TuT AI Core Engine: Three Deliverable Powerhouses</a:t>
             </a:r>
           </a:p>
         </p:txBody>
@@ -7722,7 +9063,145 @@
         <p:spPr>
           <a:xfrm>
             <a:off x="731520" y="1645920"/>
-            <a:ext cx="5212080" cy="4572000"/>
+            <a:ext cx="3383280" cy="4572000"/>
+          </a:xfrm>
+          <a:prstGeom prst="roundRect">
+            <a:avLst/>
+          </a:prstGeom>
+          <a:solidFill>
+            <a:srgbClr val="111827"/>
+          </a:solidFill>
+          <a:ln w="15240">
+            <a:solidFill>
+              <a:srgbClr val="38BDF8"/>
+            </a:solidFill>
+          </a:ln>
+        </p:spPr>
+        <p:style>
+          <a:lnRef idx="1">
+            <a:schemeClr val="accent1"/>
+          </a:lnRef>
+          <a:fillRef idx="3">
+            <a:schemeClr val="accent1"/>
+          </a:fillRef>
+          <a:effectRef idx="2">
+            <a:schemeClr val="accent1"/>
+          </a:effectRef>
+          <a:fontRef idx="minor">
+            <a:schemeClr val="lt1"/>
+          </a:fontRef>
+        </p:style>
+        <p:txBody>
+          <a:bodyPr rtlCol="0" anchor="ctr" wrap="square" lIns="228600" rIns="228600" tIns="228600" bIns="182880"/>
+          <a:lstStyle/>
+          <a:p>
+            <a:pPr algn="ctr">
+              <a:spcAft>
+                <a:spcPts val="400"/>
+              </a:spcAft>
+              <a:defRPr sz="1000" b="1">
+                <a:solidFill>
+                  <a:srgbClr val="38BDF8"/>
+                </a:solidFill>
+                <a:latin typeface="Arial"/>
+              </a:defRPr>
+            </a:pPr>
+            <a:r>
+              <a:t>RESEARCH ENGINE</a:t>
+            </a:r>
+          </a:p>
+          <a:p>
+            <a:pPr>
+              <a:spcAft>
+                <a:spcPts val="1000"/>
+              </a:spcAft>
+              <a:defRPr sz="1600" b="1">
+                <a:solidFill>
+                  <a:srgbClr val="F8FAFC"/>
+                </a:solidFill>
+                <a:latin typeface="Arial"/>
+              </a:defRPr>
+            </a:pPr>
+            <a:r>
+              <a:t>📑 Deep Summarization</a:t>
+            </a:r>
+          </a:p>
+          <a:p>
+            <a:pPr>
+              <a:spcAft>
+                <a:spcPts val="600"/>
+              </a:spcAft>
+              <a:defRPr sz="1200">
+                <a:solidFill>
+                  <a:srgbClr val="94A3B8"/>
+                </a:solidFill>
+                <a:latin typeface="Arial"/>
+              </a:defRPr>
+            </a:pPr>
+            <a:r>
+              <a:t>•  Ingests 100+ page PDFs, Word docs, decrees, and raw spreadsheets into local notebooks.</a:t>
+            </a:r>
+          </a:p>
+          <a:p>
+            <a:pPr>
+              <a:spcAft>
+                <a:spcPts val="600"/>
+              </a:spcAft>
+              <a:defRPr sz="1200">
+                <a:solidFill>
+                  <a:srgbClr val="94A3B8"/>
+                </a:solidFill>
+                <a:latin typeface="Arial"/>
+              </a:defRPr>
+            </a:pPr>
+            <a:r>
+              <a:t>•  Hierarchical multi-tier synthesis: Executive Brief, Chapter Breakdown, and Key Deliverables.</a:t>
+            </a:r>
+          </a:p>
+          <a:p>
+            <a:pPr>
+              <a:spcAft>
+                <a:spcPts val="600"/>
+              </a:spcAft>
+              <a:defRPr sz="1200">
+                <a:solidFill>
+                  <a:srgbClr val="94A3B8"/>
+                </a:solidFill>
+                <a:latin typeface="Arial"/>
+              </a:defRPr>
+            </a:pPr>
+            <a:r>
+              <a:t>•  Grounded passage citations: Every bullet point is bound to exact numbered passage references.</a:t>
+            </a:r>
+          </a:p>
+          <a:p>
+            <a:pPr>
+              <a:spcAft>
+                <a:spcPts val="600"/>
+              </a:spcAft>
+              <a:defRPr sz="1200">
+                <a:solidFill>
+                  <a:srgbClr val="94A3B8"/>
+                </a:solidFill>
+                <a:latin typeface="Arial"/>
+              </a:defRPr>
+            </a:pPr>
+            <a:r>
+              <a:t>•  Guaranteed Zero-Hallucination via local vector and full-text hybrid RAG retrieval.</a:t>
+            </a:r>
+          </a:p>
+        </p:txBody>
+      </p:sp>
+      <p:sp>
+        <p:nvSpPr>
+          <p:cNvPr id="8" name="Rounded Rectangle 7"/>
+          <p:cNvSpPr/>
+          <p:nvPr/>
+        </p:nvSpPr>
+        <p:spPr>
+          <a:xfrm>
+            <a:off x="4389120" y="1645920"/>
+            <a:ext cx="3383280" cy="4572000"/>
           </a:xfrm>
           <a:prstGeom prst="roundRect">
             <a:avLst/>
@@ -7766,7 +9245,7 @@
               </a:defRPr>
             </a:pPr>
             <a:r>
-              <a:t>CONVERSATIONAL FLOW</a:t>
+              <a:t>DECKCRAFT STUDIO</a:t>
             </a:r>
           </a:p>
           <a:p>
@@ -7782,7 +9261,7 @@
               </a:defRPr>
             </a:pPr>
             <a:r>
-              <a:t>End-to-End In-Chat Generation</a:t>
+              <a:t>📊 Autonomous Presentations</a:t>
             </a:r>
           </a:p>
           <a:p>
@@ -7798,7 +9277,7 @@
               </a:defRPr>
             </a:pPr>
             <a:r>
-              <a:t>•  Natural Language Prompting: Ask TuT Agent: 'Create a 12-slide presentation on Egypt Vision 2030 digital pillars'.</a:t>
+              <a:t>•  Prompts in natural language directly generate complete 12+ slide PowerPoint decks (.pptx).</a:t>
             </a:r>
           </a:p>
           <a:p>
@@ -7814,7 +9293,7 @@
               </a:defRPr>
             </a:pPr>
             <a:r>
-              <a:t>•  Local MCP Protocol: Agent invokes the local deck generator tool via Model Context Protocol (MCP) in real-time.</a:t>
+              <a:t>•  DeckCraft local engine with strict MCIT branding, Nohemi typography, and royal gold accents.</a:t>
             </a:r>
           </a:p>
           <a:p>
@@ -7830,7 +9309,7 @@
               </a:defRPr>
             </a:pPr>
             <a:r>
-              <a:t>•  Production Deck Output: Produces a genuine, fully editable .pptx file (5+ MB) directly in the conversation stream.</a:t>
+              <a:t>•  5-pass automated layout audit loop fixes text overflow, card alignment, and visual balance.</a:t>
             </a:r>
           </a:p>
           <a:p>
@@ -7846,21 +9325,21 @@
               </a:defRPr>
             </a:pPr>
             <a:r>
-              <a:t>•  Instant ONLYOFFICE Editing: Click to open in port :8082 without needing Microsoft Office installed on the PC.</a:t>
-            </a:r>
-          </a:p>
-        </p:txBody>
-      </p:sp>
-      <p:sp>
-        <p:nvSpPr>
-          <p:cNvPr id="8" name="Rounded Rectangle 7"/>
+              <a:t>•  Direct download in chat &amp; instant editing via integrated ONLYOFFICE Document Server.</a:t>
+            </a:r>
+          </a:p>
+        </p:txBody>
+      </p:sp>
+      <p:sp>
+        <p:nvSpPr>
+          <p:cNvPr id="9" name="Rounded Rectangle 8"/>
           <p:cNvSpPr/>
           <p:nvPr/>
         </p:nvSpPr>
         <p:spPr>
           <a:xfrm>
-            <a:off x="6217920" y="1645920"/>
-            <a:ext cx="5212080" cy="4572000"/>
+            <a:off x="8046720" y="1645920"/>
+            <a:ext cx="3383280" cy="4572000"/>
           </a:xfrm>
           <a:prstGeom prst="roundRect">
             <a:avLst/>
@@ -7870,7 +9349,7 @@
           </a:solidFill>
           <a:ln w="15240">
             <a:solidFill>
-              <a:srgbClr val="38BDF8"/>
+              <a:srgbClr val="34D399"/>
             </a:solidFill>
           </a:ln>
         </p:spPr>
@@ -7898,13 +9377,13 @@
               </a:spcAft>
               <a:defRPr sz="1000" b="1">
                 <a:solidFill>
-                  <a:srgbClr val="38BDF8"/>
-                </a:solidFill>
-                <a:latin typeface="Arial"/>
-              </a:defRPr>
-            </a:pPr>
-            <a:r>
-              <a:t>DESIGN RIGOR</a:t>
+                  <a:srgbClr val="34D399"/>
+                </a:solidFill>
+                <a:latin typeface="Arial"/>
+              </a:defRPr>
+            </a:pPr>
+            <a:r>
+              <a:t>VECTORCRAFT STUDIO</a:t>
             </a:r>
           </a:p>
           <a:p>
@@ -7920,7 +9399,7 @@
               </a:defRPr>
             </a:pPr>
             <a:r>
-              <a:t>DeckCraft Design &amp; Audit Pipeline</a:t>
+              <a:t>🎨 Vector Infographics</a:t>
             </a:r>
           </a:p>
           <a:p>
@@ -7936,7 +9415,7 @@
               </a:defRPr>
             </a:pPr>
             <a:r>
-              <a:t>•  Approved MCIT Typography: Automatically embeds Nohemi headings, Libre Franklin body, and Inter covers.</a:t>
+              <a:t>•  Translates complex metrics, policy timelines, and architectures into visual sketchnotes.</a:t>
             </a:r>
           </a:p>
           <a:p>
@@ -7952,7 +9431,7 @@
               </a:defRPr>
             </a:pPr>
             <a:r>
-              <a:t>•  Royal Obsidian Theme: High-contrast midnight obsidian background with royal Egyptian gold framing (#D4AF37).</a:t>
+              <a:t>•  VectorCraft engine integrates Open Doodles, structured flowchart arrows, and metric badges.</a:t>
             </a:r>
           </a:p>
           <a:p>
@@ -7968,7 +9447,7 @@
               </a:defRPr>
             </a:pPr>
             <a:r>
-              <a:t>•  Multi-Slide Typology: Hero cover slides, 3-pillar metric cards, timeline roadmaps, and closing executive summaries.</a:t>
+              <a:t>•  High-resolution exports in PNG, scalable SVG, and print-ready vector PDF.</a:t>
             </a:r>
           </a:p>
           <a:p>
@@ -7984,7 +9463,7 @@
               </a:defRPr>
             </a:pPr>
             <a:r>
-              <a:t>•  Automated Layout Audit: Self-healing loop inspects slide text lengths and refactors cards to ensure zero visual overlap.</a:t>
+              <a:t>•  Instantly embeds into official ministerial publications and social media briefs.</a:t>
             </a:r>
           </a:p>
         </p:txBody>
@@ -8117,7 +9596,7 @@
               </a:defRPr>
             </a:pPr>
             <a:r>
-              <a:t>Pillar 3: VectorCraft Infographics Studio</a:t>
+              <a:t>Pillar 1: Intelligent Deep Summarization Engine</a:t>
             </a:r>
           </a:p>
         </p:txBody>
@@ -8208,7 +9687,7 @@
           </a:solidFill>
           <a:ln w="15240">
             <a:solidFill>
-              <a:srgbClr val="34D399"/>
+              <a:srgbClr val="38BDF8"/>
             </a:solidFill>
           </a:ln>
         </p:spPr>
@@ -8236,13 +9715,13 @@
               </a:spcAft>
               <a:defRPr sz="1000" b="1">
                 <a:solidFill>
-                  <a:srgbClr val="34D399"/>
-                </a:solidFill>
-                <a:latin typeface="Arial"/>
-              </a:defRPr>
-            </a:pPr>
-            <a:r>
-              <a:t>VISUAL DESIGN</a:t>
+                  <a:srgbClr val="38BDF8"/>
+                </a:solidFill>
+                <a:latin typeface="Arial"/>
+              </a:defRPr>
+            </a:pPr>
+            <a:r>
+              <a:t>ARCHITECTURE</a:t>
             </a:r>
           </a:p>
           <a:p>
@@ -8258,7 +9737,7 @@
               </a:defRPr>
             </a:pPr>
             <a:r>
-              <a:t>Visualizing Abstract Governmental Data</a:t>
+              <a:t>Multi-Source Knowledge Digestion</a:t>
             </a:r>
           </a:p>
           <a:p>
@@ -8274,7 +9753,7 @@
               </a:defRPr>
             </a:pPr>
             <a:r>
-              <a:t>•  From Numbers to Art: Transforms dry tables and statistical metrics into intuitive visual sketchnotes.</a:t>
+              <a:t>•  Omni-Channel Ingestion: Scanned and text PDFs, Word (.docx), Excel spreadsheets, audio transcripts, and HTML portals.</a:t>
             </a:r>
           </a:p>
           <a:p>
@@ -8290,7 +9769,7 @@
               </a:defRPr>
             </a:pPr>
             <a:r>
-              <a:t>•  Process &amp; Flow Mapping: Automatically draws sequential arrows, milestone containers, and dependency diagrams.</a:t>
+              <a:t>•  Local Chunking &amp; Vectorization: Embeddings generated on-premise using nomic-embed-text via local Ollama bridge.</a:t>
             </a:r>
           </a:p>
           <a:p>
@@ -8306,7 +9785,7 @@
               </a:defRPr>
             </a:pPr>
             <a:r>
-              <a:t>•  Open Doodles &amp; Custom Vector Icons: Integrates approved human-centric vector doodles for friendly, modern appeal.</a:t>
+              <a:t>•  SurrealDB Account Isolation: Each ministry department and user operates in a segregated, sandboxed database.</a:t>
             </a:r>
           </a:p>
           <a:p>
@@ -8322,7 +9801,7 @@
               </a:defRPr>
             </a:pPr>
             <a:r>
-              <a:t>•  Responsive Layouts: Generates square, portrait, and landscape compositions adapted for print, web, or mobile.</a:t>
+              <a:t>•  Lightning Synthesis: Synthesizes complex multi-volume reports into an executive brief in under 20 seconds.</a:t>
             </a:r>
           </a:p>
         </p:txBody>
@@ -8380,7 +9859,7 @@
               </a:defRPr>
             </a:pPr>
             <a:r>
-              <a:t>PRODUCTION FORMATS</a:t>
+              <a:t>VERIFICATION</a:t>
             </a:r>
           </a:p>
           <a:p>
@@ -8396,7 +9875,7 @@
               </a:defRPr>
             </a:pPr>
             <a:r>
-              <a:t>Multi-Format Sovereign Export</a:t>
+              <a:t>Grounded Trust &amp; Zero-Hallucination</a:t>
             </a:r>
           </a:p>
           <a:p>
@@ -8412,7 +9891,7 @@
               </a:defRPr>
             </a:pPr>
             <a:r>
-              <a:t>•  Vector SVG Export: Infinitely scalable vector art suitable for billboards, official banners, and web publication.</a:t>
+              <a:t>•  Numbered Citation System: Summary sentences display [1], [2] clickable references pointing back to the exact passage.</a:t>
             </a:r>
           </a:p>
           <a:p>
@@ -8428,7 +9907,7 @@
               </a:defRPr>
             </a:pPr>
             <a:r>
-              <a:t>•  Ultra-HD PNG: High-DPI raster output for seamless embedding into Word reports, executive PDFs, and emails.</a:t>
+              <a:t>•  Context-Locked LLM: The model is strictly instructed to answer only from verified retrieved passages.</a:t>
             </a:r>
           </a:p>
           <a:p>
@@ -8444,7 +9923,7 @@
               </a:defRPr>
             </a:pPr>
             <a:r>
-              <a:t>•  Print-Ready PDF: Vector PDF output matching international A4 / A3 print standards.</a:t>
+              <a:t>•  Executive Summary Tiers: Switch between a 1-page High-Level Digest, a 5-page Comprehensive Study, or a Table of Deliverables.</a:t>
             </a:r>
           </a:p>
           <a:p>
@@ -8460,7 +9939,7 @@
               </a:defRPr>
             </a:pPr>
             <a:r>
-              <a:t>•  Zero Cloud Dependency: All rendering done via local Node.js VectorCraft engine inside Docker container.</a:t>
+              <a:t>•  Arabic &amp; English Mastery: Full bilingual comprehension of complex Egyptian administrative and legal phrasing.</a:t>
             </a:r>
           </a:p>
         </p:txBody>
@@ -8557,7 +10036,7 @@
               </a:defRPr>
             </a:pPr>
             <a:r>
-              <a:t>LIVE SYSTEM INTERFACE</a:t>
+              <a:t>CORE FEATURE DEEP-DIVE</a:t>
             </a:r>
           </a:p>
         </p:txBody>
@@ -8593,7 +10072,7 @@
               </a:defRPr>
             </a:pPr>
             <a:r>
-              <a:t>Live Platform Showcase: Knowledge Notebooks &amp; Multi-Source RAG</a:t>
+              <a:t>Pillar 2: Autonomous PowerPoint Presentation Engine</a:t>
             </a:r>
           </a:p>
         </p:txBody>
@@ -8673,77 +10152,8 @@
         </p:nvSpPr>
         <p:spPr>
           <a:xfrm>
-            <a:off x="676656" y="1728216"/>
-            <a:ext cx="6876288" cy="4114800"/>
-          </a:xfrm>
-          <a:prstGeom prst="roundRect">
-            <a:avLst/>
-          </a:prstGeom>
-          <a:solidFill>
-            <a:srgbClr val="111827"/>
-          </a:solidFill>
-          <a:ln w="19050">
-            <a:solidFill>
-              <a:srgbClr val="D4AF37"/>
-            </a:solidFill>
-          </a:ln>
-        </p:spPr>
-        <p:style>
-          <a:lnRef idx="1">
-            <a:schemeClr val="accent1"/>
-          </a:lnRef>
-          <a:fillRef idx="3">
-            <a:schemeClr val="accent1"/>
-          </a:fillRef>
-          <a:effectRef idx="2">
-            <a:schemeClr val="accent1"/>
-          </a:effectRef>
-          <a:fontRef idx="minor">
-            <a:schemeClr val="lt1"/>
-          </a:fontRef>
-        </p:style>
-        <p:txBody>
-          <a:bodyPr rtlCol="0" anchor="ctr"/>
-          <a:lstStyle/>
-          <a:p>
-            <a:pPr algn="ctr"/>
-          </a:p>
-        </p:txBody>
-      </p:sp>
-      <p:pic>
-        <p:nvPicPr>
-          <p:cNvPr id="8" name="Picture 7" descr="tut_ui_notebooks.png"/>
-          <p:cNvPicPr>
-            <a:picLocks noChangeAspect="1"/>
-          </p:cNvPicPr>
-          <p:nvPr/>
-        </p:nvPicPr>
-        <p:blipFill>
-          <a:blip r:embed="rId3"/>
-          <a:stretch>
-            <a:fillRect/>
-          </a:stretch>
-        </p:blipFill>
-        <p:spPr>
-          <a:xfrm>
-            <a:off x="731520" y="1783080"/>
-            <a:ext cx="6766560" cy="4005072"/>
-          </a:xfrm>
-          <a:prstGeom prst="rect">
-            <a:avLst/>
-          </a:prstGeom>
-        </p:spPr>
-      </p:pic>
-      <p:sp>
-        <p:nvSpPr>
-          <p:cNvPr id="9" name="Rounded Rectangle 8"/>
-          <p:cNvSpPr/>
-          <p:nvPr/>
-        </p:nvSpPr>
-        <p:spPr>
-          <a:xfrm>
-            <a:off x="7772400" y="1719072"/>
-            <a:ext cx="3685032" cy="1353312"/>
+            <a:off x="731520" y="1645920"/>
+            <a:ext cx="5212080" cy="4572000"/>
           </a:xfrm>
           <a:prstGeom prst="roundRect">
             <a:avLst/>
@@ -8772,14 +10182,14 @@
           </a:fontRef>
         </p:style>
         <p:txBody>
-          <a:bodyPr rtlCol="0" anchor="ctr" wrap="square" lIns="182880" rIns="182880" tIns="109728" bIns="73152"/>
+          <a:bodyPr rtlCol="0" anchor="ctr" wrap="square" lIns="228600" rIns="228600" tIns="228600" bIns="182880"/>
           <a:lstStyle/>
           <a:p>
             <a:pPr algn="ctr">
               <a:spcAft>
-                <a:spcPts val="200"/>
-              </a:spcAft>
-              <a:defRPr sz="900" b="1">
+                <a:spcPts val="400"/>
+              </a:spcAft>
+              <a:defRPr sz="1000" b="1">
                 <a:solidFill>
                   <a:srgbClr val="D4AF37"/>
                 </a:solidFill>
@@ -8787,15 +10197,15 @@
               </a:defRPr>
             </a:pPr>
             <a:r>
-              <a:t>DATA INGESTION</a:t>
-            </a:r>
-          </a:p>
-          <a:p>
-            <a:pPr>
-              <a:spcAft>
-                <a:spcPts val="400"/>
-              </a:spcAft>
-              <a:defRPr sz="1300" b="1">
+              <a:t>CONVERSATIONAL FLOW</a:t>
+            </a:r>
+          </a:p>
+          <a:p>
+            <a:pPr>
+              <a:spcAft>
+                <a:spcPts val="1000"/>
+              </a:spcAft>
+              <a:defRPr sz="1600" b="1">
                 <a:solidFill>
                   <a:srgbClr val="F8FAFC"/>
                 </a:solidFill>
@@ -8803,53 +10213,85 @@
               </a:defRPr>
             </a:pPr>
             <a:r>
-              <a:t>Multi-Source Knowledge Ingestion</a:t>
-            </a:r>
-          </a:p>
-          <a:p>
-            <a:pPr>
-              <a:spcAft>
-                <a:spcPts val="200"/>
-              </a:spcAft>
-              <a:defRPr sz="1050">
-                <a:solidFill>
-                  <a:srgbClr val="94A3B8"/>
-                </a:solidFill>
-                <a:latin typeface="Arial"/>
-              </a:defRPr>
-            </a:pPr>
-            <a:r>
-              <a:t>•  Ingests massive governmental PDFs (e.g. WEF Global Risks Report 2024), decrees, and spreadsheets.</a:t>
-            </a:r>
-          </a:p>
-          <a:p>
-            <a:pPr>
-              <a:spcAft>
-                <a:spcPts val="200"/>
-              </a:spcAft>
-              <a:defRPr sz="1050">
-                <a:solidFill>
-                  <a:srgbClr val="94A3B8"/>
-                </a:solidFill>
-                <a:latin typeface="Arial"/>
-              </a:defRPr>
-            </a:pPr>
-            <a:r>
-              <a:t>•  Full-text search &amp; vector embeddings extracted and stored 100% locally.</a:t>
-            </a:r>
-          </a:p>
-        </p:txBody>
-      </p:sp>
-      <p:sp>
-        <p:nvSpPr>
-          <p:cNvPr id="10" name="Rounded Rectangle 9"/>
+              <a:t>End-to-End In-Chat Generation</a:t>
+            </a:r>
+          </a:p>
+          <a:p>
+            <a:pPr>
+              <a:spcAft>
+                <a:spcPts val="600"/>
+              </a:spcAft>
+              <a:defRPr sz="1200">
+                <a:solidFill>
+                  <a:srgbClr val="94A3B8"/>
+                </a:solidFill>
+                <a:latin typeface="Arial"/>
+              </a:defRPr>
+            </a:pPr>
+            <a:r>
+              <a:t>•  Natural Language Prompting: Ask TuT Agent: 'Create a 12-slide presentation on Egypt Vision 2030 digital pillars'.</a:t>
+            </a:r>
+          </a:p>
+          <a:p>
+            <a:pPr>
+              <a:spcAft>
+                <a:spcPts val="600"/>
+              </a:spcAft>
+              <a:defRPr sz="1200">
+                <a:solidFill>
+                  <a:srgbClr val="94A3B8"/>
+                </a:solidFill>
+                <a:latin typeface="Arial"/>
+              </a:defRPr>
+            </a:pPr>
+            <a:r>
+              <a:t>•  Local MCP Protocol: Agent invokes the local deck generator tool via Model Context Protocol (MCP) in real-time.</a:t>
+            </a:r>
+          </a:p>
+          <a:p>
+            <a:pPr>
+              <a:spcAft>
+                <a:spcPts val="600"/>
+              </a:spcAft>
+              <a:defRPr sz="1200">
+                <a:solidFill>
+                  <a:srgbClr val="94A3B8"/>
+                </a:solidFill>
+                <a:latin typeface="Arial"/>
+              </a:defRPr>
+            </a:pPr>
+            <a:r>
+              <a:t>•  Production Deck Output: Produces a genuine, fully editable .pptx file (5+ MB) directly in the conversation stream.</a:t>
+            </a:r>
+          </a:p>
+          <a:p>
+            <a:pPr>
+              <a:spcAft>
+                <a:spcPts val="600"/>
+              </a:spcAft>
+              <a:defRPr sz="1200">
+                <a:solidFill>
+                  <a:srgbClr val="94A3B8"/>
+                </a:solidFill>
+                <a:latin typeface="Arial"/>
+              </a:defRPr>
+            </a:pPr>
+            <a:r>
+              <a:t>•  Instant ONLYOFFICE Editing: Click to open in port :8082 without needing Microsoft Office installed on the PC.</a:t>
+            </a:r>
+          </a:p>
+        </p:txBody>
+      </p:sp>
+      <p:sp>
+        <p:nvSpPr>
+          <p:cNvPr id="8" name="Rounded Rectangle 7"/>
           <p:cNvSpPr/>
           <p:nvPr/>
         </p:nvSpPr>
         <p:spPr>
           <a:xfrm>
-            <a:off x="7772400" y="3218688"/>
-            <a:ext cx="3685032" cy="1353312"/>
+            <a:off x="6217920" y="1645920"/>
+            <a:ext cx="5212080" cy="4572000"/>
           </a:xfrm>
           <a:prstGeom prst="roundRect">
             <a:avLst/>
@@ -8878,14 +10320,14 @@
           </a:fontRef>
         </p:style>
         <p:txBody>
-          <a:bodyPr rtlCol="0" anchor="ctr" wrap="square" lIns="182880" rIns="182880" tIns="109728" bIns="73152"/>
+          <a:bodyPr rtlCol="0" anchor="ctr" wrap="square" lIns="228600" rIns="228600" tIns="228600" bIns="182880"/>
           <a:lstStyle/>
           <a:p>
             <a:pPr algn="ctr">
               <a:spcAft>
-                <a:spcPts val="200"/>
-              </a:spcAft>
-              <a:defRPr sz="900" b="1">
+                <a:spcPts val="400"/>
+              </a:spcAft>
+              <a:defRPr sz="1000" b="1">
                 <a:solidFill>
                   <a:srgbClr val="38BDF8"/>
                 </a:solidFill>
@@ -8893,15 +10335,15 @@
               </a:defRPr>
             </a:pPr>
             <a:r>
-              <a:t>SECURITY &amp; ISOLATION</a:t>
-            </a:r>
-          </a:p>
-          <a:p>
-            <a:pPr>
-              <a:spcAft>
-                <a:spcPts val="400"/>
-              </a:spcAft>
-              <a:defRPr sz="1300" b="1">
+              <a:t>DESIGN RIGOR</a:t>
+            </a:r>
+          </a:p>
+          <a:p>
+            <a:pPr>
+              <a:spcAft>
+                <a:spcPts val="1000"/>
+              </a:spcAft>
+              <a:defRPr sz="1600" b="1">
                 <a:solidFill>
                   <a:srgbClr val="F8FAFC"/>
                 </a:solidFill>
@@ -8909,145 +10351,71 @@
               </a:defRPr>
             </a:pPr>
             <a:r>
-              <a:t>Departmental Notebook Sandboxing</a:t>
-            </a:r>
-          </a:p>
-          <a:p>
-            <a:pPr>
-              <a:spcAft>
-                <a:spcPts val="200"/>
-              </a:spcAft>
-              <a:defRPr sz="1050">
-                <a:solidFill>
-                  <a:srgbClr val="94A3B8"/>
-                </a:solidFill>
-                <a:latin typeface="Arial"/>
-              </a:defRPr>
-            </a:pPr>
-            <a:r>
-              <a:t>•  Isolated sovereign workspaces ('dsc', 'klh', 'arfa', 'eg') protect departmental boundaries.</a:t>
-            </a:r>
-          </a:p>
-          <a:p>
-            <a:pPr>
-              <a:spcAft>
-                <a:spcPts val="200"/>
-              </a:spcAft>
-              <a:defRPr sz="1050">
-                <a:solidFill>
-                  <a:srgbClr val="94A3B8"/>
-                </a:solidFill>
-                <a:latin typeface="Arial"/>
-              </a:defRPr>
-            </a:pPr>
-            <a:r>
-              <a:t>•  Prevents data cross-contamination with secure account-level isolation.</a:t>
-            </a:r>
-          </a:p>
-        </p:txBody>
-      </p:sp>
-      <p:sp>
-        <p:nvSpPr>
-          <p:cNvPr id="11" name="Rounded Rectangle 10"/>
-          <p:cNvSpPr/>
-          <p:nvPr/>
-        </p:nvSpPr>
-        <p:spPr>
-          <a:xfrm>
-            <a:off x="7772400" y="4718304"/>
-            <a:ext cx="3685032" cy="1353312"/>
-          </a:xfrm>
-          <a:prstGeom prst="roundRect">
-            <a:avLst/>
-          </a:prstGeom>
-          <a:solidFill>
-            <a:srgbClr val="111827"/>
-          </a:solidFill>
-          <a:ln w="15240">
-            <a:solidFill>
-              <a:srgbClr val="34D399"/>
-            </a:solidFill>
-          </a:ln>
-        </p:spPr>
-        <p:style>
-          <a:lnRef idx="1">
-            <a:schemeClr val="accent1"/>
-          </a:lnRef>
-          <a:fillRef idx="3">
-            <a:schemeClr val="accent1"/>
-          </a:fillRef>
-          <a:effectRef idx="2">
-            <a:schemeClr val="accent1"/>
-          </a:effectRef>
-          <a:fontRef idx="minor">
-            <a:schemeClr val="lt1"/>
-          </a:fontRef>
-        </p:style>
-        <p:txBody>
-          <a:bodyPr rtlCol="0" anchor="ctr" wrap="square" lIns="182880" rIns="182880" tIns="109728" bIns="73152"/>
-          <a:lstStyle/>
-          <a:p>
-            <a:pPr algn="ctr">
-              <a:spcAft>
-                <a:spcPts val="200"/>
-              </a:spcAft>
-              <a:defRPr sz="900" b="1">
-                <a:solidFill>
-                  <a:srgbClr val="34D399"/>
-                </a:solidFill>
-                <a:latin typeface="Arial"/>
-              </a:defRPr>
-            </a:pPr>
-            <a:r>
-              <a:t>MCIT PROVENANCE</a:t>
-            </a:r>
-          </a:p>
-          <a:p>
-            <a:pPr>
-              <a:spcAft>
-                <a:spcPts val="400"/>
-              </a:spcAft>
-              <a:defRPr sz="1300" b="1">
-                <a:solidFill>
-                  <a:srgbClr val="F8FAFC"/>
-                </a:solidFill>
-                <a:latin typeface="Arial"/>
-              </a:defRPr>
-            </a:pPr>
-            <a:r>
-              <a:t>Sovereign National Attribution</a:t>
-            </a:r>
-          </a:p>
-          <a:p>
-            <a:pPr>
-              <a:spcAft>
-                <a:spcPts val="200"/>
-              </a:spcAft>
-              <a:defRPr sz="1050">
-                <a:solidFill>
-                  <a:srgbClr val="94A3B8"/>
-                </a:solidFill>
-                <a:latin typeface="Arial"/>
-              </a:defRPr>
-            </a:pPr>
-            <a:r>
-              <a:t>•  Custom-built for the Ministry of Communications &amp; Information Technology.</a:t>
-            </a:r>
-          </a:p>
-          <a:p>
-            <a:pPr>
-              <a:spcAft>
-                <a:spcPts val="200"/>
-              </a:spcAft>
-              <a:defRPr sz="1050">
-                <a:solidFill>
-                  <a:srgbClr val="94A3B8"/>
-                </a:solidFill>
-                <a:latin typeface="Arial"/>
-              </a:defRPr>
-            </a:pPr>
-            <a:r>
-              <a:t>•  Verified interface attribution: 'Developed by Eng Ahmed Arfa for MCIT'.</a:t>
+              <a:t>DeckCraft Design &amp; Audit Pipeline</a:t>
+            </a:r>
+          </a:p>
+          <a:p>
+            <a:pPr>
+              <a:spcAft>
+                <a:spcPts val="600"/>
+              </a:spcAft>
+              <a:defRPr sz="1200">
+                <a:solidFill>
+                  <a:srgbClr val="94A3B8"/>
+                </a:solidFill>
+                <a:latin typeface="Arial"/>
+              </a:defRPr>
+            </a:pPr>
+            <a:r>
+              <a:t>•  Approved MCIT Typography: Automatically embeds Nohemi headings, Libre Franklin body, and Inter covers.</a:t>
+            </a:r>
+          </a:p>
+          <a:p>
+            <a:pPr>
+              <a:spcAft>
+                <a:spcPts val="600"/>
+              </a:spcAft>
+              <a:defRPr sz="1200">
+                <a:solidFill>
+                  <a:srgbClr val="94A3B8"/>
+                </a:solidFill>
+                <a:latin typeface="Arial"/>
+              </a:defRPr>
+            </a:pPr>
+            <a:r>
+              <a:t>•  Royal Obsidian Theme: High-contrast midnight obsidian background with royal Egyptian gold framing (#D4AF37).</a:t>
+            </a:r>
+          </a:p>
+          <a:p>
+            <a:pPr>
+              <a:spcAft>
+                <a:spcPts val="600"/>
+              </a:spcAft>
+              <a:defRPr sz="1200">
+                <a:solidFill>
+                  <a:srgbClr val="94A3B8"/>
+                </a:solidFill>
+                <a:latin typeface="Arial"/>
+              </a:defRPr>
+            </a:pPr>
+            <a:r>
+              <a:t>•  Multi-Slide Typology: Hero cover slides, 3-pillar metric cards, timeline roadmaps, and closing executive summaries.</a:t>
+            </a:r>
+          </a:p>
+          <a:p>
+            <a:pPr>
+              <a:spcAft>
+                <a:spcPts val="600"/>
+              </a:spcAft>
+              <a:defRPr sz="1200">
+                <a:solidFill>
+                  <a:srgbClr val="94A3B8"/>
+                </a:solidFill>
+                <a:latin typeface="Arial"/>
+              </a:defRPr>
+            </a:pPr>
+            <a:r>
+              <a:t>•  Automated Layout Audit: Self-healing loop inspects slide text lengths and refactors cards to ensure zero visual overlap.</a:t>
             </a:r>
           </a:p>
         </p:txBody>
@@ -9144,7 +10512,7 @@
               </a:defRPr>
             </a:pPr>
             <a:r>
-              <a:t>CONVERSATIONAL INTELLIGENCE</a:t>
+              <a:t>CORE FEATURE DEEP-DIVE</a:t>
             </a:r>
           </a:p>
         </p:txBody>
@@ -9180,7 +10548,7 @@
               </a:defRPr>
             </a:pPr>
             <a:r>
-              <a:t>Live Agent Showcase: In-Chat Deck Generation &amp; 3D Avatar</a:t>
+              <a:t>Pillar 3: VectorCraft Infographics Studio</a:t>
             </a:r>
           </a:p>
         </p:txBody>
@@ -9260,8 +10628,8 @@
         </p:nvSpPr>
         <p:spPr>
           <a:xfrm>
-            <a:off x="676656" y="1728216"/>
-            <a:ext cx="6876288" cy="4114800"/>
+            <a:off x="731520" y="1645920"/>
+            <a:ext cx="5212080" cy="4572000"/>
           </a:xfrm>
           <a:prstGeom prst="roundRect">
             <a:avLst/>
@@ -9269,9 +10637,9 @@
           <a:solidFill>
             <a:srgbClr val="111827"/>
           </a:solidFill>
-          <a:ln w="19050">
+          <a:ln w="15240">
             <a:solidFill>
-              <a:srgbClr val="38BDF8"/>
+              <a:srgbClr val="34D399"/>
             </a:solidFill>
           </a:ln>
         </p:spPr>
@@ -9290,47 +10658,116 @@
           </a:fontRef>
         </p:style>
         <p:txBody>
-          <a:bodyPr rtlCol="0" anchor="ctr"/>
-          <a:lstStyle/>
-          <a:p>
-            <a:pPr algn="ctr"/>
-          </a:p>
-        </p:txBody>
-      </p:sp>
-      <p:pic>
-        <p:nvPicPr>
-          <p:cNvPr id="8" name="Picture 7" descr="tut_ui_agent.png"/>
-          <p:cNvPicPr>
-            <a:picLocks noChangeAspect="1"/>
-          </p:cNvPicPr>
-          <p:nvPr/>
-        </p:nvPicPr>
-        <p:blipFill>
-          <a:blip r:embed="rId3"/>
-          <a:stretch>
-            <a:fillRect/>
-          </a:stretch>
-        </p:blipFill>
-        <p:spPr>
-          <a:xfrm>
-            <a:off x="731520" y="1783080"/>
-            <a:ext cx="6766560" cy="4005072"/>
-          </a:xfrm>
-          <a:prstGeom prst="rect">
-            <a:avLst/>
-          </a:prstGeom>
-        </p:spPr>
-      </p:pic>
-      <p:sp>
-        <p:nvSpPr>
-          <p:cNvPr id="9" name="Rounded Rectangle 8"/>
+          <a:bodyPr rtlCol="0" anchor="ctr" wrap="square" lIns="228600" rIns="228600" tIns="228600" bIns="182880"/>
+          <a:lstStyle/>
+          <a:p>
+            <a:pPr algn="ctr">
+              <a:spcAft>
+                <a:spcPts val="400"/>
+              </a:spcAft>
+              <a:defRPr sz="1000" b="1">
+                <a:solidFill>
+                  <a:srgbClr val="34D399"/>
+                </a:solidFill>
+                <a:latin typeface="Arial"/>
+              </a:defRPr>
+            </a:pPr>
+            <a:r>
+              <a:t>VISUAL DESIGN</a:t>
+            </a:r>
+          </a:p>
+          <a:p>
+            <a:pPr>
+              <a:spcAft>
+                <a:spcPts val="1000"/>
+              </a:spcAft>
+              <a:defRPr sz="1600" b="1">
+                <a:solidFill>
+                  <a:srgbClr val="F8FAFC"/>
+                </a:solidFill>
+                <a:latin typeface="Arial"/>
+              </a:defRPr>
+            </a:pPr>
+            <a:r>
+              <a:t>Visualizing Abstract Governmental Data</a:t>
+            </a:r>
+          </a:p>
+          <a:p>
+            <a:pPr>
+              <a:spcAft>
+                <a:spcPts val="600"/>
+              </a:spcAft>
+              <a:defRPr sz="1200">
+                <a:solidFill>
+                  <a:srgbClr val="94A3B8"/>
+                </a:solidFill>
+                <a:latin typeface="Arial"/>
+              </a:defRPr>
+            </a:pPr>
+            <a:r>
+              <a:t>•  From Numbers to Art: Transforms dry tables and statistical metrics into intuitive visual sketchnotes.</a:t>
+            </a:r>
+          </a:p>
+          <a:p>
+            <a:pPr>
+              <a:spcAft>
+                <a:spcPts val="600"/>
+              </a:spcAft>
+              <a:defRPr sz="1200">
+                <a:solidFill>
+                  <a:srgbClr val="94A3B8"/>
+                </a:solidFill>
+                <a:latin typeface="Arial"/>
+              </a:defRPr>
+            </a:pPr>
+            <a:r>
+              <a:t>•  Process &amp; Flow Mapping: Automatically draws sequential arrows, milestone containers, and dependency diagrams.</a:t>
+            </a:r>
+          </a:p>
+          <a:p>
+            <a:pPr>
+              <a:spcAft>
+                <a:spcPts val="600"/>
+              </a:spcAft>
+              <a:defRPr sz="1200">
+                <a:solidFill>
+                  <a:srgbClr val="94A3B8"/>
+                </a:solidFill>
+                <a:latin typeface="Arial"/>
+              </a:defRPr>
+            </a:pPr>
+            <a:r>
+              <a:t>•  Open Doodles &amp; Custom Vector Icons: Integrates approved human-centric vector doodles for friendly, modern appeal.</a:t>
+            </a:r>
+          </a:p>
+          <a:p>
+            <a:pPr>
+              <a:spcAft>
+                <a:spcPts val="600"/>
+              </a:spcAft>
+              <a:defRPr sz="1200">
+                <a:solidFill>
+                  <a:srgbClr val="94A3B8"/>
+                </a:solidFill>
+                <a:latin typeface="Arial"/>
+              </a:defRPr>
+            </a:pPr>
+            <a:r>
+              <a:t>•  Responsive Layouts: Generates square, portrait, and landscape compositions adapted for print, web, or mobile.</a:t>
+            </a:r>
+          </a:p>
+        </p:txBody>
+      </p:sp>
+      <p:sp>
+        <p:nvSpPr>
+          <p:cNvPr id="8" name="Rounded Rectangle 7"/>
           <p:cNvSpPr/>
           <p:nvPr/>
         </p:nvSpPr>
         <p:spPr>
           <a:xfrm>
-            <a:off x="7772400" y="1719072"/>
-            <a:ext cx="3685032" cy="1353312"/>
+            <a:off x="6217920" y="1645920"/>
+            <a:ext cx="5212080" cy="4572000"/>
           </a:xfrm>
           <a:prstGeom prst="roundRect">
             <a:avLst/>
@@ -9359,14 +10796,14 @@
           </a:fontRef>
         </p:style>
         <p:txBody>
-          <a:bodyPr rtlCol="0" anchor="ctr" wrap="square" lIns="182880" rIns="182880" tIns="109728" bIns="73152"/>
+          <a:bodyPr rtlCol="0" anchor="ctr" wrap="square" lIns="228600" rIns="228600" tIns="228600" bIns="182880"/>
           <a:lstStyle/>
           <a:p>
             <a:pPr algn="ctr">
               <a:spcAft>
-                <a:spcPts val="200"/>
-              </a:spcAft>
-              <a:defRPr sz="900" b="1">
+                <a:spcPts val="400"/>
+              </a:spcAft>
+              <a:defRPr sz="1000" b="1">
                 <a:solidFill>
                   <a:srgbClr val="D4AF37"/>
                 </a:solidFill>
@@ -9374,15 +10811,15 @@
               </a:defRPr>
             </a:pPr>
             <a:r>
-              <a:t>SOVEREIGN IDENTITY</a:t>
-            </a:r>
-          </a:p>
-          <a:p>
-            <a:pPr>
-              <a:spcAft>
-                <a:spcPts val="400"/>
-              </a:spcAft>
-              <a:defRPr sz="1300" b="1">
+              <a:t>PRODUCTION FORMATS</a:t>
+            </a:r>
+          </a:p>
+          <a:p>
+            <a:pPr>
+              <a:spcAft>
+                <a:spcPts val="1000"/>
+              </a:spcAft>
+              <a:defRPr sz="1600" b="1">
                 <a:solidFill>
                   <a:srgbClr val="F8FAFC"/>
                 </a:solidFill>
@@ -9390,251 +10827,71 @@
               </a:defRPr>
             </a:pPr>
             <a:r>
-              <a:t>3D Holographic Sovereign Avatar</a:t>
-            </a:r>
-          </a:p>
-          <a:p>
-            <a:pPr>
-              <a:spcAft>
-                <a:spcPts val="200"/>
-              </a:spcAft>
-              <a:defRPr sz="1050">
-                <a:solidFill>
-                  <a:srgbClr val="94A3B8"/>
-                </a:solidFill>
-                <a:latin typeface="Arial"/>
-              </a:defRPr>
-            </a:pPr>
-            <a:r>
-              <a:t>•  Interactive real-time 3D King Tut avatar blending Egyptian heritage with state-of-the-art AI.</a:t>
-            </a:r>
-          </a:p>
-          <a:p>
-            <a:pPr>
-              <a:spcAft>
-                <a:spcPts val="200"/>
-              </a:spcAft>
-              <a:defRPr sz="1050">
-                <a:solidFill>
-                  <a:srgbClr val="94A3B8"/>
-                </a:solidFill>
-                <a:latin typeface="Arial"/>
-              </a:defRPr>
-            </a:pPr>
-            <a:r>
-              <a:t>•  Dynamic state cues respond to thought cycles and generation stages.</a:t>
-            </a:r>
-          </a:p>
-        </p:txBody>
-      </p:sp>
-      <p:sp>
-        <p:nvSpPr>
-          <p:cNvPr id="10" name="Rounded Rectangle 9"/>
-          <p:cNvSpPr/>
-          <p:nvPr/>
-        </p:nvSpPr>
-        <p:spPr>
-          <a:xfrm>
-            <a:off x="7772400" y="3218688"/>
-            <a:ext cx="3685032" cy="1353312"/>
-          </a:xfrm>
-          <a:prstGeom prst="roundRect">
-            <a:avLst/>
-          </a:prstGeom>
-          <a:solidFill>
-            <a:srgbClr val="111827"/>
-          </a:solidFill>
-          <a:ln w="15240">
-            <a:solidFill>
-              <a:srgbClr val="38BDF8"/>
-            </a:solidFill>
-          </a:ln>
-        </p:spPr>
-        <p:style>
-          <a:lnRef idx="1">
-            <a:schemeClr val="accent1"/>
-          </a:lnRef>
-          <a:fillRef idx="3">
-            <a:schemeClr val="accent1"/>
-          </a:fillRef>
-          <a:effectRef idx="2">
-            <a:schemeClr val="accent1"/>
-          </a:effectRef>
-          <a:fontRef idx="minor">
-            <a:schemeClr val="lt1"/>
-          </a:fontRef>
-        </p:style>
-        <p:txBody>
-          <a:bodyPr rtlCol="0" anchor="ctr" wrap="square" lIns="182880" rIns="182880" tIns="109728" bIns="73152"/>
-          <a:lstStyle/>
-          <a:p>
-            <a:pPr algn="ctr">
-              <a:spcAft>
-                <a:spcPts val="200"/>
-              </a:spcAft>
-              <a:defRPr sz="900" b="1">
-                <a:solidFill>
-                  <a:srgbClr val="38BDF8"/>
-                </a:solidFill>
-                <a:latin typeface="Arial"/>
-              </a:defRPr>
-            </a:pPr>
-            <a:r>
-              <a:t>DECKCRAFT ENGINE</a:t>
-            </a:r>
-          </a:p>
-          <a:p>
-            <a:pPr>
-              <a:spcAft>
-                <a:spcPts val="400"/>
-              </a:spcAft>
-              <a:defRPr sz="1300" b="1">
-                <a:solidFill>
-                  <a:srgbClr val="F8FAFC"/>
-                </a:solidFill>
-                <a:latin typeface="Arial"/>
-              </a:defRPr>
-            </a:pPr>
-            <a:r>
-              <a:t>In-Chat Autonomous Presentation Engine</a:t>
-            </a:r>
-          </a:p>
-          <a:p>
-            <a:pPr>
-              <a:spcAft>
-                <a:spcPts val="200"/>
-              </a:spcAft>
-              <a:defRPr sz="1050">
-                <a:solidFill>
-                  <a:srgbClr val="94A3B8"/>
-                </a:solidFill>
-                <a:latin typeface="Arial"/>
-              </a:defRPr>
-            </a:pPr>
-            <a:r>
-              <a:t>•  Live conversational workflow: User asks in Arabic for presentations on complex national topics.</a:t>
-            </a:r>
-          </a:p>
-          <a:p>
-            <a:pPr>
-              <a:spcAft>
-                <a:spcPts val="200"/>
-              </a:spcAft>
-              <a:defRPr sz="1050">
-                <a:solidFill>
-                  <a:srgbClr val="94A3B8"/>
-                </a:solidFill>
-                <a:latin typeface="Arial"/>
-              </a:defRPr>
-            </a:pPr>
-            <a:r>
-              <a:t>•  Generates genuine, fully editable PowerPoint decks (.pptx) right inside chat.</a:t>
-            </a:r>
-          </a:p>
-        </p:txBody>
-      </p:sp>
-      <p:sp>
-        <p:nvSpPr>
-          <p:cNvPr id="11" name="Rounded Rectangle 10"/>
-          <p:cNvSpPr/>
-          <p:nvPr/>
-        </p:nvSpPr>
-        <p:spPr>
-          <a:xfrm>
-            <a:off x="7772400" y="4718304"/>
-            <a:ext cx="3685032" cy="1353312"/>
-          </a:xfrm>
-          <a:prstGeom prst="roundRect">
-            <a:avLst/>
-          </a:prstGeom>
-          <a:solidFill>
-            <a:srgbClr val="111827"/>
-          </a:solidFill>
-          <a:ln w="15240">
-            <a:solidFill>
-              <a:srgbClr val="34D399"/>
-            </a:solidFill>
-          </a:ln>
-        </p:spPr>
-        <p:style>
-          <a:lnRef idx="1">
-            <a:schemeClr val="accent1"/>
-          </a:lnRef>
-          <a:fillRef idx="3">
-            <a:schemeClr val="accent1"/>
-          </a:fillRef>
-          <a:effectRef idx="2">
-            <a:schemeClr val="accent1"/>
-          </a:effectRef>
-          <a:fontRef idx="minor">
-            <a:schemeClr val="lt1"/>
-          </a:fontRef>
-        </p:style>
-        <p:txBody>
-          <a:bodyPr rtlCol="0" anchor="ctr" wrap="square" lIns="182880" rIns="182880" tIns="109728" bIns="73152"/>
-          <a:lstStyle/>
-          <a:p>
-            <a:pPr algn="ctr">
-              <a:spcAft>
-                <a:spcPts val="200"/>
-              </a:spcAft>
-              <a:defRPr sz="900" b="1">
-                <a:solidFill>
-                  <a:srgbClr val="34D399"/>
-                </a:solidFill>
-                <a:latin typeface="Arial"/>
-              </a:defRPr>
-            </a:pPr>
-            <a:r>
-              <a:t>GPU ACCELERATION</a:t>
-            </a:r>
-          </a:p>
-          <a:p>
-            <a:pPr>
-              <a:spcAft>
-                <a:spcPts val="400"/>
-              </a:spcAft>
-              <a:defRPr sz="1300" b="1">
-                <a:solidFill>
-                  <a:srgbClr val="F8FAFC"/>
-                </a:solidFill>
-                <a:latin typeface="Arial"/>
-              </a:defRPr>
-            </a:pPr>
-            <a:r>
-              <a:t>Pinned Local Gemma 4 Engine</a:t>
-            </a:r>
-          </a:p>
-          <a:p>
-            <a:pPr>
-              <a:spcAft>
-                <a:spcPts val="200"/>
-              </a:spcAft>
-              <a:defRPr sz="1050">
-                <a:solidFill>
-                  <a:srgbClr val="94A3B8"/>
-                </a:solidFill>
-                <a:latin typeface="Arial"/>
-              </a:defRPr>
-            </a:pPr>
-            <a:r>
-              <a:t>•  Powered by Gemma 4 e4b pinned directly in NVIDIA RTX GPU VRAM.</a:t>
-            </a:r>
-          </a:p>
-          <a:p>
-            <a:pPr>
-              <a:spcAft>
-                <a:spcPts val="200"/>
-              </a:spcAft>
-              <a:defRPr sz="1050">
-                <a:solidFill>
-                  <a:srgbClr val="94A3B8"/>
-                </a:solidFill>
-                <a:latin typeface="Arial"/>
-              </a:defRPr>
-            </a:pPr>
-            <a:r>
-              <a:t>•  Instant token streaming with zero latency and 100% offline data privacy.</a:t>
+              <a:t>Multi-Format Sovereign Export</a:t>
+            </a:r>
+          </a:p>
+          <a:p>
+            <a:pPr>
+              <a:spcAft>
+                <a:spcPts val="600"/>
+              </a:spcAft>
+              <a:defRPr sz="1200">
+                <a:solidFill>
+                  <a:srgbClr val="94A3B8"/>
+                </a:solidFill>
+                <a:latin typeface="Arial"/>
+              </a:defRPr>
+            </a:pPr>
+            <a:r>
+              <a:t>•  Vector SVG Export: Infinitely scalable vector art suitable for billboards, official banners, and web publication.</a:t>
+            </a:r>
+          </a:p>
+          <a:p>
+            <a:pPr>
+              <a:spcAft>
+                <a:spcPts val="600"/>
+              </a:spcAft>
+              <a:defRPr sz="1200">
+                <a:solidFill>
+                  <a:srgbClr val="94A3B8"/>
+                </a:solidFill>
+                <a:latin typeface="Arial"/>
+              </a:defRPr>
+            </a:pPr>
+            <a:r>
+              <a:t>•  Ultra-HD PNG: High-DPI raster output for seamless embedding into Word reports, executive PDFs, and emails.</a:t>
+            </a:r>
+          </a:p>
+          <a:p>
+            <a:pPr>
+              <a:spcAft>
+                <a:spcPts val="600"/>
+              </a:spcAft>
+              <a:defRPr sz="1200">
+                <a:solidFill>
+                  <a:srgbClr val="94A3B8"/>
+                </a:solidFill>
+                <a:latin typeface="Arial"/>
+              </a:defRPr>
+            </a:pPr>
+            <a:r>
+              <a:t>•  Print-Ready PDF: Vector PDF output matching international A4 / A3 print standards.</a:t>
+            </a:r>
+          </a:p>
+          <a:p>
+            <a:pPr>
+              <a:spcAft>
+                <a:spcPts val="600"/>
+              </a:spcAft>
+              <a:defRPr sz="1200">
+                <a:solidFill>
+                  <a:srgbClr val="94A3B8"/>
+                </a:solidFill>
+                <a:latin typeface="Arial"/>
+              </a:defRPr>
+            </a:pPr>
+            <a:r>
+              <a:t>•  Zero Cloud Dependency: All rendering done via local Node.js VectorCraft engine inside Docker container.</a:t>
             </a:r>
           </a:p>
         </p:txBody>
@@ -9731,7 +10988,7 @@
               </a:defRPr>
             </a:pPr>
             <a:r>
-              <a:t>ENGINEERING RIGOR</a:t>
+              <a:t>LIVE SYSTEM INTERFACE</a:t>
             </a:r>
           </a:p>
         </p:txBody>
@@ -9767,7 +11024,7 @@
               </a:defRPr>
             </a:pPr>
             <a:r>
-              <a:t>Technical Breakthroughs: 131k Context &amp; GPU Acceleration</a:t>
+              <a:t>Live Platform Showcase: Knowledge Notebooks &amp; Multi-Source RAG</a:t>
             </a:r>
           </a:p>
         </p:txBody>
@@ -9847,8 +11104,183 @@
         </p:nvSpPr>
         <p:spPr>
           <a:xfrm>
-            <a:off x="731520" y="1645920"/>
-            <a:ext cx="3383280" cy="4572000"/>
+            <a:off x="676656" y="1728216"/>
+            <a:ext cx="6876288" cy="4114800"/>
+          </a:xfrm>
+          <a:prstGeom prst="roundRect">
+            <a:avLst/>
+          </a:prstGeom>
+          <a:solidFill>
+            <a:srgbClr val="111827"/>
+          </a:solidFill>
+          <a:ln w="19050">
+            <a:solidFill>
+              <a:srgbClr val="D4AF37"/>
+            </a:solidFill>
+          </a:ln>
+        </p:spPr>
+        <p:style>
+          <a:lnRef idx="1">
+            <a:schemeClr val="accent1"/>
+          </a:lnRef>
+          <a:fillRef idx="3">
+            <a:schemeClr val="accent1"/>
+          </a:fillRef>
+          <a:effectRef idx="2">
+            <a:schemeClr val="accent1"/>
+          </a:effectRef>
+          <a:fontRef idx="minor">
+            <a:schemeClr val="lt1"/>
+          </a:fontRef>
+        </p:style>
+        <p:txBody>
+          <a:bodyPr rtlCol="0" anchor="ctr"/>
+          <a:lstStyle/>
+          <a:p>
+            <a:pPr algn="ctr"/>
+          </a:p>
+        </p:txBody>
+      </p:sp>
+      <p:pic>
+        <p:nvPicPr>
+          <p:cNvPr id="8" name="Picture 7" descr="tut_ui_notebooks.png"/>
+          <p:cNvPicPr>
+            <a:picLocks noChangeAspect="1"/>
+          </p:cNvPicPr>
+          <p:nvPr/>
+        </p:nvPicPr>
+        <p:blipFill>
+          <a:blip r:embed="rId3"/>
+          <a:stretch>
+            <a:fillRect/>
+          </a:stretch>
+        </p:blipFill>
+        <p:spPr>
+          <a:xfrm>
+            <a:off x="731520" y="1783080"/>
+            <a:ext cx="6766560" cy="4005072"/>
+          </a:xfrm>
+          <a:prstGeom prst="rect">
+            <a:avLst/>
+          </a:prstGeom>
+        </p:spPr>
+      </p:pic>
+      <p:sp>
+        <p:nvSpPr>
+          <p:cNvPr id="9" name="Rounded Rectangle 8"/>
+          <p:cNvSpPr/>
+          <p:nvPr/>
+        </p:nvSpPr>
+        <p:spPr>
+          <a:xfrm>
+            <a:off x="7772400" y="1719072"/>
+            <a:ext cx="3685032" cy="1353312"/>
+          </a:xfrm>
+          <a:prstGeom prst="roundRect">
+            <a:avLst/>
+          </a:prstGeom>
+          <a:solidFill>
+            <a:srgbClr val="111827"/>
+          </a:solidFill>
+          <a:ln w="15240">
+            <a:solidFill>
+              <a:srgbClr val="D4AF37"/>
+            </a:solidFill>
+          </a:ln>
+        </p:spPr>
+        <p:style>
+          <a:lnRef idx="1">
+            <a:schemeClr val="accent1"/>
+          </a:lnRef>
+          <a:fillRef idx="3">
+            <a:schemeClr val="accent1"/>
+          </a:fillRef>
+          <a:effectRef idx="2">
+            <a:schemeClr val="accent1"/>
+          </a:effectRef>
+          <a:fontRef idx="minor">
+            <a:schemeClr val="lt1"/>
+          </a:fontRef>
+        </p:style>
+        <p:txBody>
+          <a:bodyPr rtlCol="0" anchor="ctr" wrap="square" lIns="182880" rIns="182880" tIns="109728" bIns="73152"/>
+          <a:lstStyle/>
+          <a:p>
+            <a:pPr algn="ctr">
+              <a:spcAft>
+                <a:spcPts val="200"/>
+              </a:spcAft>
+              <a:defRPr sz="900" b="1">
+                <a:solidFill>
+                  <a:srgbClr val="D4AF37"/>
+                </a:solidFill>
+                <a:latin typeface="Arial"/>
+              </a:defRPr>
+            </a:pPr>
+            <a:r>
+              <a:t>DATA INGESTION</a:t>
+            </a:r>
+          </a:p>
+          <a:p>
+            <a:pPr>
+              <a:spcAft>
+                <a:spcPts val="400"/>
+              </a:spcAft>
+              <a:defRPr sz="1300" b="1">
+                <a:solidFill>
+                  <a:srgbClr val="F8FAFC"/>
+                </a:solidFill>
+                <a:latin typeface="Arial"/>
+              </a:defRPr>
+            </a:pPr>
+            <a:r>
+              <a:t>Multi-Source Knowledge Ingestion</a:t>
+            </a:r>
+          </a:p>
+          <a:p>
+            <a:pPr>
+              <a:spcAft>
+                <a:spcPts val="200"/>
+              </a:spcAft>
+              <a:defRPr sz="1050">
+                <a:solidFill>
+                  <a:srgbClr val="94A3B8"/>
+                </a:solidFill>
+                <a:latin typeface="Arial"/>
+              </a:defRPr>
+            </a:pPr>
+            <a:r>
+              <a:t>•  Ingests massive governmental PDFs (e.g. WEF Global Risks Report 2024), decrees, and spreadsheets.</a:t>
+            </a:r>
+          </a:p>
+          <a:p>
+            <a:pPr>
+              <a:spcAft>
+                <a:spcPts val="200"/>
+              </a:spcAft>
+              <a:defRPr sz="1050">
+                <a:solidFill>
+                  <a:srgbClr val="94A3B8"/>
+                </a:solidFill>
+                <a:latin typeface="Arial"/>
+              </a:defRPr>
+            </a:pPr>
+            <a:r>
+              <a:t>•  Full-text search &amp; vector embeddings extracted and stored 100% locally.</a:t>
+            </a:r>
+          </a:p>
+        </p:txBody>
+      </p:sp>
+      <p:sp>
+        <p:nvSpPr>
+          <p:cNvPr id="10" name="Rounded Rectangle 9"/>
+          <p:cNvSpPr/>
+          <p:nvPr/>
+        </p:nvSpPr>
+        <p:spPr>
+          <a:xfrm>
+            <a:off x="7772400" y="3218688"/>
+            <a:ext cx="3685032" cy="1353312"/>
           </a:xfrm>
           <a:prstGeom prst="roundRect">
             <a:avLst/>
@@ -9877,30 +11309,30 @@
           </a:fontRef>
         </p:style>
         <p:txBody>
-          <a:bodyPr rtlCol="0" anchor="ctr" wrap="square" lIns="228600" rIns="228600" tIns="228600" bIns="182880"/>
+          <a:bodyPr rtlCol="0" anchor="ctr" wrap="square" lIns="182880" rIns="182880" tIns="109728" bIns="73152"/>
           <a:lstStyle/>
           <a:p>
             <a:pPr algn="ctr">
               <a:spcAft>
+                <a:spcPts val="200"/>
+              </a:spcAft>
+              <a:defRPr sz="900" b="1">
+                <a:solidFill>
+                  <a:srgbClr val="38BDF8"/>
+                </a:solidFill>
+                <a:latin typeface="Arial"/>
+              </a:defRPr>
+            </a:pPr>
+            <a:r>
+              <a:t>SECURITY &amp; ISOLATION</a:t>
+            </a:r>
+          </a:p>
+          <a:p>
+            <a:pPr>
+              <a:spcAft>
                 <a:spcPts val="400"/>
               </a:spcAft>
-              <a:defRPr sz="1000" b="1">
-                <a:solidFill>
-                  <a:srgbClr val="38BDF8"/>
-                </a:solidFill>
-                <a:latin typeface="Arial"/>
-              </a:defRPr>
-            </a:pPr>
-            <a:r>
-              <a:t>MODEL CAPACITY</a:t>
-            </a:r>
-          </a:p>
-          <a:p>
-            <a:pPr>
-              <a:spcAft>
-                <a:spcPts val="1000"/>
-              </a:spcAft>
-              <a:defRPr sz="1600" b="1">
+              <a:defRPr sz="1300" b="1">
                 <a:solidFill>
                   <a:srgbClr val="F8FAFC"/>
                 </a:solidFill>
@@ -9908,223 +11340,53 @@
               </a:defRPr>
             </a:pPr>
             <a:r>
-              <a:t>131k Context Window</a:t>
-            </a:r>
-          </a:p>
-          <a:p>
-            <a:pPr>
-              <a:spcAft>
-                <a:spcPts val="600"/>
-              </a:spcAft>
-              <a:defRPr sz="1200">
-                <a:solidFill>
-                  <a:srgbClr val="94A3B8"/>
-                </a:solidFill>
-                <a:latin typeface="Arial"/>
-              </a:defRPr>
-            </a:pPr>
-            <a:r>
-              <a:t>•  PostgreSQL database tables unlocked to 131,072 context tokens.</a:t>
-            </a:r>
-          </a:p>
-          <a:p>
-            <a:pPr>
-              <a:spcAft>
-                <a:spcPts val="600"/>
-              </a:spcAft>
-              <a:defRPr sz="1200">
-                <a:solidFill>
-                  <a:srgbClr val="94A3B8"/>
-                </a:solidFill>
-                <a:latin typeface="Arial"/>
-              </a:defRPr>
-            </a:pPr>
-            <a:r>
-              <a:t>•  16,384 maximum output tokens for exhaustive document generation.</a:t>
-            </a:r>
-          </a:p>
-          <a:p>
-            <a:pPr>
-              <a:spcAft>
-                <a:spcPts val="600"/>
-              </a:spcAft>
-              <a:defRPr sz="1200">
-                <a:solidFill>
-                  <a:srgbClr val="94A3B8"/>
-                </a:solidFill>
-                <a:latin typeface="Arial"/>
-              </a:defRPr>
-            </a:pPr>
-            <a:r>
-              <a:t>•  Eliminates memory truncation: Ingest entire decree books without losing context.</a:t>
-            </a:r>
-          </a:p>
-          <a:p>
-            <a:pPr>
-              <a:spcAft>
-                <a:spcPts val="600"/>
-              </a:spcAft>
-              <a:defRPr sz="1200">
-                <a:solidFill>
-                  <a:srgbClr val="94A3B8"/>
-                </a:solidFill>
-                <a:latin typeface="Arial"/>
-              </a:defRPr>
-            </a:pPr>
-            <a:r>
-              <a:t>•  Reasoning mode: 'pro' with 8,192 dedicated thinking budget.</a:t>
-            </a:r>
-          </a:p>
-        </p:txBody>
-      </p:sp>
-      <p:sp>
-        <p:nvSpPr>
-          <p:cNvPr id="8" name="Rounded Rectangle 7"/>
+              <a:t>Departmental Notebook Sandboxing</a:t>
+            </a:r>
+          </a:p>
+          <a:p>
+            <a:pPr>
+              <a:spcAft>
+                <a:spcPts val="200"/>
+              </a:spcAft>
+              <a:defRPr sz="1050">
+                <a:solidFill>
+                  <a:srgbClr val="94A3B8"/>
+                </a:solidFill>
+                <a:latin typeface="Arial"/>
+              </a:defRPr>
+            </a:pPr>
+            <a:r>
+              <a:t>•  Isolated sovereign workspaces ('dsc', 'klh', 'arfa', 'eg') protect departmental boundaries.</a:t>
+            </a:r>
+          </a:p>
+          <a:p>
+            <a:pPr>
+              <a:spcAft>
+                <a:spcPts val="200"/>
+              </a:spcAft>
+              <a:defRPr sz="1050">
+                <a:solidFill>
+                  <a:srgbClr val="94A3B8"/>
+                </a:solidFill>
+                <a:latin typeface="Arial"/>
+              </a:defRPr>
+            </a:pPr>
+            <a:r>
+              <a:t>•  Prevents data cross-contamination with secure account-level isolation.</a:t>
+            </a:r>
+          </a:p>
+        </p:txBody>
+      </p:sp>
+      <p:sp>
+        <p:nvSpPr>
+          <p:cNvPr id="11" name="Rounded Rectangle 10"/>
           <p:cNvSpPr/>
           <p:nvPr/>
         </p:nvSpPr>
         <p:spPr>
           <a:xfrm>
-            <a:off x="4389120" y="1645920"/>
-            <a:ext cx="3383280" cy="4572000"/>
-          </a:xfrm>
-          <a:prstGeom prst="roundRect">
-            <a:avLst/>
-          </a:prstGeom>
-          <a:solidFill>
-            <a:srgbClr val="111827"/>
-          </a:solidFill>
-          <a:ln w="15240">
-            <a:solidFill>
-              <a:srgbClr val="D4AF37"/>
-            </a:solidFill>
-          </a:ln>
-        </p:spPr>
-        <p:style>
-          <a:lnRef idx="1">
-            <a:schemeClr val="accent1"/>
-          </a:lnRef>
-          <a:fillRef idx="3">
-            <a:schemeClr val="accent1"/>
-          </a:fillRef>
-          <a:effectRef idx="2">
-            <a:schemeClr val="accent1"/>
-          </a:effectRef>
-          <a:fontRef idx="minor">
-            <a:schemeClr val="lt1"/>
-          </a:fontRef>
-        </p:style>
-        <p:txBody>
-          <a:bodyPr rtlCol="0" anchor="ctr" wrap="square" lIns="228600" rIns="228600" tIns="228600" bIns="182880"/>
-          <a:lstStyle/>
-          <a:p>
-            <a:pPr algn="ctr">
-              <a:spcAft>
-                <a:spcPts val="400"/>
-              </a:spcAft>
-              <a:defRPr sz="1000" b="1">
-                <a:solidFill>
-                  <a:srgbClr val="D4AF37"/>
-                </a:solidFill>
-                <a:latin typeface="Arial"/>
-              </a:defRPr>
-            </a:pPr>
-            <a:r>
-              <a:t>VELOCITY</a:t>
-            </a:r>
-          </a:p>
-          <a:p>
-            <a:pPr>
-              <a:spcAft>
-                <a:spcPts val="1000"/>
-              </a:spcAft>
-              <a:defRPr sz="1600" b="1">
-                <a:solidFill>
-                  <a:srgbClr val="F8FAFC"/>
-                </a:solidFill>
-                <a:latin typeface="Arial"/>
-              </a:defRPr>
-            </a:pPr>
-            <a:r>
-              <a:t>NVIDIA RTX 4050 GPU VRAM</a:t>
-            </a:r>
-          </a:p>
-          <a:p>
-            <a:pPr>
-              <a:spcAft>
-                <a:spcPts val="600"/>
-              </a:spcAft>
-              <a:defRPr sz="1200">
-                <a:solidFill>
-                  <a:srgbClr val="94A3B8"/>
-                </a:solidFill>
-                <a:latin typeface="Arial"/>
-              </a:defRPr>
-            </a:pPr>
-            <a:r>
-              <a:t>•  Pinned local gemma4:e4b weights in dedicated 5.1 GB GPU VRAM.</a:t>
-            </a:r>
-          </a:p>
-          <a:p>
-            <a:pPr>
-              <a:spcAft>
-                <a:spcPts val="600"/>
-              </a:spcAft>
-              <a:defRPr sz="1200">
-                <a:solidFill>
-                  <a:srgbClr val="94A3B8"/>
-                </a:solidFill>
-                <a:latin typeface="Arial"/>
-              </a:defRPr>
-            </a:pPr>
-            <a:r>
-              <a:t>•  Configured keep_alive: '-1' to completely eliminate cold-start unloading.</a:t>
-            </a:r>
-          </a:p>
-          <a:p>
-            <a:pPr>
-              <a:spcAft>
-                <a:spcPts val="600"/>
-              </a:spcAft>
-              <a:defRPr sz="1200">
-                <a:solidFill>
-                  <a:srgbClr val="94A3B8"/>
-                </a:solidFill>
-                <a:latin typeface="Arial"/>
-              </a:defRPr>
-            </a:pPr>
-            <a:r>
-              <a:t>•  Instant response velocity: First token streamed in milliseconds.</a:t>
-            </a:r>
-          </a:p>
-          <a:p>
-            <a:pPr>
-              <a:spcAft>
-                <a:spcPts val="600"/>
-              </a:spcAft>
-              <a:defRPr sz="1200">
-                <a:solidFill>
-                  <a:srgbClr val="94A3B8"/>
-                </a:solidFill>
-                <a:latin typeface="Arial"/>
-              </a:defRPr>
-            </a:pPr>
-            <a:r>
-              <a:t>•  Optimized for smooth pair programming and multi-turn conversational agents.</a:t>
-            </a:r>
-          </a:p>
-        </p:txBody>
-      </p:sp>
-      <p:sp>
-        <p:nvSpPr>
-          <p:cNvPr id="9" name="Rounded Rectangle 8"/>
-          <p:cNvSpPr/>
-          <p:nvPr/>
-        </p:nvSpPr>
-        <p:spPr>
-          <a:xfrm>
-            <a:off x="8046720" y="1645920"/>
-            <a:ext cx="3383280" cy="4572000"/>
+            <a:off x="7772400" y="4718304"/>
+            <a:ext cx="3685032" cy="1353312"/>
           </a:xfrm>
           <a:prstGeom prst="roundRect">
             <a:avLst/>
@@ -10153,30 +11415,30 @@
           </a:fontRef>
         </p:style>
         <p:txBody>
-          <a:bodyPr rtlCol="0" anchor="ctr" wrap="square" lIns="228600" rIns="228600" tIns="228600" bIns="182880"/>
+          <a:bodyPr rtlCol="0" anchor="ctr" wrap="square" lIns="182880" rIns="182880" tIns="109728" bIns="73152"/>
           <a:lstStyle/>
           <a:p>
             <a:pPr algn="ctr">
               <a:spcAft>
+                <a:spcPts val="200"/>
+              </a:spcAft>
+              <a:defRPr sz="900" b="1">
+                <a:solidFill>
+                  <a:srgbClr val="34D399"/>
+                </a:solidFill>
+                <a:latin typeface="Arial"/>
+              </a:defRPr>
+            </a:pPr>
+            <a:r>
+              <a:t>MCIT PROVENANCE</a:t>
+            </a:r>
+          </a:p>
+          <a:p>
+            <a:pPr>
+              <a:spcAft>
                 <a:spcPts val="400"/>
               </a:spcAft>
-              <a:defRPr sz="1000" b="1">
-                <a:solidFill>
-                  <a:srgbClr val="34D399"/>
-                </a:solidFill>
-                <a:latin typeface="Arial"/>
-              </a:defRPr>
-            </a:pPr>
-            <a:r>
-              <a:t>RESILIENCE</a:t>
-            </a:r>
-          </a:p>
-          <a:p>
-            <a:pPr>
-              <a:spcAft>
-                <a:spcPts val="1000"/>
-              </a:spcAft>
-              <a:defRPr sz="1600" b="1">
+              <a:defRPr sz="1300" b="1">
                 <a:solidFill>
                   <a:srgbClr val="F8FAFC"/>
                 </a:solidFill>
@@ -10184,71 +11446,39 @@
               </a:defRPr>
             </a:pPr>
             <a:r>
-              <a:t>Self-Healing Docker Stack</a:t>
-            </a:r>
-          </a:p>
-          <a:p>
-            <a:pPr>
-              <a:spcAft>
-                <a:spcPts val="600"/>
-              </a:spcAft>
-              <a:defRPr sz="1200">
-                <a:solidFill>
-                  <a:srgbClr val="94A3B8"/>
-                </a:solidFill>
-                <a:latin typeface="Arial"/>
-              </a:defRPr>
-            </a:pPr>
-            <a:r>
-              <a:t>•  11 isolated Docker services: Agent, Platform, ONLYOFFICE, SurrealDB, Postgres, Redis, Kokoro.</a:t>
-            </a:r>
-          </a:p>
-          <a:p>
-            <a:pPr>
-              <a:spcAft>
-                <a:spcPts val="600"/>
-              </a:spcAft>
-              <a:defRPr sz="1200">
-                <a:solidFill>
-                  <a:srgbClr val="94A3B8"/>
-                </a:solidFill>
-                <a:latin typeface="Arial"/>
-              </a:defRPr>
-            </a:pPr>
-            <a:r>
-              <a:t>•  Built-in runtime self-patching in startServer.js guarantees TRPC stability on container boot.</a:t>
-            </a:r>
-          </a:p>
-          <a:p>
-            <a:pPr>
-              <a:spcAft>
-                <a:spcPts val="600"/>
-              </a:spcAft>
-              <a:defRPr sz="1200">
-                <a:solidFill>
-                  <a:srgbClr val="94A3B8"/>
-                </a:solidFill>
-                <a:latin typeface="Arial"/>
-              </a:defRPr>
-            </a:pPr>
-            <a:r>
-              <a:t>•  Turnkey 1-click bootstrap scripts (.ps1 and .sh) launch the full ecosystem in under 15 seconds.</a:t>
-            </a:r>
-          </a:p>
-          <a:p>
-            <a:pPr>
-              <a:spcAft>
-                <a:spcPts val="600"/>
-              </a:spcAft>
-              <a:defRPr sz="1200">
-                <a:solidFill>
-                  <a:srgbClr val="94A3B8"/>
-                </a:solidFill>
-                <a:latin typeface="Arial"/>
-              </a:defRPr>
-            </a:pPr>
-            <a:r>
-              <a:t>•  All source code versioned on GitHub: MCIT-DEPI/DEPI-PPTX.</a:t>
+              <a:t>Sovereign National Attribution</a:t>
+            </a:r>
+          </a:p>
+          <a:p>
+            <a:pPr>
+              <a:spcAft>
+                <a:spcPts val="200"/>
+              </a:spcAft>
+              <a:defRPr sz="1050">
+                <a:solidFill>
+                  <a:srgbClr val="94A3B8"/>
+                </a:solidFill>
+                <a:latin typeface="Arial"/>
+              </a:defRPr>
+            </a:pPr>
+            <a:r>
+              <a:t>•  Custom-built for the Ministry of Communications &amp; Information Technology.</a:t>
+            </a:r>
+          </a:p>
+          <a:p>
+            <a:pPr>
+              <a:spcAft>
+                <a:spcPts val="200"/>
+              </a:spcAft>
+              <a:defRPr sz="1050">
+                <a:solidFill>
+                  <a:srgbClr val="94A3B8"/>
+                </a:solidFill>
+                <a:latin typeface="Arial"/>
+              </a:defRPr>
+            </a:pPr>
+            <a:r>
+              <a:t>•  Verified interface attribution: 'Developed by Eng Ahmed Arfa for MCIT'.</a:t>
             </a:r>
           </a:p>
         </p:txBody>
